--- a/01 Classes/Aula 12, 13 RAD Python - Banco de Dados.pptx
+++ b/01 Classes/Aula 12, 13 RAD Python - Banco de Dados.pptx
@@ -5,7 +5,7 @@
     <p:sldMasterId id="2147483671" r:id="rId1"/>
   </p:sldMasterIdLst>
   <p:notesMasterIdLst>
-    <p:notesMasterId r:id="rId18"/>
+    <p:notesMasterId r:id="rId24"/>
   </p:notesMasterIdLst>
   <p:sldIdLst>
     <p:sldId id="291" r:id="rId2"/>
@@ -15,15 +15,21 @@
     <p:sldId id="345" r:id="rId6"/>
     <p:sldId id="344" r:id="rId7"/>
     <p:sldId id="339" r:id="rId8"/>
-    <p:sldId id="340" r:id="rId9"/>
-    <p:sldId id="341" r:id="rId10"/>
-    <p:sldId id="342" r:id="rId11"/>
-    <p:sldId id="343" r:id="rId12"/>
-    <p:sldId id="323" r:id="rId13"/>
-    <p:sldId id="333" r:id="rId14"/>
-    <p:sldId id="334" r:id="rId15"/>
-    <p:sldId id="337" r:id="rId16"/>
-    <p:sldId id="347" r:id="rId17"/>
+    <p:sldId id="341" r:id="rId9"/>
+    <p:sldId id="342" r:id="rId10"/>
+    <p:sldId id="343" r:id="rId11"/>
+    <p:sldId id="340" r:id="rId12"/>
+    <p:sldId id="348" r:id="rId13"/>
+    <p:sldId id="349" r:id="rId14"/>
+    <p:sldId id="350" r:id="rId15"/>
+    <p:sldId id="351" r:id="rId16"/>
+    <p:sldId id="352" r:id="rId17"/>
+    <p:sldId id="353" r:id="rId18"/>
+    <p:sldId id="323" r:id="rId19"/>
+    <p:sldId id="333" r:id="rId20"/>
+    <p:sldId id="334" r:id="rId21"/>
+    <p:sldId id="337" r:id="rId22"/>
+    <p:sldId id="347" r:id="rId23"/>
   </p:sldIdLst>
   <p:sldSz cx="9144000" cy="5143500" type="screen16x9"/>
   <p:notesSz cx="6858000" cy="9144000"/>
@@ -387,7 +393,13 @@
   <p:cSld>
     <p:spTree>
       <p:nvGrpSpPr>
-        <p:cNvPr id="1" name=""/>
+        <p:cNvPr id="1" name="">
+          <a:extLst>
+            <a:ext uri="{FF2B5EF4-FFF2-40B4-BE49-F238E27FC236}">
+              <a16:creationId xmlns:a16="http://schemas.microsoft.com/office/drawing/2014/main" id="{2DE7E0D4-AE43-5645-3771-A42985960748}"/>
+            </a:ext>
+          </a:extLst>
+        </p:cNvPr>
         <p:cNvGrpSpPr/>
         <p:nvPr/>
       </p:nvGrpSpPr>
@@ -401,7 +413,13 @@
       </p:grpSpPr>
       <p:sp>
         <p:nvSpPr>
-          <p:cNvPr id="2" name="Espaço Reservado para Imagem de Slide 1"/>
+          <p:cNvPr id="2" name="Espaço Reservado para Imagem de Slide 1">
+            <a:extLst>
+              <a:ext uri="{FF2B5EF4-FFF2-40B4-BE49-F238E27FC236}">
+                <a16:creationId xmlns:a16="http://schemas.microsoft.com/office/drawing/2014/main" id="{18B04F26-10EC-39F4-0801-A07C00314E11}"/>
+              </a:ext>
+            </a:extLst>
+          </p:cNvPr>
           <p:cNvSpPr>
             <a:spLocks noGrp="1" noRot="1" noChangeAspect="1"/>
           </p:cNvSpPr>
@@ -418,7 +436,13 @@
       </p:sp>
       <p:sp>
         <p:nvSpPr>
-          <p:cNvPr id="3" name="Espaço Reservado para Anotações 2"/>
+          <p:cNvPr id="3" name="Espaço Reservado para Anotações 2">
+            <a:extLst>
+              <a:ext uri="{FF2B5EF4-FFF2-40B4-BE49-F238E27FC236}">
+                <a16:creationId xmlns:a16="http://schemas.microsoft.com/office/drawing/2014/main" id="{06092861-39A7-8636-1F4F-84A705889676}"/>
+              </a:ext>
+            </a:extLst>
+          </p:cNvPr>
           <p:cNvSpPr>
             <a:spLocks noGrp="1"/>
           </p:cNvSpPr>
@@ -438,7 +462,7 @@
     </p:spTree>
     <p:extLst>
       <p:ext uri="{BB962C8B-B14F-4D97-AF65-F5344CB8AC3E}">
-        <p14:creationId xmlns:p14="http://schemas.microsoft.com/office/powerpoint/2010/main" val="2709569597"/>
+        <p14:creationId xmlns:p14="http://schemas.microsoft.com/office/powerpoint/2010/main" val="1722451795"/>
       </p:ext>
     </p:extLst>
   </p:cSld>
@@ -449,6 +473,426 @@
 </file>
 
 <file path=ppt/notesSlides/notesSlide11.xml><?xml version="1.0" encoding="utf-8"?>
+<p:notes xmlns:a="http://schemas.openxmlformats.org/drawingml/2006/main" xmlns:r="http://schemas.openxmlformats.org/officeDocument/2006/relationships" xmlns:p="http://schemas.openxmlformats.org/presentationml/2006/main">
+  <p:cSld>
+    <p:spTree>
+      <p:nvGrpSpPr>
+        <p:cNvPr id="1" name="">
+          <a:extLst>
+            <a:ext uri="{FF2B5EF4-FFF2-40B4-BE49-F238E27FC236}">
+              <a16:creationId xmlns:a16="http://schemas.microsoft.com/office/drawing/2014/main" id="{1F3C4CBB-DCF4-4058-CF51-12C2447174AF}"/>
+            </a:ext>
+          </a:extLst>
+        </p:cNvPr>
+        <p:cNvGrpSpPr/>
+        <p:nvPr/>
+      </p:nvGrpSpPr>
+      <p:grpSpPr>
+        <a:xfrm>
+          <a:off x="0" y="0"/>
+          <a:ext cx="0" cy="0"/>
+          <a:chOff x="0" y="0"/>
+          <a:chExt cx="0" cy="0"/>
+        </a:xfrm>
+      </p:grpSpPr>
+      <p:sp>
+        <p:nvSpPr>
+          <p:cNvPr id="2" name="Espaço Reservado para Imagem de Slide 1">
+            <a:extLst>
+              <a:ext uri="{FF2B5EF4-FFF2-40B4-BE49-F238E27FC236}">
+                <a16:creationId xmlns:a16="http://schemas.microsoft.com/office/drawing/2014/main" id="{62631B53-72F9-7AFE-1BAC-F9F550CAF569}"/>
+              </a:ext>
+            </a:extLst>
+          </p:cNvPr>
+          <p:cNvSpPr>
+            <a:spLocks noGrp="1" noRot="1" noChangeAspect="1"/>
+          </p:cNvSpPr>
+          <p:nvPr>
+            <p:ph type="sldImg"/>
+          </p:nvPr>
+        </p:nvSpPr>
+        <p:spPr>
+          <a:xfrm>
+            <a:off x="381000" y="685800"/>
+            <a:ext cx="6096000" cy="3429000"/>
+          </a:xfrm>
+        </p:spPr>
+      </p:sp>
+      <p:sp>
+        <p:nvSpPr>
+          <p:cNvPr id="3" name="Espaço Reservado para Anotações 2">
+            <a:extLst>
+              <a:ext uri="{FF2B5EF4-FFF2-40B4-BE49-F238E27FC236}">
+                <a16:creationId xmlns:a16="http://schemas.microsoft.com/office/drawing/2014/main" id="{C745BFD7-5DF1-B87A-0DFD-403B77B24144}"/>
+              </a:ext>
+            </a:extLst>
+          </p:cNvPr>
+          <p:cNvSpPr>
+            <a:spLocks noGrp="1"/>
+          </p:cNvSpPr>
+          <p:nvPr>
+            <p:ph type="body" idx="1"/>
+          </p:nvPr>
+        </p:nvSpPr>
+        <p:spPr/>
+        <p:txBody>
+          <a:bodyPr/>
+          <a:lstStyle/>
+          <a:p>
+            <a:endParaRPr lang="pt-BR" dirty="0"/>
+          </a:p>
+        </p:txBody>
+      </p:sp>
+    </p:spTree>
+    <p:extLst>
+      <p:ext uri="{BB962C8B-B14F-4D97-AF65-F5344CB8AC3E}">
+        <p14:creationId xmlns:p14="http://schemas.microsoft.com/office/powerpoint/2010/main" val="940727938"/>
+      </p:ext>
+    </p:extLst>
+  </p:cSld>
+  <p:clrMapOvr>
+    <a:masterClrMapping/>
+  </p:clrMapOvr>
+</p:notes>
+</file>
+
+<file path=ppt/notesSlides/notesSlide12.xml><?xml version="1.0" encoding="utf-8"?>
+<p:notes xmlns:a="http://schemas.openxmlformats.org/drawingml/2006/main" xmlns:r="http://schemas.openxmlformats.org/officeDocument/2006/relationships" xmlns:p="http://schemas.openxmlformats.org/presentationml/2006/main">
+  <p:cSld>
+    <p:spTree>
+      <p:nvGrpSpPr>
+        <p:cNvPr id="1" name="">
+          <a:extLst>
+            <a:ext uri="{FF2B5EF4-FFF2-40B4-BE49-F238E27FC236}">
+              <a16:creationId xmlns:a16="http://schemas.microsoft.com/office/drawing/2014/main" id="{4D40C433-E7A6-7D7D-3547-916F963182A5}"/>
+            </a:ext>
+          </a:extLst>
+        </p:cNvPr>
+        <p:cNvGrpSpPr/>
+        <p:nvPr/>
+      </p:nvGrpSpPr>
+      <p:grpSpPr>
+        <a:xfrm>
+          <a:off x="0" y="0"/>
+          <a:ext cx="0" cy="0"/>
+          <a:chOff x="0" y="0"/>
+          <a:chExt cx="0" cy="0"/>
+        </a:xfrm>
+      </p:grpSpPr>
+      <p:sp>
+        <p:nvSpPr>
+          <p:cNvPr id="2" name="Espaço Reservado para Imagem de Slide 1">
+            <a:extLst>
+              <a:ext uri="{FF2B5EF4-FFF2-40B4-BE49-F238E27FC236}">
+                <a16:creationId xmlns:a16="http://schemas.microsoft.com/office/drawing/2014/main" id="{6D439E6C-A2B7-BC7A-2D3D-1BF31FDB0534}"/>
+              </a:ext>
+            </a:extLst>
+          </p:cNvPr>
+          <p:cNvSpPr>
+            <a:spLocks noGrp="1" noRot="1" noChangeAspect="1"/>
+          </p:cNvSpPr>
+          <p:nvPr>
+            <p:ph type="sldImg"/>
+          </p:nvPr>
+        </p:nvSpPr>
+        <p:spPr>
+          <a:xfrm>
+            <a:off x="381000" y="685800"/>
+            <a:ext cx="6096000" cy="3429000"/>
+          </a:xfrm>
+        </p:spPr>
+      </p:sp>
+      <p:sp>
+        <p:nvSpPr>
+          <p:cNvPr id="3" name="Espaço Reservado para Anotações 2">
+            <a:extLst>
+              <a:ext uri="{FF2B5EF4-FFF2-40B4-BE49-F238E27FC236}">
+                <a16:creationId xmlns:a16="http://schemas.microsoft.com/office/drawing/2014/main" id="{A34F9217-C9DF-40C3-2159-2E01E7FC4FD7}"/>
+              </a:ext>
+            </a:extLst>
+          </p:cNvPr>
+          <p:cNvSpPr>
+            <a:spLocks noGrp="1"/>
+          </p:cNvSpPr>
+          <p:nvPr>
+            <p:ph type="body" idx="1"/>
+          </p:nvPr>
+        </p:nvSpPr>
+        <p:spPr/>
+        <p:txBody>
+          <a:bodyPr/>
+          <a:lstStyle/>
+          <a:p>
+            <a:endParaRPr lang="pt-BR" dirty="0"/>
+          </a:p>
+        </p:txBody>
+      </p:sp>
+    </p:spTree>
+    <p:extLst>
+      <p:ext uri="{BB962C8B-B14F-4D97-AF65-F5344CB8AC3E}">
+        <p14:creationId xmlns:p14="http://schemas.microsoft.com/office/powerpoint/2010/main" val="1092800235"/>
+      </p:ext>
+    </p:extLst>
+  </p:cSld>
+  <p:clrMapOvr>
+    <a:masterClrMapping/>
+  </p:clrMapOvr>
+</p:notes>
+</file>
+
+<file path=ppt/notesSlides/notesSlide13.xml><?xml version="1.0" encoding="utf-8"?>
+<p:notes xmlns:a="http://schemas.openxmlformats.org/drawingml/2006/main" xmlns:r="http://schemas.openxmlformats.org/officeDocument/2006/relationships" xmlns:p="http://schemas.openxmlformats.org/presentationml/2006/main">
+  <p:cSld>
+    <p:spTree>
+      <p:nvGrpSpPr>
+        <p:cNvPr id="1" name="">
+          <a:extLst>
+            <a:ext uri="{FF2B5EF4-FFF2-40B4-BE49-F238E27FC236}">
+              <a16:creationId xmlns:a16="http://schemas.microsoft.com/office/drawing/2014/main" id="{92E2E0A1-302F-A43F-9B9A-EDD7F2CF7D9C}"/>
+            </a:ext>
+          </a:extLst>
+        </p:cNvPr>
+        <p:cNvGrpSpPr/>
+        <p:nvPr/>
+      </p:nvGrpSpPr>
+      <p:grpSpPr>
+        <a:xfrm>
+          <a:off x="0" y="0"/>
+          <a:ext cx="0" cy="0"/>
+          <a:chOff x="0" y="0"/>
+          <a:chExt cx="0" cy="0"/>
+        </a:xfrm>
+      </p:grpSpPr>
+      <p:sp>
+        <p:nvSpPr>
+          <p:cNvPr id="2" name="Espaço Reservado para Imagem de Slide 1">
+            <a:extLst>
+              <a:ext uri="{FF2B5EF4-FFF2-40B4-BE49-F238E27FC236}">
+                <a16:creationId xmlns:a16="http://schemas.microsoft.com/office/drawing/2014/main" id="{71A6ED9D-4466-4587-55A9-DDAC4E9D7812}"/>
+              </a:ext>
+            </a:extLst>
+          </p:cNvPr>
+          <p:cNvSpPr>
+            <a:spLocks noGrp="1" noRot="1" noChangeAspect="1"/>
+          </p:cNvSpPr>
+          <p:nvPr>
+            <p:ph type="sldImg"/>
+          </p:nvPr>
+        </p:nvSpPr>
+        <p:spPr>
+          <a:xfrm>
+            <a:off x="381000" y="685800"/>
+            <a:ext cx="6096000" cy="3429000"/>
+          </a:xfrm>
+        </p:spPr>
+      </p:sp>
+      <p:sp>
+        <p:nvSpPr>
+          <p:cNvPr id="3" name="Espaço Reservado para Anotações 2">
+            <a:extLst>
+              <a:ext uri="{FF2B5EF4-FFF2-40B4-BE49-F238E27FC236}">
+                <a16:creationId xmlns:a16="http://schemas.microsoft.com/office/drawing/2014/main" id="{5A00CAE1-F5C6-FE26-27AE-F6CE6765E4A4}"/>
+              </a:ext>
+            </a:extLst>
+          </p:cNvPr>
+          <p:cNvSpPr>
+            <a:spLocks noGrp="1"/>
+          </p:cNvSpPr>
+          <p:nvPr>
+            <p:ph type="body" idx="1"/>
+          </p:nvPr>
+        </p:nvSpPr>
+        <p:spPr/>
+        <p:txBody>
+          <a:bodyPr/>
+          <a:lstStyle/>
+          <a:p>
+            <a:endParaRPr lang="pt-BR" dirty="0"/>
+          </a:p>
+        </p:txBody>
+      </p:sp>
+    </p:spTree>
+    <p:extLst>
+      <p:ext uri="{BB962C8B-B14F-4D97-AF65-F5344CB8AC3E}">
+        <p14:creationId xmlns:p14="http://schemas.microsoft.com/office/powerpoint/2010/main" val="354894883"/>
+      </p:ext>
+    </p:extLst>
+  </p:cSld>
+  <p:clrMapOvr>
+    <a:masterClrMapping/>
+  </p:clrMapOvr>
+</p:notes>
+</file>
+
+<file path=ppt/notesSlides/notesSlide14.xml><?xml version="1.0" encoding="utf-8"?>
+<p:notes xmlns:a="http://schemas.openxmlformats.org/drawingml/2006/main" xmlns:r="http://schemas.openxmlformats.org/officeDocument/2006/relationships" xmlns:p="http://schemas.openxmlformats.org/presentationml/2006/main">
+  <p:cSld>
+    <p:spTree>
+      <p:nvGrpSpPr>
+        <p:cNvPr id="1" name="">
+          <a:extLst>
+            <a:ext uri="{FF2B5EF4-FFF2-40B4-BE49-F238E27FC236}">
+              <a16:creationId xmlns:a16="http://schemas.microsoft.com/office/drawing/2014/main" id="{E722E7A9-21A6-37F0-7904-65C32C53410A}"/>
+            </a:ext>
+          </a:extLst>
+        </p:cNvPr>
+        <p:cNvGrpSpPr/>
+        <p:nvPr/>
+      </p:nvGrpSpPr>
+      <p:grpSpPr>
+        <a:xfrm>
+          <a:off x="0" y="0"/>
+          <a:ext cx="0" cy="0"/>
+          <a:chOff x="0" y="0"/>
+          <a:chExt cx="0" cy="0"/>
+        </a:xfrm>
+      </p:grpSpPr>
+      <p:sp>
+        <p:nvSpPr>
+          <p:cNvPr id="2" name="Espaço Reservado para Imagem de Slide 1">
+            <a:extLst>
+              <a:ext uri="{FF2B5EF4-FFF2-40B4-BE49-F238E27FC236}">
+                <a16:creationId xmlns:a16="http://schemas.microsoft.com/office/drawing/2014/main" id="{654F899B-D646-0D26-F2CB-4650DEED32A7}"/>
+              </a:ext>
+            </a:extLst>
+          </p:cNvPr>
+          <p:cNvSpPr>
+            <a:spLocks noGrp="1" noRot="1" noChangeAspect="1"/>
+          </p:cNvSpPr>
+          <p:nvPr>
+            <p:ph type="sldImg"/>
+          </p:nvPr>
+        </p:nvSpPr>
+        <p:spPr>
+          <a:xfrm>
+            <a:off x="381000" y="685800"/>
+            <a:ext cx="6096000" cy="3429000"/>
+          </a:xfrm>
+        </p:spPr>
+      </p:sp>
+      <p:sp>
+        <p:nvSpPr>
+          <p:cNvPr id="3" name="Espaço Reservado para Anotações 2">
+            <a:extLst>
+              <a:ext uri="{FF2B5EF4-FFF2-40B4-BE49-F238E27FC236}">
+                <a16:creationId xmlns:a16="http://schemas.microsoft.com/office/drawing/2014/main" id="{01765652-34B5-70C4-BEE3-F7E35ED1C285}"/>
+              </a:ext>
+            </a:extLst>
+          </p:cNvPr>
+          <p:cNvSpPr>
+            <a:spLocks noGrp="1"/>
+          </p:cNvSpPr>
+          <p:nvPr>
+            <p:ph type="body" idx="1"/>
+          </p:nvPr>
+        </p:nvSpPr>
+        <p:spPr/>
+        <p:txBody>
+          <a:bodyPr/>
+          <a:lstStyle/>
+          <a:p>
+            <a:endParaRPr lang="pt-BR" dirty="0"/>
+          </a:p>
+        </p:txBody>
+      </p:sp>
+    </p:spTree>
+    <p:extLst>
+      <p:ext uri="{BB962C8B-B14F-4D97-AF65-F5344CB8AC3E}">
+        <p14:creationId xmlns:p14="http://schemas.microsoft.com/office/powerpoint/2010/main" val="4282301424"/>
+      </p:ext>
+    </p:extLst>
+  </p:cSld>
+  <p:clrMapOvr>
+    <a:masterClrMapping/>
+  </p:clrMapOvr>
+</p:notes>
+</file>
+
+<file path=ppt/notesSlides/notesSlide15.xml><?xml version="1.0" encoding="utf-8"?>
+<p:notes xmlns:a="http://schemas.openxmlformats.org/drawingml/2006/main" xmlns:r="http://schemas.openxmlformats.org/officeDocument/2006/relationships" xmlns:p="http://schemas.openxmlformats.org/presentationml/2006/main">
+  <p:cSld>
+    <p:spTree>
+      <p:nvGrpSpPr>
+        <p:cNvPr id="1" name="">
+          <a:extLst>
+            <a:ext uri="{FF2B5EF4-FFF2-40B4-BE49-F238E27FC236}">
+              <a16:creationId xmlns:a16="http://schemas.microsoft.com/office/drawing/2014/main" id="{799236F8-D6F0-F527-96D5-E428906A558A}"/>
+            </a:ext>
+          </a:extLst>
+        </p:cNvPr>
+        <p:cNvGrpSpPr/>
+        <p:nvPr/>
+      </p:nvGrpSpPr>
+      <p:grpSpPr>
+        <a:xfrm>
+          <a:off x="0" y="0"/>
+          <a:ext cx="0" cy="0"/>
+          <a:chOff x="0" y="0"/>
+          <a:chExt cx="0" cy="0"/>
+        </a:xfrm>
+      </p:grpSpPr>
+      <p:sp>
+        <p:nvSpPr>
+          <p:cNvPr id="2" name="Espaço Reservado para Imagem de Slide 1">
+            <a:extLst>
+              <a:ext uri="{FF2B5EF4-FFF2-40B4-BE49-F238E27FC236}">
+                <a16:creationId xmlns:a16="http://schemas.microsoft.com/office/drawing/2014/main" id="{9969855F-B6CA-F15A-D203-3F575929012A}"/>
+              </a:ext>
+            </a:extLst>
+          </p:cNvPr>
+          <p:cNvSpPr>
+            <a:spLocks noGrp="1" noRot="1" noChangeAspect="1"/>
+          </p:cNvSpPr>
+          <p:nvPr>
+            <p:ph type="sldImg"/>
+          </p:nvPr>
+        </p:nvSpPr>
+        <p:spPr>
+          <a:xfrm>
+            <a:off x="381000" y="685800"/>
+            <a:ext cx="6096000" cy="3429000"/>
+          </a:xfrm>
+        </p:spPr>
+      </p:sp>
+      <p:sp>
+        <p:nvSpPr>
+          <p:cNvPr id="3" name="Espaço Reservado para Anotações 2">
+            <a:extLst>
+              <a:ext uri="{FF2B5EF4-FFF2-40B4-BE49-F238E27FC236}">
+                <a16:creationId xmlns:a16="http://schemas.microsoft.com/office/drawing/2014/main" id="{42898E80-DCB4-49D4-BA33-E0D0306D0B51}"/>
+              </a:ext>
+            </a:extLst>
+          </p:cNvPr>
+          <p:cNvSpPr>
+            <a:spLocks noGrp="1"/>
+          </p:cNvSpPr>
+          <p:nvPr>
+            <p:ph type="body" idx="1"/>
+          </p:nvPr>
+        </p:nvSpPr>
+        <p:spPr/>
+        <p:txBody>
+          <a:bodyPr/>
+          <a:lstStyle/>
+          <a:p>
+            <a:endParaRPr lang="pt-BR" dirty="0"/>
+          </a:p>
+        </p:txBody>
+      </p:sp>
+    </p:spTree>
+    <p:extLst>
+      <p:ext uri="{BB962C8B-B14F-4D97-AF65-F5344CB8AC3E}">
+        <p14:creationId xmlns:p14="http://schemas.microsoft.com/office/powerpoint/2010/main" val="1200483123"/>
+      </p:ext>
+    </p:extLst>
+  </p:cSld>
+  <p:clrMapOvr>
+    <a:masterClrMapping/>
+  </p:clrMapOvr>
+</p:notes>
+</file>
+
+<file path=ppt/notesSlides/notesSlide16.xml><?xml version="1.0" encoding="utf-8"?>
 <p:notes xmlns:a="http://schemas.openxmlformats.org/drawingml/2006/main" xmlns:r="http://schemas.openxmlformats.org/officeDocument/2006/relationships" xmlns:p="http://schemas.openxmlformats.org/presentationml/2006/main">
   <p:cSld>
     <p:spTree>
@@ -504,7 +948,7 @@
     </p:spTree>
     <p:extLst>
       <p:ext uri="{BB962C8B-B14F-4D97-AF65-F5344CB8AC3E}">
-        <p14:creationId xmlns:p14="http://schemas.microsoft.com/office/powerpoint/2010/main" val="585304384"/>
+        <p14:creationId xmlns:p14="http://schemas.microsoft.com/office/powerpoint/2010/main" val="2709569597"/>
       </p:ext>
     </p:extLst>
   </p:cSld>
@@ -514,7 +958,7 @@
 </p:notes>
 </file>
 
-<file path=ppt/notesSlides/notesSlide12.xml><?xml version="1.0" encoding="utf-8"?>
+<file path=ppt/notesSlides/notesSlide17.xml><?xml version="1.0" encoding="utf-8"?>
 <p:notes xmlns:a="http://schemas.openxmlformats.org/drawingml/2006/main" xmlns:r="http://schemas.openxmlformats.org/officeDocument/2006/relationships" xmlns:p="http://schemas.openxmlformats.org/presentationml/2006/main">
   <p:cSld>
     <p:spTree>
@@ -570,6 +1014,72 @@
     </p:spTree>
     <p:extLst>
       <p:ext uri="{BB962C8B-B14F-4D97-AF65-F5344CB8AC3E}">
+        <p14:creationId xmlns:p14="http://schemas.microsoft.com/office/powerpoint/2010/main" val="585304384"/>
+      </p:ext>
+    </p:extLst>
+  </p:cSld>
+  <p:clrMapOvr>
+    <a:masterClrMapping/>
+  </p:clrMapOvr>
+</p:notes>
+</file>
+
+<file path=ppt/notesSlides/notesSlide18.xml><?xml version="1.0" encoding="utf-8"?>
+<p:notes xmlns:a="http://schemas.openxmlformats.org/drawingml/2006/main" xmlns:r="http://schemas.openxmlformats.org/officeDocument/2006/relationships" xmlns:p="http://schemas.openxmlformats.org/presentationml/2006/main">
+  <p:cSld>
+    <p:spTree>
+      <p:nvGrpSpPr>
+        <p:cNvPr id="1" name=""/>
+        <p:cNvGrpSpPr/>
+        <p:nvPr/>
+      </p:nvGrpSpPr>
+      <p:grpSpPr>
+        <a:xfrm>
+          <a:off x="0" y="0"/>
+          <a:ext cx="0" cy="0"/>
+          <a:chOff x="0" y="0"/>
+          <a:chExt cx="0" cy="0"/>
+        </a:xfrm>
+      </p:grpSpPr>
+      <p:sp>
+        <p:nvSpPr>
+          <p:cNvPr id="2" name="Espaço Reservado para Imagem de Slide 1"/>
+          <p:cNvSpPr>
+            <a:spLocks noGrp="1" noRot="1" noChangeAspect="1"/>
+          </p:cNvSpPr>
+          <p:nvPr>
+            <p:ph type="sldImg"/>
+          </p:nvPr>
+        </p:nvSpPr>
+        <p:spPr>
+          <a:xfrm>
+            <a:off x="381000" y="685800"/>
+            <a:ext cx="6096000" cy="3429000"/>
+          </a:xfrm>
+        </p:spPr>
+      </p:sp>
+      <p:sp>
+        <p:nvSpPr>
+          <p:cNvPr id="3" name="Espaço Reservado para Anotações 2"/>
+          <p:cNvSpPr>
+            <a:spLocks noGrp="1"/>
+          </p:cNvSpPr>
+          <p:nvPr>
+            <p:ph type="body" idx="1"/>
+          </p:nvPr>
+        </p:nvSpPr>
+        <p:spPr/>
+        <p:txBody>
+          <a:bodyPr/>
+          <a:lstStyle/>
+          <a:p>
+            <a:endParaRPr lang="pt-BR" dirty="0"/>
+          </a:p>
+        </p:txBody>
+      </p:sp>
+    </p:spTree>
+    <p:extLst>
+      <p:ext uri="{BB962C8B-B14F-4D97-AF65-F5344CB8AC3E}">
         <p14:creationId xmlns:p14="http://schemas.microsoft.com/office/powerpoint/2010/main" val="2296249050"/>
       </p:ext>
     </p:extLst>
@@ -580,7 +1090,7 @@
 </p:notes>
 </file>
 
-<file path=ppt/notesSlides/notesSlide13.xml><?xml version="1.0" encoding="utf-8"?>
+<file path=ppt/notesSlides/notesSlide19.xml><?xml version="1.0" encoding="utf-8"?>
 <p:notes xmlns:a="http://schemas.openxmlformats.org/drawingml/2006/main" xmlns:r="http://schemas.openxmlformats.org/officeDocument/2006/relationships" xmlns:p="http://schemas.openxmlformats.org/presentationml/2006/main">
   <p:cSld>
     <p:spTree>
@@ -966,7 +1476,7 @@
     </p:spTree>
     <p:extLst>
       <p:ext uri="{BB962C8B-B14F-4D97-AF65-F5344CB8AC3E}">
-        <p14:creationId xmlns:p14="http://schemas.microsoft.com/office/powerpoint/2010/main" val="355499387"/>
+        <p14:creationId xmlns:p14="http://schemas.microsoft.com/office/powerpoint/2010/main" val="152022818"/>
       </p:ext>
     </p:extLst>
   </p:cSld>
@@ -1032,7 +1542,7 @@
     </p:spTree>
     <p:extLst>
       <p:ext uri="{BB962C8B-B14F-4D97-AF65-F5344CB8AC3E}">
-        <p14:creationId xmlns:p14="http://schemas.microsoft.com/office/powerpoint/2010/main" val="152022818"/>
+        <p14:creationId xmlns:p14="http://schemas.microsoft.com/office/powerpoint/2010/main" val="103641948"/>
       </p:ext>
     </p:extLst>
   </p:cSld>
@@ -1098,7 +1608,7 @@
     </p:spTree>
     <p:extLst>
       <p:ext uri="{BB962C8B-B14F-4D97-AF65-F5344CB8AC3E}">
-        <p14:creationId xmlns:p14="http://schemas.microsoft.com/office/powerpoint/2010/main" val="103641948"/>
+        <p14:creationId xmlns:p14="http://schemas.microsoft.com/office/powerpoint/2010/main" val="1104284737"/>
       </p:ext>
     </p:extLst>
   </p:cSld>
@@ -1164,7 +1674,7 @@
     </p:spTree>
     <p:extLst>
       <p:ext uri="{BB962C8B-B14F-4D97-AF65-F5344CB8AC3E}">
-        <p14:creationId xmlns:p14="http://schemas.microsoft.com/office/powerpoint/2010/main" val="1104284737"/>
+        <p14:creationId xmlns:p14="http://schemas.microsoft.com/office/powerpoint/2010/main" val="355499387"/>
       </p:ext>
     </p:extLst>
   </p:cSld>
@@ -1313,7 +1823,7 @@
           <a:p>
             <a:fld id="{48A87A34-81AB-432B-8DAE-1953F412C126}" type="datetimeFigureOut">
               <a:rPr lang="en-US" smtClean="0"/>
-              <a:t>10/16/2023</a:t>
+              <a:t>4/27/2026</a:t>
             </a:fld>
             <a:endParaRPr lang="en-US" dirty="0"/>
           </a:p>
@@ -1524,7 +2034,7 @@
           <a:p>
             <a:fld id="{48A87A34-81AB-432B-8DAE-1953F412C126}" type="datetimeFigureOut">
               <a:rPr lang="en-US" smtClean="0"/>
-              <a:t>10/16/2023</a:t>
+              <a:t>4/27/2026</a:t>
             </a:fld>
             <a:endParaRPr lang="en-US" dirty="0"/>
           </a:p>
@@ -1739,7 +2249,7 @@
           <a:p>
             <a:fld id="{48A87A34-81AB-432B-8DAE-1953F412C126}" type="datetimeFigureOut">
               <a:rPr lang="en-US" smtClean="0"/>
-              <a:t>10/16/2023</a:t>
+              <a:t>4/27/2026</a:t>
             </a:fld>
             <a:endParaRPr lang="en-US" dirty="0"/>
           </a:p>
@@ -2107,7 +2617,7 @@
           <a:p>
             <a:fld id="{48A87A34-81AB-432B-8DAE-1953F412C126}" type="datetimeFigureOut">
               <a:rPr lang="en-US" smtClean="0"/>
-              <a:t>10/16/2023</a:t>
+              <a:t>4/27/2026</a:t>
             </a:fld>
             <a:endParaRPr lang="en-US" dirty="0"/>
           </a:p>
@@ -2386,7 +2896,7 @@
           <a:p>
             <a:fld id="{48A87A34-81AB-432B-8DAE-1953F412C126}" type="datetimeFigureOut">
               <a:rPr lang="en-US" smtClean="0"/>
-              <a:t>10/16/2023</a:t>
+              <a:t>4/27/2026</a:t>
             </a:fld>
             <a:endParaRPr lang="en-US" dirty="0"/>
           </a:p>
@@ -2654,7 +3164,7 @@
           <a:p>
             <a:fld id="{48A87A34-81AB-432B-8DAE-1953F412C126}" type="datetimeFigureOut">
               <a:rPr lang="en-US" smtClean="0"/>
-              <a:t>10/16/2023</a:t>
+              <a:t>4/27/2026</a:t>
             </a:fld>
             <a:endParaRPr lang="en-US" dirty="0"/>
           </a:p>
@@ -3070,7 +3580,7 @@
           <a:p>
             <a:fld id="{48A87A34-81AB-432B-8DAE-1953F412C126}" type="datetimeFigureOut">
               <a:rPr lang="en-US" smtClean="0"/>
-              <a:t>10/16/2023</a:t>
+              <a:t>4/27/2026</a:t>
             </a:fld>
             <a:endParaRPr lang="en-US" dirty="0"/>
           </a:p>
@@ -3219,7 +3729,7 @@
           <a:p>
             <a:fld id="{48A87A34-81AB-432B-8DAE-1953F412C126}" type="datetimeFigureOut">
               <a:rPr lang="en-US" smtClean="0"/>
-              <a:t>10/16/2023</a:t>
+              <a:t>4/27/2026</a:t>
             </a:fld>
             <a:endParaRPr lang="en-US" dirty="0"/>
           </a:p>
@@ -3345,7 +3855,7 @@
           <a:p>
             <a:fld id="{48A87A34-81AB-432B-8DAE-1953F412C126}" type="datetimeFigureOut">
               <a:rPr lang="en-US" smtClean="0"/>
-              <a:t>10/16/2023</a:t>
+              <a:t>4/27/2026</a:t>
             </a:fld>
             <a:endParaRPr lang="en-US" dirty="0"/>
           </a:p>
@@ -3596,7 +4106,7 @@
           <a:p>
             <a:fld id="{48A87A34-81AB-432B-8DAE-1953F412C126}" type="datetimeFigureOut">
               <a:rPr lang="en-US" smtClean="0"/>
-              <a:t>10/16/2023</a:t>
+              <a:t>4/27/2026</a:t>
             </a:fld>
             <a:endParaRPr lang="en-US" dirty="0"/>
           </a:p>
@@ -4042,7 +4552,7 @@
             <a:fld id="{48A87A34-81AB-432B-8DAE-1953F412C126}" type="datetimeFigureOut">
               <a:rPr lang="en-US" smtClean="0"/>
               <a:pPr/>
-              <a:t>10/16/2023</a:t>
+              <a:t>4/27/2026</a:t>
             </a:fld>
             <a:endParaRPr lang="en-US" dirty="0"/>
           </a:p>
@@ -4209,6 +4719,13 @@
             <a:schemeClr val="lt1"/>
           </a:fontRef>
         </p:style>
+        <p:txBody>
+          <a:bodyPr/>
+          <a:lstStyle/>
+          <a:p>
+            <a:endParaRPr lang="pt-BR"/>
+          </a:p>
+        </p:txBody>
       </p:sp>
       <p:pic>
         <p:nvPicPr>
@@ -4370,7 +4887,7 @@
             <a:fld id="{48A87A34-81AB-432B-8DAE-1953F412C126}" type="datetimeFigureOut">
               <a:rPr lang="en-US" smtClean="0"/>
               <a:pPr/>
-              <a:t>10/16/2023</a:t>
+              <a:t>4/27/2026</a:t>
             </a:fld>
             <a:endParaRPr lang="en-US" dirty="0"/>
           </a:p>
@@ -5444,7 +5961,7 @@
                   <a:srgbClr val="0070C0"/>
                 </a:solidFill>
               </a:rPr>
-              <a:t>Python – BANCO DE DADOS – CRUD UPDATE</a:t>
+              <a:t>Python – BANCO DE DADOS – CRUD DELETE</a:t>
             </a:r>
           </a:p>
         </p:txBody>
@@ -5461,8 +5978,8 @@
         </p:nvSpPr>
         <p:spPr>
           <a:xfrm>
-            <a:off x="142865" y="836895"/>
-            <a:ext cx="8865056" cy="4160989"/>
+            <a:off x="142865" y="702783"/>
+            <a:ext cx="8865056" cy="4344705"/>
           </a:xfrm>
         </p:spPr>
         <p:txBody>
@@ -5475,7 +5992,7 @@
               <a:buNone/>
             </a:pPr>
             <a:r>
-              <a:rPr lang="pt-BR" sz="2400" dirty="0">
+              <a:rPr lang="pt-BR" sz="2000" dirty="0">
                 <a:solidFill>
                   <a:schemeClr val="tx1"/>
                 </a:solidFill>
@@ -5485,7 +6002,7 @@
               <a:t>cursor = </a:t>
             </a:r>
             <a:r>
-              <a:rPr lang="pt-BR" sz="2400" dirty="0" err="1">
+              <a:rPr lang="pt-BR" sz="2000" dirty="0" err="1">
                 <a:solidFill>
                   <a:schemeClr val="tx1"/>
                 </a:solidFill>
@@ -5495,7 +6012,7 @@
               <a:t>conn.</a:t>
             </a:r>
             <a:r>
-              <a:rPr lang="pt-BR" sz="2400" b="1" dirty="0" err="1">
+              <a:rPr lang="pt-BR" sz="2000" b="1" dirty="0" err="1">
                 <a:solidFill>
                   <a:srgbClr val="FF0000"/>
                 </a:solidFill>
@@ -5505,7 +6022,7 @@
               <a:t>cursor</a:t>
             </a:r>
             <a:r>
-              <a:rPr lang="pt-BR" sz="2400" dirty="0">
+              <a:rPr lang="pt-BR" sz="2000" dirty="0">
                 <a:solidFill>
                   <a:schemeClr val="tx1"/>
                 </a:solidFill>
@@ -5520,13 +6037,13 @@
               <a:buNone/>
             </a:pPr>
             <a:r>
-              <a:rPr lang="pt-BR" sz="2400" dirty="0">
+              <a:rPr lang="pt-BR" sz="2000" dirty="0">
                 <a:latin typeface="Times New Roman" panose="02020603050405020304" pitchFamily="18" charset="0"/>
                 <a:cs typeface="Times New Roman" panose="02020603050405020304" pitchFamily="18" charset="0"/>
               </a:rPr>
               <a:t>id = 63</a:t>
             </a:r>
-            <a:endParaRPr lang="pt-BR" sz="2400" dirty="0">
+            <a:endParaRPr lang="pt-BR" sz="2000" dirty="0">
               <a:solidFill>
                 <a:schemeClr val="tx1"/>
               </a:solidFill>
@@ -5539,11 +6056,91 @@
               <a:buNone/>
             </a:pPr>
             <a:r>
-              <a:rPr lang="pt-BR" sz="2400" dirty="0">
-                <a:latin typeface="Times New Roman" panose="02020603050405020304" pitchFamily="18" charset="0"/>
-                <a:cs typeface="Times New Roman" panose="02020603050405020304" pitchFamily="18" charset="0"/>
-              </a:rPr>
-              <a:t>nome = "recursos humanos"</a:t>
+              <a:rPr lang="pt-BR" sz="2000" dirty="0" err="1">
+                <a:latin typeface="Times New Roman" panose="02020603050405020304" pitchFamily="18" charset="0"/>
+                <a:cs typeface="Times New Roman" panose="02020603050405020304" pitchFamily="18" charset="0"/>
+              </a:rPr>
+              <a:t>sql</a:t>
+            </a:r>
+            <a:r>
+              <a:rPr lang="pt-BR" sz="2000" dirty="0">
+                <a:latin typeface="Times New Roman" panose="02020603050405020304" pitchFamily="18" charset="0"/>
+                <a:cs typeface="Times New Roman" panose="02020603050405020304" pitchFamily="18" charset="0"/>
+              </a:rPr>
+              <a:t> = </a:t>
+            </a:r>
+            <a:r>
+              <a:rPr lang="pt-BR" sz="2000" b="1" dirty="0" err="1">
+                <a:solidFill>
+                  <a:srgbClr val="FF0000"/>
+                </a:solidFill>
+                <a:latin typeface="Times New Roman" panose="02020603050405020304" pitchFamily="18" charset="0"/>
+                <a:cs typeface="Times New Roman" panose="02020603050405020304" pitchFamily="18" charset="0"/>
+              </a:rPr>
+              <a:t>f</a:t>
+            </a:r>
+            <a:r>
+              <a:rPr lang="pt-BR" sz="2000" dirty="0" err="1">
+                <a:latin typeface="Times New Roman" panose="02020603050405020304" pitchFamily="18" charset="0"/>
+                <a:cs typeface="Times New Roman" panose="02020603050405020304" pitchFamily="18" charset="0"/>
+              </a:rPr>
+              <a:t>“</a:t>
+            </a:r>
+            <a:r>
+              <a:rPr lang="pt-BR" sz="2000" b="1" dirty="0" err="1">
+                <a:latin typeface="Times New Roman" panose="02020603050405020304" pitchFamily="18" charset="0"/>
+                <a:cs typeface="Times New Roman" panose="02020603050405020304" pitchFamily="18" charset="0"/>
+              </a:rPr>
+              <a:t>delete</a:t>
+            </a:r>
+            <a:r>
+              <a:rPr lang="pt-BR" sz="2000" dirty="0">
+                <a:latin typeface="Times New Roman" panose="02020603050405020304" pitchFamily="18" charset="0"/>
+                <a:cs typeface="Times New Roman" panose="02020603050405020304" pitchFamily="18" charset="0"/>
+              </a:rPr>
+              <a:t> </a:t>
+            </a:r>
+            <a:r>
+              <a:rPr lang="pt-BR" sz="2000" b="1" dirty="0" err="1">
+                <a:latin typeface="Times New Roman" panose="02020603050405020304" pitchFamily="18" charset="0"/>
+                <a:cs typeface="Times New Roman" panose="02020603050405020304" pitchFamily="18" charset="0"/>
+              </a:rPr>
+              <a:t>from</a:t>
+            </a:r>
+            <a:r>
+              <a:rPr lang="pt-BR" sz="2000" b="1" dirty="0">
+                <a:latin typeface="Times New Roman" panose="02020603050405020304" pitchFamily="18" charset="0"/>
+                <a:cs typeface="Times New Roman" panose="02020603050405020304" pitchFamily="18" charset="0"/>
+              </a:rPr>
+              <a:t> </a:t>
+            </a:r>
+            <a:r>
+              <a:rPr lang="pt-BR" sz="2000" dirty="0" err="1">
+                <a:latin typeface="Times New Roman" panose="02020603050405020304" pitchFamily="18" charset="0"/>
+                <a:cs typeface="Times New Roman" panose="02020603050405020304" pitchFamily="18" charset="0"/>
+              </a:rPr>
+              <a:t>department</a:t>
+            </a:r>
+            <a:r>
+              <a:rPr lang="pt-BR" sz="2000" dirty="0">
+                <a:latin typeface="Times New Roman" panose="02020603050405020304" pitchFamily="18" charset="0"/>
+                <a:cs typeface="Times New Roman" panose="02020603050405020304" pitchFamily="18" charset="0"/>
+              </a:rPr>
+              <a:t> </a:t>
+            </a:r>
+            <a:r>
+              <a:rPr lang="pt-BR" sz="2000" b="1" dirty="0" err="1">
+                <a:latin typeface="Times New Roman" panose="02020603050405020304" pitchFamily="18" charset="0"/>
+                <a:cs typeface="Times New Roman" panose="02020603050405020304" pitchFamily="18" charset="0"/>
+              </a:rPr>
+              <a:t>where</a:t>
+            </a:r>
+            <a:r>
+              <a:rPr lang="pt-BR" sz="2000" dirty="0">
+                <a:latin typeface="Times New Roman" panose="02020603050405020304" pitchFamily="18" charset="0"/>
+                <a:cs typeface="Times New Roman" panose="02020603050405020304" pitchFamily="18" charset="0"/>
+              </a:rPr>
+              <a:t> Id = {id}"</a:t>
             </a:r>
           </a:p>
           <a:p>
@@ -5551,157 +6148,173 @@
               <a:buNone/>
             </a:pPr>
             <a:r>
-              <a:rPr lang="pt-BR" sz="2400" dirty="0" err="1">
+              <a:rPr lang="pt-BR" sz="2000" dirty="0" err="1">
+                <a:latin typeface="Times New Roman" panose="02020603050405020304" pitchFamily="18" charset="0"/>
+                <a:cs typeface="Times New Roman" panose="02020603050405020304" pitchFamily="18" charset="0"/>
+              </a:rPr>
+              <a:t>cursor.</a:t>
+            </a:r>
+            <a:r>
+              <a:rPr lang="pt-BR" sz="2000" b="1" dirty="0" err="1">
+                <a:solidFill>
+                  <a:srgbClr val="FF0000"/>
+                </a:solidFill>
+                <a:latin typeface="Times New Roman" panose="02020603050405020304" pitchFamily="18" charset="0"/>
+                <a:cs typeface="Times New Roman" panose="02020603050405020304" pitchFamily="18" charset="0"/>
+              </a:rPr>
+              <a:t>execute</a:t>
+            </a:r>
+            <a:r>
+              <a:rPr lang="pt-BR" sz="2000" dirty="0">
+                <a:latin typeface="Times New Roman" panose="02020603050405020304" pitchFamily="18" charset="0"/>
+                <a:cs typeface="Times New Roman" panose="02020603050405020304" pitchFamily="18" charset="0"/>
+              </a:rPr>
+              <a:t>(</a:t>
+            </a:r>
+            <a:r>
+              <a:rPr lang="pt-BR" sz="2000" dirty="0" err="1">
                 <a:latin typeface="Times New Roman" panose="02020603050405020304" pitchFamily="18" charset="0"/>
                 <a:cs typeface="Times New Roman" panose="02020603050405020304" pitchFamily="18" charset="0"/>
               </a:rPr>
               <a:t>sql</a:t>
             </a:r>
             <a:r>
-              <a:rPr lang="pt-BR" sz="2400" dirty="0">
-                <a:latin typeface="Times New Roman" panose="02020603050405020304" pitchFamily="18" charset="0"/>
-                <a:cs typeface="Times New Roman" panose="02020603050405020304" pitchFamily="18" charset="0"/>
-              </a:rPr>
-              <a:t> = </a:t>
-            </a:r>
-            <a:r>
-              <a:rPr lang="pt-BR" sz="2400" b="1" dirty="0" err="1">
+              <a:rPr lang="pt-BR" sz="2000" dirty="0">
+                <a:latin typeface="Times New Roman" panose="02020603050405020304" pitchFamily="18" charset="0"/>
+                <a:cs typeface="Times New Roman" panose="02020603050405020304" pitchFamily="18" charset="0"/>
+              </a:rPr>
+              <a:t>)</a:t>
+            </a:r>
+          </a:p>
+          <a:p>
+            <a:pPr marL="0" indent="0" algn="just">
+              <a:buNone/>
+            </a:pPr>
+            <a:r>
+              <a:rPr lang="pt-BR" sz="2000" dirty="0">
+                <a:latin typeface="Times New Roman" panose="02020603050405020304" pitchFamily="18" charset="0"/>
+                <a:cs typeface="Times New Roman" panose="02020603050405020304" pitchFamily="18" charset="0"/>
+              </a:rPr>
+              <a:t>linha = </a:t>
+            </a:r>
+            <a:r>
+              <a:rPr lang="pt-BR" sz="2000" dirty="0" err="1">
+                <a:solidFill>
+                  <a:schemeClr val="tx1"/>
+                </a:solidFill>
+                <a:latin typeface="Times New Roman" panose="02020603050405020304" pitchFamily="18" charset="0"/>
+                <a:cs typeface="Times New Roman" panose="02020603050405020304" pitchFamily="18" charset="0"/>
+              </a:rPr>
+              <a:t>cursor.</a:t>
+            </a:r>
+            <a:r>
+              <a:rPr lang="pt-BR" sz="2000" b="1" dirty="0" err="1">
                 <a:solidFill>
                   <a:srgbClr val="FF0000"/>
                 </a:solidFill>
                 <a:latin typeface="Times New Roman" panose="02020603050405020304" pitchFamily="18" charset="0"/>
                 <a:cs typeface="Times New Roman" panose="02020603050405020304" pitchFamily="18" charset="0"/>
               </a:rPr>
-              <a:t>f</a:t>
-            </a:r>
-            <a:r>
-              <a:rPr lang="pt-BR" sz="2400" dirty="0" err="1">
-                <a:latin typeface="Times New Roman" panose="02020603050405020304" pitchFamily="18" charset="0"/>
-                <a:cs typeface="Times New Roman" panose="02020603050405020304" pitchFamily="18" charset="0"/>
-              </a:rPr>
-              <a:t>"</a:t>
-            </a:r>
-            <a:r>
-              <a:rPr lang="pt-BR" sz="2400" b="1" dirty="0" err="1">
-                <a:latin typeface="Times New Roman" panose="02020603050405020304" pitchFamily="18" charset="0"/>
-                <a:cs typeface="Times New Roman" panose="02020603050405020304" pitchFamily="18" charset="0"/>
-              </a:rPr>
-              <a:t>update</a:t>
-            </a:r>
-            <a:r>
-              <a:rPr lang="pt-BR" sz="2400" dirty="0">
-                <a:latin typeface="Times New Roman" panose="02020603050405020304" pitchFamily="18" charset="0"/>
-                <a:cs typeface="Times New Roman" panose="02020603050405020304" pitchFamily="18" charset="0"/>
-              </a:rPr>
-              <a:t> </a:t>
-            </a:r>
-            <a:r>
-              <a:rPr lang="pt-BR" sz="2400" dirty="0" err="1">
-                <a:latin typeface="Times New Roman" panose="02020603050405020304" pitchFamily="18" charset="0"/>
-                <a:cs typeface="Times New Roman" panose="02020603050405020304" pitchFamily="18" charset="0"/>
-              </a:rPr>
-              <a:t>department</a:t>
-            </a:r>
-            <a:r>
-              <a:rPr lang="pt-BR" sz="2400" dirty="0">
-                <a:latin typeface="Times New Roman" panose="02020603050405020304" pitchFamily="18" charset="0"/>
-                <a:cs typeface="Times New Roman" panose="02020603050405020304" pitchFamily="18" charset="0"/>
-              </a:rPr>
-              <a:t> </a:t>
-            </a:r>
-            <a:r>
-              <a:rPr lang="pt-BR" sz="2400" b="1" dirty="0">
-                <a:latin typeface="Times New Roman" panose="02020603050405020304" pitchFamily="18" charset="0"/>
-                <a:cs typeface="Times New Roman" panose="02020603050405020304" pitchFamily="18" charset="0"/>
-              </a:rPr>
-              <a:t>set</a:t>
-            </a:r>
-            <a:r>
-              <a:rPr lang="pt-BR" sz="2400" dirty="0">
-                <a:latin typeface="Times New Roman" panose="02020603050405020304" pitchFamily="18" charset="0"/>
-                <a:cs typeface="Times New Roman" panose="02020603050405020304" pitchFamily="18" charset="0"/>
-              </a:rPr>
-              <a:t> </a:t>
-            </a:r>
-            <a:r>
-              <a:rPr lang="pt-BR" sz="2400" dirty="0" err="1">
-                <a:latin typeface="Times New Roman" panose="02020603050405020304" pitchFamily="18" charset="0"/>
-                <a:cs typeface="Times New Roman" panose="02020603050405020304" pitchFamily="18" charset="0"/>
-              </a:rPr>
-              <a:t>Name</a:t>
-            </a:r>
-            <a:r>
-              <a:rPr lang="pt-BR" sz="2400" dirty="0">
-                <a:latin typeface="Times New Roman" panose="02020603050405020304" pitchFamily="18" charset="0"/>
-                <a:cs typeface="Times New Roman" panose="02020603050405020304" pitchFamily="18" charset="0"/>
-              </a:rPr>
-              <a:t> = '{nome}' </a:t>
-            </a:r>
-            <a:r>
-              <a:rPr lang="pt-BR" sz="2400" b="1" dirty="0" err="1">
-                <a:latin typeface="Times New Roman" panose="02020603050405020304" pitchFamily="18" charset="0"/>
-                <a:cs typeface="Times New Roman" panose="02020603050405020304" pitchFamily="18" charset="0"/>
-              </a:rPr>
-              <a:t>where</a:t>
-            </a:r>
-            <a:r>
-              <a:rPr lang="pt-BR" sz="2400" dirty="0">
-                <a:latin typeface="Times New Roman" panose="02020603050405020304" pitchFamily="18" charset="0"/>
-                <a:cs typeface="Times New Roman" panose="02020603050405020304" pitchFamily="18" charset="0"/>
-              </a:rPr>
-              <a:t> Id = {id}"</a:t>
+              <a:t>fetchone</a:t>
+            </a:r>
+            <a:r>
+              <a:rPr lang="pt-BR" sz="2000" dirty="0">
+                <a:solidFill>
+                  <a:schemeClr val="tx1"/>
+                </a:solidFill>
+                <a:latin typeface="Times New Roman" panose="02020603050405020304" pitchFamily="18" charset="0"/>
+                <a:cs typeface="Times New Roman" panose="02020603050405020304" pitchFamily="18" charset="0"/>
+              </a:rPr>
+              <a:t>()</a:t>
             </a:r>
           </a:p>
           <a:p>
             <a:pPr marL="0" indent="0" algn="just">
               <a:buNone/>
             </a:pPr>
-            <a:endParaRPr lang="pt-BR" sz="2400" dirty="0">
-              <a:latin typeface="Times New Roman" panose="02020603050405020304" pitchFamily="18" charset="0"/>
-              <a:cs typeface="Times New Roman" panose="02020603050405020304" pitchFamily="18" charset="0"/>
-            </a:endParaRPr>
+            <a:r>
+              <a:rPr lang="pt-BR" sz="2000" b="1" dirty="0" err="1">
+                <a:latin typeface="Times New Roman" panose="02020603050405020304" pitchFamily="18" charset="0"/>
+                <a:cs typeface="Times New Roman" panose="02020603050405020304" pitchFamily="18" charset="0"/>
+              </a:rPr>
+              <a:t>if</a:t>
+            </a:r>
+            <a:r>
+              <a:rPr lang="pt-BR" sz="2000" dirty="0">
+                <a:latin typeface="Times New Roman" panose="02020603050405020304" pitchFamily="18" charset="0"/>
+                <a:cs typeface="Times New Roman" panose="02020603050405020304" pitchFamily="18" charset="0"/>
+              </a:rPr>
+              <a:t> (linha != </a:t>
+            </a:r>
+            <a:r>
+              <a:rPr lang="pt-BR" sz="2000" b="1" dirty="0" err="1">
+                <a:latin typeface="Times New Roman" panose="02020603050405020304" pitchFamily="18" charset="0"/>
+                <a:cs typeface="Times New Roman" panose="02020603050405020304" pitchFamily="18" charset="0"/>
+              </a:rPr>
+              <a:t>None</a:t>
+            </a:r>
+            <a:r>
+              <a:rPr lang="pt-BR" sz="2000" dirty="0">
+                <a:latin typeface="Times New Roman" panose="02020603050405020304" pitchFamily="18" charset="0"/>
+                <a:cs typeface="Times New Roman" panose="02020603050405020304" pitchFamily="18" charset="0"/>
+              </a:rPr>
+              <a:t>): # ou </a:t>
+            </a:r>
+            <a:r>
+              <a:rPr lang="pt-BR" sz="2000" b="1" dirty="0" err="1">
+                <a:solidFill>
+                  <a:srgbClr val="FF0000"/>
+                </a:solidFill>
+                <a:latin typeface="Times New Roman" panose="02020603050405020304" pitchFamily="18" charset="0"/>
+                <a:cs typeface="Times New Roman" panose="02020603050405020304" pitchFamily="18" charset="0"/>
+              </a:rPr>
+              <a:t>linha.rowcount</a:t>
+            </a:r>
+            <a:r>
+              <a:rPr lang="pt-BR" sz="2000" b="1" dirty="0">
+                <a:solidFill>
+                  <a:srgbClr val="FF0000"/>
+                </a:solidFill>
+                <a:latin typeface="Times New Roman" panose="02020603050405020304" pitchFamily="18" charset="0"/>
+                <a:cs typeface="Times New Roman" panose="02020603050405020304" pitchFamily="18" charset="0"/>
+              </a:rPr>
+              <a:t> &gt; 0:</a:t>
+            </a:r>
           </a:p>
           <a:p>
             <a:pPr marL="0" indent="0" algn="just">
               <a:buNone/>
             </a:pPr>
             <a:r>
-              <a:rPr lang="pt-BR" sz="2400" dirty="0" err="1">
-                <a:latin typeface="Times New Roman" panose="02020603050405020304" pitchFamily="18" charset="0"/>
-                <a:cs typeface="Times New Roman" panose="02020603050405020304" pitchFamily="18" charset="0"/>
-              </a:rPr>
-              <a:t>cursor.</a:t>
-            </a:r>
-            <a:r>
-              <a:rPr lang="pt-BR" sz="2400" b="1" dirty="0" err="1">
+              <a:rPr lang="pt-BR" sz="2000" dirty="0">
+                <a:latin typeface="Times New Roman" panose="02020603050405020304" pitchFamily="18" charset="0"/>
+                <a:cs typeface="Times New Roman" panose="02020603050405020304" pitchFamily="18" charset="0"/>
+              </a:rPr>
+              <a:t>    </a:t>
+            </a:r>
+            <a:r>
+              <a:rPr lang="pt-BR" sz="2000" dirty="0" err="1">
+                <a:latin typeface="Times New Roman" panose="02020603050405020304" pitchFamily="18" charset="0"/>
+                <a:cs typeface="Times New Roman" panose="02020603050405020304" pitchFamily="18" charset="0"/>
+              </a:rPr>
+              <a:t>conn.</a:t>
+            </a:r>
+            <a:r>
+              <a:rPr lang="pt-BR" sz="2000" b="1" dirty="0" err="1">
                 <a:solidFill>
                   <a:srgbClr val="FF0000"/>
                 </a:solidFill>
                 <a:latin typeface="Times New Roman" panose="02020603050405020304" pitchFamily="18" charset="0"/>
                 <a:cs typeface="Times New Roman" panose="02020603050405020304" pitchFamily="18" charset="0"/>
               </a:rPr>
-              <a:t>execute</a:t>
-            </a:r>
-            <a:r>
-              <a:rPr lang="pt-BR" sz="2400" dirty="0">
-                <a:latin typeface="Times New Roman" panose="02020603050405020304" pitchFamily="18" charset="0"/>
-                <a:cs typeface="Times New Roman" panose="02020603050405020304" pitchFamily="18" charset="0"/>
-              </a:rPr>
-              <a:t>(</a:t>
-            </a:r>
-            <a:r>
-              <a:rPr lang="pt-BR" sz="2400" dirty="0" err="1">
-                <a:latin typeface="Times New Roman" panose="02020603050405020304" pitchFamily="18" charset="0"/>
-                <a:cs typeface="Times New Roman" panose="02020603050405020304" pitchFamily="18" charset="0"/>
-              </a:rPr>
-              <a:t>sql</a:t>
-            </a:r>
-            <a:r>
-              <a:rPr lang="pt-BR" sz="2400" dirty="0">
-                <a:latin typeface="Times New Roman" panose="02020603050405020304" pitchFamily="18" charset="0"/>
-                <a:cs typeface="Times New Roman" panose="02020603050405020304" pitchFamily="18" charset="0"/>
-              </a:rPr>
-              <a:t>)</a:t>
+              <a:t>commit</a:t>
+            </a:r>
+            <a:r>
+              <a:rPr lang="pt-BR" sz="2000" dirty="0">
+                <a:latin typeface="Times New Roman" panose="02020603050405020304" pitchFamily="18" charset="0"/>
+                <a:cs typeface="Times New Roman" panose="02020603050405020304" pitchFamily="18" charset="0"/>
+              </a:rPr>
+              <a:t>()</a:t>
             </a:r>
           </a:p>
           <a:p>
@@ -5709,28 +6322,18 @@
               <a:buNone/>
             </a:pPr>
             <a:r>
-              <a:rPr lang="pt-BR" sz="2400" dirty="0" err="1">
-                <a:latin typeface="Times New Roman" panose="02020603050405020304" pitchFamily="18" charset="0"/>
-                <a:cs typeface="Times New Roman" panose="02020603050405020304" pitchFamily="18" charset="0"/>
-              </a:rPr>
-              <a:t>conn.</a:t>
-            </a:r>
-            <a:r>
-              <a:rPr lang="pt-BR" sz="2400" b="1" dirty="0" err="1">
-                <a:solidFill>
-                  <a:srgbClr val="FF0000"/>
-                </a:solidFill>
-                <a:latin typeface="Times New Roman" panose="02020603050405020304" pitchFamily="18" charset="0"/>
-                <a:cs typeface="Times New Roman" panose="02020603050405020304" pitchFamily="18" charset="0"/>
-              </a:rPr>
-              <a:t>commit</a:t>
-            </a:r>
-            <a:r>
-              <a:rPr lang="pt-BR" sz="2400" dirty="0">
-                <a:latin typeface="Times New Roman" panose="02020603050405020304" pitchFamily="18" charset="0"/>
-                <a:cs typeface="Times New Roman" panose="02020603050405020304" pitchFamily="18" charset="0"/>
-              </a:rPr>
-              <a:t>()</a:t>
+              <a:rPr lang="pt-BR" sz="2000" b="1" dirty="0">
+                <a:latin typeface="Times New Roman" panose="02020603050405020304" pitchFamily="18" charset="0"/>
+                <a:cs typeface="Times New Roman" panose="02020603050405020304" pitchFamily="18" charset="0"/>
+              </a:rPr>
+              <a:t>    print</a:t>
+            </a:r>
+            <a:r>
+              <a:rPr lang="pt-BR" sz="2000" dirty="0">
+                <a:latin typeface="Times New Roman" panose="02020603050405020304" pitchFamily="18" charset="0"/>
+                <a:cs typeface="Times New Roman" panose="02020603050405020304" pitchFamily="18" charset="0"/>
+              </a:rPr>
+              <a:t>(“Excluído com sucesso")</a:t>
             </a:r>
           </a:p>
           <a:p>
@@ -5738,20 +6341,45 @@
               <a:buNone/>
             </a:pPr>
             <a:r>
-              <a:rPr lang="pt-BR" sz="2400" b="1" dirty="0">
-                <a:latin typeface="Times New Roman" panose="02020603050405020304" pitchFamily="18" charset="0"/>
-                <a:cs typeface="Times New Roman" panose="02020603050405020304" pitchFamily="18" charset="0"/>
-              </a:rPr>
-              <a:t>print</a:t>
-            </a:r>
-            <a:r>
-              <a:rPr lang="pt-BR" sz="2400" dirty="0">
-                <a:latin typeface="Times New Roman" panose="02020603050405020304" pitchFamily="18" charset="0"/>
-                <a:cs typeface="Times New Roman" panose="02020603050405020304" pitchFamily="18" charset="0"/>
-              </a:rPr>
-              <a:t>("Atualizado com sucesso")</a:t>
-            </a:r>
-            <a:endParaRPr lang="pt-BR" sz="2400" dirty="0">
+              <a:rPr lang="pt-BR" sz="2000" b="1" dirty="0" err="1">
+                <a:solidFill>
+                  <a:schemeClr val="tx1"/>
+                </a:solidFill>
+                <a:latin typeface="Times New Roman" panose="02020603050405020304" pitchFamily="18" charset="0"/>
+                <a:cs typeface="Times New Roman" panose="02020603050405020304" pitchFamily="18" charset="0"/>
+              </a:rPr>
+              <a:t>else</a:t>
+            </a:r>
+            <a:r>
+              <a:rPr lang="pt-BR" sz="2000" dirty="0">
+                <a:solidFill>
+                  <a:schemeClr val="tx1"/>
+                </a:solidFill>
+                <a:latin typeface="Times New Roman" panose="02020603050405020304" pitchFamily="18" charset="0"/>
+                <a:cs typeface="Times New Roman" panose="02020603050405020304" pitchFamily="18" charset="0"/>
+              </a:rPr>
+              <a:t>:</a:t>
+            </a:r>
+          </a:p>
+          <a:p>
+            <a:pPr marL="0" indent="0" algn="just">
+              <a:buNone/>
+            </a:pPr>
+            <a:r>
+              <a:rPr lang="pt-BR" sz="2000" b="1" dirty="0">
+                <a:latin typeface="Times New Roman" panose="02020603050405020304" pitchFamily="18" charset="0"/>
+                <a:cs typeface="Times New Roman" panose="02020603050405020304" pitchFamily="18" charset="0"/>
+              </a:rPr>
+              <a:t>    print</a:t>
+            </a:r>
+            <a:r>
+              <a:rPr lang="pt-BR" sz="2000" dirty="0">
+                <a:latin typeface="Times New Roman" panose="02020603050405020304" pitchFamily="18" charset="0"/>
+                <a:cs typeface="Times New Roman" panose="02020603050405020304" pitchFamily="18" charset="0"/>
+              </a:rPr>
+              <a:t>(“Registro não encontrado!!!")</a:t>
+            </a:r>
+            <a:endParaRPr lang="pt-BR" sz="2000" dirty="0">
               <a:solidFill>
                 <a:schemeClr val="tx1"/>
               </a:solidFill>
@@ -5764,7 +6392,7 @@
     </p:spTree>
     <p:extLst>
       <p:ext uri="{BB962C8B-B14F-4D97-AF65-F5344CB8AC3E}">
-        <p14:creationId xmlns:p14="http://schemas.microsoft.com/office/powerpoint/2010/main" val="4197986306"/>
+        <p14:creationId xmlns:p14="http://schemas.microsoft.com/office/powerpoint/2010/main" val="4223033648"/>
       </p:ext>
     </p:extLst>
   </p:cSld>
@@ -5821,7 +6449,7 @@
                   <a:srgbClr val="0070C0"/>
                 </a:solidFill>
               </a:rPr>
-              <a:t>Python – BANCO DE DADOS – CRUD DELETE</a:t>
+              <a:t>Python – BANCO DE DADOS – CRUD READ</a:t>
             </a:r>
           </a:p>
         </p:txBody>
@@ -5838,8 +6466,8 @@
         </p:nvSpPr>
         <p:spPr>
           <a:xfrm>
-            <a:off x="142865" y="702783"/>
-            <a:ext cx="8865056" cy="4344705"/>
+            <a:off x="142865" y="836895"/>
+            <a:ext cx="8865056" cy="4160989"/>
           </a:xfrm>
         </p:spPr>
         <p:txBody>
@@ -5852,7 +6480,7 @@
               <a:buNone/>
             </a:pPr>
             <a:r>
-              <a:rPr lang="pt-BR" sz="2000" dirty="0">
+              <a:rPr lang="pt-BR" sz="1800" dirty="0">
                 <a:solidFill>
                   <a:schemeClr val="tx1"/>
                 </a:solidFill>
@@ -5862,7 +6490,7 @@
               <a:t>cursor = </a:t>
             </a:r>
             <a:r>
-              <a:rPr lang="pt-BR" sz="2000" dirty="0" err="1">
+              <a:rPr lang="pt-BR" sz="1800" dirty="0" err="1">
                 <a:solidFill>
                   <a:schemeClr val="tx1"/>
                 </a:solidFill>
@@ -5872,7 +6500,7 @@
               <a:t>conn.</a:t>
             </a:r>
             <a:r>
-              <a:rPr lang="pt-BR" sz="2000" b="1" dirty="0" err="1">
+              <a:rPr lang="pt-BR" sz="1800" b="1" dirty="0" err="1">
                 <a:solidFill>
                   <a:srgbClr val="FF0000"/>
                 </a:solidFill>
@@ -5882,7 +6510,7 @@
               <a:t>cursor</a:t>
             </a:r>
             <a:r>
-              <a:rPr lang="pt-BR" sz="2000" dirty="0">
+              <a:rPr lang="pt-BR" sz="1800" dirty="0">
                 <a:solidFill>
                   <a:schemeClr val="tx1"/>
                 </a:solidFill>
@@ -5897,13 +6525,297 @@
               <a:buNone/>
             </a:pPr>
             <a:r>
-              <a:rPr lang="pt-BR" sz="2000" dirty="0">
-                <a:latin typeface="Times New Roman" panose="02020603050405020304" pitchFamily="18" charset="0"/>
-                <a:cs typeface="Times New Roman" panose="02020603050405020304" pitchFamily="18" charset="0"/>
-              </a:rPr>
-              <a:t>id = 63</a:t>
-            </a:r>
-            <a:endParaRPr lang="pt-BR" sz="2000" dirty="0">
+              <a:rPr lang="pt-BR" sz="1800" dirty="0" err="1">
+                <a:latin typeface="Times New Roman" panose="02020603050405020304" pitchFamily="18" charset="0"/>
+                <a:cs typeface="Times New Roman" panose="02020603050405020304" pitchFamily="18" charset="0"/>
+              </a:rPr>
+              <a:t>sql</a:t>
+            </a:r>
+            <a:r>
+              <a:rPr lang="pt-BR" sz="1800" dirty="0">
+                <a:latin typeface="Times New Roman" panose="02020603050405020304" pitchFamily="18" charset="0"/>
+                <a:cs typeface="Times New Roman" panose="02020603050405020304" pitchFamily="18" charset="0"/>
+              </a:rPr>
+              <a:t> = </a:t>
+            </a:r>
+            <a:r>
+              <a:rPr lang="pt-BR" sz="1800" b="1" dirty="0" err="1">
+                <a:solidFill>
+                  <a:srgbClr val="FF0000"/>
+                </a:solidFill>
+                <a:latin typeface="Times New Roman" panose="02020603050405020304" pitchFamily="18" charset="0"/>
+                <a:cs typeface="Times New Roman" panose="02020603050405020304" pitchFamily="18" charset="0"/>
+              </a:rPr>
+              <a:t>f</a:t>
+            </a:r>
+            <a:r>
+              <a:rPr lang="pt-BR" sz="1800" dirty="0" err="1">
+                <a:solidFill>
+                  <a:schemeClr val="tx1"/>
+                </a:solidFill>
+                <a:latin typeface="Times New Roman" panose="02020603050405020304" pitchFamily="18" charset="0"/>
+                <a:cs typeface="Times New Roman" panose="02020603050405020304" pitchFamily="18" charset="0"/>
+              </a:rPr>
+              <a:t>"</a:t>
+            </a:r>
+            <a:r>
+              <a:rPr lang="pt-BR" sz="1800" b="1" dirty="0" err="1">
+                <a:latin typeface="Times New Roman" panose="02020603050405020304" pitchFamily="18" charset="0"/>
+                <a:cs typeface="Times New Roman" panose="02020603050405020304" pitchFamily="18" charset="0"/>
+              </a:rPr>
+              <a:t>select</a:t>
+            </a:r>
+            <a:r>
+              <a:rPr lang="pt-BR" sz="1800" dirty="0">
+                <a:solidFill>
+                  <a:schemeClr val="tx1"/>
+                </a:solidFill>
+                <a:latin typeface="Times New Roman" panose="02020603050405020304" pitchFamily="18" charset="0"/>
+                <a:cs typeface="Times New Roman" panose="02020603050405020304" pitchFamily="18" charset="0"/>
+              </a:rPr>
+              <a:t> * </a:t>
+            </a:r>
+            <a:r>
+              <a:rPr lang="pt-BR" sz="1800" b="1" dirty="0" err="1">
+                <a:solidFill>
+                  <a:schemeClr val="tx1"/>
+                </a:solidFill>
+                <a:latin typeface="Times New Roman" panose="02020603050405020304" pitchFamily="18" charset="0"/>
+                <a:cs typeface="Times New Roman" panose="02020603050405020304" pitchFamily="18" charset="0"/>
+              </a:rPr>
+              <a:t>from</a:t>
+            </a:r>
+            <a:r>
+              <a:rPr lang="pt-BR" sz="1800" b="1" dirty="0">
+                <a:solidFill>
+                  <a:schemeClr val="tx1"/>
+                </a:solidFill>
+                <a:latin typeface="Times New Roman" panose="02020603050405020304" pitchFamily="18" charset="0"/>
+                <a:cs typeface="Times New Roman" panose="02020603050405020304" pitchFamily="18" charset="0"/>
+              </a:rPr>
+              <a:t> </a:t>
+            </a:r>
+            <a:r>
+              <a:rPr lang="pt-BR" sz="1800" dirty="0" err="1">
+                <a:solidFill>
+                  <a:schemeClr val="tx1"/>
+                </a:solidFill>
+                <a:latin typeface="Times New Roman" panose="02020603050405020304" pitchFamily="18" charset="0"/>
+                <a:cs typeface="Times New Roman" panose="02020603050405020304" pitchFamily="18" charset="0"/>
+              </a:rPr>
+              <a:t>department</a:t>
+            </a:r>
+            <a:r>
+              <a:rPr lang="pt-BR" sz="1800" dirty="0">
+                <a:solidFill>
+                  <a:schemeClr val="tx1"/>
+                </a:solidFill>
+                <a:latin typeface="Times New Roman" panose="02020603050405020304" pitchFamily="18" charset="0"/>
+                <a:cs typeface="Times New Roman" panose="02020603050405020304" pitchFamily="18" charset="0"/>
+              </a:rPr>
+              <a:t>"</a:t>
+            </a:r>
+          </a:p>
+          <a:p>
+            <a:pPr marL="0" indent="0" algn="just">
+              <a:buNone/>
+            </a:pPr>
+            <a:r>
+              <a:rPr lang="pt-BR" sz="1800" dirty="0" err="1">
+                <a:solidFill>
+                  <a:schemeClr val="tx1"/>
+                </a:solidFill>
+                <a:latin typeface="Times New Roman" panose="02020603050405020304" pitchFamily="18" charset="0"/>
+                <a:cs typeface="Times New Roman" panose="02020603050405020304" pitchFamily="18" charset="0"/>
+              </a:rPr>
+              <a:t>cursor.</a:t>
+            </a:r>
+            <a:r>
+              <a:rPr lang="pt-BR" sz="1800" b="1" dirty="0" err="1">
+                <a:solidFill>
+                  <a:schemeClr val="tx1"/>
+                </a:solidFill>
+                <a:latin typeface="Times New Roman" panose="02020603050405020304" pitchFamily="18" charset="0"/>
+                <a:cs typeface="Times New Roman" panose="02020603050405020304" pitchFamily="18" charset="0"/>
+              </a:rPr>
+              <a:t>execute</a:t>
+            </a:r>
+            <a:r>
+              <a:rPr lang="pt-BR" sz="1800" dirty="0">
+                <a:solidFill>
+                  <a:schemeClr val="tx1"/>
+                </a:solidFill>
+                <a:latin typeface="Times New Roman" panose="02020603050405020304" pitchFamily="18" charset="0"/>
+                <a:cs typeface="Times New Roman" panose="02020603050405020304" pitchFamily="18" charset="0"/>
+              </a:rPr>
+              <a:t>(</a:t>
+            </a:r>
+            <a:r>
+              <a:rPr lang="pt-BR" sz="1800" dirty="0" err="1">
+                <a:solidFill>
+                  <a:schemeClr val="tx1"/>
+                </a:solidFill>
+                <a:latin typeface="Times New Roman" panose="02020603050405020304" pitchFamily="18" charset="0"/>
+                <a:cs typeface="Times New Roman" panose="02020603050405020304" pitchFamily="18" charset="0"/>
+              </a:rPr>
+              <a:t>sql</a:t>
+            </a:r>
+            <a:r>
+              <a:rPr lang="pt-BR" sz="1800" dirty="0">
+                <a:solidFill>
+                  <a:schemeClr val="tx1"/>
+                </a:solidFill>
+                <a:latin typeface="Times New Roman" panose="02020603050405020304" pitchFamily="18" charset="0"/>
+                <a:cs typeface="Times New Roman" panose="02020603050405020304" pitchFamily="18" charset="0"/>
+              </a:rPr>
+              <a:t>)</a:t>
+            </a:r>
+          </a:p>
+          <a:p>
+            <a:pPr marL="0" indent="0" algn="just">
+              <a:buNone/>
+            </a:pPr>
+            <a:r>
+              <a:rPr lang="pt-BR" sz="1800" dirty="0">
+                <a:solidFill>
+                  <a:schemeClr val="tx1"/>
+                </a:solidFill>
+                <a:latin typeface="Times New Roman" panose="02020603050405020304" pitchFamily="18" charset="0"/>
+                <a:cs typeface="Times New Roman" panose="02020603050405020304" pitchFamily="18" charset="0"/>
+              </a:rPr>
+              <a:t>linha</a:t>
+            </a:r>
+            <a:r>
+              <a:rPr lang="pt-BR" sz="1800" dirty="0">
+                <a:latin typeface="Times New Roman" panose="02020603050405020304" pitchFamily="18" charset="0"/>
+                <a:cs typeface="Times New Roman" panose="02020603050405020304" pitchFamily="18" charset="0"/>
+              </a:rPr>
+              <a:t>s</a:t>
+            </a:r>
+            <a:r>
+              <a:rPr lang="pt-BR" sz="1800" dirty="0">
+                <a:solidFill>
+                  <a:schemeClr val="tx1"/>
+                </a:solidFill>
+                <a:latin typeface="Times New Roman" panose="02020603050405020304" pitchFamily="18" charset="0"/>
+                <a:cs typeface="Times New Roman" panose="02020603050405020304" pitchFamily="18" charset="0"/>
+              </a:rPr>
+              <a:t> = </a:t>
+            </a:r>
+            <a:r>
+              <a:rPr lang="pt-BR" sz="1800" dirty="0" err="1">
+                <a:solidFill>
+                  <a:schemeClr val="tx1"/>
+                </a:solidFill>
+                <a:latin typeface="Times New Roman" panose="02020603050405020304" pitchFamily="18" charset="0"/>
+                <a:cs typeface="Times New Roman" panose="02020603050405020304" pitchFamily="18" charset="0"/>
+              </a:rPr>
+              <a:t>cursor.</a:t>
+            </a:r>
+            <a:r>
+              <a:rPr lang="pt-BR" sz="1800" b="1" dirty="0" err="1">
+                <a:solidFill>
+                  <a:srgbClr val="FF0000"/>
+                </a:solidFill>
+                <a:latin typeface="Times New Roman" panose="02020603050405020304" pitchFamily="18" charset="0"/>
+                <a:cs typeface="Times New Roman" panose="02020603050405020304" pitchFamily="18" charset="0"/>
+              </a:rPr>
+              <a:t>fetchall</a:t>
+            </a:r>
+            <a:r>
+              <a:rPr lang="pt-BR" sz="1800" dirty="0">
+                <a:solidFill>
+                  <a:schemeClr val="tx1"/>
+                </a:solidFill>
+                <a:latin typeface="Times New Roman" panose="02020603050405020304" pitchFamily="18" charset="0"/>
+                <a:cs typeface="Times New Roman" panose="02020603050405020304" pitchFamily="18" charset="0"/>
+              </a:rPr>
+              <a:t>()</a:t>
+            </a:r>
+          </a:p>
+          <a:p>
+            <a:pPr marL="0" indent="0" algn="just">
+              <a:buNone/>
+            </a:pPr>
+            <a:r>
+              <a:rPr lang="pt-BR" sz="1800" dirty="0">
+                <a:latin typeface="Times New Roman" panose="02020603050405020304" pitchFamily="18" charset="0"/>
+                <a:cs typeface="Times New Roman" panose="02020603050405020304" pitchFamily="18" charset="0"/>
+              </a:rPr>
+              <a:t>for linha in linhas:</a:t>
+            </a:r>
+          </a:p>
+          <a:p>
+            <a:pPr marL="0" indent="0" algn="just">
+              <a:buNone/>
+            </a:pPr>
+            <a:r>
+              <a:rPr lang="pt-BR" sz="1800" dirty="0">
+                <a:latin typeface="Times New Roman" panose="02020603050405020304" pitchFamily="18" charset="0"/>
+                <a:cs typeface="Times New Roman" panose="02020603050405020304" pitchFamily="18" charset="0"/>
+              </a:rPr>
+              <a:t>    print(linha)</a:t>
+            </a:r>
+          </a:p>
+          <a:p>
+            <a:pPr marL="0" indent="0" algn="just">
+              <a:buNone/>
+            </a:pPr>
+            <a:endParaRPr lang="pt-BR" sz="1800" dirty="0">
+              <a:latin typeface="Times New Roman" panose="02020603050405020304" pitchFamily="18" charset="0"/>
+              <a:cs typeface="Times New Roman" panose="02020603050405020304" pitchFamily="18" charset="0"/>
+            </a:endParaRPr>
+          </a:p>
+          <a:p>
+            <a:pPr marL="0" indent="0" algn="just">
+              <a:buNone/>
+            </a:pPr>
+            <a:r>
+              <a:rPr lang="pt-BR" sz="1800" dirty="0" err="1">
+                <a:latin typeface="Times New Roman" panose="02020603050405020304" pitchFamily="18" charset="0"/>
+                <a:cs typeface="Times New Roman" panose="02020603050405020304" pitchFamily="18" charset="0"/>
+              </a:rPr>
+              <a:t>cur.close</a:t>
+            </a:r>
+            <a:r>
+              <a:rPr lang="pt-BR" sz="1800" dirty="0">
+                <a:latin typeface="Times New Roman" panose="02020603050405020304" pitchFamily="18" charset="0"/>
+                <a:cs typeface="Times New Roman" panose="02020603050405020304" pitchFamily="18" charset="0"/>
+              </a:rPr>
+              <a:t>()</a:t>
+            </a:r>
+          </a:p>
+          <a:p>
+            <a:pPr marL="0" indent="0" algn="just">
+              <a:buNone/>
+            </a:pPr>
+            <a:r>
+              <a:rPr lang="pt-BR" sz="1800" dirty="0" err="1">
+                <a:latin typeface="Times New Roman" panose="02020603050405020304" pitchFamily="18" charset="0"/>
+                <a:cs typeface="Times New Roman" panose="02020603050405020304" pitchFamily="18" charset="0"/>
+              </a:rPr>
+              <a:t>conn.close</a:t>
+            </a:r>
+            <a:r>
+              <a:rPr lang="pt-BR" sz="1800" dirty="0">
+                <a:latin typeface="Times New Roman" panose="02020603050405020304" pitchFamily="18" charset="0"/>
+                <a:cs typeface="Times New Roman" panose="02020603050405020304" pitchFamily="18" charset="0"/>
+              </a:rPr>
+              <a:t>()</a:t>
+            </a:r>
+          </a:p>
+          <a:p>
+            <a:pPr marL="0" indent="0" algn="just">
+              <a:buNone/>
+            </a:pPr>
+            <a:r>
+              <a:rPr lang="pt-BR" sz="1800" dirty="0">
+                <a:latin typeface="Times New Roman" panose="02020603050405020304" pitchFamily="18" charset="0"/>
+                <a:cs typeface="Times New Roman" panose="02020603050405020304" pitchFamily="18" charset="0"/>
+              </a:rPr>
+              <a:t>print("Conexão encerrada")</a:t>
+            </a:r>
+            <a:endParaRPr lang="pt-BR" sz="1800" dirty="0">
               <a:solidFill>
                 <a:schemeClr val="tx1"/>
               </a:solidFill>
@@ -5911,348 +6823,12 @@
               <a:cs typeface="Times New Roman" panose="02020603050405020304" pitchFamily="18" charset="0"/>
             </a:endParaRPr>
           </a:p>
-          <a:p>
-            <a:pPr marL="0" indent="0" algn="just">
-              <a:buNone/>
-            </a:pPr>
-            <a:r>
-              <a:rPr lang="pt-BR" sz="2000" dirty="0" err="1">
-                <a:latin typeface="Times New Roman" panose="02020603050405020304" pitchFamily="18" charset="0"/>
-                <a:cs typeface="Times New Roman" panose="02020603050405020304" pitchFamily="18" charset="0"/>
-              </a:rPr>
-              <a:t>sql</a:t>
-            </a:r>
-            <a:r>
-              <a:rPr lang="pt-BR" sz="2000" dirty="0">
-                <a:latin typeface="Times New Roman" panose="02020603050405020304" pitchFamily="18" charset="0"/>
-                <a:cs typeface="Times New Roman" panose="02020603050405020304" pitchFamily="18" charset="0"/>
-              </a:rPr>
-              <a:t> = </a:t>
-            </a:r>
-            <a:r>
-              <a:rPr lang="pt-BR" sz="2000" b="1" dirty="0" err="1">
-                <a:solidFill>
-                  <a:srgbClr val="FF0000"/>
-                </a:solidFill>
-                <a:latin typeface="Times New Roman" panose="02020603050405020304" pitchFamily="18" charset="0"/>
-                <a:cs typeface="Times New Roman" panose="02020603050405020304" pitchFamily="18" charset="0"/>
-              </a:rPr>
-              <a:t>f</a:t>
-            </a:r>
-            <a:r>
-              <a:rPr lang="pt-BR" sz="2000" dirty="0" err="1">
-                <a:latin typeface="Times New Roman" panose="02020603050405020304" pitchFamily="18" charset="0"/>
-                <a:cs typeface="Times New Roman" panose="02020603050405020304" pitchFamily="18" charset="0"/>
-              </a:rPr>
-              <a:t>“</a:t>
-            </a:r>
-            <a:r>
-              <a:rPr lang="pt-BR" sz="2000" b="1" dirty="0" err="1">
-                <a:latin typeface="Times New Roman" panose="02020603050405020304" pitchFamily="18" charset="0"/>
-                <a:cs typeface="Times New Roman" panose="02020603050405020304" pitchFamily="18" charset="0"/>
-              </a:rPr>
-              <a:t>delete</a:t>
-            </a:r>
-            <a:r>
-              <a:rPr lang="pt-BR" sz="2000" dirty="0">
-                <a:latin typeface="Times New Roman" panose="02020603050405020304" pitchFamily="18" charset="0"/>
-                <a:cs typeface="Times New Roman" panose="02020603050405020304" pitchFamily="18" charset="0"/>
-              </a:rPr>
-              <a:t> </a:t>
-            </a:r>
-            <a:r>
-              <a:rPr lang="pt-BR" sz="2000" b="1" dirty="0" err="1">
-                <a:latin typeface="Times New Roman" panose="02020603050405020304" pitchFamily="18" charset="0"/>
-                <a:cs typeface="Times New Roman" panose="02020603050405020304" pitchFamily="18" charset="0"/>
-              </a:rPr>
-              <a:t>from</a:t>
-            </a:r>
-            <a:r>
-              <a:rPr lang="pt-BR" sz="2000" b="1" dirty="0">
-                <a:latin typeface="Times New Roman" panose="02020603050405020304" pitchFamily="18" charset="0"/>
-                <a:cs typeface="Times New Roman" panose="02020603050405020304" pitchFamily="18" charset="0"/>
-              </a:rPr>
-              <a:t> </a:t>
-            </a:r>
-            <a:r>
-              <a:rPr lang="pt-BR" sz="2000" dirty="0" err="1">
-                <a:latin typeface="Times New Roman" panose="02020603050405020304" pitchFamily="18" charset="0"/>
-                <a:cs typeface="Times New Roman" panose="02020603050405020304" pitchFamily="18" charset="0"/>
-              </a:rPr>
-              <a:t>department</a:t>
-            </a:r>
-            <a:r>
-              <a:rPr lang="pt-BR" sz="2000" dirty="0">
-                <a:latin typeface="Times New Roman" panose="02020603050405020304" pitchFamily="18" charset="0"/>
-                <a:cs typeface="Times New Roman" panose="02020603050405020304" pitchFamily="18" charset="0"/>
-              </a:rPr>
-              <a:t> </a:t>
-            </a:r>
-            <a:r>
-              <a:rPr lang="pt-BR" sz="2000" b="1" dirty="0" err="1">
-                <a:latin typeface="Times New Roman" panose="02020603050405020304" pitchFamily="18" charset="0"/>
-                <a:cs typeface="Times New Roman" panose="02020603050405020304" pitchFamily="18" charset="0"/>
-              </a:rPr>
-              <a:t>where</a:t>
-            </a:r>
-            <a:r>
-              <a:rPr lang="pt-BR" sz="2000" dirty="0">
-                <a:latin typeface="Times New Roman" panose="02020603050405020304" pitchFamily="18" charset="0"/>
-                <a:cs typeface="Times New Roman" panose="02020603050405020304" pitchFamily="18" charset="0"/>
-              </a:rPr>
-              <a:t> Id = {id}"</a:t>
-            </a:r>
-          </a:p>
-          <a:p>
-            <a:pPr marL="0" indent="0" algn="just">
-              <a:buNone/>
-            </a:pPr>
-            <a:r>
-              <a:rPr lang="pt-BR" sz="2000" dirty="0" err="1">
-                <a:latin typeface="Times New Roman" panose="02020603050405020304" pitchFamily="18" charset="0"/>
-                <a:cs typeface="Times New Roman" panose="02020603050405020304" pitchFamily="18" charset="0"/>
-              </a:rPr>
-              <a:t>cursor.</a:t>
-            </a:r>
-            <a:r>
-              <a:rPr lang="pt-BR" sz="2000" b="1" dirty="0" err="1">
-                <a:solidFill>
-                  <a:srgbClr val="FF0000"/>
-                </a:solidFill>
-                <a:latin typeface="Times New Roman" panose="02020603050405020304" pitchFamily="18" charset="0"/>
-                <a:cs typeface="Times New Roman" panose="02020603050405020304" pitchFamily="18" charset="0"/>
-              </a:rPr>
-              <a:t>execute</a:t>
-            </a:r>
-            <a:r>
-              <a:rPr lang="pt-BR" sz="2000" dirty="0">
-                <a:latin typeface="Times New Roman" panose="02020603050405020304" pitchFamily="18" charset="0"/>
-                <a:cs typeface="Times New Roman" panose="02020603050405020304" pitchFamily="18" charset="0"/>
-              </a:rPr>
-              <a:t>(</a:t>
-            </a:r>
-            <a:r>
-              <a:rPr lang="pt-BR" sz="2000" dirty="0" err="1">
-                <a:latin typeface="Times New Roman" panose="02020603050405020304" pitchFamily="18" charset="0"/>
-                <a:cs typeface="Times New Roman" panose="02020603050405020304" pitchFamily="18" charset="0"/>
-              </a:rPr>
-              <a:t>sql</a:t>
-            </a:r>
-            <a:r>
-              <a:rPr lang="pt-BR" sz="2000" dirty="0">
-                <a:latin typeface="Times New Roman" panose="02020603050405020304" pitchFamily="18" charset="0"/>
-                <a:cs typeface="Times New Roman" panose="02020603050405020304" pitchFamily="18" charset="0"/>
-              </a:rPr>
-              <a:t>)</a:t>
-            </a:r>
-          </a:p>
-          <a:p>
-            <a:pPr marL="0" indent="0" algn="just">
-              <a:buNone/>
-            </a:pPr>
-            <a:r>
-              <a:rPr lang="pt-BR" sz="2000" dirty="0">
-                <a:latin typeface="Times New Roman" panose="02020603050405020304" pitchFamily="18" charset="0"/>
-                <a:cs typeface="Times New Roman" panose="02020603050405020304" pitchFamily="18" charset="0"/>
-              </a:rPr>
-              <a:t>linha = </a:t>
-            </a:r>
-            <a:r>
-              <a:rPr lang="pt-BR" sz="2000" dirty="0" err="1">
-                <a:solidFill>
-                  <a:schemeClr val="tx1"/>
-                </a:solidFill>
-                <a:latin typeface="Times New Roman" panose="02020603050405020304" pitchFamily="18" charset="0"/>
-                <a:cs typeface="Times New Roman" panose="02020603050405020304" pitchFamily="18" charset="0"/>
-              </a:rPr>
-              <a:t>cursor.</a:t>
-            </a:r>
-            <a:r>
-              <a:rPr lang="pt-BR" sz="2000" b="1" dirty="0" err="1">
-                <a:solidFill>
-                  <a:srgbClr val="FF0000"/>
-                </a:solidFill>
-                <a:latin typeface="Times New Roman" panose="02020603050405020304" pitchFamily="18" charset="0"/>
-                <a:cs typeface="Times New Roman" panose="02020603050405020304" pitchFamily="18" charset="0"/>
-              </a:rPr>
-              <a:t>fetchone</a:t>
-            </a:r>
-            <a:r>
-              <a:rPr lang="pt-BR" sz="2000" dirty="0">
-                <a:solidFill>
-                  <a:schemeClr val="tx1"/>
-                </a:solidFill>
-                <a:latin typeface="Times New Roman" panose="02020603050405020304" pitchFamily="18" charset="0"/>
-                <a:cs typeface="Times New Roman" panose="02020603050405020304" pitchFamily="18" charset="0"/>
-              </a:rPr>
-              <a:t>()</a:t>
-            </a:r>
-          </a:p>
-          <a:p>
-            <a:pPr marL="0" indent="0" algn="just">
-              <a:buNone/>
-            </a:pPr>
-            <a:r>
-              <a:rPr lang="pt-BR" sz="2000" b="1" dirty="0" err="1">
-                <a:latin typeface="Times New Roman" panose="02020603050405020304" pitchFamily="18" charset="0"/>
-                <a:cs typeface="Times New Roman" panose="02020603050405020304" pitchFamily="18" charset="0"/>
-              </a:rPr>
-              <a:t>if</a:t>
-            </a:r>
-            <a:r>
-              <a:rPr lang="pt-BR" sz="2000" dirty="0">
-                <a:latin typeface="Times New Roman" panose="02020603050405020304" pitchFamily="18" charset="0"/>
-                <a:cs typeface="Times New Roman" panose="02020603050405020304" pitchFamily="18" charset="0"/>
-              </a:rPr>
-              <a:t> (linha != </a:t>
-            </a:r>
-            <a:r>
-              <a:rPr lang="pt-BR" sz="2000" b="1" dirty="0" err="1">
-                <a:latin typeface="Times New Roman" panose="02020603050405020304" pitchFamily="18" charset="0"/>
-                <a:cs typeface="Times New Roman" panose="02020603050405020304" pitchFamily="18" charset="0"/>
-              </a:rPr>
-              <a:t>None</a:t>
-            </a:r>
-            <a:r>
-              <a:rPr lang="pt-BR" sz="2000" dirty="0">
-                <a:latin typeface="Times New Roman" panose="02020603050405020304" pitchFamily="18" charset="0"/>
-                <a:cs typeface="Times New Roman" panose="02020603050405020304" pitchFamily="18" charset="0"/>
-              </a:rPr>
-              <a:t>): # ou </a:t>
-            </a:r>
-            <a:r>
-              <a:rPr lang="pt-BR" sz="2000" b="1" dirty="0" err="1">
-                <a:solidFill>
-                  <a:srgbClr val="FF0000"/>
-                </a:solidFill>
-                <a:latin typeface="Times New Roman" panose="02020603050405020304" pitchFamily="18" charset="0"/>
-                <a:cs typeface="Times New Roman" panose="02020603050405020304" pitchFamily="18" charset="0"/>
-              </a:rPr>
-              <a:t>linha.rowcount</a:t>
-            </a:r>
-            <a:r>
-              <a:rPr lang="pt-BR" sz="2000" b="1" dirty="0">
-                <a:solidFill>
-                  <a:srgbClr val="FF0000"/>
-                </a:solidFill>
-                <a:latin typeface="Times New Roman" panose="02020603050405020304" pitchFamily="18" charset="0"/>
-                <a:cs typeface="Times New Roman" panose="02020603050405020304" pitchFamily="18" charset="0"/>
-              </a:rPr>
-              <a:t> &gt; 0:</a:t>
-            </a:r>
-          </a:p>
-          <a:p>
-            <a:pPr marL="0" indent="0" algn="just">
-              <a:buNone/>
-            </a:pPr>
-            <a:r>
-              <a:rPr lang="pt-BR" sz="2000" dirty="0">
-                <a:latin typeface="Times New Roman" panose="02020603050405020304" pitchFamily="18" charset="0"/>
-                <a:cs typeface="Times New Roman" panose="02020603050405020304" pitchFamily="18" charset="0"/>
-              </a:rPr>
-              <a:t>    </a:t>
-            </a:r>
-            <a:r>
-              <a:rPr lang="pt-BR" sz="2000" dirty="0" err="1">
-                <a:latin typeface="Times New Roman" panose="02020603050405020304" pitchFamily="18" charset="0"/>
-                <a:cs typeface="Times New Roman" panose="02020603050405020304" pitchFamily="18" charset="0"/>
-              </a:rPr>
-              <a:t>conn.</a:t>
-            </a:r>
-            <a:r>
-              <a:rPr lang="pt-BR" sz="2000" b="1" dirty="0" err="1">
-                <a:solidFill>
-                  <a:srgbClr val="FF0000"/>
-                </a:solidFill>
-                <a:latin typeface="Times New Roman" panose="02020603050405020304" pitchFamily="18" charset="0"/>
-                <a:cs typeface="Times New Roman" panose="02020603050405020304" pitchFamily="18" charset="0"/>
-              </a:rPr>
-              <a:t>commit</a:t>
-            </a:r>
-            <a:r>
-              <a:rPr lang="pt-BR" sz="2000" dirty="0">
-                <a:latin typeface="Times New Roman" panose="02020603050405020304" pitchFamily="18" charset="0"/>
-                <a:cs typeface="Times New Roman" panose="02020603050405020304" pitchFamily="18" charset="0"/>
-              </a:rPr>
-              <a:t>()</a:t>
-            </a:r>
-          </a:p>
-          <a:p>
-            <a:pPr marL="0" indent="0" algn="just">
-              <a:buNone/>
-            </a:pPr>
-            <a:r>
-              <a:rPr lang="pt-BR" sz="2000" b="1" dirty="0">
-                <a:latin typeface="Times New Roman" panose="02020603050405020304" pitchFamily="18" charset="0"/>
-                <a:cs typeface="Times New Roman" panose="02020603050405020304" pitchFamily="18" charset="0"/>
-              </a:rPr>
-              <a:t>    print</a:t>
-            </a:r>
-            <a:r>
-              <a:rPr lang="pt-BR" sz="2000" dirty="0">
-                <a:latin typeface="Times New Roman" panose="02020603050405020304" pitchFamily="18" charset="0"/>
-                <a:cs typeface="Times New Roman" panose="02020603050405020304" pitchFamily="18" charset="0"/>
-              </a:rPr>
-              <a:t>(“Excluído com sucesso")</a:t>
-            </a:r>
-          </a:p>
-          <a:p>
-            <a:pPr marL="0" indent="0" algn="just">
-              <a:buNone/>
-            </a:pPr>
-            <a:r>
-              <a:rPr lang="pt-BR" sz="2000" b="1" dirty="0" err="1">
-                <a:solidFill>
-                  <a:schemeClr val="tx1"/>
-                </a:solidFill>
-                <a:latin typeface="Times New Roman" panose="02020603050405020304" pitchFamily="18" charset="0"/>
-                <a:cs typeface="Times New Roman" panose="02020603050405020304" pitchFamily="18" charset="0"/>
-              </a:rPr>
-              <a:t>else</a:t>
-            </a:r>
-            <a:r>
-              <a:rPr lang="pt-BR" sz="2000" dirty="0">
-                <a:solidFill>
-                  <a:schemeClr val="tx1"/>
-                </a:solidFill>
-                <a:latin typeface="Times New Roman" panose="02020603050405020304" pitchFamily="18" charset="0"/>
-                <a:cs typeface="Times New Roman" panose="02020603050405020304" pitchFamily="18" charset="0"/>
-              </a:rPr>
-              <a:t>:</a:t>
-            </a:r>
-          </a:p>
-          <a:p>
-            <a:pPr marL="0" indent="0" algn="just">
-              <a:buNone/>
-            </a:pPr>
-            <a:r>
-              <a:rPr lang="pt-BR" sz="2000" b="1" dirty="0">
-                <a:latin typeface="Times New Roman" panose="02020603050405020304" pitchFamily="18" charset="0"/>
-                <a:cs typeface="Times New Roman" panose="02020603050405020304" pitchFamily="18" charset="0"/>
-              </a:rPr>
-              <a:t>    print</a:t>
-            </a:r>
-            <a:r>
-              <a:rPr lang="pt-BR" sz="2000" dirty="0">
-                <a:latin typeface="Times New Roman" panose="02020603050405020304" pitchFamily="18" charset="0"/>
-                <a:cs typeface="Times New Roman" panose="02020603050405020304" pitchFamily="18" charset="0"/>
-              </a:rPr>
-              <a:t>(“Registro não encontrado!!!")</a:t>
-            </a:r>
-            <a:endParaRPr lang="pt-BR" sz="2000" dirty="0">
-              <a:solidFill>
-                <a:schemeClr val="tx1"/>
-              </a:solidFill>
-              <a:latin typeface="Times New Roman" panose="02020603050405020304" pitchFamily="18" charset="0"/>
-              <a:cs typeface="Times New Roman" panose="02020603050405020304" pitchFamily="18" charset="0"/>
-            </a:endParaRPr>
-          </a:p>
         </p:txBody>
       </p:sp>
     </p:spTree>
     <p:extLst>
       <p:ext uri="{BB962C8B-B14F-4D97-AF65-F5344CB8AC3E}">
-        <p14:creationId xmlns:p14="http://schemas.microsoft.com/office/powerpoint/2010/main" val="4223033648"/>
+        <p14:creationId xmlns:p14="http://schemas.microsoft.com/office/powerpoint/2010/main" val="484425744"/>
       </p:ext>
     </p:extLst>
   </p:cSld>
@@ -6264,6 +6840,2587 @@
 </file>
 
 <file path=ppt/slides/slide12.xml><?xml version="1.0" encoding="utf-8"?>
+<p:sld xmlns:a="http://schemas.openxmlformats.org/drawingml/2006/main" xmlns:r="http://schemas.openxmlformats.org/officeDocument/2006/relationships" xmlns:p="http://schemas.openxmlformats.org/presentationml/2006/main">
+  <p:cSld>
+    <p:spTree>
+      <p:nvGrpSpPr>
+        <p:cNvPr id="1" name="">
+          <a:extLst>
+            <a:ext uri="{FF2B5EF4-FFF2-40B4-BE49-F238E27FC236}">
+              <a16:creationId xmlns:a16="http://schemas.microsoft.com/office/drawing/2014/main" id="{662FE367-EA20-08B6-FDE7-40466FDA8426}"/>
+            </a:ext>
+          </a:extLst>
+        </p:cNvPr>
+        <p:cNvGrpSpPr/>
+        <p:nvPr/>
+      </p:nvGrpSpPr>
+      <p:grpSpPr>
+        <a:xfrm>
+          <a:off x="0" y="0"/>
+          <a:ext cx="0" cy="0"/>
+          <a:chOff x="0" y="0"/>
+          <a:chExt cx="0" cy="0"/>
+        </a:xfrm>
+      </p:grpSpPr>
+      <p:sp>
+        <p:nvSpPr>
+          <p:cNvPr id="6" name="Title 1">
+            <a:extLst>
+              <a:ext uri="{FF2B5EF4-FFF2-40B4-BE49-F238E27FC236}">
+                <a16:creationId xmlns:a16="http://schemas.microsoft.com/office/drawing/2014/main" id="{B0C80CB6-1AA7-A0A9-0FA0-BEEB62D84F40}"/>
+              </a:ext>
+            </a:extLst>
+          </p:cNvPr>
+          <p:cNvSpPr>
+            <a:spLocks noGrp="1"/>
+          </p:cNvSpPr>
+          <p:nvPr>
+            <p:ph type="title"/>
+          </p:nvPr>
+        </p:nvSpPr>
+        <p:spPr>
+          <a:xfrm>
+            <a:off x="237995" y="265188"/>
+            <a:ext cx="8763140" cy="596760"/>
+          </a:xfrm>
+        </p:spPr>
+        <p:txBody>
+          <a:bodyPr>
+            <a:normAutofit/>
+          </a:bodyPr>
+          <a:lstStyle/>
+          <a:p>
+            <a:pPr algn="ctr"/>
+            <a:r>
+              <a:rPr lang="en-US" b="1" dirty="0">
+                <a:solidFill>
+                  <a:srgbClr val="0070C0"/>
+                </a:solidFill>
+              </a:rPr>
+              <a:t>Python – BD </a:t>
+            </a:r>
+            <a:r>
+              <a:rPr lang="en-US" b="1" dirty="0" err="1">
+                <a:solidFill>
+                  <a:srgbClr val="0070C0"/>
+                </a:solidFill>
+              </a:rPr>
+              <a:t>postgresql</a:t>
+            </a:r>
+            <a:r>
+              <a:rPr lang="en-US" b="1" dirty="0">
+                <a:solidFill>
+                  <a:srgbClr val="0070C0"/>
+                </a:solidFill>
+              </a:rPr>
+              <a:t> - </a:t>
+            </a:r>
+            <a:r>
+              <a:rPr lang="en-US" b="1" dirty="0" err="1">
+                <a:solidFill>
+                  <a:srgbClr val="0070C0"/>
+                </a:solidFill>
+              </a:rPr>
+              <a:t>Conexão</a:t>
+            </a:r>
+            <a:endParaRPr lang="en-US" b="1" dirty="0">
+              <a:solidFill>
+                <a:srgbClr val="0070C0"/>
+              </a:solidFill>
+            </a:endParaRPr>
+          </a:p>
+        </p:txBody>
+      </p:sp>
+      <p:sp>
+        <p:nvSpPr>
+          <p:cNvPr id="8" name="Text Placeholder 2">
+            <a:extLst>
+              <a:ext uri="{FF2B5EF4-FFF2-40B4-BE49-F238E27FC236}">
+                <a16:creationId xmlns:a16="http://schemas.microsoft.com/office/drawing/2014/main" id="{43B8CF4A-CDD2-F064-4364-7F6ADAD94737}"/>
+              </a:ext>
+            </a:extLst>
+          </p:cNvPr>
+          <p:cNvSpPr>
+            <a:spLocks noGrp="1"/>
+          </p:cNvSpPr>
+          <p:nvPr>
+            <p:ph type="body" sz="half" idx="1"/>
+          </p:nvPr>
+        </p:nvSpPr>
+        <p:spPr>
+          <a:xfrm>
+            <a:off x="142865" y="836895"/>
+            <a:ext cx="8865056" cy="4160989"/>
+          </a:xfrm>
+        </p:spPr>
+        <p:txBody>
+          <a:bodyPr>
+            <a:noAutofit/>
+          </a:bodyPr>
+          <a:lstStyle/>
+          <a:p>
+            <a:pPr marL="0" indent="0" algn="just">
+              <a:buNone/>
+            </a:pPr>
+            <a:r>
+              <a:rPr lang="pt-BR" sz="1600" b="1" dirty="0">
+                <a:latin typeface="Times New Roman" panose="02020603050405020304" pitchFamily="18" charset="0"/>
+                <a:cs typeface="Times New Roman" panose="02020603050405020304" pitchFamily="18" charset="0"/>
+              </a:rPr>
+              <a:t>!</a:t>
+            </a:r>
+            <a:r>
+              <a:rPr lang="pt-BR" sz="1600" b="1" dirty="0" err="1">
+                <a:latin typeface="Times New Roman" panose="02020603050405020304" pitchFamily="18" charset="0"/>
+                <a:cs typeface="Times New Roman" panose="02020603050405020304" pitchFamily="18" charset="0"/>
+              </a:rPr>
+              <a:t>pip</a:t>
+            </a:r>
+            <a:r>
+              <a:rPr lang="pt-BR" sz="1600" b="1" dirty="0">
+                <a:latin typeface="Times New Roman" panose="02020603050405020304" pitchFamily="18" charset="0"/>
+                <a:cs typeface="Times New Roman" panose="02020603050405020304" pitchFamily="18" charset="0"/>
+              </a:rPr>
+              <a:t> </a:t>
+            </a:r>
+            <a:r>
+              <a:rPr lang="pt-BR" sz="1600" b="1" dirty="0" err="1">
+                <a:latin typeface="Times New Roman" panose="02020603050405020304" pitchFamily="18" charset="0"/>
+                <a:cs typeface="Times New Roman" panose="02020603050405020304" pitchFamily="18" charset="0"/>
+              </a:rPr>
+              <a:t>install</a:t>
+            </a:r>
+            <a:r>
+              <a:rPr lang="pt-BR" sz="1600" b="1" dirty="0">
+                <a:solidFill>
+                  <a:srgbClr val="FF0000"/>
+                </a:solidFill>
+                <a:latin typeface="Times New Roman" panose="02020603050405020304" pitchFamily="18" charset="0"/>
+                <a:cs typeface="Times New Roman" panose="02020603050405020304" pitchFamily="18" charset="0"/>
+              </a:rPr>
+              <a:t> psycopg2-binary</a:t>
+            </a:r>
+          </a:p>
+          <a:p>
+            <a:pPr marL="0" indent="0" algn="just">
+              <a:buNone/>
+            </a:pPr>
+            <a:r>
+              <a:rPr lang="pt-BR" sz="1600" b="1" dirty="0" err="1">
+                <a:latin typeface="Times New Roman" panose="02020603050405020304" pitchFamily="18" charset="0"/>
+                <a:cs typeface="Times New Roman" panose="02020603050405020304" pitchFamily="18" charset="0"/>
+              </a:rPr>
+              <a:t>import</a:t>
+            </a:r>
+            <a:r>
+              <a:rPr lang="pt-BR" sz="1600" b="1" dirty="0">
+                <a:latin typeface="Times New Roman" panose="02020603050405020304" pitchFamily="18" charset="0"/>
+                <a:cs typeface="Times New Roman" panose="02020603050405020304" pitchFamily="18" charset="0"/>
+              </a:rPr>
+              <a:t> </a:t>
+            </a:r>
+            <a:r>
+              <a:rPr lang="pt-BR" sz="1600" b="1" dirty="0">
+                <a:solidFill>
+                  <a:srgbClr val="FF0000"/>
+                </a:solidFill>
+                <a:latin typeface="Times New Roman" panose="02020603050405020304" pitchFamily="18" charset="0"/>
+                <a:cs typeface="Times New Roman" panose="02020603050405020304" pitchFamily="18" charset="0"/>
+              </a:rPr>
+              <a:t>psycopg2</a:t>
+            </a:r>
+          </a:p>
+          <a:p>
+            <a:pPr marL="0" indent="0" algn="just">
+              <a:buNone/>
+            </a:pPr>
+            <a:r>
+              <a:rPr lang="pt-BR" sz="1600" b="1" dirty="0" err="1">
+                <a:latin typeface="Times New Roman" panose="02020603050405020304" pitchFamily="18" charset="0"/>
+                <a:cs typeface="Times New Roman" panose="02020603050405020304" pitchFamily="18" charset="0"/>
+              </a:rPr>
+              <a:t>conn</a:t>
+            </a:r>
+            <a:r>
+              <a:rPr lang="pt-BR" sz="1600" b="1" dirty="0">
+                <a:latin typeface="Times New Roman" panose="02020603050405020304" pitchFamily="18" charset="0"/>
+                <a:cs typeface="Times New Roman" panose="02020603050405020304" pitchFamily="18" charset="0"/>
+              </a:rPr>
+              <a:t> = </a:t>
+            </a:r>
+            <a:r>
+              <a:rPr lang="pt-BR" sz="1600" b="1" dirty="0">
+                <a:solidFill>
+                  <a:srgbClr val="FF0000"/>
+                </a:solidFill>
+                <a:latin typeface="Times New Roman" panose="02020603050405020304" pitchFamily="18" charset="0"/>
+                <a:cs typeface="Times New Roman" panose="02020603050405020304" pitchFamily="18" charset="0"/>
+              </a:rPr>
+              <a:t>psycopg2</a:t>
+            </a:r>
+            <a:r>
+              <a:rPr lang="pt-BR" sz="1600" dirty="0">
+                <a:latin typeface="Times New Roman" panose="02020603050405020304" pitchFamily="18" charset="0"/>
+                <a:cs typeface="Times New Roman" panose="02020603050405020304" pitchFamily="18" charset="0"/>
+              </a:rPr>
+              <a:t>.connect(</a:t>
+            </a:r>
+          </a:p>
+          <a:p>
+            <a:pPr marL="0" indent="0" algn="just">
+              <a:buNone/>
+            </a:pPr>
+            <a:r>
+              <a:rPr lang="pt-BR" sz="1600" dirty="0">
+                <a:latin typeface="Times New Roman" panose="02020603050405020304" pitchFamily="18" charset="0"/>
+                <a:cs typeface="Times New Roman" panose="02020603050405020304" pitchFamily="18" charset="0"/>
+              </a:rPr>
+              <a:t>"</a:t>
+            </a:r>
+            <a:r>
+              <a:rPr lang="pt-BR" sz="1600" dirty="0" err="1">
+                <a:latin typeface="Times New Roman" panose="02020603050405020304" pitchFamily="18" charset="0"/>
+                <a:cs typeface="Times New Roman" panose="02020603050405020304" pitchFamily="18" charset="0"/>
+              </a:rPr>
+              <a:t>postgresql</a:t>
+            </a:r>
+            <a:r>
+              <a:rPr lang="pt-BR" sz="1600" dirty="0">
+                <a:latin typeface="Times New Roman" panose="02020603050405020304" pitchFamily="18" charset="0"/>
+                <a:cs typeface="Times New Roman" panose="02020603050405020304" pitchFamily="18" charset="0"/>
+              </a:rPr>
+              <a:t>://postgres:vkDRoYCjStLYzdFluJWHnQmGdtDLWCKR@switchback.proxy.rlwy.net:37985/railway"</a:t>
+            </a:r>
+          </a:p>
+          <a:p>
+            <a:pPr marL="0" indent="0" algn="just">
+              <a:buNone/>
+            </a:pPr>
+            <a:r>
+              <a:rPr lang="pt-BR" sz="1600" b="1" dirty="0">
+                <a:latin typeface="Times New Roman" panose="02020603050405020304" pitchFamily="18" charset="0"/>
+                <a:cs typeface="Times New Roman" panose="02020603050405020304" pitchFamily="18" charset="0"/>
+              </a:rPr>
+              <a:t>)</a:t>
+            </a:r>
+          </a:p>
+          <a:p>
+            <a:pPr marL="0" indent="0" algn="just">
+              <a:buNone/>
+            </a:pPr>
+            <a:r>
+              <a:rPr lang="pt-BR" sz="1600" dirty="0" err="1">
+                <a:latin typeface="Times New Roman" panose="02020603050405020304" pitchFamily="18" charset="0"/>
+                <a:cs typeface="Times New Roman" panose="02020603050405020304" pitchFamily="18" charset="0"/>
+              </a:rPr>
+              <a:t>cur</a:t>
+            </a:r>
+            <a:r>
+              <a:rPr lang="pt-BR" sz="1600" dirty="0">
+                <a:latin typeface="Times New Roman" panose="02020603050405020304" pitchFamily="18" charset="0"/>
+                <a:cs typeface="Times New Roman" panose="02020603050405020304" pitchFamily="18" charset="0"/>
+              </a:rPr>
+              <a:t> = </a:t>
+            </a:r>
+            <a:r>
+              <a:rPr lang="pt-BR" sz="1600" b="1" dirty="0" err="1">
+                <a:latin typeface="Times New Roman" panose="02020603050405020304" pitchFamily="18" charset="0"/>
+                <a:cs typeface="Times New Roman" panose="02020603050405020304" pitchFamily="18" charset="0"/>
+              </a:rPr>
+              <a:t>conn</a:t>
+            </a:r>
+            <a:r>
+              <a:rPr lang="pt-BR" sz="1600" dirty="0" err="1">
+                <a:latin typeface="Times New Roman" panose="02020603050405020304" pitchFamily="18" charset="0"/>
+                <a:cs typeface="Times New Roman" panose="02020603050405020304" pitchFamily="18" charset="0"/>
+              </a:rPr>
+              <a:t>.cursor</a:t>
+            </a:r>
+            <a:r>
+              <a:rPr lang="pt-BR" sz="1600" dirty="0">
+                <a:latin typeface="Times New Roman" panose="02020603050405020304" pitchFamily="18" charset="0"/>
+                <a:cs typeface="Times New Roman" panose="02020603050405020304" pitchFamily="18" charset="0"/>
+              </a:rPr>
+              <a:t>()</a:t>
+            </a:r>
+          </a:p>
+          <a:p>
+            <a:pPr marL="0" indent="0" algn="just">
+              <a:buNone/>
+            </a:pPr>
+            <a:r>
+              <a:rPr lang="pt-BR" sz="1600" dirty="0" err="1">
+                <a:latin typeface="Times New Roman" panose="02020603050405020304" pitchFamily="18" charset="0"/>
+                <a:cs typeface="Times New Roman" panose="02020603050405020304" pitchFamily="18" charset="0"/>
+              </a:rPr>
+              <a:t>cur.execute</a:t>
+            </a:r>
+            <a:r>
+              <a:rPr lang="pt-BR" sz="1600" dirty="0">
+                <a:latin typeface="Times New Roman" panose="02020603050405020304" pitchFamily="18" charset="0"/>
+                <a:cs typeface="Times New Roman" panose="02020603050405020304" pitchFamily="18" charset="0"/>
+              </a:rPr>
+              <a:t>("SELECT </a:t>
+            </a:r>
+            <a:r>
+              <a:rPr lang="pt-BR" sz="1600" dirty="0" err="1">
+                <a:latin typeface="Times New Roman" panose="02020603050405020304" pitchFamily="18" charset="0"/>
+                <a:cs typeface="Times New Roman" panose="02020603050405020304" pitchFamily="18" charset="0"/>
+              </a:rPr>
+              <a:t>version</a:t>
+            </a:r>
+            <a:r>
+              <a:rPr lang="pt-BR" sz="1600" dirty="0">
+                <a:latin typeface="Times New Roman" panose="02020603050405020304" pitchFamily="18" charset="0"/>
+                <a:cs typeface="Times New Roman" panose="02020603050405020304" pitchFamily="18" charset="0"/>
+              </a:rPr>
+              <a:t>();")</a:t>
+            </a:r>
+          </a:p>
+          <a:p>
+            <a:pPr marL="0" indent="0" algn="just">
+              <a:buNone/>
+            </a:pPr>
+            <a:r>
+              <a:rPr lang="pt-BR" sz="1600" dirty="0">
+                <a:latin typeface="Times New Roman" panose="02020603050405020304" pitchFamily="18" charset="0"/>
+                <a:cs typeface="Times New Roman" panose="02020603050405020304" pitchFamily="18" charset="0"/>
+              </a:rPr>
+              <a:t>print(</a:t>
+            </a:r>
+            <a:r>
+              <a:rPr lang="pt-BR" sz="1600" dirty="0" err="1">
+                <a:latin typeface="Times New Roman" panose="02020603050405020304" pitchFamily="18" charset="0"/>
+                <a:cs typeface="Times New Roman" panose="02020603050405020304" pitchFamily="18" charset="0"/>
+              </a:rPr>
+              <a:t>cur.fetchone</a:t>
+            </a:r>
+            <a:r>
+              <a:rPr lang="pt-BR" sz="1600" dirty="0">
+                <a:latin typeface="Times New Roman" panose="02020603050405020304" pitchFamily="18" charset="0"/>
+                <a:cs typeface="Times New Roman" panose="02020603050405020304" pitchFamily="18" charset="0"/>
+              </a:rPr>
+              <a:t>())</a:t>
+            </a:r>
+          </a:p>
+          <a:p>
+            <a:pPr marL="0" indent="0" algn="just">
+              <a:buNone/>
+            </a:pPr>
+            <a:r>
+              <a:rPr lang="pt-BR" sz="1600" dirty="0" err="1">
+                <a:latin typeface="Times New Roman" panose="02020603050405020304" pitchFamily="18" charset="0"/>
+                <a:cs typeface="Times New Roman" panose="02020603050405020304" pitchFamily="18" charset="0"/>
+              </a:rPr>
+              <a:t>cur.close</a:t>
+            </a:r>
+            <a:r>
+              <a:rPr lang="pt-BR" sz="1600" dirty="0">
+                <a:latin typeface="Times New Roman" panose="02020603050405020304" pitchFamily="18" charset="0"/>
+                <a:cs typeface="Times New Roman" panose="02020603050405020304" pitchFamily="18" charset="0"/>
+              </a:rPr>
+              <a:t>()</a:t>
+            </a:r>
+          </a:p>
+          <a:p>
+            <a:pPr marL="0" indent="0" algn="just">
+              <a:buNone/>
+            </a:pPr>
+            <a:r>
+              <a:rPr lang="pt-BR" sz="1600" dirty="0" err="1">
+                <a:latin typeface="Times New Roman" panose="02020603050405020304" pitchFamily="18" charset="0"/>
+                <a:cs typeface="Times New Roman" panose="02020603050405020304" pitchFamily="18" charset="0"/>
+              </a:rPr>
+              <a:t>conn.close</a:t>
+            </a:r>
+            <a:r>
+              <a:rPr lang="pt-BR" sz="1600" dirty="0">
+                <a:latin typeface="Times New Roman" panose="02020603050405020304" pitchFamily="18" charset="0"/>
+                <a:cs typeface="Times New Roman" panose="02020603050405020304" pitchFamily="18" charset="0"/>
+              </a:rPr>
+              <a:t>()</a:t>
+            </a:r>
+            <a:endParaRPr lang="pt-BR" sz="1600" dirty="0">
+              <a:solidFill>
+                <a:schemeClr val="tx1"/>
+              </a:solidFill>
+              <a:latin typeface="Times New Roman" panose="02020603050405020304" pitchFamily="18" charset="0"/>
+              <a:cs typeface="Times New Roman" panose="02020603050405020304" pitchFamily="18" charset="0"/>
+            </a:endParaRPr>
+          </a:p>
+        </p:txBody>
+      </p:sp>
+    </p:spTree>
+    <p:extLst>
+      <p:ext uri="{BB962C8B-B14F-4D97-AF65-F5344CB8AC3E}">
+        <p14:creationId xmlns:p14="http://schemas.microsoft.com/office/powerpoint/2010/main" val="2806504454"/>
+      </p:ext>
+    </p:extLst>
+  </p:cSld>
+  <p:clrMapOvr>
+    <a:masterClrMapping/>
+  </p:clrMapOvr>
+  <p:transition spd="med"/>
+</p:sld>
+</file>
+
+<file path=ppt/slides/slide13.xml><?xml version="1.0" encoding="utf-8"?>
+<p:sld xmlns:a="http://schemas.openxmlformats.org/drawingml/2006/main" xmlns:r="http://schemas.openxmlformats.org/officeDocument/2006/relationships" xmlns:p="http://schemas.openxmlformats.org/presentationml/2006/main">
+  <p:cSld>
+    <p:spTree>
+      <p:nvGrpSpPr>
+        <p:cNvPr id="1" name="">
+          <a:extLst>
+            <a:ext uri="{FF2B5EF4-FFF2-40B4-BE49-F238E27FC236}">
+              <a16:creationId xmlns:a16="http://schemas.microsoft.com/office/drawing/2014/main" id="{423943AD-F7F8-94AA-A227-2D2C7CFB44A1}"/>
+            </a:ext>
+          </a:extLst>
+        </p:cNvPr>
+        <p:cNvGrpSpPr/>
+        <p:nvPr/>
+      </p:nvGrpSpPr>
+      <p:grpSpPr>
+        <a:xfrm>
+          <a:off x="0" y="0"/>
+          <a:ext cx="0" cy="0"/>
+          <a:chOff x="0" y="0"/>
+          <a:chExt cx="0" cy="0"/>
+        </a:xfrm>
+      </p:grpSpPr>
+      <p:sp>
+        <p:nvSpPr>
+          <p:cNvPr id="6" name="Title 1">
+            <a:extLst>
+              <a:ext uri="{FF2B5EF4-FFF2-40B4-BE49-F238E27FC236}">
+                <a16:creationId xmlns:a16="http://schemas.microsoft.com/office/drawing/2014/main" id="{2392C283-CE4C-33CC-4390-E28B5FCDB12F}"/>
+              </a:ext>
+            </a:extLst>
+          </p:cNvPr>
+          <p:cNvSpPr>
+            <a:spLocks noGrp="1"/>
+          </p:cNvSpPr>
+          <p:nvPr>
+            <p:ph type="title"/>
+          </p:nvPr>
+        </p:nvSpPr>
+        <p:spPr>
+          <a:xfrm>
+            <a:off x="237995" y="265188"/>
+            <a:ext cx="8763140" cy="596760"/>
+          </a:xfrm>
+        </p:spPr>
+        <p:txBody>
+          <a:bodyPr>
+            <a:normAutofit/>
+          </a:bodyPr>
+          <a:lstStyle/>
+          <a:p>
+            <a:pPr algn="ctr"/>
+            <a:r>
+              <a:rPr lang="en-US" b="1" dirty="0">
+                <a:solidFill>
+                  <a:srgbClr val="0070C0"/>
+                </a:solidFill>
+              </a:rPr>
+              <a:t>Python – bd </a:t>
+            </a:r>
+            <a:r>
+              <a:rPr lang="en-US" b="1" dirty="0" err="1">
+                <a:solidFill>
+                  <a:srgbClr val="0070C0"/>
+                </a:solidFill>
+              </a:rPr>
+              <a:t>postgresql</a:t>
+            </a:r>
+            <a:r>
+              <a:rPr lang="en-US" b="1" dirty="0">
+                <a:solidFill>
+                  <a:srgbClr val="0070C0"/>
+                </a:solidFill>
+              </a:rPr>
+              <a:t> – SELECT bd</a:t>
+            </a:r>
+          </a:p>
+        </p:txBody>
+      </p:sp>
+      <p:sp>
+        <p:nvSpPr>
+          <p:cNvPr id="8" name="Text Placeholder 2">
+            <a:extLst>
+              <a:ext uri="{FF2B5EF4-FFF2-40B4-BE49-F238E27FC236}">
+                <a16:creationId xmlns:a16="http://schemas.microsoft.com/office/drawing/2014/main" id="{9EF3C99C-CABF-1837-BECF-877D8359AFF9}"/>
+              </a:ext>
+            </a:extLst>
+          </p:cNvPr>
+          <p:cNvSpPr>
+            <a:spLocks noGrp="1"/>
+          </p:cNvSpPr>
+          <p:nvPr>
+            <p:ph type="body" sz="half" idx="1"/>
+          </p:nvPr>
+        </p:nvSpPr>
+        <p:spPr>
+          <a:xfrm>
+            <a:off x="142865" y="836895"/>
+            <a:ext cx="8865056" cy="4160989"/>
+          </a:xfrm>
+        </p:spPr>
+        <p:txBody>
+          <a:bodyPr>
+            <a:noAutofit/>
+          </a:bodyPr>
+          <a:lstStyle/>
+          <a:p>
+            <a:pPr marL="0" indent="0" algn="just">
+              <a:buNone/>
+            </a:pPr>
+            <a:r>
+              <a:rPr lang="pt-BR" sz="1600" b="1" dirty="0" err="1">
+                <a:latin typeface="Times New Roman" panose="02020603050405020304" pitchFamily="18" charset="0"/>
+                <a:cs typeface="Times New Roman" panose="02020603050405020304" pitchFamily="18" charset="0"/>
+              </a:rPr>
+              <a:t>conn</a:t>
+            </a:r>
+            <a:r>
+              <a:rPr lang="pt-BR" sz="1600" dirty="0">
+                <a:latin typeface="Times New Roman" panose="02020603050405020304" pitchFamily="18" charset="0"/>
+                <a:cs typeface="Times New Roman" panose="02020603050405020304" pitchFamily="18" charset="0"/>
+              </a:rPr>
+              <a:t> = </a:t>
+            </a:r>
+            <a:r>
+              <a:rPr lang="pt-BR" sz="1600" b="1" dirty="0">
+                <a:solidFill>
+                  <a:srgbClr val="FF0000"/>
+                </a:solidFill>
+                <a:latin typeface="Times New Roman" panose="02020603050405020304" pitchFamily="18" charset="0"/>
+                <a:cs typeface="Times New Roman" panose="02020603050405020304" pitchFamily="18" charset="0"/>
+              </a:rPr>
+              <a:t>psycopg2</a:t>
+            </a:r>
+            <a:r>
+              <a:rPr lang="pt-BR" sz="1600" dirty="0">
+                <a:latin typeface="Times New Roman" panose="02020603050405020304" pitchFamily="18" charset="0"/>
+                <a:cs typeface="Times New Roman" panose="02020603050405020304" pitchFamily="18" charset="0"/>
+              </a:rPr>
+              <a:t>.connect(</a:t>
+            </a:r>
+          </a:p>
+          <a:p>
+            <a:pPr marL="0" indent="0" algn="just">
+              <a:buNone/>
+            </a:pPr>
+            <a:r>
+              <a:rPr lang="pt-BR" sz="1600" dirty="0">
+                <a:latin typeface="Times New Roman" panose="02020603050405020304" pitchFamily="18" charset="0"/>
+                <a:cs typeface="Times New Roman" panose="02020603050405020304" pitchFamily="18" charset="0"/>
+              </a:rPr>
+              <a:t> " substituir pela </a:t>
+            </a:r>
+            <a:r>
+              <a:rPr lang="pt-BR" sz="1600" dirty="0" err="1">
+                <a:latin typeface="Times New Roman" panose="02020603050405020304" pitchFamily="18" charset="0"/>
+                <a:cs typeface="Times New Roman" panose="02020603050405020304" pitchFamily="18" charset="0"/>
+              </a:rPr>
+              <a:t>string</a:t>
+            </a:r>
+            <a:r>
+              <a:rPr lang="pt-BR" sz="1600" dirty="0">
+                <a:latin typeface="Times New Roman" panose="02020603050405020304" pitchFamily="18" charset="0"/>
+                <a:cs typeface="Times New Roman" panose="02020603050405020304" pitchFamily="18" charset="0"/>
+              </a:rPr>
+              <a:t> de conexão"</a:t>
+            </a:r>
+          </a:p>
+          <a:p>
+            <a:pPr marL="0" indent="0" algn="just">
+              <a:buNone/>
+            </a:pPr>
+            <a:r>
+              <a:rPr lang="pt-BR" sz="1600" dirty="0">
+                <a:latin typeface="Times New Roman" panose="02020603050405020304" pitchFamily="18" charset="0"/>
+                <a:cs typeface="Times New Roman" panose="02020603050405020304" pitchFamily="18" charset="0"/>
+              </a:rPr>
+              <a:t>)</a:t>
+            </a:r>
+          </a:p>
+          <a:p>
+            <a:pPr marL="0" indent="0" algn="just">
+              <a:buNone/>
+            </a:pPr>
+            <a:r>
+              <a:rPr lang="pt-BR" sz="1600" dirty="0" err="1">
+                <a:latin typeface="Times New Roman" panose="02020603050405020304" pitchFamily="18" charset="0"/>
+                <a:cs typeface="Times New Roman" panose="02020603050405020304" pitchFamily="18" charset="0"/>
+              </a:rPr>
+              <a:t>cur</a:t>
+            </a:r>
+            <a:r>
+              <a:rPr lang="pt-BR" sz="1600" dirty="0">
+                <a:latin typeface="Times New Roman" panose="02020603050405020304" pitchFamily="18" charset="0"/>
+                <a:cs typeface="Times New Roman" panose="02020603050405020304" pitchFamily="18" charset="0"/>
+              </a:rPr>
+              <a:t> = </a:t>
+            </a:r>
+            <a:r>
+              <a:rPr lang="pt-BR" sz="1600" b="1" dirty="0" err="1">
+                <a:latin typeface="Times New Roman" panose="02020603050405020304" pitchFamily="18" charset="0"/>
+                <a:cs typeface="Times New Roman" panose="02020603050405020304" pitchFamily="18" charset="0"/>
+              </a:rPr>
+              <a:t>conn</a:t>
+            </a:r>
+            <a:r>
+              <a:rPr lang="pt-BR" sz="1600" dirty="0" err="1">
+                <a:latin typeface="Times New Roman" panose="02020603050405020304" pitchFamily="18" charset="0"/>
+                <a:cs typeface="Times New Roman" panose="02020603050405020304" pitchFamily="18" charset="0"/>
+              </a:rPr>
+              <a:t>.cursor</a:t>
+            </a:r>
+            <a:r>
+              <a:rPr lang="pt-BR" sz="1600" dirty="0">
+                <a:latin typeface="Times New Roman" panose="02020603050405020304" pitchFamily="18" charset="0"/>
+                <a:cs typeface="Times New Roman" panose="02020603050405020304" pitchFamily="18" charset="0"/>
+              </a:rPr>
+              <a:t>()</a:t>
+            </a:r>
+          </a:p>
+          <a:p>
+            <a:pPr marL="0" indent="0" algn="just">
+              <a:buNone/>
+            </a:pPr>
+            <a:r>
+              <a:rPr lang="pt-BR" sz="1600" dirty="0" err="1">
+                <a:latin typeface="Times New Roman" panose="02020603050405020304" pitchFamily="18" charset="0"/>
+                <a:cs typeface="Times New Roman" panose="02020603050405020304" pitchFamily="18" charset="0"/>
+              </a:rPr>
+              <a:t>cur.execute</a:t>
+            </a:r>
+            <a:r>
+              <a:rPr lang="pt-BR" sz="1600" dirty="0">
+                <a:latin typeface="Times New Roman" panose="02020603050405020304" pitchFamily="18" charset="0"/>
+                <a:cs typeface="Times New Roman" panose="02020603050405020304" pitchFamily="18" charset="0"/>
+              </a:rPr>
+              <a:t>("</a:t>
+            </a:r>
+            <a:r>
+              <a:rPr lang="pt-BR" sz="1600" dirty="0" err="1">
+                <a:latin typeface="Times New Roman" panose="02020603050405020304" pitchFamily="18" charset="0"/>
+                <a:cs typeface="Times New Roman" panose="02020603050405020304" pitchFamily="18" charset="0"/>
+              </a:rPr>
+              <a:t>select</a:t>
+            </a:r>
+            <a:r>
+              <a:rPr lang="pt-BR" sz="1600" dirty="0">
+                <a:latin typeface="Times New Roman" panose="02020603050405020304" pitchFamily="18" charset="0"/>
+                <a:cs typeface="Times New Roman" panose="02020603050405020304" pitchFamily="18" charset="0"/>
+              </a:rPr>
+              <a:t> </a:t>
+            </a:r>
+            <a:r>
+              <a:rPr lang="pt-BR" sz="1600" dirty="0" err="1">
+                <a:latin typeface="Times New Roman" panose="02020603050405020304" pitchFamily="18" charset="0"/>
+                <a:cs typeface="Times New Roman" panose="02020603050405020304" pitchFamily="18" charset="0"/>
+              </a:rPr>
+              <a:t>current_database</a:t>
+            </a:r>
+            <a:r>
+              <a:rPr lang="pt-BR" sz="1600" dirty="0">
+                <a:latin typeface="Times New Roman" panose="02020603050405020304" pitchFamily="18" charset="0"/>
+                <a:cs typeface="Times New Roman" panose="02020603050405020304" pitchFamily="18" charset="0"/>
+              </a:rPr>
+              <a:t>(); ")</a:t>
+            </a:r>
+          </a:p>
+          <a:p>
+            <a:pPr marL="0" indent="0" algn="just">
+              <a:buNone/>
+            </a:pPr>
+            <a:r>
+              <a:rPr lang="pt-BR" sz="1600" dirty="0">
+                <a:latin typeface="Times New Roman" panose="02020603050405020304" pitchFamily="18" charset="0"/>
+                <a:cs typeface="Times New Roman" panose="02020603050405020304" pitchFamily="18" charset="0"/>
+              </a:rPr>
+              <a:t>linha = </a:t>
+            </a:r>
+            <a:r>
+              <a:rPr lang="pt-BR" sz="1600" dirty="0" err="1">
+                <a:latin typeface="Times New Roman" panose="02020603050405020304" pitchFamily="18" charset="0"/>
+                <a:cs typeface="Times New Roman" panose="02020603050405020304" pitchFamily="18" charset="0"/>
+              </a:rPr>
+              <a:t>cur.fetchone</a:t>
+            </a:r>
+            <a:r>
+              <a:rPr lang="pt-BR" sz="1600" dirty="0">
+                <a:latin typeface="Times New Roman" panose="02020603050405020304" pitchFamily="18" charset="0"/>
+                <a:cs typeface="Times New Roman" panose="02020603050405020304" pitchFamily="18" charset="0"/>
+              </a:rPr>
+              <a:t>()</a:t>
+            </a:r>
+          </a:p>
+          <a:p>
+            <a:pPr marL="0" indent="0" algn="just">
+              <a:buNone/>
+            </a:pPr>
+            <a:r>
+              <a:rPr lang="pt-BR" sz="1600" dirty="0">
+                <a:latin typeface="Times New Roman" panose="02020603050405020304" pitchFamily="18" charset="0"/>
+                <a:cs typeface="Times New Roman" panose="02020603050405020304" pitchFamily="18" charset="0"/>
+              </a:rPr>
+              <a:t>print("conectado ao banco de dados: ", linha)</a:t>
+            </a:r>
+          </a:p>
+          <a:p>
+            <a:pPr marL="0" indent="0" algn="just">
+              <a:buNone/>
+            </a:pPr>
+            <a:r>
+              <a:rPr lang="pt-BR" sz="1600" dirty="0" err="1">
+                <a:latin typeface="Times New Roman" panose="02020603050405020304" pitchFamily="18" charset="0"/>
+                <a:cs typeface="Times New Roman" panose="02020603050405020304" pitchFamily="18" charset="0"/>
+              </a:rPr>
+              <a:t>if</a:t>
+            </a:r>
+            <a:r>
+              <a:rPr lang="pt-BR" sz="1600" dirty="0">
+                <a:latin typeface="Times New Roman" panose="02020603050405020304" pitchFamily="18" charset="0"/>
+                <a:cs typeface="Times New Roman" panose="02020603050405020304" pitchFamily="18" charset="0"/>
+              </a:rPr>
+              <a:t> </a:t>
+            </a:r>
+            <a:r>
+              <a:rPr lang="pt-BR" sz="1600" dirty="0" err="1">
+                <a:latin typeface="Times New Roman" panose="02020603050405020304" pitchFamily="18" charset="0"/>
+                <a:cs typeface="Times New Roman" panose="02020603050405020304" pitchFamily="18" charset="0"/>
+              </a:rPr>
+              <a:t>conn</a:t>
+            </a:r>
+            <a:r>
+              <a:rPr lang="pt-BR" sz="1600" dirty="0">
+                <a:latin typeface="Times New Roman" panose="02020603050405020304" pitchFamily="18" charset="0"/>
+                <a:cs typeface="Times New Roman" panose="02020603050405020304" pitchFamily="18" charset="0"/>
+              </a:rPr>
+              <a:t> </a:t>
+            </a:r>
+            <a:r>
+              <a:rPr lang="pt-BR" sz="1600" dirty="0" err="1">
+                <a:latin typeface="Times New Roman" panose="02020603050405020304" pitchFamily="18" charset="0"/>
+                <a:cs typeface="Times New Roman" panose="02020603050405020304" pitchFamily="18" charset="0"/>
+              </a:rPr>
+              <a:t>and</a:t>
+            </a:r>
+            <a:r>
+              <a:rPr lang="pt-BR" sz="1600" dirty="0">
+                <a:latin typeface="Times New Roman" panose="02020603050405020304" pitchFamily="18" charset="0"/>
+                <a:cs typeface="Times New Roman" panose="02020603050405020304" pitchFamily="18" charset="0"/>
+              </a:rPr>
+              <a:t> </a:t>
+            </a:r>
+            <a:r>
+              <a:rPr lang="pt-BR" sz="1600" dirty="0" err="1">
+                <a:latin typeface="Times New Roman" panose="02020603050405020304" pitchFamily="18" charset="0"/>
+                <a:cs typeface="Times New Roman" panose="02020603050405020304" pitchFamily="18" charset="0"/>
+              </a:rPr>
+              <a:t>conn.closed</a:t>
+            </a:r>
+            <a:r>
+              <a:rPr lang="pt-BR" sz="1600" dirty="0">
+                <a:latin typeface="Times New Roman" panose="02020603050405020304" pitchFamily="18" charset="0"/>
+                <a:cs typeface="Times New Roman" panose="02020603050405020304" pitchFamily="18" charset="0"/>
+              </a:rPr>
+              <a:t> == 0: # testando se está conectado</a:t>
+            </a:r>
+          </a:p>
+          <a:p>
+            <a:pPr marL="0" indent="0" algn="just">
+              <a:buNone/>
+            </a:pPr>
+            <a:r>
+              <a:rPr lang="pt-BR" sz="1600" dirty="0">
+                <a:latin typeface="Times New Roman" panose="02020603050405020304" pitchFamily="18" charset="0"/>
+                <a:cs typeface="Times New Roman" panose="02020603050405020304" pitchFamily="18" charset="0"/>
+              </a:rPr>
+              <a:t>    </a:t>
+            </a:r>
+            <a:r>
+              <a:rPr lang="pt-BR" sz="1600" dirty="0" err="1">
+                <a:latin typeface="Times New Roman" panose="02020603050405020304" pitchFamily="18" charset="0"/>
+                <a:cs typeface="Times New Roman" panose="02020603050405020304" pitchFamily="18" charset="0"/>
+              </a:rPr>
+              <a:t>cur.close</a:t>
+            </a:r>
+            <a:r>
+              <a:rPr lang="pt-BR" sz="1600" dirty="0">
+                <a:latin typeface="Times New Roman" panose="02020603050405020304" pitchFamily="18" charset="0"/>
+                <a:cs typeface="Times New Roman" panose="02020603050405020304" pitchFamily="18" charset="0"/>
+              </a:rPr>
+              <a:t>()</a:t>
+            </a:r>
+          </a:p>
+          <a:p>
+            <a:pPr marL="0" indent="0" algn="just">
+              <a:buNone/>
+            </a:pPr>
+            <a:r>
+              <a:rPr lang="pt-BR" sz="1600" dirty="0">
+                <a:latin typeface="Times New Roman" panose="02020603050405020304" pitchFamily="18" charset="0"/>
+                <a:cs typeface="Times New Roman" panose="02020603050405020304" pitchFamily="18" charset="0"/>
+              </a:rPr>
+              <a:t>    </a:t>
+            </a:r>
+            <a:r>
+              <a:rPr lang="pt-BR" sz="1600" dirty="0" err="1">
+                <a:latin typeface="Times New Roman" panose="02020603050405020304" pitchFamily="18" charset="0"/>
+                <a:cs typeface="Times New Roman" panose="02020603050405020304" pitchFamily="18" charset="0"/>
+              </a:rPr>
+              <a:t>conn.close</a:t>
+            </a:r>
+            <a:r>
+              <a:rPr lang="pt-BR" sz="1600" dirty="0">
+                <a:latin typeface="Times New Roman" panose="02020603050405020304" pitchFamily="18" charset="0"/>
+                <a:cs typeface="Times New Roman" panose="02020603050405020304" pitchFamily="18" charset="0"/>
+              </a:rPr>
+              <a:t>()</a:t>
+            </a:r>
+          </a:p>
+          <a:p>
+            <a:pPr marL="0" indent="0" algn="just">
+              <a:buNone/>
+            </a:pPr>
+            <a:r>
+              <a:rPr lang="pt-BR" sz="1600" dirty="0">
+                <a:latin typeface="Times New Roman" panose="02020603050405020304" pitchFamily="18" charset="0"/>
+                <a:cs typeface="Times New Roman" panose="02020603050405020304" pitchFamily="18" charset="0"/>
+              </a:rPr>
+              <a:t>    print("Conexão encerrada")</a:t>
+            </a:r>
+          </a:p>
+        </p:txBody>
+      </p:sp>
+    </p:spTree>
+    <p:extLst>
+      <p:ext uri="{BB962C8B-B14F-4D97-AF65-F5344CB8AC3E}">
+        <p14:creationId xmlns:p14="http://schemas.microsoft.com/office/powerpoint/2010/main" val="1128829412"/>
+      </p:ext>
+    </p:extLst>
+  </p:cSld>
+  <p:clrMapOvr>
+    <a:masterClrMapping/>
+  </p:clrMapOvr>
+  <p:transition spd="med"/>
+</p:sld>
+</file>
+
+<file path=ppt/slides/slide14.xml><?xml version="1.0" encoding="utf-8"?>
+<p:sld xmlns:a="http://schemas.openxmlformats.org/drawingml/2006/main" xmlns:r="http://schemas.openxmlformats.org/officeDocument/2006/relationships" xmlns:p="http://schemas.openxmlformats.org/presentationml/2006/main">
+  <p:cSld>
+    <p:spTree>
+      <p:nvGrpSpPr>
+        <p:cNvPr id="1" name="">
+          <a:extLst>
+            <a:ext uri="{FF2B5EF4-FFF2-40B4-BE49-F238E27FC236}">
+              <a16:creationId xmlns:a16="http://schemas.microsoft.com/office/drawing/2014/main" id="{BB36069F-60F8-D883-C743-6E983207F752}"/>
+            </a:ext>
+          </a:extLst>
+        </p:cNvPr>
+        <p:cNvGrpSpPr/>
+        <p:nvPr/>
+      </p:nvGrpSpPr>
+      <p:grpSpPr>
+        <a:xfrm>
+          <a:off x="0" y="0"/>
+          <a:ext cx="0" cy="0"/>
+          <a:chOff x="0" y="0"/>
+          <a:chExt cx="0" cy="0"/>
+        </a:xfrm>
+      </p:grpSpPr>
+      <p:sp>
+        <p:nvSpPr>
+          <p:cNvPr id="6" name="Title 1">
+            <a:extLst>
+              <a:ext uri="{FF2B5EF4-FFF2-40B4-BE49-F238E27FC236}">
+                <a16:creationId xmlns:a16="http://schemas.microsoft.com/office/drawing/2014/main" id="{6A094A22-769F-CDE5-523A-3422FE96EEC9}"/>
+              </a:ext>
+            </a:extLst>
+          </p:cNvPr>
+          <p:cNvSpPr>
+            <a:spLocks noGrp="1"/>
+          </p:cNvSpPr>
+          <p:nvPr>
+            <p:ph type="title"/>
+          </p:nvPr>
+        </p:nvSpPr>
+        <p:spPr>
+          <a:xfrm>
+            <a:off x="237995" y="265188"/>
+            <a:ext cx="8763140" cy="596760"/>
+          </a:xfrm>
+        </p:spPr>
+        <p:txBody>
+          <a:bodyPr>
+            <a:normAutofit/>
+          </a:bodyPr>
+          <a:lstStyle/>
+          <a:p>
+            <a:pPr algn="ctr"/>
+            <a:r>
+              <a:rPr lang="en-US" b="1" dirty="0">
+                <a:solidFill>
+                  <a:srgbClr val="0070C0"/>
+                </a:solidFill>
+              </a:rPr>
+              <a:t>Python – bd </a:t>
+            </a:r>
+            <a:r>
+              <a:rPr lang="en-US" b="1" dirty="0" err="1">
+                <a:solidFill>
+                  <a:srgbClr val="0070C0"/>
+                </a:solidFill>
+              </a:rPr>
+              <a:t>postgresql</a:t>
+            </a:r>
+            <a:r>
+              <a:rPr lang="en-US" b="1" dirty="0">
+                <a:solidFill>
+                  <a:srgbClr val="0070C0"/>
+                </a:solidFill>
+              </a:rPr>
+              <a:t> – SELECT </a:t>
+            </a:r>
+            <a:r>
+              <a:rPr lang="en-US" b="1" dirty="0" err="1">
+                <a:solidFill>
+                  <a:srgbClr val="0070C0"/>
+                </a:solidFill>
+              </a:rPr>
+              <a:t>tABELA</a:t>
+            </a:r>
+            <a:endParaRPr lang="en-US" b="1" dirty="0">
+              <a:solidFill>
+                <a:srgbClr val="0070C0"/>
+              </a:solidFill>
+            </a:endParaRPr>
+          </a:p>
+        </p:txBody>
+      </p:sp>
+      <p:sp>
+        <p:nvSpPr>
+          <p:cNvPr id="8" name="Text Placeholder 2">
+            <a:extLst>
+              <a:ext uri="{FF2B5EF4-FFF2-40B4-BE49-F238E27FC236}">
+                <a16:creationId xmlns:a16="http://schemas.microsoft.com/office/drawing/2014/main" id="{0B693493-D7F9-EB40-7E97-41E7D0BC3101}"/>
+              </a:ext>
+            </a:extLst>
+          </p:cNvPr>
+          <p:cNvSpPr>
+            <a:spLocks noGrp="1"/>
+          </p:cNvSpPr>
+          <p:nvPr>
+            <p:ph type="body" sz="half" idx="1"/>
+          </p:nvPr>
+        </p:nvSpPr>
+        <p:spPr>
+          <a:xfrm>
+            <a:off x="142865" y="836895"/>
+            <a:ext cx="8865056" cy="4160989"/>
+          </a:xfrm>
+        </p:spPr>
+        <p:txBody>
+          <a:bodyPr>
+            <a:noAutofit/>
+          </a:bodyPr>
+          <a:lstStyle/>
+          <a:p>
+            <a:pPr marL="0" indent="0" algn="just">
+              <a:buNone/>
+            </a:pPr>
+            <a:r>
+              <a:rPr lang="pt-BR" sz="1600" b="1" dirty="0" err="1">
+                <a:latin typeface="Times New Roman" panose="02020603050405020304" pitchFamily="18" charset="0"/>
+                <a:cs typeface="Times New Roman" panose="02020603050405020304" pitchFamily="18" charset="0"/>
+              </a:rPr>
+              <a:t>conn</a:t>
+            </a:r>
+            <a:r>
+              <a:rPr lang="pt-BR" sz="1600" dirty="0">
+                <a:latin typeface="Times New Roman" panose="02020603050405020304" pitchFamily="18" charset="0"/>
+                <a:cs typeface="Times New Roman" panose="02020603050405020304" pitchFamily="18" charset="0"/>
+              </a:rPr>
+              <a:t> = </a:t>
+            </a:r>
+            <a:r>
+              <a:rPr lang="pt-BR" sz="1600" b="1" dirty="0">
+                <a:solidFill>
+                  <a:srgbClr val="FF0000"/>
+                </a:solidFill>
+                <a:latin typeface="Times New Roman" panose="02020603050405020304" pitchFamily="18" charset="0"/>
+                <a:cs typeface="Times New Roman" panose="02020603050405020304" pitchFamily="18" charset="0"/>
+              </a:rPr>
+              <a:t>psycopg2</a:t>
+            </a:r>
+            <a:r>
+              <a:rPr lang="pt-BR" sz="1600" dirty="0">
+                <a:latin typeface="Times New Roman" panose="02020603050405020304" pitchFamily="18" charset="0"/>
+                <a:cs typeface="Times New Roman" panose="02020603050405020304" pitchFamily="18" charset="0"/>
+              </a:rPr>
+              <a:t>.connect(</a:t>
+            </a:r>
+          </a:p>
+          <a:p>
+            <a:pPr marL="0" indent="0" algn="just">
+              <a:buNone/>
+            </a:pPr>
+            <a:r>
+              <a:rPr lang="pt-BR" sz="1600" dirty="0">
+                <a:latin typeface="Times New Roman" panose="02020603050405020304" pitchFamily="18" charset="0"/>
+                <a:cs typeface="Times New Roman" panose="02020603050405020304" pitchFamily="18" charset="0"/>
+              </a:rPr>
+              <a:t> "</a:t>
+            </a:r>
+            <a:r>
+              <a:rPr lang="pt-BR" sz="1600" b="1" dirty="0">
+                <a:solidFill>
+                  <a:srgbClr val="FF0000"/>
+                </a:solidFill>
+                <a:latin typeface="Times New Roman" panose="02020603050405020304" pitchFamily="18" charset="0"/>
+                <a:cs typeface="Times New Roman" panose="02020603050405020304" pitchFamily="18" charset="0"/>
+              </a:rPr>
+              <a:t>substituir pela </a:t>
+            </a:r>
+            <a:r>
+              <a:rPr lang="pt-BR" sz="1600" b="1" dirty="0" err="1">
+                <a:solidFill>
+                  <a:srgbClr val="FF0000"/>
+                </a:solidFill>
+                <a:latin typeface="Times New Roman" panose="02020603050405020304" pitchFamily="18" charset="0"/>
+                <a:cs typeface="Times New Roman" panose="02020603050405020304" pitchFamily="18" charset="0"/>
+              </a:rPr>
+              <a:t>string</a:t>
+            </a:r>
+            <a:r>
+              <a:rPr lang="pt-BR" sz="1600" b="1" dirty="0">
+                <a:solidFill>
+                  <a:srgbClr val="FF0000"/>
+                </a:solidFill>
+                <a:latin typeface="Times New Roman" panose="02020603050405020304" pitchFamily="18" charset="0"/>
+                <a:cs typeface="Times New Roman" panose="02020603050405020304" pitchFamily="18" charset="0"/>
+              </a:rPr>
+              <a:t> de conexão</a:t>
+            </a:r>
+            <a:r>
+              <a:rPr lang="pt-BR" sz="1600" dirty="0">
+                <a:latin typeface="Times New Roman" panose="02020603050405020304" pitchFamily="18" charset="0"/>
+                <a:cs typeface="Times New Roman" panose="02020603050405020304" pitchFamily="18" charset="0"/>
+              </a:rPr>
+              <a:t>" )</a:t>
+            </a:r>
+          </a:p>
+          <a:p>
+            <a:pPr marL="0" indent="0" algn="just">
+              <a:buNone/>
+            </a:pPr>
+            <a:r>
+              <a:rPr lang="pt-BR" sz="1600" dirty="0" err="1">
+                <a:latin typeface="Times New Roman" panose="02020603050405020304" pitchFamily="18" charset="0"/>
+                <a:cs typeface="Times New Roman" panose="02020603050405020304" pitchFamily="18" charset="0"/>
+              </a:rPr>
+              <a:t>cur</a:t>
+            </a:r>
+            <a:r>
+              <a:rPr lang="pt-BR" sz="1600" dirty="0">
+                <a:latin typeface="Times New Roman" panose="02020603050405020304" pitchFamily="18" charset="0"/>
+                <a:cs typeface="Times New Roman" panose="02020603050405020304" pitchFamily="18" charset="0"/>
+              </a:rPr>
+              <a:t> = </a:t>
+            </a:r>
+            <a:r>
+              <a:rPr lang="pt-BR" sz="1600" b="1" dirty="0" err="1">
+                <a:latin typeface="Times New Roman" panose="02020603050405020304" pitchFamily="18" charset="0"/>
+                <a:cs typeface="Times New Roman" panose="02020603050405020304" pitchFamily="18" charset="0"/>
+              </a:rPr>
+              <a:t>conn</a:t>
+            </a:r>
+            <a:r>
+              <a:rPr lang="pt-BR" sz="1600" dirty="0" err="1">
+                <a:latin typeface="Times New Roman" panose="02020603050405020304" pitchFamily="18" charset="0"/>
+                <a:cs typeface="Times New Roman" panose="02020603050405020304" pitchFamily="18" charset="0"/>
+              </a:rPr>
+              <a:t>.cursor</a:t>
+            </a:r>
+            <a:r>
+              <a:rPr lang="pt-BR" sz="1600" dirty="0">
+                <a:latin typeface="Times New Roman" panose="02020603050405020304" pitchFamily="18" charset="0"/>
+                <a:cs typeface="Times New Roman" panose="02020603050405020304" pitchFamily="18" charset="0"/>
+              </a:rPr>
+              <a:t>()</a:t>
+            </a:r>
+          </a:p>
+          <a:p>
+            <a:pPr marL="0" indent="0" algn="just">
+              <a:buNone/>
+            </a:pPr>
+            <a:r>
+              <a:rPr lang="pt-BR" sz="1600" dirty="0" err="1">
+                <a:latin typeface="Times New Roman" panose="02020603050405020304" pitchFamily="18" charset="0"/>
+                <a:cs typeface="Times New Roman" panose="02020603050405020304" pitchFamily="18" charset="0"/>
+              </a:rPr>
+              <a:t>sql</a:t>
+            </a:r>
+            <a:r>
+              <a:rPr lang="pt-BR" sz="1600" dirty="0">
+                <a:latin typeface="Times New Roman" panose="02020603050405020304" pitchFamily="18" charset="0"/>
+                <a:cs typeface="Times New Roman" panose="02020603050405020304" pitchFamily="18" charset="0"/>
+              </a:rPr>
+              <a:t> = "</a:t>
+            </a:r>
+            <a:r>
+              <a:rPr lang="pt-BR" sz="1600" dirty="0" err="1">
+                <a:latin typeface="Times New Roman" panose="02020603050405020304" pitchFamily="18" charset="0"/>
+                <a:cs typeface="Times New Roman" panose="02020603050405020304" pitchFamily="18" charset="0"/>
+              </a:rPr>
+              <a:t>select</a:t>
+            </a:r>
+            <a:r>
+              <a:rPr lang="pt-BR" sz="1600" dirty="0">
+                <a:latin typeface="Times New Roman" panose="02020603050405020304" pitchFamily="18" charset="0"/>
+                <a:cs typeface="Times New Roman" panose="02020603050405020304" pitchFamily="18" charset="0"/>
+              </a:rPr>
+              <a:t> * </a:t>
+            </a:r>
+            <a:r>
+              <a:rPr lang="pt-BR" sz="1600" dirty="0" err="1">
+                <a:latin typeface="Times New Roman" panose="02020603050405020304" pitchFamily="18" charset="0"/>
+                <a:cs typeface="Times New Roman" panose="02020603050405020304" pitchFamily="18" charset="0"/>
+              </a:rPr>
+              <a:t>from</a:t>
+            </a:r>
+            <a:r>
+              <a:rPr lang="pt-BR" sz="1600" dirty="0">
+                <a:latin typeface="Times New Roman" panose="02020603050405020304" pitchFamily="18" charset="0"/>
+                <a:cs typeface="Times New Roman" panose="02020603050405020304" pitchFamily="18" charset="0"/>
+              </a:rPr>
+              <a:t> </a:t>
+            </a:r>
+            <a:r>
+              <a:rPr lang="pt-BR" sz="1600" dirty="0" err="1">
+                <a:latin typeface="Times New Roman" panose="02020603050405020304" pitchFamily="18" charset="0"/>
+                <a:cs typeface="Times New Roman" panose="02020603050405020304" pitchFamily="18" charset="0"/>
+              </a:rPr>
+              <a:t>department</a:t>
+            </a:r>
+            <a:r>
+              <a:rPr lang="pt-BR" sz="1600" dirty="0">
+                <a:latin typeface="Times New Roman" panose="02020603050405020304" pitchFamily="18" charset="0"/>
+                <a:cs typeface="Times New Roman" panose="02020603050405020304" pitchFamily="18" charset="0"/>
+              </a:rPr>
+              <a:t>"</a:t>
+            </a:r>
+          </a:p>
+          <a:p>
+            <a:pPr marL="0" indent="0" algn="just">
+              <a:buNone/>
+            </a:pPr>
+            <a:r>
+              <a:rPr lang="pt-BR" sz="1600" dirty="0" err="1">
+                <a:latin typeface="Times New Roman" panose="02020603050405020304" pitchFamily="18" charset="0"/>
+                <a:cs typeface="Times New Roman" panose="02020603050405020304" pitchFamily="18" charset="0"/>
+              </a:rPr>
+              <a:t>cur.execute</a:t>
+            </a:r>
+            <a:r>
+              <a:rPr lang="pt-BR" sz="1600" dirty="0">
+                <a:latin typeface="Times New Roman" panose="02020603050405020304" pitchFamily="18" charset="0"/>
+                <a:cs typeface="Times New Roman" panose="02020603050405020304" pitchFamily="18" charset="0"/>
+              </a:rPr>
+              <a:t>(</a:t>
+            </a:r>
+            <a:r>
+              <a:rPr lang="pt-BR" sz="1600" dirty="0" err="1">
+                <a:latin typeface="Times New Roman" panose="02020603050405020304" pitchFamily="18" charset="0"/>
+                <a:cs typeface="Times New Roman" panose="02020603050405020304" pitchFamily="18" charset="0"/>
+              </a:rPr>
+              <a:t>sql</a:t>
+            </a:r>
+            <a:r>
+              <a:rPr lang="pt-BR" sz="1600" dirty="0">
+                <a:latin typeface="Times New Roman" panose="02020603050405020304" pitchFamily="18" charset="0"/>
+                <a:cs typeface="Times New Roman" panose="02020603050405020304" pitchFamily="18" charset="0"/>
+              </a:rPr>
+              <a:t>)</a:t>
+            </a:r>
+          </a:p>
+          <a:p>
+            <a:pPr marL="0" indent="0" algn="just">
+              <a:buNone/>
+            </a:pPr>
+            <a:r>
+              <a:rPr lang="pt-BR" sz="1600" dirty="0">
+                <a:latin typeface="Times New Roman" panose="02020603050405020304" pitchFamily="18" charset="0"/>
+                <a:cs typeface="Times New Roman" panose="02020603050405020304" pitchFamily="18" charset="0"/>
+              </a:rPr>
+              <a:t>linhas = </a:t>
+            </a:r>
+            <a:r>
+              <a:rPr lang="pt-BR" sz="1600" dirty="0" err="1">
+                <a:latin typeface="Times New Roman" panose="02020603050405020304" pitchFamily="18" charset="0"/>
+                <a:cs typeface="Times New Roman" panose="02020603050405020304" pitchFamily="18" charset="0"/>
+              </a:rPr>
+              <a:t>cur.fetchall</a:t>
+            </a:r>
+            <a:r>
+              <a:rPr lang="pt-BR" sz="1600" dirty="0">
+                <a:latin typeface="Times New Roman" panose="02020603050405020304" pitchFamily="18" charset="0"/>
+                <a:cs typeface="Times New Roman" panose="02020603050405020304" pitchFamily="18" charset="0"/>
+              </a:rPr>
+              <a:t>()</a:t>
+            </a:r>
+          </a:p>
+          <a:p>
+            <a:pPr marL="0" indent="0" algn="just">
+              <a:buNone/>
+            </a:pPr>
+            <a:r>
+              <a:rPr lang="pt-BR" sz="1600" dirty="0">
+                <a:latin typeface="Times New Roman" panose="02020603050405020304" pitchFamily="18" charset="0"/>
+                <a:cs typeface="Times New Roman" panose="02020603050405020304" pitchFamily="18" charset="0"/>
+              </a:rPr>
+              <a:t>for linha in linhas:</a:t>
+            </a:r>
+          </a:p>
+          <a:p>
+            <a:pPr marL="0" indent="0" algn="just">
+              <a:buNone/>
+            </a:pPr>
+            <a:r>
+              <a:rPr lang="pt-BR" sz="1600" dirty="0">
+                <a:latin typeface="Times New Roman" panose="02020603050405020304" pitchFamily="18" charset="0"/>
+                <a:cs typeface="Times New Roman" panose="02020603050405020304" pitchFamily="18" charset="0"/>
+              </a:rPr>
+              <a:t>    print(linha)</a:t>
+            </a:r>
+          </a:p>
+          <a:p>
+            <a:pPr marL="0" indent="0" algn="just">
+              <a:buNone/>
+            </a:pPr>
+            <a:r>
+              <a:rPr lang="pt-BR" sz="1600" dirty="0" err="1">
+                <a:latin typeface="Times New Roman" panose="02020603050405020304" pitchFamily="18" charset="0"/>
+                <a:cs typeface="Times New Roman" panose="02020603050405020304" pitchFamily="18" charset="0"/>
+              </a:rPr>
+              <a:t>cur.close</a:t>
+            </a:r>
+            <a:r>
+              <a:rPr lang="pt-BR" sz="1600" dirty="0">
+                <a:latin typeface="Times New Roman" panose="02020603050405020304" pitchFamily="18" charset="0"/>
+                <a:cs typeface="Times New Roman" panose="02020603050405020304" pitchFamily="18" charset="0"/>
+              </a:rPr>
+              <a:t>()</a:t>
+            </a:r>
+          </a:p>
+          <a:p>
+            <a:pPr marL="0" indent="0" algn="just">
+              <a:buNone/>
+            </a:pPr>
+            <a:r>
+              <a:rPr lang="pt-BR" sz="1600" dirty="0" err="1">
+                <a:latin typeface="Times New Roman" panose="02020603050405020304" pitchFamily="18" charset="0"/>
+                <a:cs typeface="Times New Roman" panose="02020603050405020304" pitchFamily="18" charset="0"/>
+              </a:rPr>
+              <a:t>conn.close</a:t>
+            </a:r>
+            <a:r>
+              <a:rPr lang="pt-BR" sz="1600" dirty="0">
+                <a:latin typeface="Times New Roman" panose="02020603050405020304" pitchFamily="18" charset="0"/>
+                <a:cs typeface="Times New Roman" panose="02020603050405020304" pitchFamily="18" charset="0"/>
+              </a:rPr>
+              <a:t>()</a:t>
+            </a:r>
+          </a:p>
+          <a:p>
+            <a:pPr marL="0" indent="0" algn="just">
+              <a:buNone/>
+            </a:pPr>
+            <a:r>
+              <a:rPr lang="pt-BR" sz="1600" dirty="0">
+                <a:latin typeface="Times New Roman" panose="02020603050405020304" pitchFamily="18" charset="0"/>
+                <a:cs typeface="Times New Roman" panose="02020603050405020304" pitchFamily="18" charset="0"/>
+              </a:rPr>
+              <a:t>print("Conexão encerrada")</a:t>
+            </a:r>
+          </a:p>
+        </p:txBody>
+      </p:sp>
+    </p:spTree>
+    <p:extLst>
+      <p:ext uri="{BB962C8B-B14F-4D97-AF65-F5344CB8AC3E}">
+        <p14:creationId xmlns:p14="http://schemas.microsoft.com/office/powerpoint/2010/main" val="2067068779"/>
+      </p:ext>
+    </p:extLst>
+  </p:cSld>
+  <p:clrMapOvr>
+    <a:masterClrMapping/>
+  </p:clrMapOvr>
+  <p:transition spd="med"/>
+</p:sld>
+</file>
+
+<file path=ppt/slides/slide15.xml><?xml version="1.0" encoding="utf-8"?>
+<p:sld xmlns:a="http://schemas.openxmlformats.org/drawingml/2006/main" xmlns:r="http://schemas.openxmlformats.org/officeDocument/2006/relationships" xmlns:p="http://schemas.openxmlformats.org/presentationml/2006/main">
+  <p:cSld>
+    <p:spTree>
+      <p:nvGrpSpPr>
+        <p:cNvPr id="1" name="">
+          <a:extLst>
+            <a:ext uri="{FF2B5EF4-FFF2-40B4-BE49-F238E27FC236}">
+              <a16:creationId xmlns:a16="http://schemas.microsoft.com/office/drawing/2014/main" id="{2C1B33F4-964E-08C8-1802-EC071FD93B47}"/>
+            </a:ext>
+          </a:extLst>
+        </p:cNvPr>
+        <p:cNvGrpSpPr/>
+        <p:nvPr/>
+      </p:nvGrpSpPr>
+      <p:grpSpPr>
+        <a:xfrm>
+          <a:off x="0" y="0"/>
+          <a:ext cx="0" cy="0"/>
+          <a:chOff x="0" y="0"/>
+          <a:chExt cx="0" cy="0"/>
+        </a:xfrm>
+      </p:grpSpPr>
+      <p:sp>
+        <p:nvSpPr>
+          <p:cNvPr id="6" name="Title 1">
+            <a:extLst>
+              <a:ext uri="{FF2B5EF4-FFF2-40B4-BE49-F238E27FC236}">
+                <a16:creationId xmlns:a16="http://schemas.microsoft.com/office/drawing/2014/main" id="{EA3B8E7F-E7DC-0E82-D236-E31D4F6FDED8}"/>
+              </a:ext>
+            </a:extLst>
+          </p:cNvPr>
+          <p:cNvSpPr>
+            <a:spLocks noGrp="1"/>
+          </p:cNvSpPr>
+          <p:nvPr>
+            <p:ph type="title"/>
+          </p:nvPr>
+        </p:nvSpPr>
+        <p:spPr>
+          <a:xfrm>
+            <a:off x="237995" y="265188"/>
+            <a:ext cx="8763140" cy="596760"/>
+          </a:xfrm>
+        </p:spPr>
+        <p:txBody>
+          <a:bodyPr>
+            <a:normAutofit/>
+          </a:bodyPr>
+          <a:lstStyle/>
+          <a:p>
+            <a:pPr algn="ctr"/>
+            <a:r>
+              <a:rPr lang="en-US" b="1" dirty="0">
+                <a:solidFill>
+                  <a:srgbClr val="0070C0"/>
+                </a:solidFill>
+              </a:rPr>
+              <a:t>Python – bd </a:t>
+            </a:r>
+            <a:r>
+              <a:rPr lang="en-US" b="1" dirty="0" err="1">
+                <a:solidFill>
+                  <a:srgbClr val="0070C0"/>
+                </a:solidFill>
+              </a:rPr>
+              <a:t>postgresql</a:t>
+            </a:r>
+            <a:r>
+              <a:rPr lang="en-US" b="1" dirty="0">
+                <a:solidFill>
+                  <a:srgbClr val="0070C0"/>
+                </a:solidFill>
+              </a:rPr>
+              <a:t> – INSERT</a:t>
+            </a:r>
+          </a:p>
+        </p:txBody>
+      </p:sp>
+      <p:sp>
+        <p:nvSpPr>
+          <p:cNvPr id="8" name="Text Placeholder 2">
+            <a:extLst>
+              <a:ext uri="{FF2B5EF4-FFF2-40B4-BE49-F238E27FC236}">
+                <a16:creationId xmlns:a16="http://schemas.microsoft.com/office/drawing/2014/main" id="{0FF87963-3615-70D6-3A7E-A24F97487981}"/>
+              </a:ext>
+            </a:extLst>
+          </p:cNvPr>
+          <p:cNvSpPr>
+            <a:spLocks noGrp="1"/>
+          </p:cNvSpPr>
+          <p:nvPr>
+            <p:ph type="body" sz="half" idx="1"/>
+          </p:nvPr>
+        </p:nvSpPr>
+        <p:spPr>
+          <a:xfrm>
+            <a:off x="142865" y="836895"/>
+            <a:ext cx="8865056" cy="4160989"/>
+          </a:xfrm>
+        </p:spPr>
+        <p:txBody>
+          <a:bodyPr>
+            <a:noAutofit/>
+          </a:bodyPr>
+          <a:lstStyle/>
+          <a:p>
+            <a:pPr marL="0" indent="0" algn="just">
+              <a:buNone/>
+            </a:pPr>
+            <a:r>
+              <a:rPr lang="pt-BR" sz="1600" dirty="0" err="1">
+                <a:latin typeface="Times New Roman" panose="02020603050405020304" pitchFamily="18" charset="0"/>
+                <a:cs typeface="Times New Roman" panose="02020603050405020304" pitchFamily="18" charset="0"/>
+              </a:rPr>
+              <a:t>import</a:t>
+            </a:r>
+            <a:r>
+              <a:rPr lang="pt-BR" sz="1600" dirty="0">
+                <a:latin typeface="Times New Roman" panose="02020603050405020304" pitchFamily="18" charset="0"/>
+                <a:cs typeface="Times New Roman" panose="02020603050405020304" pitchFamily="18" charset="0"/>
+              </a:rPr>
+              <a:t> </a:t>
+            </a:r>
+            <a:r>
+              <a:rPr lang="pt-BR" sz="1600" b="1" dirty="0">
+                <a:solidFill>
+                  <a:srgbClr val="FF0000"/>
+                </a:solidFill>
+                <a:latin typeface="Times New Roman" panose="02020603050405020304" pitchFamily="18" charset="0"/>
+                <a:cs typeface="Times New Roman" panose="02020603050405020304" pitchFamily="18" charset="0"/>
+              </a:rPr>
+              <a:t>psycopg2</a:t>
+            </a:r>
+          </a:p>
+          <a:p>
+            <a:pPr marL="0" indent="0" algn="just">
+              <a:buNone/>
+            </a:pPr>
+            <a:r>
+              <a:rPr lang="pt-BR" sz="1600" b="1" dirty="0" err="1">
+                <a:latin typeface="Times New Roman" panose="02020603050405020304" pitchFamily="18" charset="0"/>
+                <a:cs typeface="Times New Roman" panose="02020603050405020304" pitchFamily="18" charset="0"/>
+              </a:rPr>
+              <a:t>conn</a:t>
+            </a:r>
+            <a:r>
+              <a:rPr lang="pt-BR" sz="1600" dirty="0">
+                <a:latin typeface="Times New Roman" panose="02020603050405020304" pitchFamily="18" charset="0"/>
+                <a:cs typeface="Times New Roman" panose="02020603050405020304" pitchFamily="18" charset="0"/>
+              </a:rPr>
+              <a:t> = psycopg2.connect(</a:t>
+            </a:r>
+          </a:p>
+          <a:p>
+            <a:pPr marL="0" indent="0" algn="just">
+              <a:buNone/>
+            </a:pPr>
+            <a:r>
+              <a:rPr lang="pt-BR" sz="1600" dirty="0">
+                <a:latin typeface="Times New Roman" panose="02020603050405020304" pitchFamily="18" charset="0"/>
+                <a:cs typeface="Times New Roman" panose="02020603050405020304" pitchFamily="18" charset="0"/>
+              </a:rPr>
+              <a:t> "</a:t>
+            </a:r>
+            <a:r>
+              <a:rPr lang="pt-BR" sz="1600" b="1" dirty="0">
+                <a:solidFill>
+                  <a:srgbClr val="FF0000"/>
+                </a:solidFill>
+                <a:latin typeface="Times New Roman" panose="02020603050405020304" pitchFamily="18" charset="0"/>
+                <a:cs typeface="Times New Roman" panose="02020603050405020304" pitchFamily="18" charset="0"/>
+              </a:rPr>
+              <a:t>substituir pela </a:t>
+            </a:r>
+            <a:r>
+              <a:rPr lang="pt-BR" sz="1600" b="1" dirty="0" err="1">
+                <a:solidFill>
+                  <a:srgbClr val="FF0000"/>
+                </a:solidFill>
+                <a:latin typeface="Times New Roman" panose="02020603050405020304" pitchFamily="18" charset="0"/>
+                <a:cs typeface="Times New Roman" panose="02020603050405020304" pitchFamily="18" charset="0"/>
+              </a:rPr>
+              <a:t>string</a:t>
+            </a:r>
+            <a:r>
+              <a:rPr lang="pt-BR" sz="1600" b="1" dirty="0">
+                <a:solidFill>
+                  <a:srgbClr val="FF0000"/>
+                </a:solidFill>
+                <a:latin typeface="Times New Roman" panose="02020603050405020304" pitchFamily="18" charset="0"/>
+                <a:cs typeface="Times New Roman" panose="02020603050405020304" pitchFamily="18" charset="0"/>
+              </a:rPr>
+              <a:t> de conexão</a:t>
+            </a:r>
+            <a:r>
+              <a:rPr lang="pt-BR" sz="1600" dirty="0">
+                <a:latin typeface="Times New Roman" panose="02020603050405020304" pitchFamily="18" charset="0"/>
+                <a:cs typeface="Times New Roman" panose="02020603050405020304" pitchFamily="18" charset="0"/>
+              </a:rPr>
+              <a:t>" )</a:t>
+            </a:r>
+          </a:p>
+          <a:p>
+            <a:pPr marL="0" indent="0" algn="just">
+              <a:buNone/>
+            </a:pPr>
+            <a:r>
+              <a:rPr lang="pt-BR" sz="1600" dirty="0">
+                <a:latin typeface="Times New Roman" panose="02020603050405020304" pitchFamily="18" charset="0"/>
+                <a:cs typeface="Times New Roman" panose="02020603050405020304" pitchFamily="18" charset="0"/>
+              </a:rPr>
+              <a:t>cursor = </a:t>
+            </a:r>
+            <a:r>
+              <a:rPr lang="pt-BR" sz="1600" b="1" dirty="0" err="1">
+                <a:latin typeface="Times New Roman" panose="02020603050405020304" pitchFamily="18" charset="0"/>
+                <a:cs typeface="Times New Roman" panose="02020603050405020304" pitchFamily="18" charset="0"/>
+              </a:rPr>
+              <a:t>conn</a:t>
+            </a:r>
+            <a:r>
+              <a:rPr lang="pt-BR" sz="1600" dirty="0" err="1">
+                <a:latin typeface="Times New Roman" panose="02020603050405020304" pitchFamily="18" charset="0"/>
+                <a:cs typeface="Times New Roman" panose="02020603050405020304" pitchFamily="18" charset="0"/>
+              </a:rPr>
+              <a:t>.cursor</a:t>
+            </a:r>
+            <a:r>
+              <a:rPr lang="pt-BR" sz="1600" dirty="0">
+                <a:latin typeface="Times New Roman" panose="02020603050405020304" pitchFamily="18" charset="0"/>
+                <a:cs typeface="Times New Roman" panose="02020603050405020304" pitchFamily="18" charset="0"/>
+              </a:rPr>
+              <a:t>()</a:t>
+            </a:r>
+          </a:p>
+          <a:p>
+            <a:pPr marL="0" indent="0" algn="just">
+              <a:buNone/>
+            </a:pPr>
+            <a:r>
+              <a:rPr lang="pt-BR" sz="1600" dirty="0">
+                <a:latin typeface="Times New Roman" panose="02020603050405020304" pitchFamily="18" charset="0"/>
+                <a:cs typeface="Times New Roman" panose="02020603050405020304" pitchFamily="18" charset="0"/>
+              </a:rPr>
+              <a:t>nome = input("Digite o nome: ")</a:t>
+            </a:r>
+          </a:p>
+          <a:p>
+            <a:pPr marL="0" indent="0" algn="just">
+              <a:buNone/>
+            </a:pPr>
+            <a:r>
+              <a:rPr lang="pt-BR" sz="1600" dirty="0" err="1">
+                <a:latin typeface="Times New Roman" panose="02020603050405020304" pitchFamily="18" charset="0"/>
+                <a:cs typeface="Times New Roman" panose="02020603050405020304" pitchFamily="18" charset="0"/>
+              </a:rPr>
+              <a:t>sql</a:t>
+            </a:r>
+            <a:r>
+              <a:rPr lang="pt-BR" sz="1600" dirty="0">
+                <a:latin typeface="Times New Roman" panose="02020603050405020304" pitchFamily="18" charset="0"/>
+                <a:cs typeface="Times New Roman" panose="02020603050405020304" pitchFamily="18" charset="0"/>
+              </a:rPr>
+              <a:t> = "INSERT INTO </a:t>
+            </a:r>
+            <a:r>
+              <a:rPr lang="pt-BR" sz="1600" dirty="0" err="1">
+                <a:latin typeface="Times New Roman" panose="02020603050405020304" pitchFamily="18" charset="0"/>
+                <a:cs typeface="Times New Roman" panose="02020603050405020304" pitchFamily="18" charset="0"/>
+              </a:rPr>
+              <a:t>department</a:t>
+            </a:r>
+            <a:r>
+              <a:rPr lang="pt-BR" sz="1600" dirty="0">
+                <a:latin typeface="Times New Roman" panose="02020603050405020304" pitchFamily="18" charset="0"/>
+                <a:cs typeface="Times New Roman" panose="02020603050405020304" pitchFamily="18" charset="0"/>
+              </a:rPr>
+              <a:t> (id, </a:t>
+            </a:r>
+            <a:r>
+              <a:rPr lang="pt-BR" sz="1600" dirty="0" err="1">
+                <a:latin typeface="Times New Roman" panose="02020603050405020304" pitchFamily="18" charset="0"/>
+                <a:cs typeface="Times New Roman" panose="02020603050405020304" pitchFamily="18" charset="0"/>
+              </a:rPr>
+              <a:t>name</a:t>
+            </a:r>
+            <a:r>
+              <a:rPr lang="pt-BR" sz="1600" dirty="0">
+                <a:latin typeface="Times New Roman" panose="02020603050405020304" pitchFamily="18" charset="0"/>
+                <a:cs typeface="Times New Roman" panose="02020603050405020304" pitchFamily="18" charset="0"/>
+              </a:rPr>
+              <a:t>) VALUES (%s, %s);"</a:t>
+            </a:r>
+          </a:p>
+          <a:p>
+            <a:pPr marL="0" indent="0" algn="just">
+              <a:buNone/>
+            </a:pPr>
+            <a:r>
+              <a:rPr lang="pt-BR" sz="1600" dirty="0" err="1">
+                <a:latin typeface="Times New Roman" panose="02020603050405020304" pitchFamily="18" charset="0"/>
+                <a:cs typeface="Times New Roman" panose="02020603050405020304" pitchFamily="18" charset="0"/>
+              </a:rPr>
+              <a:t>cursor.execute</a:t>
+            </a:r>
+            <a:r>
+              <a:rPr lang="pt-BR" sz="1600" dirty="0">
+                <a:latin typeface="Times New Roman" panose="02020603050405020304" pitchFamily="18" charset="0"/>
+                <a:cs typeface="Times New Roman" panose="02020603050405020304" pitchFamily="18" charset="0"/>
+              </a:rPr>
+              <a:t>(</a:t>
+            </a:r>
+            <a:r>
+              <a:rPr lang="pt-BR" sz="1600" dirty="0" err="1">
+                <a:latin typeface="Times New Roman" panose="02020603050405020304" pitchFamily="18" charset="0"/>
+                <a:cs typeface="Times New Roman" panose="02020603050405020304" pitchFamily="18" charset="0"/>
+              </a:rPr>
+              <a:t>sql</a:t>
+            </a:r>
+            <a:r>
+              <a:rPr lang="pt-BR" sz="1600" dirty="0">
+                <a:latin typeface="Times New Roman" panose="02020603050405020304" pitchFamily="18" charset="0"/>
+                <a:cs typeface="Times New Roman" panose="02020603050405020304" pitchFamily="18" charset="0"/>
+              </a:rPr>
+              <a:t>, (55, nome,))</a:t>
+            </a:r>
+          </a:p>
+          <a:p>
+            <a:pPr marL="0" indent="0" algn="just">
+              <a:buNone/>
+            </a:pPr>
+            <a:r>
+              <a:rPr lang="pt-BR" sz="1600" dirty="0" err="1">
+                <a:latin typeface="Times New Roman" panose="02020603050405020304" pitchFamily="18" charset="0"/>
+                <a:cs typeface="Times New Roman" panose="02020603050405020304" pitchFamily="18" charset="0"/>
+              </a:rPr>
+              <a:t>conn.commit</a:t>
+            </a:r>
+            <a:r>
+              <a:rPr lang="pt-BR" sz="1600" dirty="0">
+                <a:latin typeface="Times New Roman" panose="02020603050405020304" pitchFamily="18" charset="0"/>
+                <a:cs typeface="Times New Roman" panose="02020603050405020304" pitchFamily="18" charset="0"/>
+              </a:rPr>
+              <a:t>()</a:t>
+            </a:r>
+          </a:p>
+          <a:p>
+            <a:pPr marL="0" indent="0" algn="just">
+              <a:buNone/>
+            </a:pPr>
+            <a:r>
+              <a:rPr lang="pt-BR" sz="1600" dirty="0">
+                <a:latin typeface="Times New Roman" panose="02020603050405020304" pitchFamily="18" charset="0"/>
+                <a:cs typeface="Times New Roman" panose="02020603050405020304" pitchFamily="18" charset="0"/>
+              </a:rPr>
+              <a:t>print("Inserido com sucesso!")</a:t>
+            </a:r>
+          </a:p>
+          <a:p>
+            <a:pPr marL="0" indent="0" algn="just">
+              <a:buNone/>
+            </a:pPr>
+            <a:r>
+              <a:rPr lang="pt-BR" sz="1600" dirty="0" err="1">
+                <a:latin typeface="Times New Roman" panose="02020603050405020304" pitchFamily="18" charset="0"/>
+                <a:cs typeface="Times New Roman" panose="02020603050405020304" pitchFamily="18" charset="0"/>
+              </a:rPr>
+              <a:t>cursor.close</a:t>
+            </a:r>
+            <a:r>
+              <a:rPr lang="pt-BR" sz="1600" dirty="0">
+                <a:latin typeface="Times New Roman" panose="02020603050405020304" pitchFamily="18" charset="0"/>
+                <a:cs typeface="Times New Roman" panose="02020603050405020304" pitchFamily="18" charset="0"/>
+              </a:rPr>
+              <a:t>()</a:t>
+            </a:r>
+          </a:p>
+          <a:p>
+            <a:pPr marL="0" indent="0" algn="just">
+              <a:buNone/>
+            </a:pPr>
+            <a:r>
+              <a:rPr lang="pt-BR" sz="1600" dirty="0" err="1">
+                <a:latin typeface="Times New Roman" panose="02020603050405020304" pitchFamily="18" charset="0"/>
+                <a:cs typeface="Times New Roman" panose="02020603050405020304" pitchFamily="18" charset="0"/>
+              </a:rPr>
+              <a:t>conn.close</a:t>
+            </a:r>
+            <a:r>
+              <a:rPr lang="pt-BR" sz="1600" dirty="0">
+                <a:latin typeface="Times New Roman" panose="02020603050405020304" pitchFamily="18" charset="0"/>
+                <a:cs typeface="Times New Roman" panose="02020603050405020304" pitchFamily="18" charset="0"/>
+              </a:rPr>
+              <a:t>()</a:t>
+            </a:r>
+          </a:p>
+        </p:txBody>
+      </p:sp>
+    </p:spTree>
+    <p:extLst>
+      <p:ext uri="{BB962C8B-B14F-4D97-AF65-F5344CB8AC3E}">
+        <p14:creationId xmlns:p14="http://schemas.microsoft.com/office/powerpoint/2010/main" val="1178425787"/>
+      </p:ext>
+    </p:extLst>
+  </p:cSld>
+  <p:clrMapOvr>
+    <a:masterClrMapping/>
+  </p:clrMapOvr>
+  <p:transition spd="med"/>
+</p:sld>
+</file>
+
+<file path=ppt/slides/slide16.xml><?xml version="1.0" encoding="utf-8"?>
+<p:sld xmlns:a="http://schemas.openxmlformats.org/drawingml/2006/main" xmlns:r="http://schemas.openxmlformats.org/officeDocument/2006/relationships" xmlns:p="http://schemas.openxmlformats.org/presentationml/2006/main">
+  <p:cSld>
+    <p:spTree>
+      <p:nvGrpSpPr>
+        <p:cNvPr id="1" name="">
+          <a:extLst>
+            <a:ext uri="{FF2B5EF4-FFF2-40B4-BE49-F238E27FC236}">
+              <a16:creationId xmlns:a16="http://schemas.microsoft.com/office/drawing/2014/main" id="{9D4CB74E-A433-0B4E-E9F4-1B038276AE7F}"/>
+            </a:ext>
+          </a:extLst>
+        </p:cNvPr>
+        <p:cNvGrpSpPr/>
+        <p:nvPr/>
+      </p:nvGrpSpPr>
+      <p:grpSpPr>
+        <a:xfrm>
+          <a:off x="0" y="0"/>
+          <a:ext cx="0" cy="0"/>
+          <a:chOff x="0" y="0"/>
+          <a:chExt cx="0" cy="0"/>
+        </a:xfrm>
+      </p:grpSpPr>
+      <p:sp>
+        <p:nvSpPr>
+          <p:cNvPr id="6" name="Title 1">
+            <a:extLst>
+              <a:ext uri="{FF2B5EF4-FFF2-40B4-BE49-F238E27FC236}">
+                <a16:creationId xmlns:a16="http://schemas.microsoft.com/office/drawing/2014/main" id="{81EEBAD3-A725-2217-AA2B-BBA3A3001D4E}"/>
+              </a:ext>
+            </a:extLst>
+          </p:cNvPr>
+          <p:cNvSpPr>
+            <a:spLocks noGrp="1"/>
+          </p:cNvSpPr>
+          <p:nvPr>
+            <p:ph type="title"/>
+          </p:nvPr>
+        </p:nvSpPr>
+        <p:spPr>
+          <a:xfrm>
+            <a:off x="237995" y="265188"/>
+            <a:ext cx="8763140" cy="596760"/>
+          </a:xfrm>
+        </p:spPr>
+        <p:txBody>
+          <a:bodyPr>
+            <a:normAutofit/>
+          </a:bodyPr>
+          <a:lstStyle/>
+          <a:p>
+            <a:pPr algn="ctr"/>
+            <a:r>
+              <a:rPr lang="en-US" b="1" dirty="0">
+                <a:solidFill>
+                  <a:srgbClr val="0070C0"/>
+                </a:solidFill>
+              </a:rPr>
+              <a:t>Python – bd </a:t>
+            </a:r>
+            <a:r>
+              <a:rPr lang="en-US" b="1" dirty="0" err="1">
+                <a:solidFill>
+                  <a:srgbClr val="0070C0"/>
+                </a:solidFill>
+              </a:rPr>
+              <a:t>postgresql</a:t>
+            </a:r>
+            <a:r>
+              <a:rPr lang="en-US" b="1" dirty="0">
+                <a:solidFill>
+                  <a:srgbClr val="0070C0"/>
+                </a:solidFill>
+              </a:rPr>
+              <a:t> – UPDATE</a:t>
+            </a:r>
+          </a:p>
+        </p:txBody>
+      </p:sp>
+      <p:sp>
+        <p:nvSpPr>
+          <p:cNvPr id="8" name="Text Placeholder 2">
+            <a:extLst>
+              <a:ext uri="{FF2B5EF4-FFF2-40B4-BE49-F238E27FC236}">
+                <a16:creationId xmlns:a16="http://schemas.microsoft.com/office/drawing/2014/main" id="{A803DC3A-D713-AB86-93B7-119465A825BD}"/>
+              </a:ext>
+            </a:extLst>
+          </p:cNvPr>
+          <p:cNvSpPr>
+            <a:spLocks noGrp="1"/>
+          </p:cNvSpPr>
+          <p:nvPr>
+            <p:ph type="body" sz="half" idx="1"/>
+          </p:nvPr>
+        </p:nvSpPr>
+        <p:spPr>
+          <a:xfrm>
+            <a:off x="142865" y="603874"/>
+            <a:ext cx="8865056" cy="4411880"/>
+          </a:xfrm>
+        </p:spPr>
+        <p:txBody>
+          <a:bodyPr>
+            <a:noAutofit/>
+          </a:bodyPr>
+          <a:lstStyle/>
+          <a:p>
+            <a:pPr marL="0" indent="0" algn="just">
+              <a:buNone/>
+            </a:pPr>
+            <a:r>
+              <a:rPr lang="pt-BR" sz="1400" dirty="0">
+                <a:latin typeface="Times New Roman" panose="02020603050405020304" pitchFamily="18" charset="0"/>
+                <a:cs typeface="Times New Roman" panose="02020603050405020304" pitchFamily="18" charset="0"/>
+              </a:rPr>
+              <a:t>...</a:t>
+            </a:r>
+          </a:p>
+          <a:p>
+            <a:pPr marL="0" indent="0" algn="just">
+              <a:buNone/>
+            </a:pPr>
+            <a:r>
+              <a:rPr lang="pt-BR" sz="1400" dirty="0" err="1">
+                <a:latin typeface="Times New Roman" panose="02020603050405020304" pitchFamily="18" charset="0"/>
+                <a:cs typeface="Times New Roman" panose="02020603050405020304" pitchFamily="18" charset="0"/>
+              </a:rPr>
+              <a:t>id_dep</a:t>
+            </a:r>
+            <a:r>
+              <a:rPr lang="pt-BR" sz="1400" dirty="0">
+                <a:latin typeface="Times New Roman" panose="02020603050405020304" pitchFamily="18" charset="0"/>
+                <a:cs typeface="Times New Roman" panose="02020603050405020304" pitchFamily="18" charset="0"/>
+              </a:rPr>
+              <a:t> = </a:t>
+            </a:r>
+            <a:r>
+              <a:rPr lang="pt-BR" sz="1400" dirty="0" err="1">
+                <a:latin typeface="Times New Roman" panose="02020603050405020304" pitchFamily="18" charset="0"/>
+                <a:cs typeface="Times New Roman" panose="02020603050405020304" pitchFamily="18" charset="0"/>
+              </a:rPr>
+              <a:t>int</a:t>
+            </a:r>
+            <a:r>
+              <a:rPr lang="pt-BR" sz="1400" dirty="0">
+                <a:latin typeface="Times New Roman" panose="02020603050405020304" pitchFamily="18" charset="0"/>
+                <a:cs typeface="Times New Roman" panose="02020603050405020304" pitchFamily="18" charset="0"/>
+              </a:rPr>
+              <a:t>(input("Digite o ID do departamento: "))</a:t>
+            </a:r>
+          </a:p>
+          <a:p>
+            <a:pPr marL="0" indent="0" algn="just">
+              <a:buNone/>
+            </a:pPr>
+            <a:r>
+              <a:rPr lang="pt-BR" sz="1400" dirty="0" err="1">
+                <a:latin typeface="Times New Roman" panose="02020603050405020304" pitchFamily="18" charset="0"/>
+                <a:cs typeface="Times New Roman" panose="02020603050405020304" pitchFamily="18" charset="0"/>
+              </a:rPr>
+              <a:t>novo_nome</a:t>
+            </a:r>
+            <a:r>
+              <a:rPr lang="pt-BR" sz="1400" dirty="0">
+                <a:latin typeface="Times New Roman" panose="02020603050405020304" pitchFamily="18" charset="0"/>
+                <a:cs typeface="Times New Roman" panose="02020603050405020304" pitchFamily="18" charset="0"/>
+              </a:rPr>
+              <a:t> = input("Digite o novo nome: ")</a:t>
+            </a:r>
+          </a:p>
+          <a:p>
+            <a:pPr marL="0" indent="0" algn="just">
+              <a:buNone/>
+            </a:pPr>
+            <a:r>
+              <a:rPr lang="pt-BR" sz="1400" dirty="0" err="1">
+                <a:latin typeface="Times New Roman" panose="02020603050405020304" pitchFamily="18" charset="0"/>
+                <a:cs typeface="Times New Roman" panose="02020603050405020304" pitchFamily="18" charset="0"/>
+              </a:rPr>
+              <a:t>sql</a:t>
+            </a:r>
+            <a:r>
+              <a:rPr lang="pt-BR" sz="1400" dirty="0">
+                <a:latin typeface="Times New Roman" panose="02020603050405020304" pitchFamily="18" charset="0"/>
+                <a:cs typeface="Times New Roman" panose="02020603050405020304" pitchFamily="18" charset="0"/>
+              </a:rPr>
+              <a:t> = "UPDATE </a:t>
+            </a:r>
+            <a:r>
+              <a:rPr lang="pt-BR" sz="1400" dirty="0" err="1">
+                <a:latin typeface="Times New Roman" panose="02020603050405020304" pitchFamily="18" charset="0"/>
+                <a:cs typeface="Times New Roman" panose="02020603050405020304" pitchFamily="18" charset="0"/>
+              </a:rPr>
+              <a:t>departament</a:t>
+            </a:r>
+            <a:r>
+              <a:rPr lang="pt-BR" sz="1400" dirty="0">
+                <a:latin typeface="Times New Roman" panose="02020603050405020304" pitchFamily="18" charset="0"/>
+                <a:cs typeface="Times New Roman" panose="02020603050405020304" pitchFamily="18" charset="0"/>
+              </a:rPr>
+              <a:t> SET </a:t>
+            </a:r>
+            <a:r>
+              <a:rPr lang="pt-BR" sz="1400" dirty="0" err="1">
+                <a:latin typeface="Times New Roman" panose="02020603050405020304" pitchFamily="18" charset="0"/>
+                <a:cs typeface="Times New Roman" panose="02020603050405020304" pitchFamily="18" charset="0"/>
+              </a:rPr>
+              <a:t>name</a:t>
+            </a:r>
+            <a:r>
+              <a:rPr lang="pt-BR" sz="1400" dirty="0">
+                <a:latin typeface="Times New Roman" panose="02020603050405020304" pitchFamily="18" charset="0"/>
+                <a:cs typeface="Times New Roman" panose="02020603050405020304" pitchFamily="18" charset="0"/>
+              </a:rPr>
+              <a:t> = %s WHERE id = %s RETURNING id;"</a:t>
+            </a:r>
+          </a:p>
+          <a:p>
+            <a:pPr marL="0" indent="0" algn="just">
+              <a:buNone/>
+            </a:pPr>
+            <a:r>
+              <a:rPr lang="pt-BR" sz="1400" dirty="0" err="1">
+                <a:latin typeface="Times New Roman" panose="02020603050405020304" pitchFamily="18" charset="0"/>
+                <a:cs typeface="Times New Roman" panose="02020603050405020304" pitchFamily="18" charset="0"/>
+              </a:rPr>
+              <a:t>cursor.execute</a:t>
+            </a:r>
+            <a:r>
+              <a:rPr lang="pt-BR" sz="1400" dirty="0">
+                <a:latin typeface="Times New Roman" panose="02020603050405020304" pitchFamily="18" charset="0"/>
+                <a:cs typeface="Times New Roman" panose="02020603050405020304" pitchFamily="18" charset="0"/>
+              </a:rPr>
+              <a:t>(</a:t>
+            </a:r>
+            <a:r>
+              <a:rPr lang="pt-BR" sz="1400" dirty="0" err="1">
+                <a:latin typeface="Times New Roman" panose="02020603050405020304" pitchFamily="18" charset="0"/>
+                <a:cs typeface="Times New Roman" panose="02020603050405020304" pitchFamily="18" charset="0"/>
+              </a:rPr>
+              <a:t>sql</a:t>
+            </a:r>
+            <a:r>
+              <a:rPr lang="pt-BR" sz="1400" dirty="0">
+                <a:latin typeface="Times New Roman" panose="02020603050405020304" pitchFamily="18" charset="0"/>
+                <a:cs typeface="Times New Roman" panose="02020603050405020304" pitchFamily="18" charset="0"/>
+              </a:rPr>
+              <a:t>, (</a:t>
+            </a:r>
+            <a:r>
+              <a:rPr lang="pt-BR" sz="1400" dirty="0" err="1">
+                <a:latin typeface="Times New Roman" panose="02020603050405020304" pitchFamily="18" charset="0"/>
+                <a:cs typeface="Times New Roman" panose="02020603050405020304" pitchFamily="18" charset="0"/>
+              </a:rPr>
+              <a:t>novo_nome</a:t>
+            </a:r>
+            <a:r>
+              <a:rPr lang="pt-BR" sz="1400" dirty="0">
+                <a:latin typeface="Times New Roman" panose="02020603050405020304" pitchFamily="18" charset="0"/>
+                <a:cs typeface="Times New Roman" panose="02020603050405020304" pitchFamily="18" charset="0"/>
+              </a:rPr>
+              <a:t>, </a:t>
+            </a:r>
+            <a:r>
+              <a:rPr lang="pt-BR" sz="1400" dirty="0" err="1">
+                <a:latin typeface="Times New Roman" panose="02020603050405020304" pitchFamily="18" charset="0"/>
+                <a:cs typeface="Times New Roman" panose="02020603050405020304" pitchFamily="18" charset="0"/>
+              </a:rPr>
+              <a:t>id_dep</a:t>
+            </a:r>
+            <a:r>
+              <a:rPr lang="pt-BR" sz="1400" dirty="0">
+                <a:latin typeface="Times New Roman" panose="02020603050405020304" pitchFamily="18" charset="0"/>
+                <a:cs typeface="Times New Roman" panose="02020603050405020304" pitchFamily="18" charset="0"/>
+              </a:rPr>
+              <a:t>))</a:t>
+            </a:r>
+          </a:p>
+          <a:p>
+            <a:pPr marL="0" indent="0" algn="just">
+              <a:buNone/>
+            </a:pPr>
+            <a:r>
+              <a:rPr lang="pt-BR" sz="1400" dirty="0">
+                <a:latin typeface="Times New Roman" panose="02020603050405020304" pitchFamily="18" charset="0"/>
+                <a:cs typeface="Times New Roman" panose="02020603050405020304" pitchFamily="18" charset="0"/>
+              </a:rPr>
+              <a:t>resultado = </a:t>
+            </a:r>
+            <a:r>
+              <a:rPr lang="pt-BR" sz="1400" dirty="0" err="1">
+                <a:latin typeface="Times New Roman" panose="02020603050405020304" pitchFamily="18" charset="0"/>
+                <a:cs typeface="Times New Roman" panose="02020603050405020304" pitchFamily="18" charset="0"/>
+              </a:rPr>
+              <a:t>cursor.fetchone</a:t>
+            </a:r>
+            <a:r>
+              <a:rPr lang="pt-BR" sz="1400" dirty="0">
+                <a:latin typeface="Times New Roman" panose="02020603050405020304" pitchFamily="18" charset="0"/>
+                <a:cs typeface="Times New Roman" panose="02020603050405020304" pitchFamily="18" charset="0"/>
+              </a:rPr>
+              <a:t>()</a:t>
+            </a:r>
+          </a:p>
+          <a:p>
+            <a:pPr marL="0" indent="0" algn="just">
+              <a:buNone/>
+            </a:pPr>
+            <a:r>
+              <a:rPr lang="pt-BR" sz="1400" dirty="0" err="1">
+                <a:latin typeface="Times New Roman" panose="02020603050405020304" pitchFamily="18" charset="0"/>
+                <a:cs typeface="Times New Roman" panose="02020603050405020304" pitchFamily="18" charset="0"/>
+              </a:rPr>
+              <a:t>conn.commit</a:t>
+            </a:r>
+            <a:r>
+              <a:rPr lang="pt-BR" sz="1400" dirty="0">
+                <a:latin typeface="Times New Roman" panose="02020603050405020304" pitchFamily="18" charset="0"/>
+                <a:cs typeface="Times New Roman" panose="02020603050405020304" pitchFamily="18" charset="0"/>
+              </a:rPr>
+              <a:t>()</a:t>
+            </a:r>
+          </a:p>
+          <a:p>
+            <a:pPr marL="0" indent="0" algn="just">
+              <a:buNone/>
+            </a:pPr>
+            <a:r>
+              <a:rPr lang="pt-BR" sz="1400" dirty="0" err="1">
+                <a:latin typeface="Times New Roman" panose="02020603050405020304" pitchFamily="18" charset="0"/>
+                <a:cs typeface="Times New Roman" panose="02020603050405020304" pitchFamily="18" charset="0"/>
+              </a:rPr>
+              <a:t>if</a:t>
+            </a:r>
+            <a:r>
+              <a:rPr lang="pt-BR" sz="1400" dirty="0">
+                <a:latin typeface="Times New Roman" panose="02020603050405020304" pitchFamily="18" charset="0"/>
+                <a:cs typeface="Times New Roman" panose="02020603050405020304" pitchFamily="18" charset="0"/>
+              </a:rPr>
+              <a:t> resultado:</a:t>
+            </a:r>
+          </a:p>
+          <a:p>
+            <a:pPr marL="0" indent="0" algn="just">
+              <a:buNone/>
+            </a:pPr>
+            <a:r>
+              <a:rPr lang="pt-BR" sz="1400" dirty="0">
+                <a:latin typeface="Times New Roman" panose="02020603050405020304" pitchFamily="18" charset="0"/>
+                <a:cs typeface="Times New Roman" panose="02020603050405020304" pitchFamily="18" charset="0"/>
+              </a:rPr>
+              <a:t>    print("Atualizado com sucesso! ID:", resultado[0])</a:t>
+            </a:r>
+          </a:p>
+          <a:p>
+            <a:pPr marL="0" indent="0" algn="just">
+              <a:buNone/>
+            </a:pPr>
+            <a:r>
+              <a:rPr lang="pt-BR" sz="1400" dirty="0" err="1">
+                <a:latin typeface="Times New Roman" panose="02020603050405020304" pitchFamily="18" charset="0"/>
+                <a:cs typeface="Times New Roman" panose="02020603050405020304" pitchFamily="18" charset="0"/>
+              </a:rPr>
+              <a:t>else</a:t>
+            </a:r>
+            <a:r>
+              <a:rPr lang="pt-BR" sz="1400" dirty="0">
+                <a:latin typeface="Times New Roman" panose="02020603050405020304" pitchFamily="18" charset="0"/>
+                <a:cs typeface="Times New Roman" panose="02020603050405020304" pitchFamily="18" charset="0"/>
+              </a:rPr>
+              <a:t>:</a:t>
+            </a:r>
+          </a:p>
+          <a:p>
+            <a:pPr marL="0" indent="0" algn="just">
+              <a:buNone/>
+            </a:pPr>
+            <a:r>
+              <a:rPr lang="pt-BR" sz="1400" dirty="0">
+                <a:latin typeface="Times New Roman" panose="02020603050405020304" pitchFamily="18" charset="0"/>
+                <a:cs typeface="Times New Roman" panose="02020603050405020304" pitchFamily="18" charset="0"/>
+              </a:rPr>
+              <a:t>    print("Nenhum registro encontrado com esse ID.")</a:t>
+            </a:r>
+          </a:p>
+          <a:p>
+            <a:pPr marL="0" indent="0" algn="just">
+              <a:buNone/>
+            </a:pPr>
+            <a:r>
+              <a:rPr lang="pt-BR" sz="1400" dirty="0" err="1">
+                <a:latin typeface="Times New Roman" panose="02020603050405020304" pitchFamily="18" charset="0"/>
+                <a:cs typeface="Times New Roman" panose="02020603050405020304" pitchFamily="18" charset="0"/>
+              </a:rPr>
+              <a:t>cursor.close</a:t>
+            </a:r>
+            <a:r>
+              <a:rPr lang="pt-BR" sz="1400" dirty="0">
+                <a:latin typeface="Times New Roman" panose="02020603050405020304" pitchFamily="18" charset="0"/>
+                <a:cs typeface="Times New Roman" panose="02020603050405020304" pitchFamily="18" charset="0"/>
+              </a:rPr>
+              <a:t>()</a:t>
+            </a:r>
+          </a:p>
+          <a:p>
+            <a:pPr marL="0" indent="0" algn="just">
+              <a:buNone/>
+            </a:pPr>
+            <a:r>
+              <a:rPr lang="pt-BR" sz="1400" dirty="0" err="1">
+                <a:latin typeface="Times New Roman" panose="02020603050405020304" pitchFamily="18" charset="0"/>
+                <a:cs typeface="Times New Roman" panose="02020603050405020304" pitchFamily="18" charset="0"/>
+              </a:rPr>
+              <a:t>conn.close</a:t>
+            </a:r>
+            <a:r>
+              <a:rPr lang="pt-BR" sz="1400" dirty="0">
+                <a:latin typeface="Times New Roman" panose="02020603050405020304" pitchFamily="18" charset="0"/>
+                <a:cs typeface="Times New Roman" panose="02020603050405020304" pitchFamily="18" charset="0"/>
+              </a:rPr>
+              <a:t>()</a:t>
+            </a:r>
+          </a:p>
+        </p:txBody>
+      </p:sp>
+    </p:spTree>
+    <p:extLst>
+      <p:ext uri="{BB962C8B-B14F-4D97-AF65-F5344CB8AC3E}">
+        <p14:creationId xmlns:p14="http://schemas.microsoft.com/office/powerpoint/2010/main" val="4059298495"/>
+      </p:ext>
+    </p:extLst>
+  </p:cSld>
+  <p:clrMapOvr>
+    <a:masterClrMapping/>
+  </p:clrMapOvr>
+  <p:transition spd="med"/>
+</p:sld>
+</file>
+
+<file path=ppt/slides/slide17.xml><?xml version="1.0" encoding="utf-8"?>
+<p:sld xmlns:a="http://schemas.openxmlformats.org/drawingml/2006/main" xmlns:r="http://schemas.openxmlformats.org/officeDocument/2006/relationships" xmlns:p="http://schemas.openxmlformats.org/presentationml/2006/main">
+  <p:cSld>
+    <p:spTree>
+      <p:nvGrpSpPr>
+        <p:cNvPr id="1" name="">
+          <a:extLst>
+            <a:ext uri="{FF2B5EF4-FFF2-40B4-BE49-F238E27FC236}">
+              <a16:creationId xmlns:a16="http://schemas.microsoft.com/office/drawing/2014/main" id="{DEABBAF8-4DA9-18E9-2740-E9292954BF8F}"/>
+            </a:ext>
+          </a:extLst>
+        </p:cNvPr>
+        <p:cNvGrpSpPr/>
+        <p:nvPr/>
+      </p:nvGrpSpPr>
+      <p:grpSpPr>
+        <a:xfrm>
+          <a:off x="0" y="0"/>
+          <a:ext cx="0" cy="0"/>
+          <a:chOff x="0" y="0"/>
+          <a:chExt cx="0" cy="0"/>
+        </a:xfrm>
+      </p:grpSpPr>
+      <p:sp>
+        <p:nvSpPr>
+          <p:cNvPr id="6" name="Title 1">
+            <a:extLst>
+              <a:ext uri="{FF2B5EF4-FFF2-40B4-BE49-F238E27FC236}">
+                <a16:creationId xmlns:a16="http://schemas.microsoft.com/office/drawing/2014/main" id="{74843328-FE33-F4A4-44C0-77B7BBCE2188}"/>
+              </a:ext>
+            </a:extLst>
+          </p:cNvPr>
+          <p:cNvSpPr>
+            <a:spLocks noGrp="1"/>
+          </p:cNvSpPr>
+          <p:nvPr>
+            <p:ph type="title"/>
+          </p:nvPr>
+        </p:nvSpPr>
+        <p:spPr>
+          <a:xfrm>
+            <a:off x="237995" y="265188"/>
+            <a:ext cx="8763140" cy="596760"/>
+          </a:xfrm>
+        </p:spPr>
+        <p:txBody>
+          <a:bodyPr>
+            <a:normAutofit/>
+          </a:bodyPr>
+          <a:lstStyle/>
+          <a:p>
+            <a:pPr algn="ctr"/>
+            <a:r>
+              <a:rPr lang="en-US" b="1" dirty="0">
+                <a:solidFill>
+                  <a:srgbClr val="0070C0"/>
+                </a:solidFill>
+              </a:rPr>
+              <a:t>Python – bd </a:t>
+            </a:r>
+            <a:r>
+              <a:rPr lang="en-US" b="1" dirty="0" err="1">
+                <a:solidFill>
+                  <a:srgbClr val="0070C0"/>
+                </a:solidFill>
+              </a:rPr>
+              <a:t>postgresql</a:t>
+            </a:r>
+            <a:r>
+              <a:rPr lang="en-US" b="1" dirty="0">
+                <a:solidFill>
+                  <a:srgbClr val="0070C0"/>
+                </a:solidFill>
+              </a:rPr>
+              <a:t> – delete</a:t>
+            </a:r>
+          </a:p>
+        </p:txBody>
+      </p:sp>
+      <p:sp>
+        <p:nvSpPr>
+          <p:cNvPr id="8" name="Text Placeholder 2">
+            <a:extLst>
+              <a:ext uri="{FF2B5EF4-FFF2-40B4-BE49-F238E27FC236}">
+                <a16:creationId xmlns:a16="http://schemas.microsoft.com/office/drawing/2014/main" id="{92D42C01-2525-C8E0-E4F3-348FC8BDE5FE}"/>
+              </a:ext>
+            </a:extLst>
+          </p:cNvPr>
+          <p:cNvSpPr>
+            <a:spLocks noGrp="1"/>
+          </p:cNvSpPr>
+          <p:nvPr>
+            <p:ph type="body" sz="half" idx="1"/>
+          </p:nvPr>
+        </p:nvSpPr>
+        <p:spPr>
+          <a:xfrm>
+            <a:off x="142865" y="675531"/>
+            <a:ext cx="8865056" cy="4367116"/>
+          </a:xfrm>
+        </p:spPr>
+        <p:txBody>
+          <a:bodyPr>
+            <a:noAutofit/>
+          </a:bodyPr>
+          <a:lstStyle/>
+          <a:p>
+            <a:pPr marL="0" indent="0" algn="just">
+              <a:buNone/>
+            </a:pPr>
+            <a:r>
+              <a:rPr lang="pt-BR" sz="1400" dirty="0">
+                <a:latin typeface="Times New Roman" panose="02020603050405020304" pitchFamily="18" charset="0"/>
+                <a:cs typeface="Times New Roman" panose="02020603050405020304" pitchFamily="18" charset="0"/>
+              </a:rPr>
+              <a:t>...</a:t>
+            </a:r>
+          </a:p>
+          <a:p>
+            <a:pPr marL="0" indent="0" algn="just">
+              <a:buNone/>
+            </a:pPr>
+            <a:r>
+              <a:rPr lang="pt-BR" sz="1400" dirty="0" err="1">
+                <a:latin typeface="Times New Roman" panose="02020603050405020304" pitchFamily="18" charset="0"/>
+                <a:cs typeface="Times New Roman" panose="02020603050405020304" pitchFamily="18" charset="0"/>
+              </a:rPr>
+              <a:t>id_dep</a:t>
+            </a:r>
+            <a:r>
+              <a:rPr lang="pt-BR" sz="1400" dirty="0">
+                <a:latin typeface="Times New Roman" panose="02020603050405020304" pitchFamily="18" charset="0"/>
+                <a:cs typeface="Times New Roman" panose="02020603050405020304" pitchFamily="18" charset="0"/>
+              </a:rPr>
+              <a:t> = </a:t>
+            </a:r>
+            <a:r>
+              <a:rPr lang="pt-BR" sz="1400" dirty="0" err="1">
+                <a:latin typeface="Times New Roman" panose="02020603050405020304" pitchFamily="18" charset="0"/>
+                <a:cs typeface="Times New Roman" panose="02020603050405020304" pitchFamily="18" charset="0"/>
+              </a:rPr>
+              <a:t>int</a:t>
+            </a:r>
+            <a:r>
+              <a:rPr lang="pt-BR" sz="1400" dirty="0">
+                <a:latin typeface="Times New Roman" panose="02020603050405020304" pitchFamily="18" charset="0"/>
+                <a:cs typeface="Times New Roman" panose="02020603050405020304" pitchFamily="18" charset="0"/>
+              </a:rPr>
+              <a:t>(input("Digite o ID do departamento para deletar: "))</a:t>
+            </a:r>
+          </a:p>
+          <a:p>
+            <a:pPr marL="0" indent="0" algn="just">
+              <a:buNone/>
+            </a:pPr>
+            <a:r>
+              <a:rPr lang="pt-BR" sz="1400" dirty="0" err="1">
+                <a:latin typeface="Times New Roman" panose="02020603050405020304" pitchFamily="18" charset="0"/>
+                <a:cs typeface="Times New Roman" panose="02020603050405020304" pitchFamily="18" charset="0"/>
+              </a:rPr>
+              <a:t>sql</a:t>
+            </a:r>
+            <a:r>
+              <a:rPr lang="pt-BR" sz="1400" dirty="0">
+                <a:latin typeface="Times New Roman" panose="02020603050405020304" pitchFamily="18" charset="0"/>
+                <a:cs typeface="Times New Roman" panose="02020603050405020304" pitchFamily="18" charset="0"/>
+              </a:rPr>
+              <a:t> = "DELETE FROM </a:t>
+            </a:r>
+            <a:r>
+              <a:rPr lang="pt-BR" sz="1400" dirty="0" err="1">
+                <a:latin typeface="Times New Roman" panose="02020603050405020304" pitchFamily="18" charset="0"/>
+                <a:cs typeface="Times New Roman" panose="02020603050405020304" pitchFamily="18" charset="0"/>
+              </a:rPr>
+              <a:t>departament</a:t>
+            </a:r>
+            <a:r>
+              <a:rPr lang="pt-BR" sz="1400" dirty="0">
+                <a:latin typeface="Times New Roman" panose="02020603050405020304" pitchFamily="18" charset="0"/>
+                <a:cs typeface="Times New Roman" panose="02020603050405020304" pitchFamily="18" charset="0"/>
+              </a:rPr>
+              <a:t> WHERE id = %s RETURNING id;"</a:t>
+            </a:r>
+          </a:p>
+          <a:p>
+            <a:pPr marL="0" indent="0" algn="just">
+              <a:buNone/>
+            </a:pPr>
+            <a:r>
+              <a:rPr lang="pt-BR" sz="1400" dirty="0" err="1">
+                <a:latin typeface="Times New Roman" panose="02020603050405020304" pitchFamily="18" charset="0"/>
+                <a:cs typeface="Times New Roman" panose="02020603050405020304" pitchFamily="18" charset="0"/>
+              </a:rPr>
+              <a:t>cursor.execute</a:t>
+            </a:r>
+            <a:r>
+              <a:rPr lang="pt-BR" sz="1400" dirty="0">
+                <a:latin typeface="Times New Roman" panose="02020603050405020304" pitchFamily="18" charset="0"/>
+                <a:cs typeface="Times New Roman" panose="02020603050405020304" pitchFamily="18" charset="0"/>
+              </a:rPr>
+              <a:t>(</a:t>
+            </a:r>
+            <a:r>
+              <a:rPr lang="pt-BR" sz="1400" dirty="0" err="1">
+                <a:latin typeface="Times New Roman" panose="02020603050405020304" pitchFamily="18" charset="0"/>
+                <a:cs typeface="Times New Roman" panose="02020603050405020304" pitchFamily="18" charset="0"/>
+              </a:rPr>
+              <a:t>sql</a:t>
+            </a:r>
+            <a:r>
+              <a:rPr lang="pt-BR" sz="1400" dirty="0">
+                <a:latin typeface="Times New Roman" panose="02020603050405020304" pitchFamily="18" charset="0"/>
+                <a:cs typeface="Times New Roman" panose="02020603050405020304" pitchFamily="18" charset="0"/>
+              </a:rPr>
+              <a:t>, (</a:t>
+            </a:r>
+            <a:r>
+              <a:rPr lang="pt-BR" sz="1400" dirty="0" err="1">
+                <a:latin typeface="Times New Roman" panose="02020603050405020304" pitchFamily="18" charset="0"/>
+                <a:cs typeface="Times New Roman" panose="02020603050405020304" pitchFamily="18" charset="0"/>
+              </a:rPr>
+              <a:t>id_dep</a:t>
+            </a:r>
+            <a:r>
+              <a:rPr lang="pt-BR" sz="1400" dirty="0">
+                <a:latin typeface="Times New Roman" panose="02020603050405020304" pitchFamily="18" charset="0"/>
+                <a:cs typeface="Times New Roman" panose="02020603050405020304" pitchFamily="18" charset="0"/>
+              </a:rPr>
+              <a:t>,))</a:t>
+            </a:r>
+          </a:p>
+          <a:p>
+            <a:pPr marL="0" indent="0" algn="just">
+              <a:buNone/>
+            </a:pPr>
+            <a:r>
+              <a:rPr lang="pt-BR" sz="1400" dirty="0">
+                <a:latin typeface="Times New Roman" panose="02020603050405020304" pitchFamily="18" charset="0"/>
+                <a:cs typeface="Times New Roman" panose="02020603050405020304" pitchFamily="18" charset="0"/>
+              </a:rPr>
+              <a:t>resultado = </a:t>
+            </a:r>
+            <a:r>
+              <a:rPr lang="pt-BR" sz="1400" dirty="0" err="1">
+                <a:latin typeface="Times New Roman" panose="02020603050405020304" pitchFamily="18" charset="0"/>
+                <a:cs typeface="Times New Roman" panose="02020603050405020304" pitchFamily="18" charset="0"/>
+              </a:rPr>
+              <a:t>cursor.fetchone</a:t>
+            </a:r>
+            <a:r>
+              <a:rPr lang="pt-BR" sz="1400" dirty="0">
+                <a:latin typeface="Times New Roman" panose="02020603050405020304" pitchFamily="18" charset="0"/>
+                <a:cs typeface="Times New Roman" panose="02020603050405020304" pitchFamily="18" charset="0"/>
+              </a:rPr>
+              <a:t>()</a:t>
+            </a:r>
+          </a:p>
+          <a:p>
+            <a:pPr marL="0" indent="0" algn="just">
+              <a:buNone/>
+            </a:pPr>
+            <a:r>
+              <a:rPr lang="pt-BR" sz="1400" dirty="0" err="1">
+                <a:latin typeface="Times New Roman" panose="02020603050405020304" pitchFamily="18" charset="0"/>
+                <a:cs typeface="Times New Roman" panose="02020603050405020304" pitchFamily="18" charset="0"/>
+              </a:rPr>
+              <a:t>conn.commit</a:t>
+            </a:r>
+            <a:r>
+              <a:rPr lang="pt-BR" sz="1400" dirty="0">
+                <a:latin typeface="Times New Roman" panose="02020603050405020304" pitchFamily="18" charset="0"/>
+                <a:cs typeface="Times New Roman" panose="02020603050405020304" pitchFamily="18" charset="0"/>
+              </a:rPr>
+              <a:t>()</a:t>
+            </a:r>
+          </a:p>
+          <a:p>
+            <a:pPr marL="0" indent="0" algn="just">
+              <a:buNone/>
+            </a:pPr>
+            <a:r>
+              <a:rPr lang="pt-BR" sz="1400" dirty="0" err="1">
+                <a:latin typeface="Times New Roman" panose="02020603050405020304" pitchFamily="18" charset="0"/>
+                <a:cs typeface="Times New Roman" panose="02020603050405020304" pitchFamily="18" charset="0"/>
+              </a:rPr>
+              <a:t>if</a:t>
+            </a:r>
+            <a:r>
+              <a:rPr lang="pt-BR" sz="1400" dirty="0">
+                <a:latin typeface="Times New Roman" panose="02020603050405020304" pitchFamily="18" charset="0"/>
+                <a:cs typeface="Times New Roman" panose="02020603050405020304" pitchFamily="18" charset="0"/>
+              </a:rPr>
+              <a:t> resultado:</a:t>
+            </a:r>
+          </a:p>
+          <a:p>
+            <a:pPr marL="0" indent="0" algn="just">
+              <a:buNone/>
+            </a:pPr>
+            <a:r>
+              <a:rPr lang="pt-BR" sz="1400" dirty="0">
+                <a:latin typeface="Times New Roman" panose="02020603050405020304" pitchFamily="18" charset="0"/>
+                <a:cs typeface="Times New Roman" panose="02020603050405020304" pitchFamily="18" charset="0"/>
+              </a:rPr>
+              <a:t>    print("Deletado com sucesso! ID removido:", resultado[0])</a:t>
+            </a:r>
+          </a:p>
+          <a:p>
+            <a:pPr marL="0" indent="0" algn="just">
+              <a:buNone/>
+            </a:pPr>
+            <a:r>
+              <a:rPr lang="pt-BR" sz="1400" dirty="0" err="1">
+                <a:latin typeface="Times New Roman" panose="02020603050405020304" pitchFamily="18" charset="0"/>
+                <a:cs typeface="Times New Roman" panose="02020603050405020304" pitchFamily="18" charset="0"/>
+              </a:rPr>
+              <a:t>else</a:t>
+            </a:r>
+            <a:r>
+              <a:rPr lang="pt-BR" sz="1400" dirty="0">
+                <a:latin typeface="Times New Roman" panose="02020603050405020304" pitchFamily="18" charset="0"/>
+                <a:cs typeface="Times New Roman" panose="02020603050405020304" pitchFamily="18" charset="0"/>
+              </a:rPr>
+              <a:t>:</a:t>
+            </a:r>
+          </a:p>
+          <a:p>
+            <a:pPr marL="0" indent="0" algn="just">
+              <a:buNone/>
+            </a:pPr>
+            <a:r>
+              <a:rPr lang="pt-BR" sz="1400" dirty="0">
+                <a:latin typeface="Times New Roman" panose="02020603050405020304" pitchFamily="18" charset="0"/>
+                <a:cs typeface="Times New Roman" panose="02020603050405020304" pitchFamily="18" charset="0"/>
+              </a:rPr>
+              <a:t>    print("Nenhum registro encontrado com esse ID.")</a:t>
+            </a:r>
+          </a:p>
+          <a:p>
+            <a:pPr marL="0" indent="0" algn="just">
+              <a:buNone/>
+            </a:pPr>
+            <a:r>
+              <a:rPr lang="pt-BR" sz="1400" dirty="0" err="1">
+                <a:latin typeface="Times New Roman" panose="02020603050405020304" pitchFamily="18" charset="0"/>
+                <a:cs typeface="Times New Roman" panose="02020603050405020304" pitchFamily="18" charset="0"/>
+              </a:rPr>
+              <a:t>cursor.close</a:t>
+            </a:r>
+            <a:r>
+              <a:rPr lang="pt-BR" sz="1400" dirty="0">
+                <a:latin typeface="Times New Roman" panose="02020603050405020304" pitchFamily="18" charset="0"/>
+                <a:cs typeface="Times New Roman" panose="02020603050405020304" pitchFamily="18" charset="0"/>
+              </a:rPr>
+              <a:t>()</a:t>
+            </a:r>
+          </a:p>
+          <a:p>
+            <a:pPr marL="0" indent="0" algn="just">
+              <a:buNone/>
+            </a:pPr>
+            <a:r>
+              <a:rPr lang="pt-BR" sz="1400" dirty="0" err="1">
+                <a:latin typeface="Times New Roman" panose="02020603050405020304" pitchFamily="18" charset="0"/>
+                <a:cs typeface="Times New Roman" panose="02020603050405020304" pitchFamily="18" charset="0"/>
+              </a:rPr>
+              <a:t>conn.close</a:t>
+            </a:r>
+            <a:r>
+              <a:rPr lang="pt-BR" sz="1400" dirty="0">
+                <a:latin typeface="Times New Roman" panose="02020603050405020304" pitchFamily="18" charset="0"/>
+                <a:cs typeface="Times New Roman" panose="02020603050405020304" pitchFamily="18" charset="0"/>
+              </a:rPr>
+              <a:t>()</a:t>
+            </a:r>
+          </a:p>
+          <a:p>
+            <a:pPr marL="0" indent="0" algn="just">
+              <a:buNone/>
+            </a:pPr>
+            <a:r>
+              <a:rPr lang="pt-BR" sz="1400" dirty="0">
+                <a:latin typeface="Times New Roman" panose="02020603050405020304" pitchFamily="18" charset="0"/>
+                <a:cs typeface="Times New Roman" panose="02020603050405020304" pitchFamily="18" charset="0"/>
+              </a:rPr>
+              <a:t>print("Conexão encerrada")</a:t>
+            </a:r>
+          </a:p>
+        </p:txBody>
+      </p:sp>
+    </p:spTree>
+    <p:extLst>
+      <p:ext uri="{BB962C8B-B14F-4D97-AF65-F5344CB8AC3E}">
+        <p14:creationId xmlns:p14="http://schemas.microsoft.com/office/powerpoint/2010/main" val="472896659"/>
+      </p:ext>
+    </p:extLst>
+  </p:cSld>
+  <p:clrMapOvr>
+    <a:masterClrMapping/>
+  </p:clrMapOvr>
+  <p:transition spd="med"/>
+</p:sld>
+</file>
+
+<file path=ppt/slides/slide18.xml><?xml version="1.0" encoding="utf-8"?>
 <p:sld xmlns:a="http://schemas.openxmlformats.org/drawingml/2006/main" xmlns:r="http://schemas.openxmlformats.org/officeDocument/2006/relationships" xmlns:p="http://schemas.openxmlformats.org/presentationml/2006/main">
   <p:cSld>
     <p:spTree>
@@ -6470,7 +9627,7 @@
 </p:sld>
 </file>
 
-<file path=ppt/slides/slide13.xml><?xml version="1.0" encoding="utf-8"?>
+<file path=ppt/slides/slide19.xml><?xml version="1.0" encoding="utf-8"?>
 <p:sld xmlns:a="http://schemas.openxmlformats.org/drawingml/2006/main" xmlns:r="http://schemas.openxmlformats.org/officeDocument/2006/relationships" xmlns:p="http://schemas.openxmlformats.org/presentationml/2006/main">
   <p:cSld>
     <p:spTree>
@@ -6607,815 +9764,6 @@
     <a:masterClrMapping/>
   </p:clrMapOvr>
   <p:transition spd="med"/>
-</p:sld>
-</file>
-
-<file path=ppt/slides/slide14.xml><?xml version="1.0" encoding="utf-8"?>
-<p:sld xmlns:a="http://schemas.openxmlformats.org/drawingml/2006/main" xmlns:r="http://schemas.openxmlformats.org/officeDocument/2006/relationships" xmlns:p="http://schemas.openxmlformats.org/presentationml/2006/main">
-  <p:cSld>
-    <p:spTree>
-      <p:nvGrpSpPr>
-        <p:cNvPr id="1" name=""/>
-        <p:cNvGrpSpPr/>
-        <p:nvPr/>
-      </p:nvGrpSpPr>
-      <p:grpSpPr>
-        <a:xfrm>
-          <a:off x="0" y="0"/>
-          <a:ext cx="0" cy="0"/>
-          <a:chOff x="0" y="0"/>
-          <a:chExt cx="0" cy="0"/>
-        </a:xfrm>
-      </p:grpSpPr>
-      <p:sp>
-        <p:nvSpPr>
-          <p:cNvPr id="6" name="Title 1"/>
-          <p:cNvSpPr>
-            <a:spLocks noGrp="1"/>
-          </p:cNvSpPr>
-          <p:nvPr>
-            <p:ph type="title"/>
-          </p:nvPr>
-        </p:nvSpPr>
-        <p:spPr/>
-        <p:txBody>
-          <a:bodyPr>
-            <a:normAutofit/>
-          </a:bodyPr>
-          <a:lstStyle/>
-          <a:p>
-            <a:r>
-              <a:rPr lang="en-US" b="1" dirty="0" err="1">
-                <a:solidFill>
-                  <a:srgbClr val="0070C0"/>
-                </a:solidFill>
-              </a:rPr>
-              <a:t>Dinâmica</a:t>
-            </a:r>
-            <a:r>
-              <a:rPr lang="en-US" b="1" dirty="0">
-                <a:solidFill>
-                  <a:srgbClr val="0070C0"/>
-                </a:solidFill>
-              </a:rPr>
-              <a:t>/</a:t>
-            </a:r>
-            <a:r>
-              <a:rPr lang="en-US" b="1" dirty="0" err="1">
-                <a:solidFill>
-                  <a:srgbClr val="0070C0"/>
-                </a:solidFill>
-              </a:rPr>
-              <a:t>Atividades</a:t>
-            </a:r>
-            <a:endParaRPr lang="en-US" b="1" dirty="0">
-              <a:solidFill>
-                <a:srgbClr val="0070C0"/>
-              </a:solidFill>
-            </a:endParaRPr>
-          </a:p>
-        </p:txBody>
-      </p:sp>
-      <p:sp>
-        <p:nvSpPr>
-          <p:cNvPr id="8" name="Text Placeholder 2"/>
-          <p:cNvSpPr>
-            <a:spLocks noGrp="1"/>
-          </p:cNvSpPr>
-          <p:nvPr>
-            <p:ph type="body" sz="half" idx="1"/>
-          </p:nvPr>
-        </p:nvSpPr>
-        <p:spPr>
-          <a:xfrm>
-            <a:off x="139472" y="1063230"/>
-            <a:ext cx="8865056" cy="3606305"/>
-          </a:xfrm>
-        </p:spPr>
-        <p:txBody>
-          <a:bodyPr>
-            <a:noAutofit/>
-          </a:bodyPr>
-          <a:lstStyle/>
-          <a:p>
-            <a:pPr algn="just">
-              <a:buFontTx/>
-              <a:buChar char="-"/>
-            </a:pPr>
-            <a:r>
-              <a:rPr lang="pt-BR" b="1" dirty="0">
-                <a:latin typeface="Times New Roman" panose="02020603050405020304" pitchFamily="18" charset="0"/>
-                <a:cs typeface="Times New Roman" panose="02020603050405020304" pitchFamily="18" charset="0"/>
-              </a:rPr>
-              <a:t>Exercícios de Fixação</a:t>
-            </a:r>
-          </a:p>
-          <a:p>
-            <a:pPr marL="0" indent="0" algn="just">
-              <a:buNone/>
-            </a:pPr>
-            <a:r>
-              <a:rPr lang="pt-BR" dirty="0">
-                <a:latin typeface="Times New Roman" panose="02020603050405020304" pitchFamily="18" charset="0"/>
-                <a:cs typeface="Times New Roman" panose="02020603050405020304" pitchFamily="18" charset="0"/>
-              </a:rPr>
-              <a:t>	Desafios em Sala de Aula.</a:t>
-            </a:r>
-          </a:p>
-          <a:p>
-            <a:pPr marL="0" indent="0" algn="just">
-              <a:buNone/>
-            </a:pPr>
-            <a:endParaRPr lang="pt-BR" dirty="0">
-              <a:latin typeface="Times New Roman" panose="02020603050405020304" pitchFamily="18" charset="0"/>
-              <a:cs typeface="Times New Roman" panose="02020603050405020304" pitchFamily="18" charset="0"/>
-            </a:endParaRPr>
-          </a:p>
-          <a:p>
-            <a:pPr algn="just">
-              <a:buFontTx/>
-              <a:buChar char="-"/>
-            </a:pPr>
-            <a:r>
-              <a:rPr lang="pt-BR" b="1" dirty="0">
-                <a:solidFill>
-                  <a:srgbClr val="FF0000"/>
-                </a:solidFill>
-                <a:latin typeface="Times New Roman" panose="02020603050405020304" pitchFamily="18" charset="0"/>
-                <a:cs typeface="Times New Roman" panose="02020603050405020304" pitchFamily="18" charset="0"/>
-              </a:rPr>
-              <a:t>Atividade (domínio – livre escolha)</a:t>
-            </a:r>
-          </a:p>
-          <a:p>
-            <a:pPr marL="0" indent="0" algn="just">
-              <a:buNone/>
-            </a:pPr>
-            <a:r>
-              <a:rPr lang="pt-BR" dirty="0">
-                <a:latin typeface="Times New Roman" panose="02020603050405020304" pitchFamily="18" charset="0"/>
-                <a:cs typeface="Times New Roman" panose="02020603050405020304" pitchFamily="18" charset="0"/>
-              </a:rPr>
-              <a:t>	Criar uma app, implementando um CRUD.</a:t>
-            </a:r>
-          </a:p>
-          <a:p>
-            <a:pPr marL="0" indent="0" algn="just">
-              <a:buNone/>
-            </a:pPr>
-            <a:endParaRPr lang="pt-BR" dirty="0">
-              <a:latin typeface="Times New Roman" panose="02020603050405020304" pitchFamily="18" charset="0"/>
-              <a:cs typeface="Times New Roman" panose="02020603050405020304" pitchFamily="18" charset="0"/>
-            </a:endParaRPr>
-          </a:p>
-          <a:p>
-            <a:pPr marL="0" indent="0" algn="just">
-              <a:buNone/>
-            </a:pPr>
-            <a:endParaRPr lang="pt-BR" dirty="0">
-              <a:latin typeface="Times New Roman" panose="02020603050405020304" pitchFamily="18" charset="0"/>
-              <a:cs typeface="Times New Roman" panose="02020603050405020304" pitchFamily="18" charset="0"/>
-            </a:endParaRPr>
-          </a:p>
-        </p:txBody>
-      </p:sp>
-    </p:spTree>
-    <p:extLst>
-      <p:ext uri="{BB962C8B-B14F-4D97-AF65-F5344CB8AC3E}">
-        <p14:creationId xmlns:p14="http://schemas.microsoft.com/office/powerpoint/2010/main" val="2470652989"/>
-      </p:ext>
-    </p:extLst>
-  </p:cSld>
-  <p:clrMapOvr>
-    <a:masterClrMapping/>
-  </p:clrMapOvr>
-  <p:transition spd="med"/>
-</p:sld>
-</file>
-
-<file path=ppt/slides/slide15.xml><?xml version="1.0" encoding="utf-8"?>
-<p:sld xmlns:a="http://schemas.openxmlformats.org/drawingml/2006/main" xmlns:r="http://schemas.openxmlformats.org/officeDocument/2006/relationships" xmlns:p="http://schemas.openxmlformats.org/presentationml/2006/main">
-  <p:cSld>
-    <p:spTree>
-      <p:nvGrpSpPr>
-        <p:cNvPr id="1" name=""/>
-        <p:cNvGrpSpPr/>
-        <p:nvPr/>
-      </p:nvGrpSpPr>
-      <p:grpSpPr>
-        <a:xfrm>
-          <a:off x="0" y="0"/>
-          <a:ext cx="0" cy="0"/>
-          <a:chOff x="0" y="0"/>
-          <a:chExt cx="0" cy="0"/>
-        </a:xfrm>
-      </p:grpSpPr>
-      <p:sp>
-        <p:nvSpPr>
-          <p:cNvPr id="6" name="Title 1"/>
-          <p:cNvSpPr>
-            <a:spLocks noGrp="1"/>
-          </p:cNvSpPr>
-          <p:nvPr>
-            <p:ph type="title"/>
-          </p:nvPr>
-        </p:nvSpPr>
-        <p:spPr/>
-        <p:txBody>
-          <a:bodyPr>
-            <a:normAutofit/>
-          </a:bodyPr>
-          <a:lstStyle/>
-          <a:p>
-            <a:r>
-              <a:rPr lang="en-US" b="1" dirty="0" err="1">
-                <a:solidFill>
-                  <a:srgbClr val="0070C0"/>
-                </a:solidFill>
-              </a:rPr>
-              <a:t>Referências</a:t>
-            </a:r>
-            <a:r>
-              <a:rPr lang="en-US" b="1" dirty="0">
-                <a:solidFill>
-                  <a:srgbClr val="0070C0"/>
-                </a:solidFill>
-              </a:rPr>
-              <a:t> </a:t>
-            </a:r>
-            <a:r>
-              <a:rPr lang="en-US" b="1" dirty="0" err="1">
-                <a:solidFill>
-                  <a:srgbClr val="0070C0"/>
-                </a:solidFill>
-              </a:rPr>
-              <a:t>Bibliográficas</a:t>
-            </a:r>
-            <a:endParaRPr lang="en-US" b="1" dirty="0">
-              <a:solidFill>
-                <a:srgbClr val="0070C0"/>
-              </a:solidFill>
-            </a:endParaRPr>
-          </a:p>
-        </p:txBody>
-      </p:sp>
-      <p:sp>
-        <p:nvSpPr>
-          <p:cNvPr id="8" name="Text Placeholder 2"/>
-          <p:cNvSpPr>
-            <a:spLocks noGrp="1"/>
-          </p:cNvSpPr>
-          <p:nvPr>
-            <p:ph type="body" sz="half" idx="1"/>
-          </p:nvPr>
-        </p:nvSpPr>
-        <p:spPr>
-          <a:xfrm>
-            <a:off x="142865" y="1200151"/>
-            <a:ext cx="8865056" cy="3394472"/>
-          </a:xfrm>
-        </p:spPr>
-        <p:txBody>
-          <a:bodyPr>
-            <a:noAutofit/>
-          </a:bodyPr>
-          <a:lstStyle/>
-          <a:p>
-            <a:pPr marL="0" indent="0" algn="just">
-              <a:buNone/>
-            </a:pPr>
-            <a:endParaRPr lang="pt-BR" sz="1800" dirty="0">
-              <a:latin typeface="Times New Roman" panose="02020603050405020304" pitchFamily="18" charset="0"/>
-              <a:cs typeface="Times New Roman" panose="02020603050405020304" pitchFamily="18" charset="0"/>
-            </a:endParaRPr>
-          </a:p>
-          <a:p>
-            <a:pPr marL="0" indent="0" algn="just">
-              <a:buNone/>
-            </a:pPr>
-            <a:r>
-              <a:rPr lang="pt-BR" sz="1800" dirty="0">
-                <a:latin typeface="Times New Roman" panose="02020603050405020304" pitchFamily="18" charset="0"/>
-                <a:cs typeface="Times New Roman" panose="02020603050405020304" pitchFamily="18" charset="0"/>
-              </a:rPr>
-              <a:t>[1] SEBESTA, Robert W. Conceitos de Linguagens de Programação. 11. edição. Porto Alegre: Bookman, 2018., Capítulo 1 (Preliminares).</a:t>
-            </a:r>
-          </a:p>
-          <a:p>
-            <a:pPr marL="0" indent="0" algn="just">
-              <a:buNone/>
-            </a:pPr>
-            <a:endParaRPr lang="pt-BR" sz="1800" dirty="0">
-              <a:latin typeface="Times New Roman" panose="02020603050405020304" pitchFamily="18" charset="0"/>
-              <a:cs typeface="Times New Roman" panose="02020603050405020304" pitchFamily="18" charset="0"/>
-            </a:endParaRPr>
-          </a:p>
-          <a:p>
-            <a:pPr marL="0" indent="0" algn="just">
-              <a:buNone/>
-            </a:pPr>
-            <a:r>
-              <a:rPr lang="pt-BR" sz="1800" dirty="0">
-                <a:latin typeface="Times New Roman" panose="02020603050405020304" pitchFamily="18" charset="0"/>
-                <a:cs typeface="Times New Roman" panose="02020603050405020304" pitchFamily="18" charset="0"/>
-              </a:rPr>
-              <a:t>[2] BORGES, Luiz Eduardo. Python para desenvolvedores: aborda Python 3.3. </a:t>
-            </a:r>
-            <a:r>
-              <a:rPr lang="pt-BR" sz="1800" dirty="0" err="1">
-                <a:latin typeface="Times New Roman" panose="02020603050405020304" pitchFamily="18" charset="0"/>
-                <a:cs typeface="Times New Roman" panose="02020603050405020304" pitchFamily="18" charset="0"/>
-              </a:rPr>
-              <a:t>Novatec</a:t>
-            </a:r>
-            <a:r>
-              <a:rPr lang="pt-BR" sz="1800" dirty="0">
-                <a:latin typeface="Times New Roman" panose="02020603050405020304" pitchFamily="18" charset="0"/>
-                <a:cs typeface="Times New Roman" panose="02020603050405020304" pitchFamily="18" charset="0"/>
-              </a:rPr>
-              <a:t> Editora, 2014.</a:t>
-            </a:r>
-          </a:p>
-          <a:p>
-            <a:pPr marL="0" indent="0" algn="just">
-              <a:buNone/>
-            </a:pPr>
-            <a:endParaRPr lang="pt-BR" sz="1800" dirty="0">
-              <a:latin typeface="Times New Roman" panose="02020603050405020304" pitchFamily="18" charset="0"/>
-              <a:cs typeface="Times New Roman" panose="02020603050405020304" pitchFamily="18" charset="0"/>
-            </a:endParaRPr>
-          </a:p>
-        </p:txBody>
-      </p:sp>
-    </p:spTree>
-    <p:extLst>
-      <p:ext uri="{BB962C8B-B14F-4D97-AF65-F5344CB8AC3E}">
-        <p14:creationId xmlns:p14="http://schemas.microsoft.com/office/powerpoint/2010/main" val="1115311843"/>
-      </p:ext>
-    </p:extLst>
-  </p:cSld>
-  <p:clrMapOvr>
-    <a:masterClrMapping/>
-  </p:clrMapOvr>
-  <p:transition spd="med"/>
-</p:sld>
-</file>
-
-<file path=ppt/slides/slide16.xml><?xml version="1.0" encoding="utf-8"?>
-<p:sld xmlns:a="http://schemas.openxmlformats.org/drawingml/2006/main" xmlns:r="http://schemas.openxmlformats.org/officeDocument/2006/relationships" xmlns:p="http://schemas.openxmlformats.org/presentationml/2006/main">
-  <p:cSld>
-    <p:spTree>
-      <p:nvGrpSpPr>
-        <p:cNvPr id="1" name=""/>
-        <p:cNvGrpSpPr/>
-        <p:nvPr/>
-      </p:nvGrpSpPr>
-      <p:grpSpPr>
-        <a:xfrm>
-          <a:off x="0" y="0"/>
-          <a:ext cx="0" cy="0"/>
-          <a:chOff x="0" y="0"/>
-          <a:chExt cx="0" cy="0"/>
-        </a:xfrm>
-      </p:grpSpPr>
-      <p:pic>
-        <p:nvPicPr>
-          <p:cNvPr id="112" name="Picture 6" descr="Picture 6"/>
-          <p:cNvPicPr>
-            <a:picLocks noChangeAspect="1"/>
-          </p:cNvPicPr>
-          <p:nvPr/>
-        </p:nvPicPr>
-        <p:blipFill>
-          <a:blip r:embed="rId2"/>
-          <a:stretch>
-            <a:fillRect/>
-          </a:stretch>
-        </p:blipFill>
-        <p:spPr>
-          <a:xfrm>
-            <a:off x="0" y="0"/>
-            <a:ext cx="9144000" cy="5143500"/>
-          </a:xfrm>
-          <a:prstGeom prst="rect">
-            <a:avLst/>
-          </a:prstGeom>
-          <a:ln w="12700">
-            <a:miter lim="400000"/>
-            <a:headEnd/>
-            <a:tailEnd/>
-          </a:ln>
-        </p:spPr>
-      </p:pic>
-      <p:pic>
-        <p:nvPicPr>
-          <p:cNvPr id="114" name="Picture 5" descr="Picture 5"/>
-          <p:cNvPicPr>
-            <a:picLocks noChangeAspect="1"/>
-          </p:cNvPicPr>
-          <p:nvPr/>
-        </p:nvPicPr>
-        <p:blipFill>
-          <a:blip r:embed="rId3"/>
-          <a:stretch>
-            <a:fillRect/>
-          </a:stretch>
-        </p:blipFill>
-        <p:spPr>
-          <a:xfrm>
-            <a:off x="469900" y="0"/>
-            <a:ext cx="4391984" cy="171450"/>
-          </a:xfrm>
-          <a:prstGeom prst="rect">
-            <a:avLst/>
-          </a:prstGeom>
-          <a:ln w="12700">
-            <a:miter lim="400000"/>
-            <a:headEnd/>
-            <a:tailEnd/>
-          </a:ln>
-        </p:spPr>
-      </p:pic>
-      <p:pic>
-        <p:nvPicPr>
-          <p:cNvPr id="115" name="Imagem" descr="Imagem"/>
-          <p:cNvPicPr>
-            <a:picLocks noChangeAspect="1"/>
-          </p:cNvPicPr>
-          <p:nvPr/>
-        </p:nvPicPr>
-        <p:blipFill>
-          <a:blip r:embed="rId4"/>
-          <a:stretch>
-            <a:fillRect/>
-          </a:stretch>
-        </p:blipFill>
-        <p:spPr>
-          <a:xfrm>
-            <a:off x="823046" y="300823"/>
-            <a:ext cx="3685692" cy="1189055"/>
-          </a:xfrm>
-          <a:prstGeom prst="rect">
-            <a:avLst/>
-          </a:prstGeom>
-          <a:ln w="12700">
-            <a:miter lim="400000"/>
-            <a:headEnd/>
-            <a:tailEnd/>
-          </a:ln>
-        </p:spPr>
-      </p:pic>
-      <p:sp>
-        <p:nvSpPr>
-          <p:cNvPr id="3" name="Título 2"/>
-          <p:cNvSpPr>
-            <a:spLocks noGrp="1"/>
-          </p:cNvSpPr>
-          <p:nvPr>
-            <p:ph type="ctrTitle"/>
-          </p:nvPr>
-        </p:nvSpPr>
-        <p:spPr>
-          <a:xfrm>
-            <a:off x="348258" y="2277667"/>
-            <a:ext cx="8681444" cy="1102519"/>
-          </a:xfrm>
-        </p:spPr>
-        <p:txBody>
-          <a:bodyPr>
-            <a:noAutofit/>
-          </a:bodyPr>
-          <a:lstStyle/>
-          <a:p>
-            <a:pPr algn="ctr"/>
-            <a:r>
-              <a:rPr lang="pt-BR" sz="3200" b="1" dirty="0">
-                <a:solidFill>
-                  <a:schemeClr val="bg1"/>
-                </a:solidFill>
-                <a:latin typeface="Calibri" panose="020F0502020204030204" pitchFamily="34" charset="0"/>
-                <a:cs typeface="Calibri" panose="020F0502020204030204" pitchFamily="34" charset="0"/>
-              </a:rPr>
-              <a:t>Desenvolvimento Rápido de Aplicações em Python</a:t>
-            </a:r>
-          </a:p>
-        </p:txBody>
-      </p:sp>
-      <p:sp>
-        <p:nvSpPr>
-          <p:cNvPr id="6" name="Título 2"/>
-          <p:cNvSpPr txBox="1"/>
-          <p:nvPr/>
-        </p:nvSpPr>
-        <p:spPr>
-          <a:xfrm>
-            <a:off x="975683" y="3866663"/>
-            <a:ext cx="7772400" cy="1102519"/>
-          </a:xfrm>
-          <a:prstGeom prst="rect">
-            <a:avLst/>
-          </a:prstGeom>
-          <a:ln w="12700">
-            <a:miter lim="400000"/>
-          </a:ln>
-        </p:spPr>
-        <p:txBody>
-          <a:bodyPr lIns="45718" tIns="45718" rIns="45718" bIns="45718" anchor="ctr">
-            <a:noAutofit/>
-          </a:bodyPr>
-          <a:lstStyle>
-            <a:lvl1pPr marL="0" marR="0" indent="0" algn="ctr" defTabSz="457200" rtl="0" latinLnBrk="0">
-              <a:lnSpc>
-                <a:spcPct val="100000"/>
-              </a:lnSpc>
-              <a:spcBef>
-                <a:spcPts val="0"/>
-              </a:spcBef>
-              <a:spcAft>
-                <a:spcPts val="0"/>
-              </a:spcAft>
-              <a:buClrTx/>
-              <a:buSzTx/>
-              <a:buFontTx/>
-              <a:buNone/>
-              <a:defRPr sz="4400" b="0" i="0" u="none" strike="noStrike" cap="none" spc="0" baseline="0">
-                <a:ln>
-                  <a:noFill/>
-                </a:ln>
-                <a:solidFill>
-                  <a:srgbClr val="000000"/>
-                </a:solidFill>
-                <a:uFillTx/>
-                <a:latin typeface="+mj-lt"/>
-                <a:ea typeface="+mj-ea"/>
-                <a:cs typeface="+mj-cs"/>
-                <a:sym typeface="Calibri"/>
-              </a:defRPr>
-            </a:lvl1pPr>
-            <a:lvl2pPr marL="0" marR="0" indent="0" algn="ctr" defTabSz="457200" rtl="0" latinLnBrk="0">
-              <a:lnSpc>
-                <a:spcPct val="100000"/>
-              </a:lnSpc>
-              <a:spcBef>
-                <a:spcPts val="0"/>
-              </a:spcBef>
-              <a:spcAft>
-                <a:spcPts val="0"/>
-              </a:spcAft>
-              <a:buClrTx/>
-              <a:buSzTx/>
-              <a:buFontTx/>
-              <a:buNone/>
-              <a:defRPr sz="4400" b="0" i="0" u="none" strike="noStrike" cap="none" spc="0" baseline="0">
-                <a:ln>
-                  <a:noFill/>
-                </a:ln>
-                <a:solidFill>
-                  <a:srgbClr val="000000"/>
-                </a:solidFill>
-                <a:uFillTx/>
-                <a:latin typeface="+mj-lt"/>
-                <a:ea typeface="+mj-ea"/>
-                <a:cs typeface="+mj-cs"/>
-                <a:sym typeface="Calibri"/>
-              </a:defRPr>
-            </a:lvl2pPr>
-            <a:lvl3pPr marL="0" marR="0" indent="0" algn="ctr" defTabSz="457200" rtl="0" latinLnBrk="0">
-              <a:lnSpc>
-                <a:spcPct val="100000"/>
-              </a:lnSpc>
-              <a:spcBef>
-                <a:spcPts val="0"/>
-              </a:spcBef>
-              <a:spcAft>
-                <a:spcPts val="0"/>
-              </a:spcAft>
-              <a:buClrTx/>
-              <a:buSzTx/>
-              <a:buFontTx/>
-              <a:buNone/>
-              <a:defRPr sz="4400" b="0" i="0" u="none" strike="noStrike" cap="none" spc="0" baseline="0">
-                <a:ln>
-                  <a:noFill/>
-                </a:ln>
-                <a:solidFill>
-                  <a:srgbClr val="000000"/>
-                </a:solidFill>
-                <a:uFillTx/>
-                <a:latin typeface="+mj-lt"/>
-                <a:ea typeface="+mj-ea"/>
-                <a:cs typeface="+mj-cs"/>
-                <a:sym typeface="Calibri"/>
-              </a:defRPr>
-            </a:lvl3pPr>
-            <a:lvl4pPr marL="0" marR="0" indent="0" algn="ctr" defTabSz="457200" rtl="0" latinLnBrk="0">
-              <a:lnSpc>
-                <a:spcPct val="100000"/>
-              </a:lnSpc>
-              <a:spcBef>
-                <a:spcPts val="0"/>
-              </a:spcBef>
-              <a:spcAft>
-                <a:spcPts val="0"/>
-              </a:spcAft>
-              <a:buClrTx/>
-              <a:buSzTx/>
-              <a:buFontTx/>
-              <a:buNone/>
-              <a:defRPr sz="4400" b="0" i="0" u="none" strike="noStrike" cap="none" spc="0" baseline="0">
-                <a:ln>
-                  <a:noFill/>
-                </a:ln>
-                <a:solidFill>
-                  <a:srgbClr val="000000"/>
-                </a:solidFill>
-                <a:uFillTx/>
-                <a:latin typeface="+mj-lt"/>
-                <a:ea typeface="+mj-ea"/>
-                <a:cs typeface="+mj-cs"/>
-                <a:sym typeface="Calibri"/>
-              </a:defRPr>
-            </a:lvl4pPr>
-            <a:lvl5pPr marL="0" marR="0" indent="0" algn="ctr" defTabSz="457200" rtl="0" latinLnBrk="0">
-              <a:lnSpc>
-                <a:spcPct val="100000"/>
-              </a:lnSpc>
-              <a:spcBef>
-                <a:spcPts val="0"/>
-              </a:spcBef>
-              <a:spcAft>
-                <a:spcPts val="0"/>
-              </a:spcAft>
-              <a:buClrTx/>
-              <a:buSzTx/>
-              <a:buFontTx/>
-              <a:buNone/>
-              <a:defRPr sz="4400" b="0" i="0" u="none" strike="noStrike" cap="none" spc="0" baseline="0">
-                <a:ln>
-                  <a:noFill/>
-                </a:ln>
-                <a:solidFill>
-                  <a:srgbClr val="000000"/>
-                </a:solidFill>
-                <a:uFillTx/>
-                <a:latin typeface="+mj-lt"/>
-                <a:ea typeface="+mj-ea"/>
-                <a:cs typeface="+mj-cs"/>
-                <a:sym typeface="Calibri"/>
-              </a:defRPr>
-            </a:lvl5pPr>
-            <a:lvl6pPr marL="0" marR="0" indent="0" algn="ctr" defTabSz="457200" rtl="0" latinLnBrk="0">
-              <a:lnSpc>
-                <a:spcPct val="100000"/>
-              </a:lnSpc>
-              <a:spcBef>
-                <a:spcPts val="0"/>
-              </a:spcBef>
-              <a:spcAft>
-                <a:spcPts val="0"/>
-              </a:spcAft>
-              <a:buClrTx/>
-              <a:buSzTx/>
-              <a:buFontTx/>
-              <a:buNone/>
-              <a:defRPr sz="4400" b="0" i="0" u="none" strike="noStrike" cap="none" spc="0" baseline="0">
-                <a:ln>
-                  <a:noFill/>
-                </a:ln>
-                <a:solidFill>
-                  <a:srgbClr val="000000"/>
-                </a:solidFill>
-                <a:uFillTx/>
-                <a:latin typeface="+mj-lt"/>
-                <a:ea typeface="+mj-ea"/>
-                <a:cs typeface="+mj-cs"/>
-                <a:sym typeface="Calibri"/>
-              </a:defRPr>
-            </a:lvl6pPr>
-            <a:lvl7pPr marL="0" marR="0" indent="0" algn="ctr" defTabSz="457200" rtl="0" latinLnBrk="0">
-              <a:lnSpc>
-                <a:spcPct val="100000"/>
-              </a:lnSpc>
-              <a:spcBef>
-                <a:spcPts val="0"/>
-              </a:spcBef>
-              <a:spcAft>
-                <a:spcPts val="0"/>
-              </a:spcAft>
-              <a:buClrTx/>
-              <a:buSzTx/>
-              <a:buFontTx/>
-              <a:buNone/>
-              <a:defRPr sz="4400" b="0" i="0" u="none" strike="noStrike" cap="none" spc="0" baseline="0">
-                <a:ln>
-                  <a:noFill/>
-                </a:ln>
-                <a:solidFill>
-                  <a:srgbClr val="000000"/>
-                </a:solidFill>
-                <a:uFillTx/>
-                <a:latin typeface="+mj-lt"/>
-                <a:ea typeface="+mj-ea"/>
-                <a:cs typeface="+mj-cs"/>
-                <a:sym typeface="Calibri"/>
-              </a:defRPr>
-            </a:lvl7pPr>
-            <a:lvl8pPr marL="0" marR="0" indent="0" algn="ctr" defTabSz="457200" rtl="0" latinLnBrk="0">
-              <a:lnSpc>
-                <a:spcPct val="100000"/>
-              </a:lnSpc>
-              <a:spcBef>
-                <a:spcPts val="0"/>
-              </a:spcBef>
-              <a:spcAft>
-                <a:spcPts val="0"/>
-              </a:spcAft>
-              <a:buClrTx/>
-              <a:buSzTx/>
-              <a:buFontTx/>
-              <a:buNone/>
-              <a:defRPr sz="4400" b="0" i="0" u="none" strike="noStrike" cap="none" spc="0" baseline="0">
-                <a:ln>
-                  <a:noFill/>
-                </a:ln>
-                <a:solidFill>
-                  <a:srgbClr val="000000"/>
-                </a:solidFill>
-                <a:uFillTx/>
-                <a:latin typeface="+mj-lt"/>
-                <a:ea typeface="+mj-ea"/>
-                <a:cs typeface="+mj-cs"/>
-                <a:sym typeface="Calibri"/>
-              </a:defRPr>
-            </a:lvl8pPr>
-            <a:lvl9pPr marL="0" marR="0" indent="0" algn="ctr" defTabSz="457200" rtl="0" latinLnBrk="0">
-              <a:lnSpc>
-                <a:spcPct val="100000"/>
-              </a:lnSpc>
-              <a:spcBef>
-                <a:spcPts val="0"/>
-              </a:spcBef>
-              <a:spcAft>
-                <a:spcPts val="0"/>
-              </a:spcAft>
-              <a:buClrTx/>
-              <a:buSzTx/>
-              <a:buFontTx/>
-              <a:buNone/>
-              <a:defRPr sz="4400" b="0" i="0" u="none" strike="noStrike" cap="none" spc="0" baseline="0">
-                <a:ln>
-                  <a:noFill/>
-                </a:ln>
-                <a:solidFill>
-                  <a:srgbClr val="000000"/>
-                </a:solidFill>
-                <a:uFillTx/>
-                <a:latin typeface="+mj-lt"/>
-                <a:ea typeface="+mj-ea"/>
-                <a:cs typeface="+mj-cs"/>
-                <a:sym typeface="Calibri"/>
-              </a:defRPr>
-            </a:lvl9pPr>
-          </a:lstStyle>
-          <a:p>
-            <a:pPr algn="r" hangingPunct="1"/>
-            <a:r>
-              <a:rPr lang="pt-BR" sz="2000" b="1" dirty="0">
-                <a:solidFill>
-                  <a:schemeClr val="bg1"/>
-                </a:solidFill>
-              </a:rPr>
-              <a:t>Professor </a:t>
-            </a:r>
-            <a:r>
-              <a:rPr lang="pt-BR" sz="2000" b="1" dirty="0" err="1">
-                <a:solidFill>
-                  <a:schemeClr val="bg1"/>
-                </a:solidFill>
-              </a:rPr>
-              <a:t>MSc</a:t>
-            </a:r>
-            <a:r>
-              <a:rPr lang="pt-BR" sz="2000" b="1" dirty="0">
-                <a:solidFill>
-                  <a:schemeClr val="bg1"/>
-                </a:solidFill>
-              </a:rPr>
-              <a:t>. Heleno Cardoso</a:t>
-            </a:r>
-          </a:p>
-        </p:txBody>
-      </p:sp>
-    </p:spTree>
-    <p:extLst>
-      <p:ext uri="{BB962C8B-B14F-4D97-AF65-F5344CB8AC3E}">
-        <p14:creationId xmlns:p14="http://schemas.microsoft.com/office/powerpoint/2010/main" val="1923557891"/>
-      </p:ext>
-    </p:extLst>
-  </p:cSld>
-  <p:clrMapOvr>
-    <a:masterClrMapping/>
-  </p:clrMapOvr>
 </p:sld>
 </file>
 
@@ -7890,6 +10238,815 @@
 </p:sld>
 </file>
 
+<file path=ppt/slides/slide20.xml><?xml version="1.0" encoding="utf-8"?>
+<p:sld xmlns:a="http://schemas.openxmlformats.org/drawingml/2006/main" xmlns:r="http://schemas.openxmlformats.org/officeDocument/2006/relationships" xmlns:p="http://schemas.openxmlformats.org/presentationml/2006/main">
+  <p:cSld>
+    <p:spTree>
+      <p:nvGrpSpPr>
+        <p:cNvPr id="1" name=""/>
+        <p:cNvGrpSpPr/>
+        <p:nvPr/>
+      </p:nvGrpSpPr>
+      <p:grpSpPr>
+        <a:xfrm>
+          <a:off x="0" y="0"/>
+          <a:ext cx="0" cy="0"/>
+          <a:chOff x="0" y="0"/>
+          <a:chExt cx="0" cy="0"/>
+        </a:xfrm>
+      </p:grpSpPr>
+      <p:sp>
+        <p:nvSpPr>
+          <p:cNvPr id="6" name="Title 1"/>
+          <p:cNvSpPr>
+            <a:spLocks noGrp="1"/>
+          </p:cNvSpPr>
+          <p:nvPr>
+            <p:ph type="title"/>
+          </p:nvPr>
+        </p:nvSpPr>
+        <p:spPr/>
+        <p:txBody>
+          <a:bodyPr>
+            <a:normAutofit/>
+          </a:bodyPr>
+          <a:lstStyle/>
+          <a:p>
+            <a:r>
+              <a:rPr lang="en-US" b="1" dirty="0" err="1">
+                <a:solidFill>
+                  <a:srgbClr val="0070C0"/>
+                </a:solidFill>
+              </a:rPr>
+              <a:t>Dinâmica</a:t>
+            </a:r>
+            <a:r>
+              <a:rPr lang="en-US" b="1" dirty="0">
+                <a:solidFill>
+                  <a:srgbClr val="0070C0"/>
+                </a:solidFill>
+              </a:rPr>
+              <a:t>/</a:t>
+            </a:r>
+            <a:r>
+              <a:rPr lang="en-US" b="1" dirty="0" err="1">
+                <a:solidFill>
+                  <a:srgbClr val="0070C0"/>
+                </a:solidFill>
+              </a:rPr>
+              <a:t>Atividades</a:t>
+            </a:r>
+            <a:endParaRPr lang="en-US" b="1" dirty="0">
+              <a:solidFill>
+                <a:srgbClr val="0070C0"/>
+              </a:solidFill>
+            </a:endParaRPr>
+          </a:p>
+        </p:txBody>
+      </p:sp>
+      <p:sp>
+        <p:nvSpPr>
+          <p:cNvPr id="8" name="Text Placeholder 2"/>
+          <p:cNvSpPr>
+            <a:spLocks noGrp="1"/>
+          </p:cNvSpPr>
+          <p:nvPr>
+            <p:ph type="body" sz="half" idx="1"/>
+          </p:nvPr>
+        </p:nvSpPr>
+        <p:spPr>
+          <a:xfrm>
+            <a:off x="139472" y="1063230"/>
+            <a:ext cx="8865056" cy="3606305"/>
+          </a:xfrm>
+        </p:spPr>
+        <p:txBody>
+          <a:bodyPr>
+            <a:noAutofit/>
+          </a:bodyPr>
+          <a:lstStyle/>
+          <a:p>
+            <a:pPr algn="just">
+              <a:buFontTx/>
+              <a:buChar char="-"/>
+            </a:pPr>
+            <a:r>
+              <a:rPr lang="pt-BR" b="1" dirty="0">
+                <a:latin typeface="Times New Roman" panose="02020603050405020304" pitchFamily="18" charset="0"/>
+                <a:cs typeface="Times New Roman" panose="02020603050405020304" pitchFamily="18" charset="0"/>
+              </a:rPr>
+              <a:t>Exercícios de Fixação</a:t>
+            </a:r>
+          </a:p>
+          <a:p>
+            <a:pPr marL="0" indent="0" algn="just">
+              <a:buNone/>
+            </a:pPr>
+            <a:r>
+              <a:rPr lang="pt-BR" dirty="0">
+                <a:latin typeface="Times New Roman" panose="02020603050405020304" pitchFamily="18" charset="0"/>
+                <a:cs typeface="Times New Roman" panose="02020603050405020304" pitchFamily="18" charset="0"/>
+              </a:rPr>
+              <a:t>	Desafios em Sala de Aula.</a:t>
+            </a:r>
+          </a:p>
+          <a:p>
+            <a:pPr marL="0" indent="0" algn="just">
+              <a:buNone/>
+            </a:pPr>
+            <a:endParaRPr lang="pt-BR" dirty="0">
+              <a:latin typeface="Times New Roman" panose="02020603050405020304" pitchFamily="18" charset="0"/>
+              <a:cs typeface="Times New Roman" panose="02020603050405020304" pitchFamily="18" charset="0"/>
+            </a:endParaRPr>
+          </a:p>
+          <a:p>
+            <a:pPr algn="just">
+              <a:buFontTx/>
+              <a:buChar char="-"/>
+            </a:pPr>
+            <a:r>
+              <a:rPr lang="pt-BR" b="1" dirty="0">
+                <a:solidFill>
+                  <a:srgbClr val="FF0000"/>
+                </a:solidFill>
+                <a:latin typeface="Times New Roman" panose="02020603050405020304" pitchFamily="18" charset="0"/>
+                <a:cs typeface="Times New Roman" panose="02020603050405020304" pitchFamily="18" charset="0"/>
+              </a:rPr>
+              <a:t>Atividade (domínio – livre escolha)</a:t>
+            </a:r>
+          </a:p>
+          <a:p>
+            <a:pPr marL="0" indent="0" algn="just">
+              <a:buNone/>
+            </a:pPr>
+            <a:r>
+              <a:rPr lang="pt-BR" dirty="0">
+                <a:latin typeface="Times New Roman" panose="02020603050405020304" pitchFamily="18" charset="0"/>
+                <a:cs typeface="Times New Roman" panose="02020603050405020304" pitchFamily="18" charset="0"/>
+              </a:rPr>
+              <a:t>	Criar uma app, implementando um CRUD.</a:t>
+            </a:r>
+          </a:p>
+          <a:p>
+            <a:pPr marL="0" indent="0" algn="just">
+              <a:buNone/>
+            </a:pPr>
+            <a:endParaRPr lang="pt-BR" dirty="0">
+              <a:latin typeface="Times New Roman" panose="02020603050405020304" pitchFamily="18" charset="0"/>
+              <a:cs typeface="Times New Roman" panose="02020603050405020304" pitchFamily="18" charset="0"/>
+            </a:endParaRPr>
+          </a:p>
+          <a:p>
+            <a:pPr marL="0" indent="0" algn="just">
+              <a:buNone/>
+            </a:pPr>
+            <a:endParaRPr lang="pt-BR" dirty="0">
+              <a:latin typeface="Times New Roman" panose="02020603050405020304" pitchFamily="18" charset="0"/>
+              <a:cs typeface="Times New Roman" panose="02020603050405020304" pitchFamily="18" charset="0"/>
+            </a:endParaRPr>
+          </a:p>
+        </p:txBody>
+      </p:sp>
+    </p:spTree>
+    <p:extLst>
+      <p:ext uri="{BB962C8B-B14F-4D97-AF65-F5344CB8AC3E}">
+        <p14:creationId xmlns:p14="http://schemas.microsoft.com/office/powerpoint/2010/main" val="2470652989"/>
+      </p:ext>
+    </p:extLst>
+  </p:cSld>
+  <p:clrMapOvr>
+    <a:masterClrMapping/>
+  </p:clrMapOvr>
+  <p:transition spd="med"/>
+</p:sld>
+</file>
+
+<file path=ppt/slides/slide21.xml><?xml version="1.0" encoding="utf-8"?>
+<p:sld xmlns:a="http://schemas.openxmlformats.org/drawingml/2006/main" xmlns:r="http://schemas.openxmlformats.org/officeDocument/2006/relationships" xmlns:p="http://schemas.openxmlformats.org/presentationml/2006/main">
+  <p:cSld>
+    <p:spTree>
+      <p:nvGrpSpPr>
+        <p:cNvPr id="1" name=""/>
+        <p:cNvGrpSpPr/>
+        <p:nvPr/>
+      </p:nvGrpSpPr>
+      <p:grpSpPr>
+        <a:xfrm>
+          <a:off x="0" y="0"/>
+          <a:ext cx="0" cy="0"/>
+          <a:chOff x="0" y="0"/>
+          <a:chExt cx="0" cy="0"/>
+        </a:xfrm>
+      </p:grpSpPr>
+      <p:sp>
+        <p:nvSpPr>
+          <p:cNvPr id="6" name="Title 1"/>
+          <p:cNvSpPr>
+            <a:spLocks noGrp="1"/>
+          </p:cNvSpPr>
+          <p:nvPr>
+            <p:ph type="title"/>
+          </p:nvPr>
+        </p:nvSpPr>
+        <p:spPr/>
+        <p:txBody>
+          <a:bodyPr>
+            <a:normAutofit/>
+          </a:bodyPr>
+          <a:lstStyle/>
+          <a:p>
+            <a:r>
+              <a:rPr lang="en-US" b="1" dirty="0" err="1">
+                <a:solidFill>
+                  <a:srgbClr val="0070C0"/>
+                </a:solidFill>
+              </a:rPr>
+              <a:t>Referências</a:t>
+            </a:r>
+            <a:r>
+              <a:rPr lang="en-US" b="1" dirty="0">
+                <a:solidFill>
+                  <a:srgbClr val="0070C0"/>
+                </a:solidFill>
+              </a:rPr>
+              <a:t> </a:t>
+            </a:r>
+            <a:r>
+              <a:rPr lang="en-US" b="1" dirty="0" err="1">
+                <a:solidFill>
+                  <a:srgbClr val="0070C0"/>
+                </a:solidFill>
+              </a:rPr>
+              <a:t>Bibliográficas</a:t>
+            </a:r>
+            <a:endParaRPr lang="en-US" b="1" dirty="0">
+              <a:solidFill>
+                <a:srgbClr val="0070C0"/>
+              </a:solidFill>
+            </a:endParaRPr>
+          </a:p>
+        </p:txBody>
+      </p:sp>
+      <p:sp>
+        <p:nvSpPr>
+          <p:cNvPr id="8" name="Text Placeholder 2"/>
+          <p:cNvSpPr>
+            <a:spLocks noGrp="1"/>
+          </p:cNvSpPr>
+          <p:nvPr>
+            <p:ph type="body" sz="half" idx="1"/>
+          </p:nvPr>
+        </p:nvSpPr>
+        <p:spPr>
+          <a:xfrm>
+            <a:off x="142865" y="1200151"/>
+            <a:ext cx="8865056" cy="3394472"/>
+          </a:xfrm>
+        </p:spPr>
+        <p:txBody>
+          <a:bodyPr>
+            <a:noAutofit/>
+          </a:bodyPr>
+          <a:lstStyle/>
+          <a:p>
+            <a:pPr marL="0" indent="0" algn="just">
+              <a:buNone/>
+            </a:pPr>
+            <a:endParaRPr lang="pt-BR" sz="1800" dirty="0">
+              <a:latin typeface="Times New Roman" panose="02020603050405020304" pitchFamily="18" charset="0"/>
+              <a:cs typeface="Times New Roman" panose="02020603050405020304" pitchFamily="18" charset="0"/>
+            </a:endParaRPr>
+          </a:p>
+          <a:p>
+            <a:pPr marL="0" indent="0" algn="just">
+              <a:buNone/>
+            </a:pPr>
+            <a:r>
+              <a:rPr lang="pt-BR" sz="1800" dirty="0">
+                <a:latin typeface="Times New Roman" panose="02020603050405020304" pitchFamily="18" charset="0"/>
+                <a:cs typeface="Times New Roman" panose="02020603050405020304" pitchFamily="18" charset="0"/>
+              </a:rPr>
+              <a:t>[1] SEBESTA, Robert W. Conceitos de Linguagens de Programação. 11. edição. Porto Alegre: Bookman, 2018., Capítulo 1 (Preliminares).</a:t>
+            </a:r>
+          </a:p>
+          <a:p>
+            <a:pPr marL="0" indent="0" algn="just">
+              <a:buNone/>
+            </a:pPr>
+            <a:endParaRPr lang="pt-BR" sz="1800" dirty="0">
+              <a:latin typeface="Times New Roman" panose="02020603050405020304" pitchFamily="18" charset="0"/>
+              <a:cs typeface="Times New Roman" panose="02020603050405020304" pitchFamily="18" charset="0"/>
+            </a:endParaRPr>
+          </a:p>
+          <a:p>
+            <a:pPr marL="0" indent="0" algn="just">
+              <a:buNone/>
+            </a:pPr>
+            <a:r>
+              <a:rPr lang="pt-BR" sz="1800" dirty="0">
+                <a:latin typeface="Times New Roman" panose="02020603050405020304" pitchFamily="18" charset="0"/>
+                <a:cs typeface="Times New Roman" panose="02020603050405020304" pitchFamily="18" charset="0"/>
+              </a:rPr>
+              <a:t>[2] BORGES, Luiz Eduardo. Python para desenvolvedores: aborda Python 3.3. </a:t>
+            </a:r>
+            <a:r>
+              <a:rPr lang="pt-BR" sz="1800" dirty="0" err="1">
+                <a:latin typeface="Times New Roman" panose="02020603050405020304" pitchFamily="18" charset="0"/>
+                <a:cs typeface="Times New Roman" panose="02020603050405020304" pitchFamily="18" charset="0"/>
+              </a:rPr>
+              <a:t>Novatec</a:t>
+            </a:r>
+            <a:r>
+              <a:rPr lang="pt-BR" sz="1800" dirty="0">
+                <a:latin typeface="Times New Roman" panose="02020603050405020304" pitchFamily="18" charset="0"/>
+                <a:cs typeface="Times New Roman" panose="02020603050405020304" pitchFamily="18" charset="0"/>
+              </a:rPr>
+              <a:t> Editora, 2014.</a:t>
+            </a:r>
+          </a:p>
+          <a:p>
+            <a:pPr marL="0" indent="0" algn="just">
+              <a:buNone/>
+            </a:pPr>
+            <a:endParaRPr lang="pt-BR" sz="1800" dirty="0">
+              <a:latin typeface="Times New Roman" panose="02020603050405020304" pitchFamily="18" charset="0"/>
+              <a:cs typeface="Times New Roman" panose="02020603050405020304" pitchFamily="18" charset="0"/>
+            </a:endParaRPr>
+          </a:p>
+        </p:txBody>
+      </p:sp>
+    </p:spTree>
+    <p:extLst>
+      <p:ext uri="{BB962C8B-B14F-4D97-AF65-F5344CB8AC3E}">
+        <p14:creationId xmlns:p14="http://schemas.microsoft.com/office/powerpoint/2010/main" val="1115311843"/>
+      </p:ext>
+    </p:extLst>
+  </p:cSld>
+  <p:clrMapOvr>
+    <a:masterClrMapping/>
+  </p:clrMapOvr>
+  <p:transition spd="med"/>
+</p:sld>
+</file>
+
+<file path=ppt/slides/slide22.xml><?xml version="1.0" encoding="utf-8"?>
+<p:sld xmlns:a="http://schemas.openxmlformats.org/drawingml/2006/main" xmlns:r="http://schemas.openxmlformats.org/officeDocument/2006/relationships" xmlns:p="http://schemas.openxmlformats.org/presentationml/2006/main">
+  <p:cSld>
+    <p:spTree>
+      <p:nvGrpSpPr>
+        <p:cNvPr id="1" name=""/>
+        <p:cNvGrpSpPr/>
+        <p:nvPr/>
+      </p:nvGrpSpPr>
+      <p:grpSpPr>
+        <a:xfrm>
+          <a:off x="0" y="0"/>
+          <a:ext cx="0" cy="0"/>
+          <a:chOff x="0" y="0"/>
+          <a:chExt cx="0" cy="0"/>
+        </a:xfrm>
+      </p:grpSpPr>
+      <p:pic>
+        <p:nvPicPr>
+          <p:cNvPr id="112" name="Picture 6" descr="Picture 6"/>
+          <p:cNvPicPr>
+            <a:picLocks noChangeAspect="1"/>
+          </p:cNvPicPr>
+          <p:nvPr/>
+        </p:nvPicPr>
+        <p:blipFill>
+          <a:blip r:embed="rId2"/>
+          <a:stretch>
+            <a:fillRect/>
+          </a:stretch>
+        </p:blipFill>
+        <p:spPr>
+          <a:xfrm>
+            <a:off x="0" y="0"/>
+            <a:ext cx="9144000" cy="5143500"/>
+          </a:xfrm>
+          <a:prstGeom prst="rect">
+            <a:avLst/>
+          </a:prstGeom>
+          <a:ln w="12700">
+            <a:miter lim="400000"/>
+            <a:headEnd/>
+            <a:tailEnd/>
+          </a:ln>
+        </p:spPr>
+      </p:pic>
+      <p:pic>
+        <p:nvPicPr>
+          <p:cNvPr id="114" name="Picture 5" descr="Picture 5"/>
+          <p:cNvPicPr>
+            <a:picLocks noChangeAspect="1"/>
+          </p:cNvPicPr>
+          <p:nvPr/>
+        </p:nvPicPr>
+        <p:blipFill>
+          <a:blip r:embed="rId3"/>
+          <a:stretch>
+            <a:fillRect/>
+          </a:stretch>
+        </p:blipFill>
+        <p:spPr>
+          <a:xfrm>
+            <a:off x="469900" y="0"/>
+            <a:ext cx="4391984" cy="171450"/>
+          </a:xfrm>
+          <a:prstGeom prst="rect">
+            <a:avLst/>
+          </a:prstGeom>
+          <a:ln w="12700">
+            <a:miter lim="400000"/>
+            <a:headEnd/>
+            <a:tailEnd/>
+          </a:ln>
+        </p:spPr>
+      </p:pic>
+      <p:pic>
+        <p:nvPicPr>
+          <p:cNvPr id="115" name="Imagem" descr="Imagem"/>
+          <p:cNvPicPr>
+            <a:picLocks noChangeAspect="1"/>
+          </p:cNvPicPr>
+          <p:nvPr/>
+        </p:nvPicPr>
+        <p:blipFill>
+          <a:blip r:embed="rId4"/>
+          <a:stretch>
+            <a:fillRect/>
+          </a:stretch>
+        </p:blipFill>
+        <p:spPr>
+          <a:xfrm>
+            <a:off x="823046" y="300823"/>
+            <a:ext cx="3685692" cy="1189055"/>
+          </a:xfrm>
+          <a:prstGeom prst="rect">
+            <a:avLst/>
+          </a:prstGeom>
+          <a:ln w="12700">
+            <a:miter lim="400000"/>
+            <a:headEnd/>
+            <a:tailEnd/>
+          </a:ln>
+        </p:spPr>
+      </p:pic>
+      <p:sp>
+        <p:nvSpPr>
+          <p:cNvPr id="3" name="Título 2"/>
+          <p:cNvSpPr>
+            <a:spLocks noGrp="1"/>
+          </p:cNvSpPr>
+          <p:nvPr>
+            <p:ph type="ctrTitle"/>
+          </p:nvPr>
+        </p:nvSpPr>
+        <p:spPr>
+          <a:xfrm>
+            <a:off x="348258" y="2277667"/>
+            <a:ext cx="8681444" cy="1102519"/>
+          </a:xfrm>
+        </p:spPr>
+        <p:txBody>
+          <a:bodyPr>
+            <a:noAutofit/>
+          </a:bodyPr>
+          <a:lstStyle/>
+          <a:p>
+            <a:pPr algn="ctr"/>
+            <a:r>
+              <a:rPr lang="pt-BR" sz="3200" b="1" dirty="0">
+                <a:solidFill>
+                  <a:schemeClr val="bg1"/>
+                </a:solidFill>
+                <a:latin typeface="Calibri" panose="020F0502020204030204" pitchFamily="34" charset="0"/>
+                <a:cs typeface="Calibri" panose="020F0502020204030204" pitchFamily="34" charset="0"/>
+              </a:rPr>
+              <a:t>Desenvolvimento Rápido de Aplicações em Python</a:t>
+            </a:r>
+          </a:p>
+        </p:txBody>
+      </p:sp>
+      <p:sp>
+        <p:nvSpPr>
+          <p:cNvPr id="6" name="Título 2"/>
+          <p:cNvSpPr txBox="1"/>
+          <p:nvPr/>
+        </p:nvSpPr>
+        <p:spPr>
+          <a:xfrm>
+            <a:off x="975683" y="3866663"/>
+            <a:ext cx="7772400" cy="1102519"/>
+          </a:xfrm>
+          <a:prstGeom prst="rect">
+            <a:avLst/>
+          </a:prstGeom>
+          <a:ln w="12700">
+            <a:miter lim="400000"/>
+          </a:ln>
+        </p:spPr>
+        <p:txBody>
+          <a:bodyPr lIns="45718" tIns="45718" rIns="45718" bIns="45718" anchor="ctr">
+            <a:noAutofit/>
+          </a:bodyPr>
+          <a:lstStyle>
+            <a:lvl1pPr marL="0" marR="0" indent="0" algn="ctr" defTabSz="457200" rtl="0" latinLnBrk="0">
+              <a:lnSpc>
+                <a:spcPct val="100000"/>
+              </a:lnSpc>
+              <a:spcBef>
+                <a:spcPts val="0"/>
+              </a:spcBef>
+              <a:spcAft>
+                <a:spcPts val="0"/>
+              </a:spcAft>
+              <a:buClrTx/>
+              <a:buSzTx/>
+              <a:buFontTx/>
+              <a:buNone/>
+              <a:defRPr sz="4400" b="0" i="0" u="none" strike="noStrike" cap="none" spc="0" baseline="0">
+                <a:ln>
+                  <a:noFill/>
+                </a:ln>
+                <a:solidFill>
+                  <a:srgbClr val="000000"/>
+                </a:solidFill>
+                <a:uFillTx/>
+                <a:latin typeface="+mj-lt"/>
+                <a:ea typeface="+mj-ea"/>
+                <a:cs typeface="+mj-cs"/>
+                <a:sym typeface="Calibri"/>
+              </a:defRPr>
+            </a:lvl1pPr>
+            <a:lvl2pPr marL="0" marR="0" indent="0" algn="ctr" defTabSz="457200" rtl="0" latinLnBrk="0">
+              <a:lnSpc>
+                <a:spcPct val="100000"/>
+              </a:lnSpc>
+              <a:spcBef>
+                <a:spcPts val="0"/>
+              </a:spcBef>
+              <a:spcAft>
+                <a:spcPts val="0"/>
+              </a:spcAft>
+              <a:buClrTx/>
+              <a:buSzTx/>
+              <a:buFontTx/>
+              <a:buNone/>
+              <a:defRPr sz="4400" b="0" i="0" u="none" strike="noStrike" cap="none" spc="0" baseline="0">
+                <a:ln>
+                  <a:noFill/>
+                </a:ln>
+                <a:solidFill>
+                  <a:srgbClr val="000000"/>
+                </a:solidFill>
+                <a:uFillTx/>
+                <a:latin typeface="+mj-lt"/>
+                <a:ea typeface="+mj-ea"/>
+                <a:cs typeface="+mj-cs"/>
+                <a:sym typeface="Calibri"/>
+              </a:defRPr>
+            </a:lvl2pPr>
+            <a:lvl3pPr marL="0" marR="0" indent="0" algn="ctr" defTabSz="457200" rtl="0" latinLnBrk="0">
+              <a:lnSpc>
+                <a:spcPct val="100000"/>
+              </a:lnSpc>
+              <a:spcBef>
+                <a:spcPts val="0"/>
+              </a:spcBef>
+              <a:spcAft>
+                <a:spcPts val="0"/>
+              </a:spcAft>
+              <a:buClrTx/>
+              <a:buSzTx/>
+              <a:buFontTx/>
+              <a:buNone/>
+              <a:defRPr sz="4400" b="0" i="0" u="none" strike="noStrike" cap="none" spc="0" baseline="0">
+                <a:ln>
+                  <a:noFill/>
+                </a:ln>
+                <a:solidFill>
+                  <a:srgbClr val="000000"/>
+                </a:solidFill>
+                <a:uFillTx/>
+                <a:latin typeface="+mj-lt"/>
+                <a:ea typeface="+mj-ea"/>
+                <a:cs typeface="+mj-cs"/>
+                <a:sym typeface="Calibri"/>
+              </a:defRPr>
+            </a:lvl3pPr>
+            <a:lvl4pPr marL="0" marR="0" indent="0" algn="ctr" defTabSz="457200" rtl="0" latinLnBrk="0">
+              <a:lnSpc>
+                <a:spcPct val="100000"/>
+              </a:lnSpc>
+              <a:spcBef>
+                <a:spcPts val="0"/>
+              </a:spcBef>
+              <a:spcAft>
+                <a:spcPts val="0"/>
+              </a:spcAft>
+              <a:buClrTx/>
+              <a:buSzTx/>
+              <a:buFontTx/>
+              <a:buNone/>
+              <a:defRPr sz="4400" b="0" i="0" u="none" strike="noStrike" cap="none" spc="0" baseline="0">
+                <a:ln>
+                  <a:noFill/>
+                </a:ln>
+                <a:solidFill>
+                  <a:srgbClr val="000000"/>
+                </a:solidFill>
+                <a:uFillTx/>
+                <a:latin typeface="+mj-lt"/>
+                <a:ea typeface="+mj-ea"/>
+                <a:cs typeface="+mj-cs"/>
+                <a:sym typeface="Calibri"/>
+              </a:defRPr>
+            </a:lvl4pPr>
+            <a:lvl5pPr marL="0" marR="0" indent="0" algn="ctr" defTabSz="457200" rtl="0" latinLnBrk="0">
+              <a:lnSpc>
+                <a:spcPct val="100000"/>
+              </a:lnSpc>
+              <a:spcBef>
+                <a:spcPts val="0"/>
+              </a:spcBef>
+              <a:spcAft>
+                <a:spcPts val="0"/>
+              </a:spcAft>
+              <a:buClrTx/>
+              <a:buSzTx/>
+              <a:buFontTx/>
+              <a:buNone/>
+              <a:defRPr sz="4400" b="0" i="0" u="none" strike="noStrike" cap="none" spc="0" baseline="0">
+                <a:ln>
+                  <a:noFill/>
+                </a:ln>
+                <a:solidFill>
+                  <a:srgbClr val="000000"/>
+                </a:solidFill>
+                <a:uFillTx/>
+                <a:latin typeface="+mj-lt"/>
+                <a:ea typeface="+mj-ea"/>
+                <a:cs typeface="+mj-cs"/>
+                <a:sym typeface="Calibri"/>
+              </a:defRPr>
+            </a:lvl5pPr>
+            <a:lvl6pPr marL="0" marR="0" indent="0" algn="ctr" defTabSz="457200" rtl="0" latinLnBrk="0">
+              <a:lnSpc>
+                <a:spcPct val="100000"/>
+              </a:lnSpc>
+              <a:spcBef>
+                <a:spcPts val="0"/>
+              </a:spcBef>
+              <a:spcAft>
+                <a:spcPts val="0"/>
+              </a:spcAft>
+              <a:buClrTx/>
+              <a:buSzTx/>
+              <a:buFontTx/>
+              <a:buNone/>
+              <a:defRPr sz="4400" b="0" i="0" u="none" strike="noStrike" cap="none" spc="0" baseline="0">
+                <a:ln>
+                  <a:noFill/>
+                </a:ln>
+                <a:solidFill>
+                  <a:srgbClr val="000000"/>
+                </a:solidFill>
+                <a:uFillTx/>
+                <a:latin typeface="+mj-lt"/>
+                <a:ea typeface="+mj-ea"/>
+                <a:cs typeface="+mj-cs"/>
+                <a:sym typeface="Calibri"/>
+              </a:defRPr>
+            </a:lvl6pPr>
+            <a:lvl7pPr marL="0" marR="0" indent="0" algn="ctr" defTabSz="457200" rtl="0" latinLnBrk="0">
+              <a:lnSpc>
+                <a:spcPct val="100000"/>
+              </a:lnSpc>
+              <a:spcBef>
+                <a:spcPts val="0"/>
+              </a:spcBef>
+              <a:spcAft>
+                <a:spcPts val="0"/>
+              </a:spcAft>
+              <a:buClrTx/>
+              <a:buSzTx/>
+              <a:buFontTx/>
+              <a:buNone/>
+              <a:defRPr sz="4400" b="0" i="0" u="none" strike="noStrike" cap="none" spc="0" baseline="0">
+                <a:ln>
+                  <a:noFill/>
+                </a:ln>
+                <a:solidFill>
+                  <a:srgbClr val="000000"/>
+                </a:solidFill>
+                <a:uFillTx/>
+                <a:latin typeface="+mj-lt"/>
+                <a:ea typeface="+mj-ea"/>
+                <a:cs typeface="+mj-cs"/>
+                <a:sym typeface="Calibri"/>
+              </a:defRPr>
+            </a:lvl7pPr>
+            <a:lvl8pPr marL="0" marR="0" indent="0" algn="ctr" defTabSz="457200" rtl="0" latinLnBrk="0">
+              <a:lnSpc>
+                <a:spcPct val="100000"/>
+              </a:lnSpc>
+              <a:spcBef>
+                <a:spcPts val="0"/>
+              </a:spcBef>
+              <a:spcAft>
+                <a:spcPts val="0"/>
+              </a:spcAft>
+              <a:buClrTx/>
+              <a:buSzTx/>
+              <a:buFontTx/>
+              <a:buNone/>
+              <a:defRPr sz="4400" b="0" i="0" u="none" strike="noStrike" cap="none" spc="0" baseline="0">
+                <a:ln>
+                  <a:noFill/>
+                </a:ln>
+                <a:solidFill>
+                  <a:srgbClr val="000000"/>
+                </a:solidFill>
+                <a:uFillTx/>
+                <a:latin typeface="+mj-lt"/>
+                <a:ea typeface="+mj-ea"/>
+                <a:cs typeface="+mj-cs"/>
+                <a:sym typeface="Calibri"/>
+              </a:defRPr>
+            </a:lvl8pPr>
+            <a:lvl9pPr marL="0" marR="0" indent="0" algn="ctr" defTabSz="457200" rtl="0" latinLnBrk="0">
+              <a:lnSpc>
+                <a:spcPct val="100000"/>
+              </a:lnSpc>
+              <a:spcBef>
+                <a:spcPts val="0"/>
+              </a:spcBef>
+              <a:spcAft>
+                <a:spcPts val="0"/>
+              </a:spcAft>
+              <a:buClrTx/>
+              <a:buSzTx/>
+              <a:buFontTx/>
+              <a:buNone/>
+              <a:defRPr sz="4400" b="0" i="0" u="none" strike="noStrike" cap="none" spc="0" baseline="0">
+                <a:ln>
+                  <a:noFill/>
+                </a:ln>
+                <a:solidFill>
+                  <a:srgbClr val="000000"/>
+                </a:solidFill>
+                <a:uFillTx/>
+                <a:latin typeface="+mj-lt"/>
+                <a:ea typeface="+mj-ea"/>
+                <a:cs typeface="+mj-cs"/>
+                <a:sym typeface="Calibri"/>
+              </a:defRPr>
+            </a:lvl9pPr>
+          </a:lstStyle>
+          <a:p>
+            <a:pPr algn="r" hangingPunct="1"/>
+            <a:r>
+              <a:rPr lang="pt-BR" sz="2000" b="1" dirty="0">
+                <a:solidFill>
+                  <a:schemeClr val="bg1"/>
+                </a:solidFill>
+              </a:rPr>
+              <a:t>Professor </a:t>
+            </a:r>
+            <a:r>
+              <a:rPr lang="pt-BR" sz="2000" b="1" dirty="0" err="1">
+                <a:solidFill>
+                  <a:schemeClr val="bg1"/>
+                </a:solidFill>
+              </a:rPr>
+              <a:t>MSc</a:t>
+            </a:r>
+            <a:r>
+              <a:rPr lang="pt-BR" sz="2000" b="1" dirty="0">
+                <a:solidFill>
+                  <a:schemeClr val="bg1"/>
+                </a:solidFill>
+              </a:rPr>
+              <a:t>. Heleno Cardoso</a:t>
+            </a:r>
+          </a:p>
+        </p:txBody>
+      </p:sp>
+    </p:spTree>
+    <p:extLst>
+      <p:ext uri="{BB962C8B-B14F-4D97-AF65-F5344CB8AC3E}">
+        <p14:creationId xmlns:p14="http://schemas.microsoft.com/office/powerpoint/2010/main" val="1923557891"/>
+      </p:ext>
+    </p:extLst>
+  </p:cSld>
+  <p:clrMapOvr>
+    <a:masterClrMapping/>
+  </p:clrMapOvr>
+</p:sld>
+</file>
+
 <file path=ppt/slides/slide3.xml><?xml version="1.0" encoding="utf-8"?>
 <p:sld xmlns:a="http://schemas.openxmlformats.org/drawingml/2006/main" xmlns:r="http://schemas.openxmlformats.org/officeDocument/2006/relationships" xmlns:p="http://schemas.openxmlformats.org/presentationml/2006/main">
   <p:cSld>
@@ -9151,7 +12308,7 @@
                   <a:srgbClr val="0070C0"/>
                 </a:solidFill>
               </a:rPr>
-              <a:t>Python – BANCO DE DADOS - </a:t>
+              <a:t>Python – BD MYSQL - </a:t>
             </a:r>
             <a:r>
               <a:rPr lang="en-US" b="1" dirty="0" err="1">
@@ -9691,7 +12848,23 @@
                   <a:srgbClr val="0070C0"/>
                 </a:solidFill>
               </a:rPr>
-              <a:t>Python – BANCO DE DADOS - SELECT</a:t>
+              <a:t>Python – bd </a:t>
+            </a:r>
+            <a:r>
+              <a:rPr lang="en-US" b="1" dirty="0" err="1">
+                <a:solidFill>
+                  <a:srgbClr val="0070C0"/>
+                </a:solidFill>
+              </a:rPr>
+              <a:t>mysql</a:t>
+            </a:r>
+            <a:r>
+              <a:rPr lang="en-US" b="1" dirty="0">
+                <a:solidFill>
+                  <a:srgbClr val="0070C0"/>
+                </a:solidFill>
+              </a:rPr>
+              <a:t> - SELECT</a:t>
             </a:r>
           </a:p>
         </p:txBody>
@@ -10161,7 +13334,7 @@
                   <a:srgbClr val="0070C0"/>
                 </a:solidFill>
               </a:rPr>
-              <a:t>Python – BANCO DE DADOS – CRUD READ</a:t>
+              <a:t>Python – BANCO DE DADOS – CRUD INSERT</a:t>
             </a:r>
           </a:p>
         </p:txBody>
@@ -10236,101 +13409,27 @@
             <a:pPr marL="0" indent="0" algn="just">
               <a:buNone/>
             </a:pPr>
-            <a:endParaRPr lang="pt-BR" sz="2400" dirty="0">
-              <a:latin typeface="Times New Roman" panose="02020603050405020304" pitchFamily="18" charset="0"/>
-              <a:cs typeface="Times New Roman" panose="02020603050405020304" pitchFamily="18" charset="0"/>
-            </a:endParaRPr>
-          </a:p>
-          <a:p>
-            <a:pPr marL="0" indent="0" algn="just">
-              <a:buNone/>
-            </a:pPr>
-            <a:r>
-              <a:rPr lang="pt-BR" sz="2400" dirty="0" err="1">
-                <a:latin typeface="Times New Roman" panose="02020603050405020304" pitchFamily="18" charset="0"/>
-                <a:cs typeface="Times New Roman" panose="02020603050405020304" pitchFamily="18" charset="0"/>
-              </a:rPr>
-              <a:t>sql</a:t>
-            </a:r>
             <a:r>
               <a:rPr lang="pt-BR" sz="2400" dirty="0">
                 <a:latin typeface="Times New Roman" panose="02020603050405020304" pitchFamily="18" charset="0"/>
                 <a:cs typeface="Times New Roman" panose="02020603050405020304" pitchFamily="18" charset="0"/>
               </a:rPr>
-              <a:t> = </a:t>
+              <a:t>nome = </a:t>
             </a:r>
             <a:r>
               <a:rPr lang="pt-BR" sz="2400" b="1" dirty="0">
-                <a:solidFill>
-                  <a:srgbClr val="FF0000"/>
-                </a:solidFill>
-                <a:latin typeface="Times New Roman" panose="02020603050405020304" pitchFamily="18" charset="0"/>
-                <a:cs typeface="Times New Roman" panose="02020603050405020304" pitchFamily="18" charset="0"/>
-              </a:rPr>
-              <a:t>f</a:t>
+                <a:latin typeface="Times New Roman" panose="02020603050405020304" pitchFamily="18" charset="0"/>
+                <a:cs typeface="Times New Roman" panose="02020603050405020304" pitchFamily="18" charset="0"/>
+              </a:rPr>
+              <a:t>input</a:t>
             </a:r>
             <a:r>
               <a:rPr lang="pt-BR" sz="2400" dirty="0">
-                <a:solidFill>
-                  <a:schemeClr val="tx1"/>
-                </a:solidFill>
-                <a:latin typeface="Times New Roman" panose="02020603050405020304" pitchFamily="18" charset="0"/>
-                <a:cs typeface="Times New Roman" panose="02020603050405020304" pitchFamily="18" charset="0"/>
-              </a:rPr>
-              <a:t> "</a:t>
-            </a:r>
-            <a:r>
-              <a:rPr lang="pt-BR" sz="2400" b="1" dirty="0" err="1">
-                <a:latin typeface="Times New Roman" panose="02020603050405020304" pitchFamily="18" charset="0"/>
-                <a:cs typeface="Times New Roman" panose="02020603050405020304" pitchFamily="18" charset="0"/>
-              </a:rPr>
-              <a:t>select</a:t>
-            </a:r>
-            <a:r>
-              <a:rPr lang="pt-BR" sz="2400" dirty="0">
-                <a:solidFill>
-                  <a:schemeClr val="tx1"/>
-                </a:solidFill>
-                <a:latin typeface="Times New Roman" panose="02020603050405020304" pitchFamily="18" charset="0"/>
-                <a:cs typeface="Times New Roman" panose="02020603050405020304" pitchFamily="18" charset="0"/>
-              </a:rPr>
-              <a:t> * </a:t>
-            </a:r>
-            <a:r>
-              <a:rPr lang="pt-BR" sz="2400" b="1" dirty="0" err="1">
-                <a:solidFill>
-                  <a:schemeClr val="tx1"/>
-                </a:solidFill>
-                <a:latin typeface="Times New Roman" panose="02020603050405020304" pitchFamily="18" charset="0"/>
-                <a:cs typeface="Times New Roman" panose="02020603050405020304" pitchFamily="18" charset="0"/>
-              </a:rPr>
-              <a:t>from</a:t>
-            </a:r>
-            <a:r>
-              <a:rPr lang="pt-BR" sz="2400" b="1" dirty="0">
-                <a:solidFill>
-                  <a:schemeClr val="tx1"/>
-                </a:solidFill>
-                <a:latin typeface="Times New Roman" panose="02020603050405020304" pitchFamily="18" charset="0"/>
-                <a:cs typeface="Times New Roman" panose="02020603050405020304" pitchFamily="18" charset="0"/>
-              </a:rPr>
-              <a:t> </a:t>
-            </a:r>
-            <a:r>
-              <a:rPr lang="pt-BR" sz="2400" dirty="0">
-                <a:solidFill>
-                  <a:schemeClr val="tx1"/>
-                </a:solidFill>
-                <a:latin typeface="Times New Roman" panose="02020603050405020304" pitchFamily="18" charset="0"/>
-                <a:cs typeface="Times New Roman" panose="02020603050405020304" pitchFamily="18" charset="0"/>
-              </a:rPr>
-              <a:t>departamento"</a:t>
-            </a:r>
-          </a:p>
-          <a:p>
-            <a:pPr marL="0" indent="0" algn="just">
-              <a:buNone/>
-            </a:pPr>
+                <a:latin typeface="Times New Roman" panose="02020603050405020304" pitchFamily="18" charset="0"/>
+                <a:cs typeface="Times New Roman" panose="02020603050405020304" pitchFamily="18" charset="0"/>
+              </a:rPr>
+              <a:t>(“Digite o nome:”)</a:t>
+            </a:r>
             <a:endParaRPr lang="pt-BR" sz="2400" dirty="0">
               <a:solidFill>
                 <a:schemeClr val="tx1"/>
@@ -10344,6 +13443,30 @@
               <a:buNone/>
             </a:pPr>
             <a:r>
+              <a:rPr lang="pt-BR" sz="2400" b="1" dirty="0" err="1">
+                <a:latin typeface="Times New Roman" panose="02020603050405020304" pitchFamily="18" charset="0"/>
+                <a:cs typeface="Times New Roman" panose="02020603050405020304" pitchFamily="18" charset="0"/>
+              </a:rPr>
+              <a:t>sql</a:t>
+            </a:r>
+            <a:r>
+              <a:rPr lang="pt-BR" sz="2400" dirty="0">
+                <a:latin typeface="Times New Roman" panose="02020603050405020304" pitchFamily="18" charset="0"/>
+                <a:cs typeface="Times New Roman" panose="02020603050405020304" pitchFamily="18" charset="0"/>
+              </a:rPr>
+              <a:t> = </a:t>
+            </a:r>
+            <a:r>
+              <a:rPr lang="pt-BR" sz="2400" b="1" dirty="0" err="1">
+                <a:solidFill>
+                  <a:srgbClr val="FF0000"/>
+                </a:solidFill>
+                <a:latin typeface="Times New Roman" panose="02020603050405020304" pitchFamily="18" charset="0"/>
+                <a:cs typeface="Times New Roman" panose="02020603050405020304" pitchFamily="18" charset="0"/>
+              </a:rPr>
+              <a:t>f</a:t>
+            </a:r>
+            <a:r>
               <a:rPr lang="pt-BR" sz="2400" dirty="0" err="1">
                 <a:solidFill>
                   <a:schemeClr val="tx1"/>
@@ -10351,6 +13474,170 @@
                 <a:latin typeface="Times New Roman" panose="02020603050405020304" pitchFamily="18" charset="0"/>
                 <a:cs typeface="Times New Roman" panose="02020603050405020304" pitchFamily="18" charset="0"/>
               </a:rPr>
+              <a:t>"</a:t>
+            </a:r>
+            <a:r>
+              <a:rPr lang="pt-BR" sz="2400" b="1" dirty="0" err="1">
+                <a:solidFill>
+                  <a:schemeClr val="tx1"/>
+                </a:solidFill>
+                <a:latin typeface="Times New Roman" panose="02020603050405020304" pitchFamily="18" charset="0"/>
+                <a:cs typeface="Times New Roman" panose="02020603050405020304" pitchFamily="18" charset="0"/>
+              </a:rPr>
+              <a:t>insert</a:t>
+            </a:r>
+            <a:r>
+              <a:rPr lang="pt-BR" sz="2400" dirty="0">
+                <a:solidFill>
+                  <a:schemeClr val="tx1"/>
+                </a:solidFill>
+                <a:latin typeface="Times New Roman" panose="02020603050405020304" pitchFamily="18" charset="0"/>
+                <a:cs typeface="Times New Roman" panose="02020603050405020304" pitchFamily="18" charset="0"/>
+              </a:rPr>
+              <a:t> </a:t>
+            </a:r>
+            <a:r>
+              <a:rPr lang="pt-BR" sz="2400" b="1" dirty="0" err="1">
+                <a:solidFill>
+                  <a:schemeClr val="tx1"/>
+                </a:solidFill>
+                <a:latin typeface="Times New Roman" panose="02020603050405020304" pitchFamily="18" charset="0"/>
+                <a:cs typeface="Times New Roman" panose="02020603050405020304" pitchFamily="18" charset="0"/>
+              </a:rPr>
+              <a:t>into</a:t>
+            </a:r>
+            <a:r>
+              <a:rPr lang="pt-BR" sz="2400" dirty="0">
+                <a:solidFill>
+                  <a:schemeClr val="tx1"/>
+                </a:solidFill>
+                <a:latin typeface="Times New Roman" panose="02020603050405020304" pitchFamily="18" charset="0"/>
+                <a:cs typeface="Times New Roman" panose="02020603050405020304" pitchFamily="18" charset="0"/>
+              </a:rPr>
+              <a:t> </a:t>
+            </a:r>
+            <a:r>
+              <a:rPr lang="pt-BR" sz="2400" dirty="0" err="1">
+                <a:solidFill>
+                  <a:schemeClr val="tx1"/>
+                </a:solidFill>
+                <a:latin typeface="Times New Roman" panose="02020603050405020304" pitchFamily="18" charset="0"/>
+                <a:cs typeface="Times New Roman" panose="02020603050405020304" pitchFamily="18" charset="0"/>
+              </a:rPr>
+              <a:t>departament</a:t>
+            </a:r>
+            <a:r>
+              <a:rPr lang="pt-BR" sz="2400" dirty="0">
+                <a:solidFill>
+                  <a:schemeClr val="tx1"/>
+                </a:solidFill>
+                <a:latin typeface="Times New Roman" panose="02020603050405020304" pitchFamily="18" charset="0"/>
+                <a:cs typeface="Times New Roman" panose="02020603050405020304" pitchFamily="18" charset="0"/>
+              </a:rPr>
+              <a:t> (</a:t>
+            </a:r>
+            <a:r>
+              <a:rPr lang="pt-BR" sz="2400" dirty="0" err="1">
+                <a:solidFill>
+                  <a:schemeClr val="tx1"/>
+                </a:solidFill>
+                <a:latin typeface="Times New Roman" panose="02020603050405020304" pitchFamily="18" charset="0"/>
+                <a:cs typeface="Times New Roman" panose="02020603050405020304" pitchFamily="18" charset="0"/>
+              </a:rPr>
+              <a:t>name</a:t>
+            </a:r>
+            <a:r>
+              <a:rPr lang="pt-BR" sz="2400" dirty="0">
+                <a:solidFill>
+                  <a:schemeClr val="tx1"/>
+                </a:solidFill>
+                <a:latin typeface="Times New Roman" panose="02020603050405020304" pitchFamily="18" charset="0"/>
+                <a:cs typeface="Times New Roman" panose="02020603050405020304" pitchFamily="18" charset="0"/>
+              </a:rPr>
+              <a:t>) </a:t>
+            </a:r>
+            <a:r>
+              <a:rPr lang="pt-BR" sz="2400" b="1" dirty="0" err="1">
+                <a:solidFill>
+                  <a:schemeClr val="tx1"/>
+                </a:solidFill>
+                <a:latin typeface="Times New Roman" panose="02020603050405020304" pitchFamily="18" charset="0"/>
+                <a:cs typeface="Times New Roman" panose="02020603050405020304" pitchFamily="18" charset="0"/>
+              </a:rPr>
+              <a:t>values</a:t>
+            </a:r>
+            <a:r>
+              <a:rPr lang="pt-BR" sz="2400" dirty="0">
+                <a:solidFill>
+                  <a:schemeClr val="tx1"/>
+                </a:solidFill>
+                <a:latin typeface="Times New Roman" panose="02020603050405020304" pitchFamily="18" charset="0"/>
+                <a:cs typeface="Times New Roman" panose="02020603050405020304" pitchFamily="18" charset="0"/>
+              </a:rPr>
+              <a:t> (</a:t>
+            </a:r>
+            <a:r>
+              <a:rPr lang="pt-BR" sz="2400" b="1" dirty="0">
+                <a:solidFill>
+                  <a:schemeClr val="tx1"/>
+                </a:solidFill>
+                <a:latin typeface="Times New Roman" panose="02020603050405020304" pitchFamily="18" charset="0"/>
+                <a:cs typeface="Times New Roman" panose="02020603050405020304" pitchFamily="18" charset="0"/>
+              </a:rPr>
+              <a:t>‘</a:t>
+            </a:r>
+            <a:r>
+              <a:rPr lang="pt-BR" sz="2400" dirty="0">
+                <a:solidFill>
+                  <a:schemeClr val="tx1"/>
+                </a:solidFill>
+                <a:latin typeface="Times New Roman" panose="02020603050405020304" pitchFamily="18" charset="0"/>
+                <a:cs typeface="Times New Roman" panose="02020603050405020304" pitchFamily="18" charset="0"/>
+              </a:rPr>
+              <a:t>{</a:t>
+            </a:r>
+            <a:r>
+              <a:rPr lang="pt-BR" sz="2400" dirty="0">
+                <a:latin typeface="Times New Roman" panose="02020603050405020304" pitchFamily="18" charset="0"/>
+                <a:cs typeface="Times New Roman" panose="02020603050405020304" pitchFamily="18" charset="0"/>
+              </a:rPr>
+              <a:t>nome</a:t>
+            </a:r>
+            <a:r>
+              <a:rPr lang="pt-BR" sz="2400" dirty="0">
+                <a:solidFill>
+                  <a:schemeClr val="tx1"/>
+                </a:solidFill>
+                <a:latin typeface="Times New Roman" panose="02020603050405020304" pitchFamily="18" charset="0"/>
+                <a:cs typeface="Times New Roman" panose="02020603050405020304" pitchFamily="18" charset="0"/>
+              </a:rPr>
+              <a:t>}’)"</a:t>
+            </a:r>
+          </a:p>
+          <a:p>
+            <a:pPr marL="0" indent="0" algn="just">
+              <a:buNone/>
+            </a:pPr>
+            <a:endParaRPr lang="pt-BR" sz="2400" dirty="0">
+              <a:solidFill>
+                <a:schemeClr val="tx1"/>
+              </a:solidFill>
+              <a:latin typeface="Times New Roman" panose="02020603050405020304" pitchFamily="18" charset="0"/>
+              <a:cs typeface="Times New Roman" panose="02020603050405020304" pitchFamily="18" charset="0"/>
+            </a:endParaRPr>
+          </a:p>
+          <a:p>
+            <a:pPr marL="0" indent="0" algn="just">
+              <a:buNone/>
+            </a:pPr>
+            <a:r>
+              <a:rPr lang="pt-BR" sz="2400" dirty="0" err="1">
+                <a:solidFill>
+                  <a:schemeClr val="tx1"/>
+                </a:solidFill>
+                <a:latin typeface="Times New Roman" panose="02020603050405020304" pitchFamily="18" charset="0"/>
+                <a:cs typeface="Times New Roman" panose="02020603050405020304" pitchFamily="18" charset="0"/>
+              </a:rPr>
               <a:t>cursor.</a:t>
             </a:r>
             <a:r>
@@ -10399,52 +13686,69 @@
               <a:buNone/>
             </a:pPr>
             <a:r>
+              <a:rPr lang="pt-BR" sz="2400" dirty="0" err="1">
+                <a:latin typeface="Times New Roman" panose="02020603050405020304" pitchFamily="18" charset="0"/>
+                <a:cs typeface="Times New Roman" panose="02020603050405020304" pitchFamily="18" charset="0"/>
+              </a:rPr>
+              <a:t>conn.</a:t>
+            </a:r>
+            <a:r>
+              <a:rPr lang="pt-BR" sz="2400" b="1" dirty="0" err="1">
+                <a:solidFill>
+                  <a:srgbClr val="FF0000"/>
+                </a:solidFill>
+                <a:latin typeface="Times New Roman" panose="02020603050405020304" pitchFamily="18" charset="0"/>
+                <a:cs typeface="Times New Roman" panose="02020603050405020304" pitchFamily="18" charset="0"/>
+              </a:rPr>
+              <a:t>commit</a:t>
+            </a:r>
+            <a:r>
               <a:rPr lang="pt-BR" sz="2400" dirty="0">
-                <a:solidFill>
-                  <a:schemeClr val="tx1"/>
-                </a:solidFill>
-                <a:latin typeface="Times New Roman" panose="02020603050405020304" pitchFamily="18" charset="0"/>
-                <a:cs typeface="Times New Roman" panose="02020603050405020304" pitchFamily="18" charset="0"/>
-              </a:rPr>
-              <a:t>linha = </a:t>
-            </a:r>
-            <a:r>
-              <a:rPr lang="pt-BR" sz="2400" dirty="0" err="1">
-                <a:solidFill>
-                  <a:schemeClr val="tx1"/>
-                </a:solidFill>
-                <a:latin typeface="Times New Roman" panose="02020603050405020304" pitchFamily="18" charset="0"/>
-                <a:cs typeface="Times New Roman" panose="02020603050405020304" pitchFamily="18" charset="0"/>
-              </a:rPr>
-              <a:t>cursor.</a:t>
-            </a:r>
-            <a:r>
-              <a:rPr lang="pt-BR" sz="2400" b="1" dirty="0" err="1">
-                <a:solidFill>
-                  <a:srgbClr val="FF0000"/>
-                </a:solidFill>
-                <a:latin typeface="Times New Roman" panose="02020603050405020304" pitchFamily="18" charset="0"/>
-                <a:cs typeface="Times New Roman" panose="02020603050405020304" pitchFamily="18" charset="0"/>
-              </a:rPr>
-              <a:t>fetchall</a:t>
+                <a:latin typeface="Times New Roman" panose="02020603050405020304" pitchFamily="18" charset="0"/>
+                <a:cs typeface="Times New Roman" panose="02020603050405020304" pitchFamily="18" charset="0"/>
+              </a:rPr>
+              <a:t>();</a:t>
+            </a:r>
+            <a:endParaRPr lang="pt-BR" sz="2400" dirty="0">
+              <a:solidFill>
+                <a:schemeClr val="tx1"/>
+              </a:solidFill>
+              <a:latin typeface="Times New Roman" panose="02020603050405020304" pitchFamily="18" charset="0"/>
+              <a:cs typeface="Times New Roman" panose="02020603050405020304" pitchFamily="18" charset="0"/>
+            </a:endParaRPr>
+          </a:p>
+          <a:p>
+            <a:pPr marL="0" indent="0" algn="just">
+              <a:buNone/>
+            </a:pPr>
+            <a:r>
+              <a:rPr lang="pt-BR" sz="2400" b="1" dirty="0">
+                <a:latin typeface="Times New Roman" panose="02020603050405020304" pitchFamily="18" charset="0"/>
+                <a:cs typeface="Times New Roman" panose="02020603050405020304" pitchFamily="18" charset="0"/>
+              </a:rPr>
+              <a:t>print</a:t>
             </a:r>
             <a:r>
               <a:rPr lang="pt-BR" sz="2400" dirty="0">
-                <a:solidFill>
-                  <a:schemeClr val="tx1"/>
-                </a:solidFill>
-                <a:latin typeface="Times New Roman" panose="02020603050405020304" pitchFamily="18" charset="0"/>
-                <a:cs typeface="Times New Roman" panose="02020603050405020304" pitchFamily="18" charset="0"/>
-              </a:rPr>
-              <a:t>()</a:t>
-            </a:r>
+                <a:latin typeface="Times New Roman" panose="02020603050405020304" pitchFamily="18" charset="0"/>
+                <a:cs typeface="Times New Roman" panose="02020603050405020304" pitchFamily="18" charset="0"/>
+              </a:rPr>
+              <a:t>(‘Inserido com sucesso’)</a:t>
+            </a:r>
+            <a:endParaRPr lang="pt-BR" sz="2400" dirty="0">
+              <a:solidFill>
+                <a:schemeClr val="tx1"/>
+              </a:solidFill>
+              <a:latin typeface="Times New Roman" panose="02020603050405020304" pitchFamily="18" charset="0"/>
+              <a:cs typeface="Times New Roman" panose="02020603050405020304" pitchFamily="18" charset="0"/>
+            </a:endParaRPr>
           </a:p>
         </p:txBody>
       </p:sp>
     </p:spTree>
     <p:extLst>
       <p:ext uri="{BB962C8B-B14F-4D97-AF65-F5344CB8AC3E}">
-        <p14:creationId xmlns:p14="http://schemas.microsoft.com/office/powerpoint/2010/main" val="484425744"/>
+        <p14:creationId xmlns:p14="http://schemas.microsoft.com/office/powerpoint/2010/main" val="3817461576"/>
       </p:ext>
     </p:extLst>
   </p:cSld>
@@ -10501,7 +13805,7 @@
                   <a:srgbClr val="0070C0"/>
                 </a:solidFill>
               </a:rPr>
-              <a:t>Python – BANCO DE DADOS – CRUD INSERT</a:t>
+              <a:t>Python – BANCO DE DADOS – CRUD UPDATE</a:t>
             </a:r>
           </a:p>
         </p:txBody>
@@ -10581,21 +13885,7 @@
                 <a:latin typeface="Times New Roman" panose="02020603050405020304" pitchFamily="18" charset="0"/>
                 <a:cs typeface="Times New Roman" panose="02020603050405020304" pitchFamily="18" charset="0"/>
               </a:rPr>
-              <a:t>nome = </a:t>
-            </a:r>
-            <a:r>
-              <a:rPr lang="pt-BR" sz="2400" b="1" dirty="0">
-                <a:latin typeface="Times New Roman" panose="02020603050405020304" pitchFamily="18" charset="0"/>
-                <a:cs typeface="Times New Roman" panose="02020603050405020304" pitchFamily="18" charset="0"/>
-              </a:rPr>
-              <a:t>input</a:t>
-            </a:r>
-            <a:r>
-              <a:rPr lang="pt-BR" sz="2400" dirty="0">
-                <a:latin typeface="Times New Roman" panose="02020603050405020304" pitchFamily="18" charset="0"/>
-                <a:cs typeface="Times New Roman" panose="02020603050405020304" pitchFamily="18" charset="0"/>
-              </a:rPr>
-              <a:t>(“Digite o nome:”)</a:t>
+              <a:t>id = 63</a:t>
             </a:r>
             <a:endParaRPr lang="pt-BR" sz="2400" dirty="0">
               <a:solidFill>
@@ -10610,7 +13900,158 @@
               <a:buNone/>
             </a:pPr>
             <a:r>
+              <a:rPr lang="pt-BR" sz="2400" dirty="0">
+                <a:latin typeface="Times New Roman" panose="02020603050405020304" pitchFamily="18" charset="0"/>
+                <a:cs typeface="Times New Roman" panose="02020603050405020304" pitchFamily="18" charset="0"/>
+              </a:rPr>
+              <a:t>nome = "recursos humanos"</a:t>
+            </a:r>
+          </a:p>
+          <a:p>
+            <a:pPr marL="0" indent="0" algn="just">
+              <a:buNone/>
+            </a:pPr>
+            <a:r>
+              <a:rPr lang="pt-BR" sz="2400" dirty="0" err="1">
+                <a:latin typeface="Times New Roman" panose="02020603050405020304" pitchFamily="18" charset="0"/>
+                <a:cs typeface="Times New Roman" panose="02020603050405020304" pitchFamily="18" charset="0"/>
+              </a:rPr>
+              <a:t>sql</a:t>
+            </a:r>
+            <a:r>
+              <a:rPr lang="pt-BR" sz="2400" dirty="0">
+                <a:latin typeface="Times New Roman" panose="02020603050405020304" pitchFamily="18" charset="0"/>
+                <a:cs typeface="Times New Roman" panose="02020603050405020304" pitchFamily="18" charset="0"/>
+              </a:rPr>
+              <a:t> = </a:t>
+            </a:r>
+            <a:r>
               <a:rPr lang="pt-BR" sz="2400" b="1" dirty="0" err="1">
+                <a:solidFill>
+                  <a:srgbClr val="FF0000"/>
+                </a:solidFill>
+                <a:latin typeface="Times New Roman" panose="02020603050405020304" pitchFamily="18" charset="0"/>
+                <a:cs typeface="Times New Roman" panose="02020603050405020304" pitchFamily="18" charset="0"/>
+              </a:rPr>
+              <a:t>f</a:t>
+            </a:r>
+            <a:r>
+              <a:rPr lang="pt-BR" sz="2400" dirty="0" err="1">
+                <a:latin typeface="Times New Roman" panose="02020603050405020304" pitchFamily="18" charset="0"/>
+                <a:cs typeface="Times New Roman" panose="02020603050405020304" pitchFamily="18" charset="0"/>
+              </a:rPr>
+              <a:t>"</a:t>
+            </a:r>
+            <a:r>
+              <a:rPr lang="pt-BR" sz="2400" b="1" dirty="0" err="1">
+                <a:latin typeface="Times New Roman" panose="02020603050405020304" pitchFamily="18" charset="0"/>
+                <a:cs typeface="Times New Roman" panose="02020603050405020304" pitchFamily="18" charset="0"/>
+              </a:rPr>
+              <a:t>update</a:t>
+            </a:r>
+            <a:r>
+              <a:rPr lang="pt-BR" sz="2400" dirty="0">
+                <a:latin typeface="Times New Roman" panose="02020603050405020304" pitchFamily="18" charset="0"/>
+                <a:cs typeface="Times New Roman" panose="02020603050405020304" pitchFamily="18" charset="0"/>
+              </a:rPr>
+              <a:t> </a:t>
+            </a:r>
+            <a:r>
+              <a:rPr lang="pt-BR" sz="2400" dirty="0" err="1">
+                <a:latin typeface="Times New Roman" panose="02020603050405020304" pitchFamily="18" charset="0"/>
+                <a:cs typeface="Times New Roman" panose="02020603050405020304" pitchFamily="18" charset="0"/>
+              </a:rPr>
+              <a:t>department</a:t>
+            </a:r>
+            <a:r>
+              <a:rPr lang="pt-BR" sz="2400" dirty="0">
+                <a:latin typeface="Times New Roman" panose="02020603050405020304" pitchFamily="18" charset="0"/>
+                <a:cs typeface="Times New Roman" panose="02020603050405020304" pitchFamily="18" charset="0"/>
+              </a:rPr>
+              <a:t> </a:t>
+            </a:r>
+            <a:r>
+              <a:rPr lang="pt-BR" sz="2400" b="1" dirty="0">
+                <a:latin typeface="Times New Roman" panose="02020603050405020304" pitchFamily="18" charset="0"/>
+                <a:cs typeface="Times New Roman" panose="02020603050405020304" pitchFamily="18" charset="0"/>
+              </a:rPr>
+              <a:t>set</a:t>
+            </a:r>
+            <a:r>
+              <a:rPr lang="pt-BR" sz="2400" dirty="0">
+                <a:latin typeface="Times New Roman" panose="02020603050405020304" pitchFamily="18" charset="0"/>
+                <a:cs typeface="Times New Roman" panose="02020603050405020304" pitchFamily="18" charset="0"/>
+              </a:rPr>
+              <a:t> </a:t>
+            </a:r>
+            <a:r>
+              <a:rPr lang="pt-BR" sz="2400" dirty="0" err="1">
+                <a:latin typeface="Times New Roman" panose="02020603050405020304" pitchFamily="18" charset="0"/>
+                <a:cs typeface="Times New Roman" panose="02020603050405020304" pitchFamily="18" charset="0"/>
+              </a:rPr>
+              <a:t>name</a:t>
+            </a:r>
+            <a:r>
+              <a:rPr lang="pt-BR" sz="2400" dirty="0">
+                <a:latin typeface="Times New Roman" panose="02020603050405020304" pitchFamily="18" charset="0"/>
+                <a:cs typeface="Times New Roman" panose="02020603050405020304" pitchFamily="18" charset="0"/>
+              </a:rPr>
+              <a:t> = '{nome}' </a:t>
+            </a:r>
+            <a:r>
+              <a:rPr lang="pt-BR" sz="2400" b="1" dirty="0" err="1">
+                <a:latin typeface="Times New Roman" panose="02020603050405020304" pitchFamily="18" charset="0"/>
+                <a:cs typeface="Times New Roman" panose="02020603050405020304" pitchFamily="18" charset="0"/>
+              </a:rPr>
+              <a:t>where</a:t>
+            </a:r>
+            <a:r>
+              <a:rPr lang="pt-BR" sz="2400" dirty="0">
+                <a:latin typeface="Times New Roman" panose="02020603050405020304" pitchFamily="18" charset="0"/>
+                <a:cs typeface="Times New Roman" panose="02020603050405020304" pitchFamily="18" charset="0"/>
+              </a:rPr>
+              <a:t> Id = {id}"</a:t>
+            </a:r>
+          </a:p>
+          <a:p>
+            <a:pPr marL="0" indent="0" algn="just">
+              <a:buNone/>
+            </a:pPr>
+            <a:endParaRPr lang="pt-BR" sz="2400" dirty="0">
+              <a:latin typeface="Times New Roman" panose="02020603050405020304" pitchFamily="18" charset="0"/>
+              <a:cs typeface="Times New Roman" panose="02020603050405020304" pitchFamily="18" charset="0"/>
+            </a:endParaRPr>
+          </a:p>
+          <a:p>
+            <a:pPr marL="0" indent="0" algn="just">
+              <a:buNone/>
+            </a:pPr>
+            <a:r>
+              <a:rPr lang="pt-BR" sz="2400" dirty="0" err="1">
+                <a:latin typeface="Times New Roman" panose="02020603050405020304" pitchFamily="18" charset="0"/>
+                <a:cs typeface="Times New Roman" panose="02020603050405020304" pitchFamily="18" charset="0"/>
+              </a:rPr>
+              <a:t>cursor.</a:t>
+            </a:r>
+            <a:r>
+              <a:rPr lang="pt-BR" sz="2400" b="1" dirty="0" err="1">
+                <a:solidFill>
+                  <a:srgbClr val="FF0000"/>
+                </a:solidFill>
+                <a:latin typeface="Times New Roman" panose="02020603050405020304" pitchFamily="18" charset="0"/>
+                <a:cs typeface="Times New Roman" panose="02020603050405020304" pitchFamily="18" charset="0"/>
+              </a:rPr>
+              <a:t>execute</a:t>
+            </a:r>
+            <a:r>
+              <a:rPr lang="pt-BR" sz="2400" dirty="0">
+                <a:latin typeface="Times New Roman" panose="02020603050405020304" pitchFamily="18" charset="0"/>
+                <a:cs typeface="Times New Roman" panose="02020603050405020304" pitchFamily="18" charset="0"/>
+              </a:rPr>
+              <a:t>(</a:t>
+            </a:r>
+            <a:r>
+              <a:rPr lang="pt-BR" sz="2400" dirty="0" err="1">
                 <a:latin typeface="Times New Roman" panose="02020603050405020304" pitchFamily="18" charset="0"/>
                 <a:cs typeface="Times New Roman" panose="02020603050405020304" pitchFamily="18" charset="0"/>
               </a:rPr>
@@ -10621,7 +14062,19 @@
                 <a:latin typeface="Times New Roman" panose="02020603050405020304" pitchFamily="18" charset="0"/>
                 <a:cs typeface="Times New Roman" panose="02020603050405020304" pitchFamily="18" charset="0"/>
               </a:rPr>
-              <a:t> = </a:t>
+              <a:t>)</a:t>
+            </a:r>
+          </a:p>
+          <a:p>
+            <a:pPr marL="0" indent="0" algn="just">
+              <a:buNone/>
+            </a:pPr>
+            <a:r>
+              <a:rPr lang="pt-BR" sz="2400" dirty="0" err="1">
+                <a:latin typeface="Times New Roman" panose="02020603050405020304" pitchFamily="18" charset="0"/>
+                <a:cs typeface="Times New Roman" panose="02020603050405020304" pitchFamily="18" charset="0"/>
+              </a:rPr>
+              <a:t>conn.</a:t>
             </a:r>
             <a:r>
               <a:rPr lang="pt-BR" sz="2400" b="1" dirty="0" err="1">
@@ -10631,120 +14084,34 @@
                 <a:latin typeface="Times New Roman" panose="02020603050405020304" pitchFamily="18" charset="0"/>
                 <a:cs typeface="Times New Roman" panose="02020603050405020304" pitchFamily="18" charset="0"/>
               </a:rPr>
-              <a:t>f</a:t>
-            </a:r>
-            <a:r>
-              <a:rPr lang="pt-BR" sz="2400" dirty="0" err="1">
-                <a:solidFill>
-                  <a:schemeClr val="tx1"/>
-                </a:solidFill>
-                <a:latin typeface="Times New Roman" panose="02020603050405020304" pitchFamily="18" charset="0"/>
-                <a:cs typeface="Times New Roman" panose="02020603050405020304" pitchFamily="18" charset="0"/>
-              </a:rPr>
-              <a:t>"</a:t>
-            </a:r>
-            <a:r>
-              <a:rPr lang="pt-BR" sz="2400" b="1" dirty="0" err="1">
-                <a:solidFill>
-                  <a:schemeClr val="tx1"/>
-                </a:solidFill>
-                <a:latin typeface="Times New Roman" panose="02020603050405020304" pitchFamily="18" charset="0"/>
-                <a:cs typeface="Times New Roman" panose="02020603050405020304" pitchFamily="18" charset="0"/>
-              </a:rPr>
-              <a:t>insert</a:t>
+              <a:t>commit</a:t>
             </a:r>
             <a:r>
               <a:rPr lang="pt-BR" sz="2400" dirty="0">
-                <a:solidFill>
-                  <a:schemeClr val="tx1"/>
-                </a:solidFill>
-                <a:latin typeface="Times New Roman" panose="02020603050405020304" pitchFamily="18" charset="0"/>
-                <a:cs typeface="Times New Roman" panose="02020603050405020304" pitchFamily="18" charset="0"/>
-              </a:rPr>
-              <a:t> </a:t>
-            </a:r>
-            <a:r>
-              <a:rPr lang="pt-BR" sz="2400" b="1" dirty="0" err="1">
-                <a:solidFill>
-                  <a:schemeClr val="tx1"/>
-                </a:solidFill>
-                <a:latin typeface="Times New Roman" panose="02020603050405020304" pitchFamily="18" charset="0"/>
-                <a:cs typeface="Times New Roman" panose="02020603050405020304" pitchFamily="18" charset="0"/>
-              </a:rPr>
-              <a:t>into</a:t>
+                <a:latin typeface="Times New Roman" panose="02020603050405020304" pitchFamily="18" charset="0"/>
+                <a:cs typeface="Times New Roman" panose="02020603050405020304" pitchFamily="18" charset="0"/>
+              </a:rPr>
+              <a:t>()</a:t>
+            </a:r>
+          </a:p>
+          <a:p>
+            <a:pPr marL="0" indent="0" algn="just">
+              <a:buNone/>
+            </a:pPr>
+            <a:r>
+              <a:rPr lang="pt-BR" sz="2400" b="1" dirty="0">
+                <a:latin typeface="Times New Roman" panose="02020603050405020304" pitchFamily="18" charset="0"/>
+                <a:cs typeface="Times New Roman" panose="02020603050405020304" pitchFamily="18" charset="0"/>
+              </a:rPr>
+              <a:t>print</a:t>
             </a:r>
             <a:r>
               <a:rPr lang="pt-BR" sz="2400" dirty="0">
-                <a:solidFill>
-                  <a:schemeClr val="tx1"/>
-                </a:solidFill>
-                <a:latin typeface="Times New Roman" panose="02020603050405020304" pitchFamily="18" charset="0"/>
-                <a:cs typeface="Times New Roman" panose="02020603050405020304" pitchFamily="18" charset="0"/>
-              </a:rPr>
-              <a:t> departamento (nome) </a:t>
-            </a:r>
-            <a:r>
-              <a:rPr lang="pt-BR" sz="2400" b="1" dirty="0" err="1">
-                <a:solidFill>
-                  <a:schemeClr val="tx1"/>
-                </a:solidFill>
-                <a:latin typeface="Times New Roman" panose="02020603050405020304" pitchFamily="18" charset="0"/>
-                <a:cs typeface="Times New Roman" panose="02020603050405020304" pitchFamily="18" charset="0"/>
-              </a:rPr>
-              <a:t>values</a:t>
-            </a:r>
-            <a:r>
-              <a:rPr lang="pt-BR" sz="2400" dirty="0">
-                <a:solidFill>
-                  <a:schemeClr val="tx1"/>
-                </a:solidFill>
-                <a:latin typeface="Times New Roman" panose="02020603050405020304" pitchFamily="18" charset="0"/>
-                <a:cs typeface="Times New Roman" panose="02020603050405020304" pitchFamily="18" charset="0"/>
-              </a:rPr>
-              <a:t> (</a:t>
-            </a:r>
-            <a:r>
-              <a:rPr lang="pt-BR" sz="2400" b="1" dirty="0">
-                <a:solidFill>
-                  <a:schemeClr val="tx1"/>
-                </a:solidFill>
-                <a:latin typeface="Times New Roman" panose="02020603050405020304" pitchFamily="18" charset="0"/>
-                <a:cs typeface="Times New Roman" panose="02020603050405020304" pitchFamily="18" charset="0"/>
-              </a:rPr>
-              <a:t>‘</a:t>
-            </a:r>
-            <a:r>
-              <a:rPr lang="pt-BR" sz="2400" dirty="0">
-                <a:solidFill>
-                  <a:schemeClr val="tx1"/>
-                </a:solidFill>
-                <a:latin typeface="Times New Roman" panose="02020603050405020304" pitchFamily="18" charset="0"/>
-                <a:cs typeface="Times New Roman" panose="02020603050405020304" pitchFamily="18" charset="0"/>
-              </a:rPr>
-              <a:t>{</a:t>
-            </a:r>
-            <a:r>
-              <a:rPr lang="pt-BR" sz="2400" dirty="0">
-                <a:latin typeface="Times New Roman" panose="02020603050405020304" pitchFamily="18" charset="0"/>
-                <a:cs typeface="Times New Roman" panose="02020603050405020304" pitchFamily="18" charset="0"/>
-              </a:rPr>
-              <a:t>nome</a:t>
-            </a:r>
-            <a:r>
-              <a:rPr lang="pt-BR" sz="2400" dirty="0">
-                <a:solidFill>
-                  <a:schemeClr val="tx1"/>
-                </a:solidFill>
-                <a:latin typeface="Times New Roman" panose="02020603050405020304" pitchFamily="18" charset="0"/>
-                <a:cs typeface="Times New Roman" panose="02020603050405020304" pitchFamily="18" charset="0"/>
-              </a:rPr>
-              <a:t>}’)"</a:t>
-            </a:r>
-          </a:p>
-          <a:p>
-            <a:pPr marL="0" indent="0" algn="just">
-              <a:buNone/>
-            </a:pPr>
+                <a:latin typeface="Times New Roman" panose="02020603050405020304" pitchFamily="18" charset="0"/>
+                <a:cs typeface="Times New Roman" panose="02020603050405020304" pitchFamily="18" charset="0"/>
+              </a:rPr>
+              <a:t>("Atualizado com sucesso")</a:t>
+            </a:r>
             <a:endParaRPr lang="pt-BR" sz="2400" dirty="0">
               <a:solidFill>
                 <a:schemeClr val="tx1"/>
@@ -10753,129 +14120,12 @@
               <a:cs typeface="Times New Roman" panose="02020603050405020304" pitchFamily="18" charset="0"/>
             </a:endParaRPr>
           </a:p>
-          <a:p>
-            <a:pPr marL="0" indent="0" algn="just">
-              <a:buNone/>
-            </a:pPr>
-            <a:r>
-              <a:rPr lang="pt-BR" sz="2400" dirty="0" err="1">
-                <a:solidFill>
-                  <a:schemeClr val="tx1"/>
-                </a:solidFill>
-                <a:latin typeface="Times New Roman" panose="02020603050405020304" pitchFamily="18" charset="0"/>
-                <a:cs typeface="Times New Roman" panose="02020603050405020304" pitchFamily="18" charset="0"/>
-              </a:rPr>
-              <a:t>cursor.</a:t>
-            </a:r>
-            <a:r>
-              <a:rPr lang="pt-BR" sz="2400" b="1" dirty="0" err="1">
-                <a:solidFill>
-                  <a:schemeClr val="tx1"/>
-                </a:solidFill>
-                <a:latin typeface="Times New Roman" panose="02020603050405020304" pitchFamily="18" charset="0"/>
-                <a:cs typeface="Times New Roman" panose="02020603050405020304" pitchFamily="18" charset="0"/>
-              </a:rPr>
-              <a:t>execute</a:t>
-            </a:r>
-            <a:r>
-              <a:rPr lang="pt-BR" sz="2400" dirty="0">
-                <a:solidFill>
-                  <a:schemeClr val="tx1"/>
-                </a:solidFill>
-                <a:latin typeface="Times New Roman" panose="02020603050405020304" pitchFamily="18" charset="0"/>
-                <a:cs typeface="Times New Roman" panose="02020603050405020304" pitchFamily="18" charset="0"/>
-              </a:rPr>
-              <a:t>(</a:t>
-            </a:r>
-            <a:r>
-              <a:rPr lang="pt-BR" sz="2400" dirty="0" err="1">
-                <a:solidFill>
-                  <a:schemeClr val="tx1"/>
-                </a:solidFill>
-                <a:latin typeface="Times New Roman" panose="02020603050405020304" pitchFamily="18" charset="0"/>
-                <a:cs typeface="Times New Roman" panose="02020603050405020304" pitchFamily="18" charset="0"/>
-              </a:rPr>
-              <a:t>sql</a:t>
-            </a:r>
-            <a:r>
-              <a:rPr lang="pt-BR" sz="2400" dirty="0">
-                <a:solidFill>
-                  <a:schemeClr val="tx1"/>
-                </a:solidFill>
-                <a:latin typeface="Times New Roman" panose="02020603050405020304" pitchFamily="18" charset="0"/>
-                <a:cs typeface="Times New Roman" panose="02020603050405020304" pitchFamily="18" charset="0"/>
-              </a:rPr>
-              <a:t>)</a:t>
-            </a:r>
-          </a:p>
-          <a:p>
-            <a:pPr marL="0" indent="0" algn="just">
-              <a:buNone/>
-            </a:pPr>
-            <a:r>
-              <a:rPr lang="pt-BR" sz="2400" dirty="0" err="1">
-                <a:latin typeface="Times New Roman" panose="02020603050405020304" pitchFamily="18" charset="0"/>
-                <a:cs typeface="Times New Roman" panose="02020603050405020304" pitchFamily="18" charset="0"/>
-              </a:rPr>
-              <a:t>conn.</a:t>
-            </a:r>
-            <a:r>
-              <a:rPr lang="pt-BR" sz="2400" b="1" dirty="0" err="1">
-                <a:solidFill>
-                  <a:srgbClr val="FF0000"/>
-                </a:solidFill>
-                <a:latin typeface="Times New Roman" panose="02020603050405020304" pitchFamily="18" charset="0"/>
-                <a:cs typeface="Times New Roman" panose="02020603050405020304" pitchFamily="18" charset="0"/>
-              </a:rPr>
-              <a:t>commit</a:t>
-            </a:r>
-            <a:r>
-              <a:rPr lang="pt-BR" sz="2400" dirty="0">
-                <a:latin typeface="Times New Roman" panose="02020603050405020304" pitchFamily="18" charset="0"/>
-                <a:cs typeface="Times New Roman" panose="02020603050405020304" pitchFamily="18" charset="0"/>
-              </a:rPr>
-              <a:t>();</a:t>
-            </a:r>
-            <a:endParaRPr lang="pt-BR" sz="2400" dirty="0">
-              <a:solidFill>
-                <a:schemeClr val="tx1"/>
-              </a:solidFill>
-              <a:latin typeface="Times New Roman" panose="02020603050405020304" pitchFamily="18" charset="0"/>
-              <a:cs typeface="Times New Roman" panose="02020603050405020304" pitchFamily="18" charset="0"/>
-            </a:endParaRPr>
-          </a:p>
-          <a:p>
-            <a:pPr marL="0" indent="0" algn="just">
-              <a:buNone/>
-            </a:pPr>
-            <a:r>
-              <a:rPr lang="pt-BR" sz="2400" b="1" dirty="0">
-                <a:latin typeface="Times New Roman" panose="02020603050405020304" pitchFamily="18" charset="0"/>
-                <a:cs typeface="Times New Roman" panose="02020603050405020304" pitchFamily="18" charset="0"/>
-              </a:rPr>
-              <a:t>print</a:t>
-            </a:r>
-            <a:r>
-              <a:rPr lang="pt-BR" sz="2400" dirty="0">
-                <a:latin typeface="Times New Roman" panose="02020603050405020304" pitchFamily="18" charset="0"/>
-                <a:cs typeface="Times New Roman" panose="02020603050405020304" pitchFamily="18" charset="0"/>
-              </a:rPr>
-              <a:t>(‘Inserido com sucesso’)</a:t>
-            </a:r>
-            <a:endParaRPr lang="pt-BR" sz="2400" dirty="0">
-              <a:solidFill>
-                <a:schemeClr val="tx1"/>
-              </a:solidFill>
-              <a:latin typeface="Times New Roman" panose="02020603050405020304" pitchFamily="18" charset="0"/>
-              <a:cs typeface="Times New Roman" panose="02020603050405020304" pitchFamily="18" charset="0"/>
-            </a:endParaRPr>
-          </a:p>
         </p:txBody>
       </p:sp>
     </p:spTree>
     <p:extLst>
       <p:ext uri="{BB962C8B-B14F-4D97-AF65-F5344CB8AC3E}">
-        <p14:creationId xmlns:p14="http://schemas.microsoft.com/office/powerpoint/2010/main" val="3817461576"/>
+        <p14:creationId xmlns:p14="http://schemas.microsoft.com/office/powerpoint/2010/main" val="4197986306"/>
       </p:ext>
     </p:extLst>
   </p:cSld>

--- a/01 Classes/Aula 12, 13 RAD Python - Banco de Dados.pptx
+++ b/01 Classes/Aula 12, 13 RAD Python - Banco de Dados.pptx
@@ -1823,7 +1823,7 @@
           <a:p>
             <a:fld id="{48A87A34-81AB-432B-8DAE-1953F412C126}" type="datetimeFigureOut">
               <a:rPr lang="en-US" smtClean="0"/>
-              <a:t>4/27/2026</a:t>
+              <a:t>4/28/2026</a:t>
             </a:fld>
             <a:endParaRPr lang="en-US" dirty="0"/>
           </a:p>
@@ -2034,7 +2034,7 @@
           <a:p>
             <a:fld id="{48A87A34-81AB-432B-8DAE-1953F412C126}" type="datetimeFigureOut">
               <a:rPr lang="en-US" smtClean="0"/>
-              <a:t>4/27/2026</a:t>
+              <a:t>4/28/2026</a:t>
             </a:fld>
             <a:endParaRPr lang="en-US" dirty="0"/>
           </a:p>
@@ -2249,7 +2249,7 @@
           <a:p>
             <a:fld id="{48A87A34-81AB-432B-8DAE-1953F412C126}" type="datetimeFigureOut">
               <a:rPr lang="en-US" smtClean="0"/>
-              <a:t>4/27/2026</a:t>
+              <a:t>4/28/2026</a:t>
             </a:fld>
             <a:endParaRPr lang="en-US" dirty="0"/>
           </a:p>
@@ -2617,7 +2617,7 @@
           <a:p>
             <a:fld id="{48A87A34-81AB-432B-8DAE-1953F412C126}" type="datetimeFigureOut">
               <a:rPr lang="en-US" smtClean="0"/>
-              <a:t>4/27/2026</a:t>
+              <a:t>4/28/2026</a:t>
             </a:fld>
             <a:endParaRPr lang="en-US" dirty="0"/>
           </a:p>
@@ -2896,7 +2896,7 @@
           <a:p>
             <a:fld id="{48A87A34-81AB-432B-8DAE-1953F412C126}" type="datetimeFigureOut">
               <a:rPr lang="en-US" smtClean="0"/>
-              <a:t>4/27/2026</a:t>
+              <a:t>4/28/2026</a:t>
             </a:fld>
             <a:endParaRPr lang="en-US" dirty="0"/>
           </a:p>
@@ -3164,7 +3164,7 @@
           <a:p>
             <a:fld id="{48A87A34-81AB-432B-8DAE-1953F412C126}" type="datetimeFigureOut">
               <a:rPr lang="en-US" smtClean="0"/>
-              <a:t>4/27/2026</a:t>
+              <a:t>4/28/2026</a:t>
             </a:fld>
             <a:endParaRPr lang="en-US" dirty="0"/>
           </a:p>
@@ -3580,7 +3580,7 @@
           <a:p>
             <a:fld id="{48A87A34-81AB-432B-8DAE-1953F412C126}" type="datetimeFigureOut">
               <a:rPr lang="en-US" smtClean="0"/>
-              <a:t>4/27/2026</a:t>
+              <a:t>4/28/2026</a:t>
             </a:fld>
             <a:endParaRPr lang="en-US" dirty="0"/>
           </a:p>
@@ -3729,7 +3729,7 @@
           <a:p>
             <a:fld id="{48A87A34-81AB-432B-8DAE-1953F412C126}" type="datetimeFigureOut">
               <a:rPr lang="en-US" smtClean="0"/>
-              <a:t>4/27/2026</a:t>
+              <a:t>4/28/2026</a:t>
             </a:fld>
             <a:endParaRPr lang="en-US" dirty="0"/>
           </a:p>
@@ -3855,7 +3855,7 @@
           <a:p>
             <a:fld id="{48A87A34-81AB-432B-8DAE-1953F412C126}" type="datetimeFigureOut">
               <a:rPr lang="en-US" smtClean="0"/>
-              <a:t>4/27/2026</a:t>
+              <a:t>4/28/2026</a:t>
             </a:fld>
             <a:endParaRPr lang="en-US" dirty="0"/>
           </a:p>
@@ -4106,7 +4106,7 @@
           <a:p>
             <a:fld id="{48A87A34-81AB-432B-8DAE-1953F412C126}" type="datetimeFigureOut">
               <a:rPr lang="en-US" smtClean="0"/>
-              <a:t>4/27/2026</a:t>
+              <a:t>4/28/2026</a:t>
             </a:fld>
             <a:endParaRPr lang="en-US" dirty="0"/>
           </a:p>
@@ -4552,7 +4552,7 @@
             <a:fld id="{48A87A34-81AB-432B-8DAE-1953F412C126}" type="datetimeFigureOut">
               <a:rPr lang="en-US" smtClean="0"/>
               <a:pPr/>
-              <a:t>4/27/2026</a:t>
+              <a:t>4/28/2026</a:t>
             </a:fld>
             <a:endParaRPr lang="en-US" dirty="0"/>
           </a:p>
@@ -4887,7 +4887,7 @@
             <a:fld id="{48A87A34-81AB-432B-8DAE-1953F412C126}" type="datetimeFigureOut">
               <a:rPr lang="en-US" smtClean="0"/>
               <a:pPr/>
-              <a:t>4/27/2026</a:t>
+              <a:t>4/28/2026</a:t>
             </a:fld>
             <a:endParaRPr lang="en-US" dirty="0"/>
           </a:p>
@@ -6775,7 +6775,7 @@
                 <a:latin typeface="Times New Roman" panose="02020603050405020304" pitchFamily="18" charset="0"/>
                 <a:cs typeface="Times New Roman" panose="02020603050405020304" pitchFamily="18" charset="0"/>
               </a:rPr>
-              <a:t>cur.close</a:t>
+              <a:t>cursor.close</a:t>
             </a:r>
             <a:r>
               <a:rPr lang="pt-BR" sz="1800" dirty="0">
@@ -7109,39 +7109,82 @@
               <a:buNone/>
             </a:pPr>
             <a:r>
+              <a:rPr lang="pt-BR" sz="1600" dirty="0">
+                <a:latin typeface="Times New Roman" panose="02020603050405020304" pitchFamily="18" charset="0"/>
+                <a:cs typeface="Times New Roman" panose="02020603050405020304" pitchFamily="18" charset="0"/>
+              </a:rPr>
+              <a:t>cursor = </a:t>
+            </a:r>
+            <a:r>
+              <a:rPr lang="pt-BR" sz="1600" b="1" dirty="0" err="1">
+                <a:latin typeface="Times New Roman" panose="02020603050405020304" pitchFamily="18" charset="0"/>
+                <a:cs typeface="Times New Roman" panose="02020603050405020304" pitchFamily="18" charset="0"/>
+              </a:rPr>
+              <a:t>conn</a:t>
+            </a:r>
+            <a:r>
               <a:rPr lang="pt-BR" sz="1600" dirty="0" err="1">
                 <a:latin typeface="Times New Roman" panose="02020603050405020304" pitchFamily="18" charset="0"/>
                 <a:cs typeface="Times New Roman" panose="02020603050405020304" pitchFamily="18" charset="0"/>
               </a:rPr>
-              <a:t>cur</a:t>
+              <a:t>.cursor</a:t>
             </a:r>
             <a:r>
               <a:rPr lang="pt-BR" sz="1600" dirty="0">
                 <a:latin typeface="Times New Roman" panose="02020603050405020304" pitchFamily="18" charset="0"/>
                 <a:cs typeface="Times New Roman" panose="02020603050405020304" pitchFamily="18" charset="0"/>
               </a:rPr>
-              <a:t> = </a:t>
-            </a:r>
-            <a:r>
-              <a:rPr lang="pt-BR" sz="1600" b="1" dirty="0" err="1">
-                <a:latin typeface="Times New Roman" panose="02020603050405020304" pitchFamily="18" charset="0"/>
-                <a:cs typeface="Times New Roman" panose="02020603050405020304" pitchFamily="18" charset="0"/>
-              </a:rPr>
-              <a:t>conn</a:t>
-            </a:r>
+              <a:t>()</a:t>
+            </a:r>
+          </a:p>
+          <a:p>
+            <a:pPr marL="0" indent="0" algn="just">
+              <a:buNone/>
+            </a:pPr>
             <a:r>
               <a:rPr lang="pt-BR" sz="1600" dirty="0" err="1">
                 <a:latin typeface="Times New Roman" panose="02020603050405020304" pitchFamily="18" charset="0"/>
                 <a:cs typeface="Times New Roman" panose="02020603050405020304" pitchFamily="18" charset="0"/>
               </a:rPr>
-              <a:t>.cursor</a:t>
+              <a:t>cursor.execute</a:t>
             </a:r>
             <a:r>
               <a:rPr lang="pt-BR" sz="1600" dirty="0">
                 <a:latin typeface="Times New Roman" panose="02020603050405020304" pitchFamily="18" charset="0"/>
                 <a:cs typeface="Times New Roman" panose="02020603050405020304" pitchFamily="18" charset="0"/>
               </a:rPr>
-              <a:t>()</a:t>
+              <a:t>("</a:t>
+            </a:r>
+            <a:r>
+              <a:rPr lang="pt-BR" sz="1600" b="1" dirty="0">
+                <a:solidFill>
+                  <a:srgbClr val="FF0000"/>
+                </a:solidFill>
+                <a:latin typeface="Times New Roman" panose="02020603050405020304" pitchFamily="18" charset="0"/>
+                <a:cs typeface="Times New Roman" panose="02020603050405020304" pitchFamily="18" charset="0"/>
+              </a:rPr>
+              <a:t>SELECT</a:t>
+            </a:r>
+            <a:r>
+              <a:rPr lang="pt-BR" sz="1600" dirty="0">
+                <a:latin typeface="Times New Roman" panose="02020603050405020304" pitchFamily="18" charset="0"/>
+                <a:cs typeface="Times New Roman" panose="02020603050405020304" pitchFamily="18" charset="0"/>
+              </a:rPr>
+              <a:t> </a:t>
+            </a:r>
+            <a:r>
+              <a:rPr lang="pt-BR" sz="1600" dirty="0" err="1">
+                <a:latin typeface="Times New Roman" panose="02020603050405020304" pitchFamily="18" charset="0"/>
+                <a:cs typeface="Times New Roman" panose="02020603050405020304" pitchFamily="18" charset="0"/>
+              </a:rPr>
+              <a:t>version</a:t>
+            </a:r>
+            <a:r>
+              <a:rPr lang="pt-BR" sz="1600" dirty="0">
+                <a:latin typeface="Times New Roman" panose="02020603050405020304" pitchFamily="18" charset="0"/>
+                <a:cs typeface="Times New Roman" panose="02020603050405020304" pitchFamily="18" charset="0"/>
+              </a:rPr>
+              <a:t>();")</a:t>
             </a:r>
           </a:p>
           <a:p>
@@ -7149,70 +7192,37 @@
               <a:buNone/>
             </a:pPr>
             <a:r>
+              <a:rPr lang="pt-BR" sz="1600" dirty="0">
+                <a:latin typeface="Times New Roman" panose="02020603050405020304" pitchFamily="18" charset="0"/>
+                <a:cs typeface="Times New Roman" panose="02020603050405020304" pitchFamily="18" charset="0"/>
+              </a:rPr>
+              <a:t>print(</a:t>
+            </a:r>
+            <a:r>
               <a:rPr lang="pt-BR" sz="1600" dirty="0" err="1">
                 <a:latin typeface="Times New Roman" panose="02020603050405020304" pitchFamily="18" charset="0"/>
                 <a:cs typeface="Times New Roman" panose="02020603050405020304" pitchFamily="18" charset="0"/>
               </a:rPr>
-              <a:t>cur.execute</a:t>
+              <a:t>cursor.fetchone</a:t>
             </a:r>
             <a:r>
               <a:rPr lang="pt-BR" sz="1600" dirty="0">
                 <a:latin typeface="Times New Roman" panose="02020603050405020304" pitchFamily="18" charset="0"/>
                 <a:cs typeface="Times New Roman" panose="02020603050405020304" pitchFamily="18" charset="0"/>
               </a:rPr>
-              <a:t>("SELECT </a:t>
-            </a:r>
+              <a:t>())</a:t>
+            </a:r>
+          </a:p>
+          <a:p>
+            <a:pPr marL="0" indent="0" algn="just">
+              <a:buNone/>
+            </a:pPr>
             <a:r>
               <a:rPr lang="pt-BR" sz="1600" dirty="0" err="1">
                 <a:latin typeface="Times New Roman" panose="02020603050405020304" pitchFamily="18" charset="0"/>
                 <a:cs typeface="Times New Roman" panose="02020603050405020304" pitchFamily="18" charset="0"/>
               </a:rPr>
-              <a:t>version</a:t>
-            </a:r>
-            <a:r>
-              <a:rPr lang="pt-BR" sz="1600" dirty="0">
-                <a:latin typeface="Times New Roman" panose="02020603050405020304" pitchFamily="18" charset="0"/>
-                <a:cs typeface="Times New Roman" panose="02020603050405020304" pitchFamily="18" charset="0"/>
-              </a:rPr>
-              <a:t>();")</a:t>
-            </a:r>
-          </a:p>
-          <a:p>
-            <a:pPr marL="0" indent="0" algn="just">
-              <a:buNone/>
-            </a:pPr>
-            <a:r>
-              <a:rPr lang="pt-BR" sz="1600" dirty="0">
-                <a:latin typeface="Times New Roman" panose="02020603050405020304" pitchFamily="18" charset="0"/>
-                <a:cs typeface="Times New Roman" panose="02020603050405020304" pitchFamily="18" charset="0"/>
-              </a:rPr>
-              <a:t>print(</a:t>
-            </a:r>
-            <a:r>
-              <a:rPr lang="pt-BR" sz="1600" dirty="0" err="1">
-                <a:latin typeface="Times New Roman" panose="02020603050405020304" pitchFamily="18" charset="0"/>
-                <a:cs typeface="Times New Roman" panose="02020603050405020304" pitchFamily="18" charset="0"/>
-              </a:rPr>
-              <a:t>cur.fetchone</a:t>
-            </a:r>
-            <a:r>
-              <a:rPr lang="pt-BR" sz="1600" dirty="0">
-                <a:latin typeface="Times New Roman" panose="02020603050405020304" pitchFamily="18" charset="0"/>
-                <a:cs typeface="Times New Roman" panose="02020603050405020304" pitchFamily="18" charset="0"/>
-              </a:rPr>
-              <a:t>())</a:t>
-            </a:r>
-          </a:p>
-          <a:p>
-            <a:pPr marL="0" indent="0" algn="just">
-              <a:buNone/>
-            </a:pPr>
-            <a:r>
-              <a:rPr lang="pt-BR" sz="1600" dirty="0" err="1">
-                <a:latin typeface="Times New Roman" panose="02020603050405020304" pitchFamily="18" charset="0"/>
-                <a:cs typeface="Times New Roman" panose="02020603050405020304" pitchFamily="18" charset="0"/>
-              </a:rPr>
-              <a:t>cur.close</a:t>
+              <a:t>cursor.close</a:t>
             </a:r>
             <a:r>
               <a:rPr lang="pt-BR" sz="1600" dirty="0">
@@ -7449,39 +7459,181 @@
               <a:buNone/>
             </a:pPr>
             <a:r>
+              <a:rPr lang="pt-BR" sz="1600" dirty="0">
+                <a:latin typeface="Times New Roman" panose="02020603050405020304" pitchFamily="18" charset="0"/>
+                <a:cs typeface="Times New Roman" panose="02020603050405020304" pitchFamily="18" charset="0"/>
+              </a:rPr>
+              <a:t>cursor = </a:t>
+            </a:r>
+            <a:r>
+              <a:rPr lang="pt-BR" sz="1600" b="1" dirty="0" err="1">
+                <a:latin typeface="Times New Roman" panose="02020603050405020304" pitchFamily="18" charset="0"/>
+                <a:cs typeface="Times New Roman" panose="02020603050405020304" pitchFamily="18" charset="0"/>
+              </a:rPr>
+              <a:t>conn</a:t>
+            </a:r>
+            <a:r>
               <a:rPr lang="pt-BR" sz="1600" dirty="0" err="1">
                 <a:latin typeface="Times New Roman" panose="02020603050405020304" pitchFamily="18" charset="0"/>
                 <a:cs typeface="Times New Roman" panose="02020603050405020304" pitchFamily="18" charset="0"/>
               </a:rPr>
-              <a:t>cur</a:t>
+              <a:t>.cursor</a:t>
             </a:r>
             <a:r>
               <a:rPr lang="pt-BR" sz="1600" dirty="0">
                 <a:latin typeface="Times New Roman" panose="02020603050405020304" pitchFamily="18" charset="0"/>
                 <a:cs typeface="Times New Roman" panose="02020603050405020304" pitchFamily="18" charset="0"/>
               </a:rPr>
-              <a:t> = </a:t>
-            </a:r>
-            <a:r>
-              <a:rPr lang="pt-BR" sz="1600" b="1" dirty="0" err="1">
+              <a:t>()</a:t>
+            </a:r>
+          </a:p>
+          <a:p>
+            <a:pPr marL="0" indent="0" algn="just">
+              <a:buNone/>
+            </a:pPr>
+            <a:r>
+              <a:rPr lang="pt-BR" sz="1600" dirty="0" err="1">
+                <a:latin typeface="Times New Roman" panose="02020603050405020304" pitchFamily="18" charset="0"/>
+                <a:cs typeface="Times New Roman" panose="02020603050405020304" pitchFamily="18" charset="0"/>
+              </a:rPr>
+              <a:t>cursor.execute</a:t>
+            </a:r>
+            <a:r>
+              <a:rPr lang="pt-BR" sz="1600" dirty="0">
+                <a:latin typeface="Times New Roman" panose="02020603050405020304" pitchFamily="18" charset="0"/>
+                <a:cs typeface="Times New Roman" panose="02020603050405020304" pitchFamily="18" charset="0"/>
+              </a:rPr>
+              <a:t>("</a:t>
+            </a:r>
+            <a:r>
+              <a:rPr lang="pt-BR" sz="1600" b="1" dirty="0">
+                <a:solidFill>
+                  <a:srgbClr val="FF0000"/>
+                </a:solidFill>
+                <a:latin typeface="Times New Roman" panose="02020603050405020304" pitchFamily="18" charset="0"/>
+                <a:cs typeface="Times New Roman" panose="02020603050405020304" pitchFamily="18" charset="0"/>
+              </a:rPr>
+              <a:t>SELECT</a:t>
+            </a:r>
+            <a:r>
+              <a:rPr lang="pt-BR" sz="1600" dirty="0">
+                <a:latin typeface="Times New Roman" panose="02020603050405020304" pitchFamily="18" charset="0"/>
+                <a:cs typeface="Times New Roman" panose="02020603050405020304" pitchFamily="18" charset="0"/>
+              </a:rPr>
+              <a:t> </a:t>
+            </a:r>
+            <a:r>
+              <a:rPr lang="pt-BR" sz="1600" dirty="0" err="1">
+                <a:latin typeface="Times New Roman" panose="02020603050405020304" pitchFamily="18" charset="0"/>
+                <a:cs typeface="Times New Roman" panose="02020603050405020304" pitchFamily="18" charset="0"/>
+              </a:rPr>
+              <a:t>current_database</a:t>
+            </a:r>
+            <a:r>
+              <a:rPr lang="pt-BR" sz="1600" dirty="0">
+                <a:latin typeface="Times New Roman" panose="02020603050405020304" pitchFamily="18" charset="0"/>
+                <a:cs typeface="Times New Roman" panose="02020603050405020304" pitchFamily="18" charset="0"/>
+              </a:rPr>
+              <a:t>(); ")</a:t>
+            </a:r>
+          </a:p>
+          <a:p>
+            <a:pPr marL="0" indent="0" algn="just">
+              <a:buNone/>
+            </a:pPr>
+            <a:r>
+              <a:rPr lang="pt-BR" sz="1600" dirty="0">
+                <a:latin typeface="Times New Roman" panose="02020603050405020304" pitchFamily="18" charset="0"/>
+                <a:cs typeface="Times New Roman" panose="02020603050405020304" pitchFamily="18" charset="0"/>
+              </a:rPr>
+              <a:t>linha = </a:t>
+            </a:r>
+            <a:r>
+              <a:rPr lang="pt-BR" sz="1600" dirty="0" err="1">
+                <a:latin typeface="Times New Roman" panose="02020603050405020304" pitchFamily="18" charset="0"/>
+                <a:cs typeface="Times New Roman" panose="02020603050405020304" pitchFamily="18" charset="0"/>
+              </a:rPr>
+              <a:t>cursor.fetchone</a:t>
+            </a:r>
+            <a:r>
+              <a:rPr lang="pt-BR" sz="1600" dirty="0">
+                <a:latin typeface="Times New Roman" panose="02020603050405020304" pitchFamily="18" charset="0"/>
+                <a:cs typeface="Times New Roman" panose="02020603050405020304" pitchFamily="18" charset="0"/>
+              </a:rPr>
+              <a:t>()</a:t>
+            </a:r>
+          </a:p>
+          <a:p>
+            <a:pPr marL="0" indent="0" algn="just">
+              <a:buNone/>
+            </a:pPr>
+            <a:r>
+              <a:rPr lang="pt-BR" sz="1600" dirty="0">
+                <a:latin typeface="Times New Roman" panose="02020603050405020304" pitchFamily="18" charset="0"/>
+                <a:cs typeface="Times New Roman" panose="02020603050405020304" pitchFamily="18" charset="0"/>
+              </a:rPr>
+              <a:t>print("conectado ao banco de dados: ", linha)</a:t>
+            </a:r>
+          </a:p>
+          <a:p>
+            <a:pPr marL="0" indent="0" algn="just">
+              <a:buNone/>
+            </a:pPr>
+            <a:r>
+              <a:rPr lang="pt-BR" sz="1600" dirty="0" err="1">
+                <a:latin typeface="Times New Roman" panose="02020603050405020304" pitchFamily="18" charset="0"/>
+                <a:cs typeface="Times New Roman" panose="02020603050405020304" pitchFamily="18" charset="0"/>
+              </a:rPr>
+              <a:t>if</a:t>
+            </a:r>
+            <a:r>
+              <a:rPr lang="pt-BR" sz="1600" dirty="0">
+                <a:latin typeface="Times New Roman" panose="02020603050405020304" pitchFamily="18" charset="0"/>
+                <a:cs typeface="Times New Roman" panose="02020603050405020304" pitchFamily="18" charset="0"/>
+              </a:rPr>
+              <a:t> </a:t>
+            </a:r>
+            <a:r>
+              <a:rPr lang="pt-BR" sz="1600" dirty="0" err="1">
                 <a:latin typeface="Times New Roman" panose="02020603050405020304" pitchFamily="18" charset="0"/>
                 <a:cs typeface="Times New Roman" panose="02020603050405020304" pitchFamily="18" charset="0"/>
               </a:rPr>
               <a:t>conn</a:t>
             </a:r>
             <a:r>
+              <a:rPr lang="pt-BR" sz="1600" dirty="0">
+                <a:latin typeface="Times New Roman" panose="02020603050405020304" pitchFamily="18" charset="0"/>
+                <a:cs typeface="Times New Roman" panose="02020603050405020304" pitchFamily="18" charset="0"/>
+              </a:rPr>
+              <a:t> </a:t>
+            </a:r>
+            <a:r>
               <a:rPr lang="pt-BR" sz="1600" dirty="0" err="1">
                 <a:latin typeface="Times New Roman" panose="02020603050405020304" pitchFamily="18" charset="0"/>
                 <a:cs typeface="Times New Roman" panose="02020603050405020304" pitchFamily="18" charset="0"/>
               </a:rPr>
-              <a:t>.cursor</a:t>
+              <a:t>and</a:t>
             </a:r>
             <a:r>
               <a:rPr lang="pt-BR" sz="1600" dirty="0">
                 <a:latin typeface="Times New Roman" panose="02020603050405020304" pitchFamily="18" charset="0"/>
                 <a:cs typeface="Times New Roman" panose="02020603050405020304" pitchFamily="18" charset="0"/>
               </a:rPr>
-              <a:t>()</a:t>
+              <a:t> </a:t>
+            </a:r>
+            <a:r>
+              <a:rPr lang="pt-BR" sz="1600" dirty="0" err="1">
+                <a:latin typeface="Times New Roman" panose="02020603050405020304" pitchFamily="18" charset="0"/>
+                <a:cs typeface="Times New Roman" panose="02020603050405020304" pitchFamily="18" charset="0"/>
+              </a:rPr>
+              <a:t>conn.closed</a:t>
+            </a:r>
+            <a:r>
+              <a:rPr lang="pt-BR" sz="1600" dirty="0">
+                <a:latin typeface="Times New Roman" panose="02020603050405020304" pitchFamily="18" charset="0"/>
+                <a:cs typeface="Times New Roman" panose="02020603050405020304" pitchFamily="18" charset="0"/>
+              </a:rPr>
+              <a:t> == 0: # testando se está conectado</a:t>
             </a:r>
           </a:p>
           <a:p>
@@ -7489,164 +7641,18 @@
               <a:buNone/>
             </a:pPr>
             <a:r>
+              <a:rPr lang="pt-BR" sz="1600" dirty="0">
+                <a:latin typeface="Times New Roman" panose="02020603050405020304" pitchFamily="18" charset="0"/>
+                <a:cs typeface="Times New Roman" panose="02020603050405020304" pitchFamily="18" charset="0"/>
+              </a:rPr>
+              <a:t>    </a:t>
+            </a:r>
+            <a:r>
               <a:rPr lang="pt-BR" sz="1600" dirty="0" err="1">
                 <a:latin typeface="Times New Roman" panose="02020603050405020304" pitchFamily="18" charset="0"/>
                 <a:cs typeface="Times New Roman" panose="02020603050405020304" pitchFamily="18" charset="0"/>
               </a:rPr>
-              <a:t>cur.execute</a:t>
-            </a:r>
-            <a:r>
-              <a:rPr lang="pt-BR" sz="1600" dirty="0">
-                <a:latin typeface="Times New Roman" panose="02020603050405020304" pitchFamily="18" charset="0"/>
-                <a:cs typeface="Times New Roman" panose="02020603050405020304" pitchFamily="18" charset="0"/>
-              </a:rPr>
-              <a:t>("</a:t>
-            </a:r>
-            <a:r>
-              <a:rPr lang="pt-BR" sz="1600" dirty="0" err="1">
-                <a:latin typeface="Times New Roman" panose="02020603050405020304" pitchFamily="18" charset="0"/>
-                <a:cs typeface="Times New Roman" panose="02020603050405020304" pitchFamily="18" charset="0"/>
-              </a:rPr>
-              <a:t>select</a:t>
-            </a:r>
-            <a:r>
-              <a:rPr lang="pt-BR" sz="1600" dirty="0">
-                <a:latin typeface="Times New Roman" panose="02020603050405020304" pitchFamily="18" charset="0"/>
-                <a:cs typeface="Times New Roman" panose="02020603050405020304" pitchFamily="18" charset="0"/>
-              </a:rPr>
-              <a:t> </a:t>
-            </a:r>
-            <a:r>
-              <a:rPr lang="pt-BR" sz="1600" dirty="0" err="1">
-                <a:latin typeface="Times New Roman" panose="02020603050405020304" pitchFamily="18" charset="0"/>
-                <a:cs typeface="Times New Roman" panose="02020603050405020304" pitchFamily="18" charset="0"/>
-              </a:rPr>
-              <a:t>current_database</a:t>
-            </a:r>
-            <a:r>
-              <a:rPr lang="pt-BR" sz="1600" dirty="0">
-                <a:latin typeface="Times New Roman" panose="02020603050405020304" pitchFamily="18" charset="0"/>
-                <a:cs typeface="Times New Roman" panose="02020603050405020304" pitchFamily="18" charset="0"/>
-              </a:rPr>
-              <a:t>(); ")</a:t>
-            </a:r>
-          </a:p>
-          <a:p>
-            <a:pPr marL="0" indent="0" algn="just">
-              <a:buNone/>
-            </a:pPr>
-            <a:r>
-              <a:rPr lang="pt-BR" sz="1600" dirty="0">
-                <a:latin typeface="Times New Roman" panose="02020603050405020304" pitchFamily="18" charset="0"/>
-                <a:cs typeface="Times New Roman" panose="02020603050405020304" pitchFamily="18" charset="0"/>
-              </a:rPr>
-              <a:t>linha = </a:t>
-            </a:r>
-            <a:r>
-              <a:rPr lang="pt-BR" sz="1600" dirty="0" err="1">
-                <a:latin typeface="Times New Roman" panose="02020603050405020304" pitchFamily="18" charset="0"/>
-                <a:cs typeface="Times New Roman" panose="02020603050405020304" pitchFamily="18" charset="0"/>
-              </a:rPr>
-              <a:t>cur.fetchone</a:t>
-            </a:r>
-            <a:r>
-              <a:rPr lang="pt-BR" sz="1600" dirty="0">
-                <a:latin typeface="Times New Roman" panose="02020603050405020304" pitchFamily="18" charset="0"/>
-                <a:cs typeface="Times New Roman" panose="02020603050405020304" pitchFamily="18" charset="0"/>
-              </a:rPr>
-              <a:t>()</a:t>
-            </a:r>
-          </a:p>
-          <a:p>
-            <a:pPr marL="0" indent="0" algn="just">
-              <a:buNone/>
-            </a:pPr>
-            <a:r>
-              <a:rPr lang="pt-BR" sz="1600" dirty="0">
-                <a:latin typeface="Times New Roman" panose="02020603050405020304" pitchFamily="18" charset="0"/>
-                <a:cs typeface="Times New Roman" panose="02020603050405020304" pitchFamily="18" charset="0"/>
-              </a:rPr>
-              <a:t>print("conectado ao banco de dados: ", linha)</a:t>
-            </a:r>
-          </a:p>
-          <a:p>
-            <a:pPr marL="0" indent="0" algn="just">
-              <a:buNone/>
-            </a:pPr>
-            <a:r>
-              <a:rPr lang="pt-BR" sz="1600" dirty="0" err="1">
-                <a:latin typeface="Times New Roman" panose="02020603050405020304" pitchFamily="18" charset="0"/>
-                <a:cs typeface="Times New Roman" panose="02020603050405020304" pitchFamily="18" charset="0"/>
-              </a:rPr>
-              <a:t>if</a:t>
-            </a:r>
-            <a:r>
-              <a:rPr lang="pt-BR" sz="1600" dirty="0">
-                <a:latin typeface="Times New Roman" panose="02020603050405020304" pitchFamily="18" charset="0"/>
-                <a:cs typeface="Times New Roman" panose="02020603050405020304" pitchFamily="18" charset="0"/>
-              </a:rPr>
-              <a:t> </a:t>
-            </a:r>
-            <a:r>
-              <a:rPr lang="pt-BR" sz="1600" dirty="0" err="1">
-                <a:latin typeface="Times New Roman" panose="02020603050405020304" pitchFamily="18" charset="0"/>
-                <a:cs typeface="Times New Roman" panose="02020603050405020304" pitchFamily="18" charset="0"/>
-              </a:rPr>
-              <a:t>conn</a:t>
-            </a:r>
-            <a:r>
-              <a:rPr lang="pt-BR" sz="1600" dirty="0">
-                <a:latin typeface="Times New Roman" panose="02020603050405020304" pitchFamily="18" charset="0"/>
-                <a:cs typeface="Times New Roman" panose="02020603050405020304" pitchFamily="18" charset="0"/>
-              </a:rPr>
-              <a:t> </a:t>
-            </a:r>
-            <a:r>
-              <a:rPr lang="pt-BR" sz="1600" dirty="0" err="1">
-                <a:latin typeface="Times New Roman" panose="02020603050405020304" pitchFamily="18" charset="0"/>
-                <a:cs typeface="Times New Roman" panose="02020603050405020304" pitchFamily="18" charset="0"/>
-              </a:rPr>
-              <a:t>and</a:t>
-            </a:r>
-            <a:r>
-              <a:rPr lang="pt-BR" sz="1600" dirty="0">
-                <a:latin typeface="Times New Roman" panose="02020603050405020304" pitchFamily="18" charset="0"/>
-                <a:cs typeface="Times New Roman" panose="02020603050405020304" pitchFamily="18" charset="0"/>
-              </a:rPr>
-              <a:t> </a:t>
-            </a:r>
-            <a:r>
-              <a:rPr lang="pt-BR" sz="1600" dirty="0" err="1">
-                <a:latin typeface="Times New Roman" panose="02020603050405020304" pitchFamily="18" charset="0"/>
-                <a:cs typeface="Times New Roman" panose="02020603050405020304" pitchFamily="18" charset="0"/>
-              </a:rPr>
-              <a:t>conn.closed</a:t>
-            </a:r>
-            <a:r>
-              <a:rPr lang="pt-BR" sz="1600" dirty="0">
-                <a:latin typeface="Times New Roman" panose="02020603050405020304" pitchFamily="18" charset="0"/>
-                <a:cs typeface="Times New Roman" panose="02020603050405020304" pitchFamily="18" charset="0"/>
-              </a:rPr>
-              <a:t> == 0: # testando se está conectado</a:t>
-            </a:r>
-          </a:p>
-          <a:p>
-            <a:pPr marL="0" indent="0" algn="just">
-              <a:buNone/>
-            </a:pPr>
-            <a:r>
-              <a:rPr lang="pt-BR" sz="1600" dirty="0">
-                <a:latin typeface="Times New Roman" panose="02020603050405020304" pitchFamily="18" charset="0"/>
-                <a:cs typeface="Times New Roman" panose="02020603050405020304" pitchFamily="18" charset="0"/>
-              </a:rPr>
-              <a:t>    </a:t>
-            </a:r>
-            <a:r>
-              <a:rPr lang="pt-BR" sz="1600" dirty="0" err="1">
-                <a:latin typeface="Times New Roman" panose="02020603050405020304" pitchFamily="18" charset="0"/>
-                <a:cs typeface="Times New Roman" panose="02020603050405020304" pitchFamily="18" charset="0"/>
-              </a:rPr>
-              <a:t>cur.close</a:t>
+              <a:t>cursor.close</a:t>
             </a:r>
             <a:r>
               <a:rPr lang="pt-BR" sz="1600" dirty="0">
@@ -7919,38 +7925,154 @@
               <a:buNone/>
             </a:pPr>
             <a:r>
+              <a:rPr lang="pt-BR" sz="1600" dirty="0">
+                <a:latin typeface="Times New Roman" panose="02020603050405020304" pitchFamily="18" charset="0"/>
+                <a:cs typeface="Times New Roman" panose="02020603050405020304" pitchFamily="18" charset="0"/>
+              </a:rPr>
+              <a:t>cursor = </a:t>
+            </a:r>
+            <a:r>
+              <a:rPr lang="pt-BR" sz="1600" b="1" dirty="0" err="1">
+                <a:latin typeface="Times New Roman" panose="02020603050405020304" pitchFamily="18" charset="0"/>
+                <a:cs typeface="Times New Roman" panose="02020603050405020304" pitchFamily="18" charset="0"/>
+              </a:rPr>
+              <a:t>conn</a:t>
+            </a:r>
+            <a:r>
               <a:rPr lang="pt-BR" sz="1600" dirty="0" err="1">
                 <a:latin typeface="Times New Roman" panose="02020603050405020304" pitchFamily="18" charset="0"/>
                 <a:cs typeface="Times New Roman" panose="02020603050405020304" pitchFamily="18" charset="0"/>
               </a:rPr>
-              <a:t>cur</a:t>
+              <a:t>.cursor</a:t>
             </a:r>
             <a:r>
               <a:rPr lang="pt-BR" sz="1600" dirty="0">
                 <a:latin typeface="Times New Roman" panose="02020603050405020304" pitchFamily="18" charset="0"/>
                 <a:cs typeface="Times New Roman" panose="02020603050405020304" pitchFamily="18" charset="0"/>
               </a:rPr>
-              <a:t> = </a:t>
-            </a:r>
-            <a:r>
-              <a:rPr lang="pt-BR" sz="1600" b="1" dirty="0" err="1">
-                <a:latin typeface="Times New Roman" panose="02020603050405020304" pitchFamily="18" charset="0"/>
-                <a:cs typeface="Times New Roman" panose="02020603050405020304" pitchFamily="18" charset="0"/>
-              </a:rPr>
-              <a:t>conn</a:t>
-            </a:r>
+              <a:t>()</a:t>
+            </a:r>
+          </a:p>
+          <a:p>
+            <a:pPr marL="0" indent="0" algn="just">
+              <a:buNone/>
+            </a:pPr>
             <a:r>
               <a:rPr lang="pt-BR" sz="1600" dirty="0" err="1">
                 <a:latin typeface="Times New Roman" panose="02020603050405020304" pitchFamily="18" charset="0"/>
                 <a:cs typeface="Times New Roman" panose="02020603050405020304" pitchFamily="18" charset="0"/>
               </a:rPr>
-              <a:t>.cursor</a:t>
+              <a:t>sql</a:t>
             </a:r>
             <a:r>
               <a:rPr lang="pt-BR" sz="1600" dirty="0">
                 <a:latin typeface="Times New Roman" panose="02020603050405020304" pitchFamily="18" charset="0"/>
                 <a:cs typeface="Times New Roman" panose="02020603050405020304" pitchFamily="18" charset="0"/>
               </a:rPr>
+              <a:t> = “</a:t>
+            </a:r>
+            <a:r>
+              <a:rPr lang="pt-BR" sz="1600" b="1" dirty="0">
+                <a:solidFill>
+                  <a:srgbClr val="FF0000"/>
+                </a:solidFill>
+                <a:latin typeface="Times New Roman" panose="02020603050405020304" pitchFamily="18" charset="0"/>
+                <a:cs typeface="Times New Roman" panose="02020603050405020304" pitchFamily="18" charset="0"/>
+              </a:rPr>
+              <a:t>SELECT</a:t>
+            </a:r>
+            <a:r>
+              <a:rPr lang="pt-BR" sz="1600" dirty="0">
+                <a:latin typeface="Times New Roman" panose="02020603050405020304" pitchFamily="18" charset="0"/>
+                <a:cs typeface="Times New Roman" panose="02020603050405020304" pitchFamily="18" charset="0"/>
+              </a:rPr>
+              <a:t> * </a:t>
+            </a:r>
+            <a:r>
+              <a:rPr lang="pt-BR" sz="1600" dirty="0" err="1">
+                <a:latin typeface="Times New Roman" panose="02020603050405020304" pitchFamily="18" charset="0"/>
+                <a:cs typeface="Times New Roman" panose="02020603050405020304" pitchFamily="18" charset="0"/>
+              </a:rPr>
+              <a:t>from</a:t>
+            </a:r>
+            <a:r>
+              <a:rPr lang="pt-BR" sz="1600" dirty="0">
+                <a:latin typeface="Times New Roman" panose="02020603050405020304" pitchFamily="18" charset="0"/>
+                <a:cs typeface="Times New Roman" panose="02020603050405020304" pitchFamily="18" charset="0"/>
+              </a:rPr>
+              <a:t> </a:t>
+            </a:r>
+            <a:r>
+              <a:rPr lang="pt-BR" sz="1600" dirty="0" err="1">
+                <a:latin typeface="Times New Roman" panose="02020603050405020304" pitchFamily="18" charset="0"/>
+                <a:cs typeface="Times New Roman" panose="02020603050405020304" pitchFamily="18" charset="0"/>
+              </a:rPr>
+              <a:t>department</a:t>
+            </a:r>
+            <a:r>
+              <a:rPr lang="pt-BR" sz="1600" dirty="0">
+                <a:latin typeface="Times New Roman" panose="02020603050405020304" pitchFamily="18" charset="0"/>
+                <a:cs typeface="Times New Roman" panose="02020603050405020304" pitchFamily="18" charset="0"/>
+              </a:rPr>
+              <a:t>"</a:t>
+            </a:r>
+          </a:p>
+          <a:p>
+            <a:pPr marL="0" indent="0" algn="just">
+              <a:buNone/>
+            </a:pPr>
+            <a:r>
+              <a:rPr lang="pt-BR" sz="1600" dirty="0" err="1">
+                <a:latin typeface="Times New Roman" panose="02020603050405020304" pitchFamily="18" charset="0"/>
+                <a:cs typeface="Times New Roman" panose="02020603050405020304" pitchFamily="18" charset="0"/>
+              </a:rPr>
+              <a:t>cursor.execute</a:t>
+            </a:r>
+            <a:r>
+              <a:rPr lang="pt-BR" sz="1600" dirty="0">
+                <a:latin typeface="Times New Roman" panose="02020603050405020304" pitchFamily="18" charset="0"/>
+                <a:cs typeface="Times New Roman" panose="02020603050405020304" pitchFamily="18" charset="0"/>
+              </a:rPr>
+              <a:t>(</a:t>
+            </a:r>
+            <a:r>
+              <a:rPr lang="pt-BR" sz="1600" dirty="0" err="1">
+                <a:latin typeface="Times New Roman" panose="02020603050405020304" pitchFamily="18" charset="0"/>
+                <a:cs typeface="Times New Roman" panose="02020603050405020304" pitchFamily="18" charset="0"/>
+              </a:rPr>
+              <a:t>sql</a:t>
+            </a:r>
+            <a:r>
+              <a:rPr lang="pt-BR" sz="1600" dirty="0">
+                <a:latin typeface="Times New Roman" panose="02020603050405020304" pitchFamily="18" charset="0"/>
+                <a:cs typeface="Times New Roman" panose="02020603050405020304" pitchFamily="18" charset="0"/>
+              </a:rPr>
+              <a:t>)</a:t>
+            </a:r>
+          </a:p>
+          <a:p>
+            <a:pPr marL="0" indent="0" algn="just">
+              <a:buNone/>
+            </a:pPr>
+            <a:r>
+              <a:rPr lang="pt-BR" sz="1600" dirty="0">
+                <a:latin typeface="Times New Roman" panose="02020603050405020304" pitchFamily="18" charset="0"/>
+                <a:cs typeface="Times New Roman" panose="02020603050405020304" pitchFamily="18" charset="0"/>
+              </a:rPr>
+              <a:t>linhas = </a:t>
+            </a:r>
+            <a:r>
+              <a:rPr lang="pt-BR" sz="1600" dirty="0" err="1">
+                <a:latin typeface="Times New Roman" panose="02020603050405020304" pitchFamily="18" charset="0"/>
+                <a:cs typeface="Times New Roman" panose="02020603050405020304" pitchFamily="18" charset="0"/>
+              </a:rPr>
+              <a:t>cursor.fetchall</a:t>
+            </a:r>
+            <a:r>
+              <a:rPr lang="pt-BR" sz="1600" dirty="0">
+                <a:latin typeface="Times New Roman" panose="02020603050405020304" pitchFamily="18" charset="0"/>
+                <a:cs typeface="Times New Roman" panose="02020603050405020304" pitchFamily="18" charset="0"/>
+              </a:rPr>
               <a:t>()</a:t>
             </a:r>
           </a:p>
@@ -7959,155 +8081,35 @@
               <a:buNone/>
             </a:pPr>
             <a:r>
+              <a:rPr lang="pt-BR" sz="1600" dirty="0">
+                <a:latin typeface="Times New Roman" panose="02020603050405020304" pitchFamily="18" charset="0"/>
+                <a:cs typeface="Times New Roman" panose="02020603050405020304" pitchFamily="18" charset="0"/>
+              </a:rPr>
+              <a:t>for linha in linhas:</a:t>
+            </a:r>
+          </a:p>
+          <a:p>
+            <a:pPr marL="0" indent="0" algn="just">
+              <a:buNone/>
+            </a:pPr>
+            <a:r>
+              <a:rPr lang="pt-BR" sz="1600" dirty="0">
+                <a:latin typeface="Times New Roman" panose="02020603050405020304" pitchFamily="18" charset="0"/>
+                <a:cs typeface="Times New Roman" panose="02020603050405020304" pitchFamily="18" charset="0"/>
+              </a:rPr>
+              <a:t>    print(linha)</a:t>
+            </a:r>
+          </a:p>
+          <a:p>
+            <a:pPr marL="0" indent="0" algn="just">
+              <a:buNone/>
+            </a:pPr>
+            <a:r>
               <a:rPr lang="pt-BR" sz="1600" dirty="0" err="1">
                 <a:latin typeface="Times New Roman" panose="02020603050405020304" pitchFamily="18" charset="0"/>
                 <a:cs typeface="Times New Roman" panose="02020603050405020304" pitchFamily="18" charset="0"/>
               </a:rPr>
-              <a:t>sql</a:t>
-            </a:r>
-            <a:r>
-              <a:rPr lang="pt-BR" sz="1600" dirty="0">
-                <a:latin typeface="Times New Roman" panose="02020603050405020304" pitchFamily="18" charset="0"/>
-                <a:cs typeface="Times New Roman" panose="02020603050405020304" pitchFamily="18" charset="0"/>
-              </a:rPr>
-              <a:t> = "</a:t>
-            </a:r>
-            <a:r>
-              <a:rPr lang="pt-BR" sz="1600" dirty="0" err="1">
-                <a:latin typeface="Times New Roman" panose="02020603050405020304" pitchFamily="18" charset="0"/>
-                <a:cs typeface="Times New Roman" panose="02020603050405020304" pitchFamily="18" charset="0"/>
-              </a:rPr>
-              <a:t>select</a:t>
-            </a:r>
-            <a:r>
-              <a:rPr lang="pt-BR" sz="1600" dirty="0">
-                <a:latin typeface="Times New Roman" panose="02020603050405020304" pitchFamily="18" charset="0"/>
-                <a:cs typeface="Times New Roman" panose="02020603050405020304" pitchFamily="18" charset="0"/>
-              </a:rPr>
-              <a:t> * </a:t>
-            </a:r>
-            <a:r>
-              <a:rPr lang="pt-BR" sz="1600" dirty="0" err="1">
-                <a:latin typeface="Times New Roman" panose="02020603050405020304" pitchFamily="18" charset="0"/>
-                <a:cs typeface="Times New Roman" panose="02020603050405020304" pitchFamily="18" charset="0"/>
-              </a:rPr>
-              <a:t>from</a:t>
-            </a:r>
-            <a:r>
-              <a:rPr lang="pt-BR" sz="1600" dirty="0">
-                <a:latin typeface="Times New Roman" panose="02020603050405020304" pitchFamily="18" charset="0"/>
-                <a:cs typeface="Times New Roman" panose="02020603050405020304" pitchFamily="18" charset="0"/>
-              </a:rPr>
-              <a:t> </a:t>
-            </a:r>
-            <a:r>
-              <a:rPr lang="pt-BR" sz="1600" dirty="0" err="1">
-                <a:latin typeface="Times New Roman" panose="02020603050405020304" pitchFamily="18" charset="0"/>
-                <a:cs typeface="Times New Roman" panose="02020603050405020304" pitchFamily="18" charset="0"/>
-              </a:rPr>
-              <a:t>department</a:t>
-            </a:r>
-            <a:r>
-              <a:rPr lang="pt-BR" sz="1600" dirty="0">
-                <a:latin typeface="Times New Roman" panose="02020603050405020304" pitchFamily="18" charset="0"/>
-                <a:cs typeface="Times New Roman" panose="02020603050405020304" pitchFamily="18" charset="0"/>
-              </a:rPr>
-              <a:t>"</a:t>
-            </a:r>
-          </a:p>
-          <a:p>
-            <a:pPr marL="0" indent="0" algn="just">
-              <a:buNone/>
-            </a:pPr>
-            <a:r>
-              <a:rPr lang="pt-BR" sz="1600" dirty="0" err="1">
-                <a:latin typeface="Times New Roman" panose="02020603050405020304" pitchFamily="18" charset="0"/>
-                <a:cs typeface="Times New Roman" panose="02020603050405020304" pitchFamily="18" charset="0"/>
-              </a:rPr>
-              <a:t>cur.execute</a:t>
-            </a:r>
-            <a:r>
-              <a:rPr lang="pt-BR" sz="1600" dirty="0">
-                <a:latin typeface="Times New Roman" panose="02020603050405020304" pitchFamily="18" charset="0"/>
-                <a:cs typeface="Times New Roman" panose="02020603050405020304" pitchFamily="18" charset="0"/>
-              </a:rPr>
-              <a:t>(</a:t>
-            </a:r>
-            <a:r>
-              <a:rPr lang="pt-BR" sz="1600" dirty="0" err="1">
-                <a:latin typeface="Times New Roman" panose="02020603050405020304" pitchFamily="18" charset="0"/>
-                <a:cs typeface="Times New Roman" panose="02020603050405020304" pitchFamily="18" charset="0"/>
-              </a:rPr>
-              <a:t>sql</a:t>
-            </a:r>
-            <a:r>
-              <a:rPr lang="pt-BR" sz="1600" dirty="0">
-                <a:latin typeface="Times New Roman" panose="02020603050405020304" pitchFamily="18" charset="0"/>
-                <a:cs typeface="Times New Roman" panose="02020603050405020304" pitchFamily="18" charset="0"/>
-              </a:rPr>
-              <a:t>)</a:t>
-            </a:r>
-          </a:p>
-          <a:p>
-            <a:pPr marL="0" indent="0" algn="just">
-              <a:buNone/>
-            </a:pPr>
-            <a:r>
-              <a:rPr lang="pt-BR" sz="1600" dirty="0">
-                <a:latin typeface="Times New Roman" panose="02020603050405020304" pitchFamily="18" charset="0"/>
-                <a:cs typeface="Times New Roman" panose="02020603050405020304" pitchFamily="18" charset="0"/>
-              </a:rPr>
-              <a:t>linhas = </a:t>
-            </a:r>
-            <a:r>
-              <a:rPr lang="pt-BR" sz="1600" dirty="0" err="1">
-                <a:latin typeface="Times New Roman" panose="02020603050405020304" pitchFamily="18" charset="0"/>
-                <a:cs typeface="Times New Roman" panose="02020603050405020304" pitchFamily="18" charset="0"/>
-              </a:rPr>
-              <a:t>cur.fetchall</a:t>
-            </a:r>
-            <a:r>
-              <a:rPr lang="pt-BR" sz="1600" dirty="0">
-                <a:latin typeface="Times New Roman" panose="02020603050405020304" pitchFamily="18" charset="0"/>
-                <a:cs typeface="Times New Roman" panose="02020603050405020304" pitchFamily="18" charset="0"/>
-              </a:rPr>
-              <a:t>()</a:t>
-            </a:r>
-          </a:p>
-          <a:p>
-            <a:pPr marL="0" indent="0" algn="just">
-              <a:buNone/>
-            </a:pPr>
-            <a:r>
-              <a:rPr lang="pt-BR" sz="1600" dirty="0">
-                <a:latin typeface="Times New Roman" panose="02020603050405020304" pitchFamily="18" charset="0"/>
-                <a:cs typeface="Times New Roman" panose="02020603050405020304" pitchFamily="18" charset="0"/>
-              </a:rPr>
-              <a:t>for linha in linhas:</a:t>
-            </a:r>
-          </a:p>
-          <a:p>
-            <a:pPr marL="0" indent="0" algn="just">
-              <a:buNone/>
-            </a:pPr>
-            <a:r>
-              <a:rPr lang="pt-BR" sz="1600" dirty="0">
-                <a:latin typeface="Times New Roman" panose="02020603050405020304" pitchFamily="18" charset="0"/>
-                <a:cs typeface="Times New Roman" panose="02020603050405020304" pitchFamily="18" charset="0"/>
-              </a:rPr>
-              <a:t>    print(linha)</a:t>
-            </a:r>
-          </a:p>
-          <a:p>
-            <a:pPr marL="0" indent="0" algn="just">
-              <a:buNone/>
-            </a:pPr>
-            <a:r>
-              <a:rPr lang="pt-BR" sz="1600" dirty="0" err="1">
-                <a:latin typeface="Times New Roman" panose="02020603050405020304" pitchFamily="18" charset="0"/>
-                <a:cs typeface="Times New Roman" panose="02020603050405020304" pitchFamily="18" charset="0"/>
-              </a:rPr>
-              <a:t>cur.close</a:t>
+              <a:t>cursor.close</a:t>
             </a:r>
             <a:r>
               <a:rPr lang="pt-BR" sz="1600" dirty="0">
@@ -8428,7 +8430,24 @@
                 <a:latin typeface="Times New Roman" panose="02020603050405020304" pitchFamily="18" charset="0"/>
                 <a:cs typeface="Times New Roman" panose="02020603050405020304" pitchFamily="18" charset="0"/>
               </a:rPr>
-              <a:t> = "INSERT INTO </a:t>
+              <a:t> = "</a:t>
+            </a:r>
+            <a:r>
+              <a:rPr lang="pt-BR" sz="1600" b="1" dirty="0">
+                <a:solidFill>
+                  <a:srgbClr val="FF0000"/>
+                </a:solidFill>
+                <a:latin typeface="Times New Roman" panose="02020603050405020304" pitchFamily="18" charset="0"/>
+                <a:cs typeface="Times New Roman" panose="02020603050405020304" pitchFamily="18" charset="0"/>
+              </a:rPr>
+              <a:t>INSERT</a:t>
+            </a:r>
+            <a:r>
+              <a:rPr lang="pt-BR" sz="1600" dirty="0">
+                <a:latin typeface="Times New Roman" panose="02020603050405020304" pitchFamily="18" charset="0"/>
+                <a:cs typeface="Times New Roman" panose="02020603050405020304" pitchFamily="18" charset="0"/>
+              </a:rPr>
+              <a:t> INTO </a:t>
             </a:r>
             <a:r>
               <a:rPr lang="pt-BR" sz="1600" dirty="0" err="1">
@@ -8501,7 +8520,14 @@
                 <a:latin typeface="Times New Roman" panose="02020603050405020304" pitchFamily="18" charset="0"/>
                 <a:cs typeface="Times New Roman" panose="02020603050405020304" pitchFamily="18" charset="0"/>
               </a:rPr>
-              <a:t>conn.commit</a:t>
+              <a:t>conn.</a:t>
+            </a:r>
+            <a:r>
+              <a:rPr lang="pt-BR" sz="1600" b="1" dirty="0" err="1">
+                <a:latin typeface="Times New Roman" panose="02020603050405020304" pitchFamily="18" charset="0"/>
+                <a:cs typeface="Times New Roman" panose="02020603050405020304" pitchFamily="18" charset="0"/>
+              </a:rPr>
+              <a:t>commit</a:t>
             </a:r>
             <a:r>
               <a:rPr lang="pt-BR" sz="1600" dirty="0">
@@ -8688,11 +8714,87 @@
               <a:buNone/>
             </a:pPr>
             <a:r>
+              <a:rPr lang="pt-BR" sz="1400" b="1" dirty="0">
+                <a:solidFill>
+                  <a:srgbClr val="FF0000"/>
+                </a:solidFill>
+                <a:latin typeface="Times New Roman" panose="02020603050405020304" pitchFamily="18" charset="0"/>
+                <a:cs typeface="Times New Roman" panose="02020603050405020304" pitchFamily="18" charset="0"/>
+              </a:rPr>
+              <a:t>manter as três linhas anteriores </a:t>
+            </a:r>
+            <a:r>
+              <a:rPr lang="pt-BR" sz="1400" b="1" dirty="0" err="1">
+                <a:solidFill>
+                  <a:srgbClr val="FF0000"/>
+                </a:solidFill>
+                <a:latin typeface="Times New Roman" panose="02020603050405020304" pitchFamily="18" charset="0"/>
+                <a:cs typeface="Times New Roman" panose="02020603050405020304" pitchFamily="18" charset="0"/>
+              </a:rPr>
+              <a:t>import</a:t>
+            </a:r>
+            <a:r>
+              <a:rPr lang="pt-BR" sz="1400" b="1" dirty="0">
+                <a:solidFill>
+                  <a:srgbClr val="FF0000"/>
+                </a:solidFill>
+                <a:latin typeface="Times New Roman" panose="02020603050405020304" pitchFamily="18" charset="0"/>
+                <a:cs typeface="Times New Roman" panose="02020603050405020304" pitchFamily="18" charset="0"/>
+              </a:rPr>
+              <a:t>, </a:t>
+            </a:r>
+            <a:r>
+              <a:rPr lang="pt-BR" sz="1400" b="1" dirty="0" err="1">
+                <a:solidFill>
+                  <a:srgbClr val="FF0000"/>
+                </a:solidFill>
+                <a:latin typeface="Times New Roman" panose="02020603050405020304" pitchFamily="18" charset="0"/>
+                <a:cs typeface="Times New Roman" panose="02020603050405020304" pitchFamily="18" charset="0"/>
+              </a:rPr>
+              <a:t>conn</a:t>
+            </a:r>
+            <a:r>
+              <a:rPr lang="pt-BR" sz="1400" b="1" dirty="0">
+                <a:solidFill>
+                  <a:srgbClr val="FF0000"/>
+                </a:solidFill>
+                <a:latin typeface="Times New Roman" panose="02020603050405020304" pitchFamily="18" charset="0"/>
+                <a:cs typeface="Times New Roman" panose="02020603050405020304" pitchFamily="18" charset="0"/>
+              </a:rPr>
+              <a:t>, cursor </a:t>
+            </a:r>
+          </a:p>
+          <a:p>
+            <a:pPr marL="0" indent="0" algn="just">
+              <a:buNone/>
+            </a:pPr>
+            <a:r>
+              <a:rPr lang="pt-BR" sz="1400" dirty="0" err="1">
+                <a:latin typeface="Times New Roman" panose="02020603050405020304" pitchFamily="18" charset="0"/>
+                <a:cs typeface="Times New Roman" panose="02020603050405020304" pitchFamily="18" charset="0"/>
+              </a:rPr>
+              <a:t>id_dep</a:t>
+            </a:r>
+            <a:r>
               <a:rPr lang="pt-BR" sz="1400" dirty="0">
                 <a:latin typeface="Times New Roman" panose="02020603050405020304" pitchFamily="18" charset="0"/>
                 <a:cs typeface="Times New Roman" panose="02020603050405020304" pitchFamily="18" charset="0"/>
               </a:rPr>
-              <a:t>...</a:t>
+              <a:t> = </a:t>
+            </a:r>
+            <a:r>
+              <a:rPr lang="pt-BR" sz="1400" dirty="0" err="1">
+                <a:latin typeface="Times New Roman" panose="02020603050405020304" pitchFamily="18" charset="0"/>
+                <a:cs typeface="Times New Roman" panose="02020603050405020304" pitchFamily="18" charset="0"/>
+              </a:rPr>
+              <a:t>int</a:t>
+            </a:r>
+            <a:r>
+              <a:rPr lang="pt-BR" sz="1400" dirty="0">
+                <a:latin typeface="Times New Roman" panose="02020603050405020304" pitchFamily="18" charset="0"/>
+                <a:cs typeface="Times New Roman" panose="02020603050405020304" pitchFamily="18" charset="0"/>
+              </a:rPr>
+              <a:t>(input("Digite o ID do departamento: "))</a:t>
             </a:r>
           </a:p>
           <a:p>
@@ -8704,73 +8806,57 @@
                 <a:latin typeface="Times New Roman" panose="02020603050405020304" pitchFamily="18" charset="0"/>
                 <a:cs typeface="Times New Roman" panose="02020603050405020304" pitchFamily="18" charset="0"/>
               </a:rPr>
-              <a:t>id_dep</a:t>
+              <a:t>novo_nome</a:t>
             </a:r>
             <a:r>
               <a:rPr lang="pt-BR" sz="1400" dirty="0">
                 <a:latin typeface="Times New Roman" panose="02020603050405020304" pitchFamily="18" charset="0"/>
                 <a:cs typeface="Times New Roman" panose="02020603050405020304" pitchFamily="18" charset="0"/>
               </a:rPr>
-              <a:t> = </a:t>
-            </a:r>
+              <a:t> = input("Digite o novo nome: ")</a:t>
+            </a:r>
+          </a:p>
+          <a:p>
+            <a:pPr marL="0" indent="0" algn="just">
+              <a:buNone/>
+            </a:pPr>
             <a:r>
               <a:rPr lang="pt-BR" sz="1400" dirty="0" err="1">
                 <a:latin typeface="Times New Roman" panose="02020603050405020304" pitchFamily="18" charset="0"/>
                 <a:cs typeface="Times New Roman" panose="02020603050405020304" pitchFamily="18" charset="0"/>
               </a:rPr>
-              <a:t>int</a:t>
+              <a:t>sql</a:t>
             </a:r>
             <a:r>
               <a:rPr lang="pt-BR" sz="1400" dirty="0">
                 <a:latin typeface="Times New Roman" panose="02020603050405020304" pitchFamily="18" charset="0"/>
                 <a:cs typeface="Times New Roman" panose="02020603050405020304" pitchFamily="18" charset="0"/>
               </a:rPr>
-              <a:t>(input("Digite o ID do departamento: "))</a:t>
-            </a:r>
-          </a:p>
-          <a:p>
-            <a:pPr marL="0" indent="0" algn="just">
-              <a:buNone/>
-            </a:pPr>
+              <a:t> = "</a:t>
+            </a:r>
+            <a:r>
+              <a:rPr lang="pt-BR" sz="1400" b="1" dirty="0">
+                <a:solidFill>
+                  <a:srgbClr val="FF0000"/>
+                </a:solidFill>
+                <a:latin typeface="Times New Roman" panose="02020603050405020304" pitchFamily="18" charset="0"/>
+                <a:cs typeface="Times New Roman" panose="02020603050405020304" pitchFamily="18" charset="0"/>
+              </a:rPr>
+              <a:t>UPDATE</a:t>
+            </a:r>
+            <a:r>
+              <a:rPr lang="pt-BR" sz="1400" dirty="0">
+                <a:latin typeface="Times New Roman" panose="02020603050405020304" pitchFamily="18" charset="0"/>
+                <a:cs typeface="Times New Roman" panose="02020603050405020304" pitchFamily="18" charset="0"/>
+              </a:rPr>
+              <a:t> </a:t>
+            </a:r>
             <a:r>
               <a:rPr lang="pt-BR" sz="1400" dirty="0" err="1">
                 <a:latin typeface="Times New Roman" panose="02020603050405020304" pitchFamily="18" charset="0"/>
                 <a:cs typeface="Times New Roman" panose="02020603050405020304" pitchFamily="18" charset="0"/>
               </a:rPr>
-              <a:t>novo_nome</a:t>
-            </a:r>
-            <a:r>
-              <a:rPr lang="pt-BR" sz="1400" dirty="0">
-                <a:latin typeface="Times New Roman" panose="02020603050405020304" pitchFamily="18" charset="0"/>
-                <a:cs typeface="Times New Roman" panose="02020603050405020304" pitchFamily="18" charset="0"/>
-              </a:rPr>
-              <a:t> = input("Digite o novo nome: ")</a:t>
-            </a:r>
-          </a:p>
-          <a:p>
-            <a:pPr marL="0" indent="0" algn="just">
-              <a:buNone/>
-            </a:pPr>
-            <a:r>
-              <a:rPr lang="pt-BR" sz="1400" dirty="0" err="1">
-                <a:latin typeface="Times New Roman" panose="02020603050405020304" pitchFamily="18" charset="0"/>
-                <a:cs typeface="Times New Roman" panose="02020603050405020304" pitchFamily="18" charset="0"/>
-              </a:rPr>
-              <a:t>sql</a:t>
-            </a:r>
-            <a:r>
-              <a:rPr lang="pt-BR" sz="1400" dirty="0">
-                <a:latin typeface="Times New Roman" panose="02020603050405020304" pitchFamily="18" charset="0"/>
-                <a:cs typeface="Times New Roman" panose="02020603050405020304" pitchFamily="18" charset="0"/>
-              </a:rPr>
-              <a:t> = "UPDATE </a:t>
-            </a:r>
-            <a:r>
-              <a:rPr lang="pt-BR" sz="1400" dirty="0" err="1">
-                <a:latin typeface="Times New Roman" panose="02020603050405020304" pitchFamily="18" charset="0"/>
-                <a:cs typeface="Times New Roman" panose="02020603050405020304" pitchFamily="18" charset="0"/>
-              </a:rPr>
-              <a:t>departament</a:t>
+              <a:t>department</a:t>
             </a:r>
             <a:r>
               <a:rPr lang="pt-BR" sz="1400" dirty="0">
@@ -9127,11 +9213,87 @@
               <a:buNone/>
             </a:pPr>
             <a:r>
+              <a:rPr lang="pt-BR" sz="1400" b="1" dirty="0">
+                <a:solidFill>
+                  <a:srgbClr val="FF0000"/>
+                </a:solidFill>
+                <a:latin typeface="Times New Roman" panose="02020603050405020304" pitchFamily="18" charset="0"/>
+                <a:cs typeface="Times New Roman" panose="02020603050405020304" pitchFamily="18" charset="0"/>
+              </a:rPr>
+              <a:t>manter as três linhas anteriores </a:t>
+            </a:r>
+            <a:r>
+              <a:rPr lang="pt-BR" sz="1400" b="1" dirty="0" err="1">
+                <a:solidFill>
+                  <a:srgbClr val="FF0000"/>
+                </a:solidFill>
+                <a:latin typeface="Times New Roman" panose="02020603050405020304" pitchFamily="18" charset="0"/>
+                <a:cs typeface="Times New Roman" panose="02020603050405020304" pitchFamily="18" charset="0"/>
+              </a:rPr>
+              <a:t>import</a:t>
+            </a:r>
+            <a:r>
+              <a:rPr lang="pt-BR" sz="1400" b="1" dirty="0">
+                <a:solidFill>
+                  <a:srgbClr val="FF0000"/>
+                </a:solidFill>
+                <a:latin typeface="Times New Roman" panose="02020603050405020304" pitchFamily="18" charset="0"/>
+                <a:cs typeface="Times New Roman" panose="02020603050405020304" pitchFamily="18" charset="0"/>
+              </a:rPr>
+              <a:t>, </a:t>
+            </a:r>
+            <a:r>
+              <a:rPr lang="pt-BR" sz="1400" b="1" dirty="0" err="1">
+                <a:solidFill>
+                  <a:srgbClr val="FF0000"/>
+                </a:solidFill>
+                <a:latin typeface="Times New Roman" panose="02020603050405020304" pitchFamily="18" charset="0"/>
+                <a:cs typeface="Times New Roman" panose="02020603050405020304" pitchFamily="18" charset="0"/>
+              </a:rPr>
+              <a:t>conn</a:t>
+            </a:r>
+            <a:r>
+              <a:rPr lang="pt-BR" sz="1400" b="1" dirty="0">
+                <a:solidFill>
+                  <a:srgbClr val="FF0000"/>
+                </a:solidFill>
+                <a:latin typeface="Times New Roman" panose="02020603050405020304" pitchFamily="18" charset="0"/>
+                <a:cs typeface="Times New Roman" panose="02020603050405020304" pitchFamily="18" charset="0"/>
+              </a:rPr>
+              <a:t>, cursor </a:t>
+            </a:r>
+          </a:p>
+          <a:p>
+            <a:pPr marL="0" indent="0" algn="just">
+              <a:buNone/>
+            </a:pPr>
+            <a:r>
+              <a:rPr lang="pt-BR" sz="1400" dirty="0" err="1">
+                <a:latin typeface="Times New Roman" panose="02020603050405020304" pitchFamily="18" charset="0"/>
+                <a:cs typeface="Times New Roman" panose="02020603050405020304" pitchFamily="18" charset="0"/>
+              </a:rPr>
+              <a:t>id_dep</a:t>
+            </a:r>
+            <a:r>
               <a:rPr lang="pt-BR" sz="1400" dirty="0">
                 <a:latin typeface="Times New Roman" panose="02020603050405020304" pitchFamily="18" charset="0"/>
                 <a:cs typeface="Times New Roman" panose="02020603050405020304" pitchFamily="18" charset="0"/>
               </a:rPr>
-              <a:t>...</a:t>
+              <a:t> = </a:t>
+            </a:r>
+            <a:r>
+              <a:rPr lang="pt-BR" sz="1400" dirty="0" err="1">
+                <a:latin typeface="Times New Roman" panose="02020603050405020304" pitchFamily="18" charset="0"/>
+                <a:cs typeface="Times New Roman" panose="02020603050405020304" pitchFamily="18" charset="0"/>
+              </a:rPr>
+              <a:t>int</a:t>
+            </a:r>
+            <a:r>
+              <a:rPr lang="pt-BR" sz="1400" dirty="0">
+                <a:latin typeface="Times New Roman" panose="02020603050405020304" pitchFamily="18" charset="0"/>
+                <a:cs typeface="Times New Roman" panose="02020603050405020304" pitchFamily="18" charset="0"/>
+              </a:rPr>
+              <a:t>(input("Digite o ID do departamento para deletar: "))</a:t>
             </a:r>
           </a:p>
           <a:p>
@@ -9143,54 +9305,38 @@
                 <a:latin typeface="Times New Roman" panose="02020603050405020304" pitchFamily="18" charset="0"/>
                 <a:cs typeface="Times New Roman" panose="02020603050405020304" pitchFamily="18" charset="0"/>
               </a:rPr>
-              <a:t>id_dep</a:t>
+              <a:t>sql</a:t>
             </a:r>
             <a:r>
               <a:rPr lang="pt-BR" sz="1400" dirty="0">
                 <a:latin typeface="Times New Roman" panose="02020603050405020304" pitchFamily="18" charset="0"/>
                 <a:cs typeface="Times New Roman" panose="02020603050405020304" pitchFamily="18" charset="0"/>
               </a:rPr>
-              <a:t> = </a:t>
+              <a:t> = "</a:t>
+            </a:r>
+            <a:r>
+              <a:rPr lang="pt-BR" sz="1400" b="1" dirty="0">
+                <a:solidFill>
+                  <a:srgbClr val="FF0000"/>
+                </a:solidFill>
+                <a:latin typeface="Times New Roman" panose="02020603050405020304" pitchFamily="18" charset="0"/>
+                <a:cs typeface="Times New Roman" panose="02020603050405020304" pitchFamily="18" charset="0"/>
+              </a:rPr>
+              <a:t>DELETE</a:t>
+            </a:r>
+            <a:r>
+              <a:rPr lang="pt-BR" sz="1400" dirty="0">
+                <a:latin typeface="Times New Roman" panose="02020603050405020304" pitchFamily="18" charset="0"/>
+                <a:cs typeface="Times New Roman" panose="02020603050405020304" pitchFamily="18" charset="0"/>
+              </a:rPr>
+              <a:t> FROM </a:t>
             </a:r>
             <a:r>
               <a:rPr lang="pt-BR" sz="1400" dirty="0" err="1">
                 <a:latin typeface="Times New Roman" panose="02020603050405020304" pitchFamily="18" charset="0"/>
                 <a:cs typeface="Times New Roman" panose="02020603050405020304" pitchFamily="18" charset="0"/>
               </a:rPr>
-              <a:t>int</a:t>
-            </a:r>
-            <a:r>
-              <a:rPr lang="pt-BR" sz="1400" dirty="0">
-                <a:latin typeface="Times New Roman" panose="02020603050405020304" pitchFamily="18" charset="0"/>
-                <a:cs typeface="Times New Roman" panose="02020603050405020304" pitchFamily="18" charset="0"/>
-              </a:rPr>
-              <a:t>(input("Digite o ID do departamento para deletar: "))</a:t>
-            </a:r>
-          </a:p>
-          <a:p>
-            <a:pPr marL="0" indent="0" algn="just">
-              <a:buNone/>
-            </a:pPr>
-            <a:r>
-              <a:rPr lang="pt-BR" sz="1400" dirty="0" err="1">
-                <a:latin typeface="Times New Roman" panose="02020603050405020304" pitchFamily="18" charset="0"/>
-                <a:cs typeface="Times New Roman" panose="02020603050405020304" pitchFamily="18" charset="0"/>
-              </a:rPr>
-              <a:t>sql</a:t>
-            </a:r>
-            <a:r>
-              <a:rPr lang="pt-BR" sz="1400" dirty="0">
-                <a:latin typeface="Times New Roman" panose="02020603050405020304" pitchFamily="18" charset="0"/>
-                <a:cs typeface="Times New Roman" panose="02020603050405020304" pitchFamily="18" charset="0"/>
-              </a:rPr>
-              <a:t> = "DELETE FROM </a:t>
-            </a:r>
-            <a:r>
-              <a:rPr lang="pt-BR" sz="1400" dirty="0" err="1">
-                <a:latin typeface="Times New Roman" panose="02020603050405020304" pitchFamily="18" charset="0"/>
-                <a:cs typeface="Times New Roman" panose="02020603050405020304" pitchFamily="18" charset="0"/>
-              </a:rPr>
-              <a:t>departament</a:t>
+              <a:t>department</a:t>
             </a:r>
             <a:r>
               <a:rPr lang="pt-BR" sz="1400" dirty="0">
